--- a/20261002_サンクスLINEのご提案.pptx
+++ b/20261002_サンクスLINEのご提案.pptx
@@ -3004,7 +3004,7 @@
       </p:cxnSp>
       <p:sp>
         <p:nvSpPr>
-          <p:cNvPr id="6" name="Rounded Rectangle 4"/>
+          <p:cNvPr id="6" name="Rounded Rectangle 12"/>
           <p:cNvSpPr/>
           <p:nvPr/>
         </p:nvSpPr>
@@ -3015,15 +3015,15 @@
           </a:xfrm>
           <a:prstGeom prst="roundRect">
             <a:avLst>
-              <a:gd name="adj" fmla="val 10000"/>
+              <a:gd name="adj" fmla="val 6000"/>
             </a:avLst>
           </a:prstGeom>
           <a:solidFill>
-            <a:srgbClr val="F4F7FF"/>
-          </a:solidFill>
-          <a:ln w="12700">
+            <a:srgbClr val="FFFFFF"/>
+          </a:solidFill>
+          <a:ln w="19050">
             <a:solidFill>
-              <a:srgbClr val="D9D9D9"/>
+              <a:srgbClr val="1F285A"/>
             </a:solidFill>
           </a:ln>
           <a:effectLst/>
@@ -3043,16 +3043,19 @@
           </a:fontRef>
         </p:style>
         <p:txBody>
-          <a:bodyPr wrap="square" lIns="54000" tIns="18000" rIns="54000" bIns="18000" rtlCol="0" anchor="ctr"/>
+          <a:bodyPr wrap="square" lIns="125999" tIns="90000" rIns="108000" bIns="54000" rtlCol="0" anchor="ctr"/>
           <a:lstStyle/>
           <a:p>
             <a:pPr algn="ctr">
               <a:lnSpc>
-                <a:spcPct val="120000"/>
+                <a:spcPct val="130000"/>
               </a:lnSpc>
+              <a:spcAft>
+                <a:spcPts val="500"/>
+              </a:spcAft>
             </a:pPr>
             <a:r>
-              <a:rPr sz="2000" b="1">
+              <a:rPr sz="2000" b="1" dirty="0" err="1">
                 <a:solidFill>
                   <a:srgbClr val="1F285A"/>
                 </a:solidFill>
@@ -3062,6 +3065,14 @@
               </a:rPr>
               <a:t>申込み完了画面</a:t>
             </a:r>
+            <a:endParaRPr sz="1250" b="1" dirty="0">
+              <a:solidFill>
+                <a:srgbClr val="1F285A"/>
+              </a:solidFill>
+              <a:latin typeface="メイリオ"/>
+              <a:ea typeface="メイリオ"/>
+              <a:cs typeface="メイリオ"/>
+            </a:endParaRPr>
           </a:p>
         </p:txBody>
       </p:sp>
@@ -3116,7 +3127,7 @@
       </p:sp>
       <p:sp>
         <p:nvSpPr>
-          <p:cNvPr id="8" name="Rounded Rectangle 8"/>
+          <p:cNvPr id="8" name="Rounded Rectangle 4"/>
           <p:cNvSpPr/>
           <p:nvPr/>
         </p:nvSpPr>
@@ -3131,7 +3142,7 @@
             </a:avLst>
           </a:prstGeom>
           <a:solidFill>
-            <a:srgbClr val="06C755"/>
+            <a:srgbClr val="1F285A"/>
           </a:solidFill>
           <a:ln>
             <a:noFill/>
@@ -3177,7 +3188,7 @@
       </p:sp>
       <p:sp>
         <p:nvSpPr>
-          <p:cNvPr id="9" name="Right Arrow 7"/>
+          <p:cNvPr id="9" name="Right Arrow 5"/>
           <p:cNvSpPr/>
           <p:nvPr/>
         </p:nvSpPr>
@@ -3190,7 +3201,7 @@
             <a:avLst/>
           </a:prstGeom>
           <a:solidFill>
-            <a:srgbClr val="06C755"/>
+            <a:srgbClr val="1F285A"/>
           </a:solidFill>
           <a:ln>
             <a:noFill/>
@@ -3226,7 +3237,7 @@
       </p:sp>
       <p:sp>
         <p:nvSpPr>
-          <p:cNvPr id="10" name="Rounded Rectangle 10"/>
+          <p:cNvPr id="10" name="Rounded Rectangle 12"/>
           <p:cNvSpPr/>
           <p:nvPr/>
         </p:nvSpPr>
@@ -3237,15 +3248,15 @@
           </a:xfrm>
           <a:prstGeom prst="roundRect">
             <a:avLst>
-              <a:gd name="adj" fmla="val 10000"/>
+              <a:gd name="adj" fmla="val 6000"/>
             </a:avLst>
           </a:prstGeom>
           <a:solidFill>
-            <a:srgbClr val="E8F8EE"/>
-          </a:solidFill>
-          <a:ln w="12700">
+            <a:srgbClr val="FFFFFF"/>
+          </a:solidFill>
+          <a:ln w="19050">
             <a:solidFill>
-              <a:srgbClr val="06C755"/>
+              <a:srgbClr val="1F285A"/>
             </a:solidFill>
           </a:ln>
           <a:effectLst/>
@@ -3265,18 +3276,21 @@
           </a:fontRef>
         </p:style>
         <p:txBody>
-          <a:bodyPr wrap="square" lIns="54000" tIns="18000" rIns="54000" bIns="18000" rtlCol="0" anchor="ctr"/>
+          <a:bodyPr wrap="square" lIns="125999" tIns="90000" rIns="108000" bIns="54000" rtlCol="0" anchor="ctr"/>
           <a:lstStyle/>
           <a:p>
             <a:pPr algn="ctr">
               <a:lnSpc>
-                <a:spcPct val="120000"/>
+                <a:spcPct val="130000"/>
               </a:lnSpc>
+              <a:spcAft>
+                <a:spcPts val="500"/>
+              </a:spcAft>
             </a:pPr>
             <a:r>
-              <a:rPr sz="1700" b="1">
-                <a:solidFill>
-                  <a:srgbClr val="0B7A3B"/>
+              <a:rPr sz="1700" b="1" dirty="0" err="1">
+                <a:solidFill>
+                  <a:srgbClr val="1F285A"/>
                 </a:solidFill>
                 <a:latin typeface="メイリオ"/>
                 <a:ea typeface="メイリオ"/>
@@ -3284,12 +3298,20 @@
               </a:rPr>
               <a:t>新規 → 友だち追加</a:t>
             </a:r>
+            <a:endParaRPr sz="1250" b="1" dirty="0">
+              <a:solidFill>
+                <a:srgbClr val="1F285A"/>
+              </a:solidFill>
+              <a:latin typeface="メイリオ"/>
+              <a:ea typeface="メイリオ"/>
+              <a:cs typeface="メイリオ"/>
+            </a:endParaRPr>
           </a:p>
         </p:txBody>
       </p:sp>
       <p:sp>
         <p:nvSpPr>
-          <p:cNvPr id="11" name="Rounded Rectangle 10"/>
+          <p:cNvPr id="11" name="Rounded Rectangle 12"/>
           <p:cNvSpPr/>
           <p:nvPr/>
         </p:nvSpPr>
@@ -3300,15 +3322,15 @@
           </a:xfrm>
           <a:prstGeom prst="roundRect">
             <a:avLst>
-              <a:gd name="adj" fmla="val 10000"/>
+              <a:gd name="adj" fmla="val 6000"/>
             </a:avLst>
           </a:prstGeom>
           <a:solidFill>
-            <a:srgbClr val="E8F8EE"/>
-          </a:solidFill>
-          <a:ln w="12700">
+            <a:srgbClr val="FFFFFF"/>
+          </a:solidFill>
+          <a:ln w="19050">
             <a:solidFill>
-              <a:srgbClr val="06C755"/>
+              <a:srgbClr val="1F285A"/>
             </a:solidFill>
           </a:ln>
           <a:effectLst/>
@@ -3328,18 +3350,21 @@
           </a:fontRef>
         </p:style>
         <p:txBody>
-          <a:bodyPr wrap="square" lIns="54000" tIns="18000" rIns="54000" bIns="18000" rtlCol="0" anchor="ctr"/>
+          <a:bodyPr wrap="square" lIns="125999" tIns="90000" rIns="108000" bIns="54000" rtlCol="0" anchor="ctr"/>
           <a:lstStyle/>
           <a:p>
             <a:pPr algn="ctr">
               <a:lnSpc>
-                <a:spcPct val="120000"/>
+                <a:spcPct val="130000"/>
               </a:lnSpc>
+              <a:spcAft>
+                <a:spcPts val="500"/>
+              </a:spcAft>
             </a:pPr>
             <a:r>
-              <a:rPr sz="1700" b="1">
-                <a:solidFill>
-                  <a:srgbClr val="0B7A3B"/>
+              <a:rPr sz="1700" b="1" dirty="0" err="1">
+                <a:solidFill>
+                  <a:srgbClr val="1F285A"/>
                 </a:solidFill>
                 <a:latin typeface="メイリオ"/>
                 <a:ea typeface="メイリオ"/>
@@ -3347,6 +3372,14 @@
               </a:rPr>
               <a:t>既存の友だち → トーク画面</a:t>
             </a:r>
+            <a:endParaRPr sz="1250" b="1" dirty="0">
+              <a:solidFill>
+                <a:srgbClr val="1F285A"/>
+              </a:solidFill>
+              <a:latin typeface="メイリオ"/>
+              <a:ea typeface="メイリオ"/>
+              <a:cs typeface="メイリオ"/>
+            </a:endParaRPr>
           </a:p>
         </p:txBody>
       </p:sp>
@@ -3367,10 +3400,12 @@
             </a:avLst>
           </a:prstGeom>
           <a:solidFill>
-            <a:srgbClr val="F4F7FF"/>
-          </a:solidFill>
-          <a:ln>
-            <a:noFill/>
+            <a:srgbClr val="FFFFFF"/>
+          </a:solidFill>
+          <a:ln w="19050">
+            <a:solidFill>
+              <a:srgbClr val="1F285A"/>
+            </a:solidFill>
           </a:ln>
           <a:effectLst/>
         </p:spPr>
@@ -3439,10 +3474,12 @@
             </a:avLst>
           </a:prstGeom>
           <a:solidFill>
-            <a:srgbClr val="F4F7FF"/>
-          </a:solidFill>
-          <a:ln>
-            <a:noFill/>
+            <a:srgbClr val="FFFFFF"/>
+          </a:solidFill>
+          <a:ln w="19050">
+            <a:solidFill>
+              <a:srgbClr val="1F285A"/>
+            </a:solidFill>
           </a:ln>
           <a:effectLst/>
         </p:spPr>
@@ -3540,7 +3577,7 @@
             </a:avLst>
           </a:prstGeom>
           <a:solidFill>
-            <a:srgbClr val="1F285A"/>
+            <a:srgbClr val="333333"/>
           </a:solidFill>
           <a:ln>
             <a:noFill/>
@@ -3743,7 +3780,7 @@
       </p:cxnSp>
       <p:sp>
         <p:nvSpPr>
-          <p:cNvPr id="6" name="Rounded Rectangle 4"/>
+          <p:cNvPr id="6" name="Rounded Rectangle 12"/>
           <p:cNvSpPr/>
           <p:nvPr/>
         </p:nvSpPr>
@@ -3754,15 +3791,15 @@
           </a:xfrm>
           <a:prstGeom prst="roundRect">
             <a:avLst>
-              <a:gd name="adj" fmla="val 10000"/>
+              <a:gd name="adj" fmla="val 6000"/>
             </a:avLst>
           </a:prstGeom>
           <a:solidFill>
-            <a:srgbClr val="F4F7FF"/>
-          </a:solidFill>
-          <a:ln w="12700">
+            <a:srgbClr val="FFFFFF"/>
+          </a:solidFill>
+          <a:ln w="19050">
             <a:solidFill>
-              <a:srgbClr val="D9D9D9"/>
+              <a:srgbClr val="1F285A"/>
             </a:solidFill>
           </a:ln>
           <a:effectLst/>
@@ -3782,16 +3819,19 @@
           </a:fontRef>
         </p:style>
         <p:txBody>
-          <a:bodyPr wrap="square" lIns="54000" tIns="18000" rIns="54000" bIns="18000" rtlCol="0" anchor="ctr"/>
+          <a:bodyPr wrap="square" lIns="125999" tIns="90000" rIns="108000" bIns="54000" rtlCol="0" anchor="ctr"/>
           <a:lstStyle/>
           <a:p>
             <a:pPr algn="ctr">
               <a:lnSpc>
-                <a:spcPct val="120000"/>
+                <a:spcPct val="130000"/>
               </a:lnSpc>
+              <a:spcAft>
+                <a:spcPts val="500"/>
+              </a:spcAft>
             </a:pPr>
             <a:r>
-              <a:rPr sz="1600" b="1">
+              <a:rPr sz="1600" b="1" dirty="0" err="1">
                 <a:solidFill>
                   <a:srgbClr val="1F285A"/>
                 </a:solidFill>
@@ -3801,6 +3841,14 @@
               </a:rPr>
               <a:t>申込み・予約</a:t>
             </a:r>
+            <a:endParaRPr sz="1250" b="1" dirty="0">
+              <a:solidFill>
+                <a:srgbClr val="1F285A"/>
+              </a:solidFill>
+              <a:latin typeface="メイリオ"/>
+              <a:ea typeface="メイリオ"/>
+              <a:cs typeface="メイリオ"/>
+            </a:endParaRPr>
           </a:p>
         </p:txBody>
       </p:sp>
@@ -3867,7 +3915,7 @@
       </p:sp>
       <p:sp>
         <p:nvSpPr>
-          <p:cNvPr id="8" name="Rounded Rectangle 4"/>
+          <p:cNvPr id="8" name="Rounded Rectangle 12"/>
           <p:cNvSpPr/>
           <p:nvPr/>
         </p:nvSpPr>
@@ -3878,15 +3926,15 @@
           </a:xfrm>
           <a:prstGeom prst="roundRect">
             <a:avLst>
-              <a:gd name="adj" fmla="val 10000"/>
+              <a:gd name="adj" fmla="val 6000"/>
             </a:avLst>
           </a:prstGeom>
           <a:solidFill>
-            <a:srgbClr val="F4F7FF"/>
-          </a:solidFill>
-          <a:ln w="12700">
+            <a:srgbClr val="FFFFFF"/>
+          </a:solidFill>
+          <a:ln w="19050">
             <a:solidFill>
-              <a:srgbClr val="D9D9D9"/>
+              <a:srgbClr val="1F285A"/>
             </a:solidFill>
           </a:ln>
           <a:effectLst/>
@@ -3906,16 +3954,19 @@
           </a:fontRef>
         </p:style>
         <p:txBody>
-          <a:bodyPr wrap="square" lIns="54000" tIns="18000" rIns="54000" bIns="18000" rtlCol="0" anchor="ctr"/>
+          <a:bodyPr wrap="square" lIns="125999" tIns="90000" rIns="108000" bIns="54000" rtlCol="0" anchor="ctr"/>
           <a:lstStyle/>
           <a:p>
             <a:pPr algn="ctr">
               <a:lnSpc>
-                <a:spcPct val="120000"/>
+                <a:spcPct val="130000"/>
               </a:lnSpc>
+              <a:spcAft>
+                <a:spcPts val="500"/>
+              </a:spcAft>
             </a:pPr>
             <a:r>
-              <a:rPr sz="1600" b="1">
+              <a:rPr sz="1600" b="1" dirty="0" err="1">
                 <a:solidFill>
                   <a:srgbClr val="1F285A"/>
                 </a:solidFill>
@@ -3925,12 +3976,20 @@
               </a:rPr>
               <a:t>来店</a:t>
             </a:r>
+            <a:endParaRPr sz="1250" b="1" dirty="0">
+              <a:solidFill>
+                <a:srgbClr val="1F285A"/>
+              </a:solidFill>
+              <a:latin typeface="メイリオ"/>
+              <a:ea typeface="メイリオ"/>
+              <a:cs typeface="メイリオ"/>
+            </a:endParaRPr>
           </a:p>
         </p:txBody>
       </p:sp>
       <p:sp>
         <p:nvSpPr>
-          <p:cNvPr id="9" name="Rounded Rectangle 8"/>
+          <p:cNvPr id="9" name="Rounded Rectangle 4"/>
           <p:cNvSpPr/>
           <p:nvPr/>
         </p:nvSpPr>
@@ -3945,7 +4004,7 @@
             </a:avLst>
           </a:prstGeom>
           <a:solidFill>
-            <a:srgbClr val="06C755"/>
+            <a:srgbClr val="1F285A"/>
           </a:solidFill>
           <a:ln>
             <a:noFill/>
@@ -3991,7 +4050,7 @@
       </p:sp>
       <p:sp>
         <p:nvSpPr>
-          <p:cNvPr id="10" name="Rounded Rectangle 4"/>
+          <p:cNvPr id="10" name="Rounded Rectangle 12"/>
           <p:cNvSpPr/>
           <p:nvPr/>
         </p:nvSpPr>
@@ -4002,15 +4061,15 @@
           </a:xfrm>
           <a:prstGeom prst="roundRect">
             <a:avLst>
-              <a:gd name="adj" fmla="val 10000"/>
+              <a:gd name="adj" fmla="val 6000"/>
             </a:avLst>
           </a:prstGeom>
           <a:solidFill>
-            <a:srgbClr val="F4F7FF"/>
-          </a:solidFill>
-          <a:ln w="12700">
+            <a:srgbClr val="FFFFFF"/>
+          </a:solidFill>
+          <a:ln w="19050">
             <a:solidFill>
-              <a:srgbClr val="D9D9D9"/>
+              <a:srgbClr val="1F285A"/>
             </a:solidFill>
           </a:ln>
           <a:effectLst/>
@@ -4030,18 +4089,21 @@
           </a:fontRef>
         </p:style>
         <p:txBody>
-          <a:bodyPr wrap="square" lIns="54000" tIns="18000" rIns="54000" bIns="18000" rtlCol="0" anchor="ctr"/>
+          <a:bodyPr wrap="square" lIns="125999" tIns="90000" rIns="108000" bIns="54000" rtlCol="0" anchor="ctr"/>
           <a:lstStyle/>
           <a:p>
             <a:pPr algn="ctr">
               <a:lnSpc>
-                <a:spcPct val="120000"/>
+                <a:spcPct val="130000"/>
               </a:lnSpc>
+              <a:spcAft>
+                <a:spcPts val="500"/>
+              </a:spcAft>
             </a:pPr>
             <a:r>
-              <a:rPr sz="1300" b="1">
-                <a:solidFill>
-                  <a:srgbClr val="7F7F7F"/>
+              <a:rPr sz="1300" b="1" dirty="0" err="1">
+                <a:solidFill>
+                  <a:srgbClr val="333333"/>
                 </a:solidFill>
                 <a:latin typeface="メイリオ"/>
                 <a:ea typeface="メイリオ"/>
@@ -4049,17 +4111,28 @@
               </a:rPr>
               <a:t>来店せず</a:t>
             </a:r>
+            <a:endParaRPr sz="1250" b="1" dirty="0">
+              <a:solidFill>
+                <a:srgbClr val="1F285A"/>
+              </a:solidFill>
+              <a:latin typeface="メイリオ"/>
+              <a:ea typeface="メイリオ"/>
+              <a:cs typeface="メイリオ"/>
+            </a:endParaRPr>
           </a:p>
           <a:p>
             <a:pPr algn="ctr">
               <a:lnSpc>
-                <a:spcPct val="120000"/>
+                <a:spcPct val="130000"/>
               </a:lnSpc>
+              <a:spcAft>
+                <a:spcPts val="500"/>
+              </a:spcAft>
             </a:pPr>
             <a:r>
-              <a:rPr sz="1600" b="1">
-                <a:solidFill>
-                  <a:srgbClr val="7F7F7F"/>
+              <a:rPr sz="1600" b="1" dirty="0" err="1">
+                <a:solidFill>
+                  <a:srgbClr val="333333"/>
                 </a:solidFill>
                 <a:latin typeface="メイリオ"/>
                 <a:ea typeface="メイリオ"/>
@@ -4067,12 +4140,20 @@
               </a:rPr>
               <a:t>2〜3割</a:t>
             </a:r>
+            <a:endParaRPr sz="1250" b="1" dirty="0">
+              <a:solidFill>
+                <a:srgbClr val="1F285A"/>
+              </a:solidFill>
+              <a:latin typeface="メイリオ"/>
+              <a:ea typeface="メイリオ"/>
+              <a:cs typeface="メイリオ"/>
+            </a:endParaRPr>
           </a:p>
         </p:txBody>
       </p:sp>
       <p:sp>
         <p:nvSpPr>
-          <p:cNvPr id="11" name="Rounded Rectangle 4"/>
+          <p:cNvPr id="11" name="Rounded Rectangle 12"/>
           <p:cNvSpPr/>
           <p:nvPr/>
         </p:nvSpPr>
@@ -4083,15 +4164,15 @@
           </a:xfrm>
           <a:prstGeom prst="roundRect">
             <a:avLst>
-              <a:gd name="adj" fmla="val 10000"/>
+              <a:gd name="adj" fmla="val 6000"/>
             </a:avLst>
           </a:prstGeom>
           <a:solidFill>
-            <a:srgbClr val="F4F7FF"/>
-          </a:solidFill>
-          <a:ln w="12700">
+            <a:srgbClr val="FFFFFF"/>
+          </a:solidFill>
+          <a:ln w="19050">
             <a:solidFill>
-              <a:srgbClr val="D9D9D9"/>
+              <a:srgbClr val="1F285A"/>
             </a:solidFill>
           </a:ln>
           <a:effectLst/>
@@ -4111,16 +4192,19 @@
           </a:fontRef>
         </p:style>
         <p:txBody>
-          <a:bodyPr wrap="square" lIns="54000" tIns="18000" rIns="54000" bIns="18000" rtlCol="0" anchor="ctr"/>
+          <a:bodyPr wrap="square" lIns="125999" tIns="90000" rIns="108000" bIns="54000" rtlCol="0" anchor="ctr"/>
           <a:lstStyle/>
           <a:p>
             <a:pPr algn="ctr">
               <a:lnSpc>
-                <a:spcPct val="120000"/>
+                <a:spcPct val="130000"/>
               </a:lnSpc>
+              <a:spcAft>
+                <a:spcPts val="500"/>
+              </a:spcAft>
             </a:pPr>
             <a:r>
-              <a:rPr sz="1500" b="1">
+              <a:rPr sz="1500" b="1" dirty="0" err="1">
                 <a:solidFill>
                   <a:srgbClr val="1F285A"/>
                 </a:solidFill>
@@ -4130,15 +4214,26 @@
               </a:rPr>
               <a:t>申込み⇒来店までに</a:t>
             </a:r>
+            <a:endParaRPr sz="1250" b="1" dirty="0">
+              <a:solidFill>
+                <a:srgbClr val="1F285A"/>
+              </a:solidFill>
+              <a:latin typeface="メイリオ"/>
+              <a:ea typeface="メイリオ"/>
+              <a:cs typeface="メイリオ"/>
+            </a:endParaRPr>
           </a:p>
           <a:p>
             <a:pPr algn="ctr">
               <a:lnSpc>
-                <a:spcPct val="120000"/>
+                <a:spcPct val="130000"/>
               </a:lnSpc>
+              <a:spcAft>
+                <a:spcPts val="500"/>
+              </a:spcAft>
             </a:pPr>
             <a:r>
-              <a:rPr sz="1500" b="1">
+              <a:rPr sz="1500" b="1" dirty="0" err="1">
                 <a:solidFill>
                   <a:srgbClr val="1F285A"/>
                 </a:solidFill>
@@ -4148,15 +4243,26 @@
               </a:rPr>
               <a:t>一定数が離脱する</a:t>
             </a:r>
+            <a:endParaRPr sz="1250" b="1" dirty="0">
+              <a:solidFill>
+                <a:srgbClr val="1F285A"/>
+              </a:solidFill>
+              <a:latin typeface="メイリオ"/>
+              <a:ea typeface="メイリオ"/>
+              <a:cs typeface="メイリオ"/>
+            </a:endParaRPr>
           </a:p>
           <a:p>
             <a:pPr algn="ctr">
               <a:lnSpc>
-                <a:spcPct val="120000"/>
+                <a:spcPct val="130000"/>
               </a:lnSpc>
+              <a:spcAft>
+                <a:spcPts val="500"/>
+              </a:spcAft>
             </a:pPr>
             <a:r>
-              <a:rPr sz="1100" b="0">
+              <a:rPr sz="1100" b="0" dirty="0" err="1">
                 <a:solidFill>
                   <a:srgbClr val="333333"/>
                 </a:solidFill>
@@ -4166,15 +4272,26 @@
               </a:rPr>
               <a:t>（予約の2〜3割が来店せず／</a:t>
             </a:r>
+            <a:endParaRPr sz="1250" b="1" dirty="0">
+              <a:solidFill>
+                <a:srgbClr val="1F285A"/>
+              </a:solidFill>
+              <a:latin typeface="メイリオ"/>
+              <a:ea typeface="メイリオ"/>
+              <a:cs typeface="メイリオ"/>
+            </a:endParaRPr>
           </a:p>
           <a:p>
             <a:pPr algn="ctr">
               <a:lnSpc>
-                <a:spcPct val="120000"/>
+                <a:spcPct val="130000"/>
               </a:lnSpc>
+              <a:spcAft>
+                <a:spcPts val="500"/>
+              </a:spcAft>
             </a:pPr>
             <a:r>
-              <a:rPr sz="1100" b="0">
+              <a:rPr sz="1100" b="0" dirty="0" err="1">
                 <a:solidFill>
                   <a:srgbClr val="333333"/>
                 </a:solidFill>
@@ -4184,6 +4301,14 @@
               </a:rPr>
               <a:t>保険見直し本舗）</a:t>
             </a:r>
+            <a:endParaRPr sz="1250" b="1" dirty="0">
+              <a:solidFill>
+                <a:srgbClr val="1F285A"/>
+              </a:solidFill>
+              <a:latin typeface="メイリオ"/>
+              <a:ea typeface="メイリオ"/>
+              <a:cs typeface="メイリオ"/>
+            </a:endParaRPr>
           </a:p>
         </p:txBody>
       </p:sp>
@@ -4238,7 +4363,7 @@
       </p:sp>
       <p:sp>
         <p:nvSpPr>
-          <p:cNvPr id="13" name="Rounded Rectangle 4"/>
+          <p:cNvPr id="13" name="Rounded Rectangle 12"/>
           <p:cNvSpPr/>
           <p:nvPr/>
         </p:nvSpPr>
@@ -4249,15 +4374,15 @@
           </a:xfrm>
           <a:prstGeom prst="roundRect">
             <a:avLst>
-              <a:gd name="adj" fmla="val 10000"/>
+              <a:gd name="adj" fmla="val 6000"/>
             </a:avLst>
           </a:prstGeom>
           <a:solidFill>
-            <a:srgbClr val="F4F7FF"/>
-          </a:solidFill>
-          <a:ln w="12700">
+            <a:srgbClr val="FFFFFF"/>
+          </a:solidFill>
+          <a:ln w="19050">
             <a:solidFill>
-              <a:srgbClr val="D9D9D9"/>
+              <a:srgbClr val="1F285A"/>
             </a:solidFill>
           </a:ln>
           <a:effectLst/>
@@ -4277,16 +4402,19 @@
           </a:fontRef>
         </p:style>
         <p:txBody>
-          <a:bodyPr wrap="square" lIns="54000" tIns="18000" rIns="54000" bIns="18000" rtlCol="0" anchor="ctr"/>
+          <a:bodyPr wrap="square" lIns="125999" tIns="90000" rIns="108000" bIns="54000" rtlCol="0" anchor="ctr"/>
           <a:lstStyle/>
           <a:p>
             <a:pPr algn="ctr">
               <a:lnSpc>
-                <a:spcPct val="120000"/>
+                <a:spcPct val="130000"/>
               </a:lnSpc>
+              <a:spcAft>
+                <a:spcPts val="500"/>
+              </a:spcAft>
             </a:pPr>
             <a:r>
-              <a:rPr sz="1500" b="1">
+              <a:rPr sz="1500" b="1" dirty="0" err="1">
                 <a:solidFill>
                   <a:srgbClr val="1F285A"/>
                 </a:solidFill>
@@ -4296,15 +4424,26 @@
               </a:rPr>
               <a:t>広告費を増やしても、</a:t>
             </a:r>
+            <a:endParaRPr sz="1250" b="1" dirty="0">
+              <a:solidFill>
+                <a:srgbClr val="1F285A"/>
+              </a:solidFill>
+              <a:latin typeface="メイリオ"/>
+              <a:ea typeface="メイリオ"/>
+              <a:cs typeface="メイリオ"/>
+            </a:endParaRPr>
           </a:p>
           <a:p>
             <a:pPr algn="ctr">
               <a:lnSpc>
-                <a:spcPct val="120000"/>
+                <a:spcPct val="130000"/>
               </a:lnSpc>
+              <a:spcAft>
+                <a:spcPts val="500"/>
+              </a:spcAft>
             </a:pPr>
             <a:r>
-              <a:rPr sz="1500" b="1">
+              <a:rPr sz="1500" b="1" dirty="0" err="1">
                 <a:solidFill>
                   <a:srgbClr val="1F285A"/>
                 </a:solidFill>
@@ -4314,12 +4453,20 @@
               </a:rPr>
               <a:t>この離脱層は減らない</a:t>
             </a:r>
+            <a:endParaRPr sz="1250" b="1" dirty="0">
+              <a:solidFill>
+                <a:srgbClr val="1F285A"/>
+              </a:solidFill>
+              <a:latin typeface="メイリオ"/>
+              <a:ea typeface="メイリオ"/>
+              <a:cs typeface="メイリオ"/>
+            </a:endParaRPr>
           </a:p>
         </p:txBody>
       </p:sp>
       <p:sp>
         <p:nvSpPr>
-          <p:cNvPr id="14" name="Right Arrow 7"/>
+          <p:cNvPr id="14" name="Right Arrow 5"/>
           <p:cNvSpPr/>
           <p:nvPr/>
         </p:nvSpPr>
@@ -4332,7 +4479,7 @@
             <a:avLst/>
           </a:prstGeom>
           <a:solidFill>
-            <a:srgbClr val="06C755"/>
+            <a:srgbClr val="1F285A"/>
           </a:solidFill>
           <a:ln>
             <a:noFill/>
@@ -4368,7 +4515,7 @@
       </p:sp>
       <p:sp>
         <p:nvSpPr>
-          <p:cNvPr id="15" name="Rounded Rectangle 8"/>
+          <p:cNvPr id="15" name="Rounded Rectangle 4"/>
           <p:cNvSpPr/>
           <p:nvPr/>
         </p:nvSpPr>
@@ -4383,7 +4530,7 @@
             </a:avLst>
           </a:prstGeom>
           <a:solidFill>
-            <a:srgbClr val="06C755"/>
+            <a:srgbClr val="1F285A"/>
           </a:solidFill>
           <a:ln>
             <a:noFill/>
@@ -4675,7 +4822,7 @@
       </p:cxnSp>
       <p:sp>
         <p:nvSpPr>
-          <p:cNvPr id="6" name="Rounded Rectangle 4"/>
+          <p:cNvPr id="6" name="Rounded Rectangle 12"/>
           <p:cNvSpPr/>
           <p:nvPr/>
         </p:nvSpPr>
@@ -4686,15 +4833,15 @@
           </a:xfrm>
           <a:prstGeom prst="roundRect">
             <a:avLst>
-              <a:gd name="adj" fmla="val 10000"/>
+              <a:gd name="adj" fmla="val 6000"/>
             </a:avLst>
           </a:prstGeom>
           <a:solidFill>
-            <a:srgbClr val="F4F7FF"/>
-          </a:solidFill>
-          <a:ln w="12700">
+            <a:srgbClr val="FFFFFF"/>
+          </a:solidFill>
+          <a:ln w="19050">
             <a:solidFill>
-              <a:srgbClr val="D9D9D9"/>
+              <a:srgbClr val="1F285A"/>
             </a:solidFill>
           </a:ln>
           <a:effectLst/>
@@ -4714,16 +4861,19 @@
           </a:fontRef>
         </p:style>
         <p:txBody>
-          <a:bodyPr wrap="square" lIns="54000" tIns="18000" rIns="54000" bIns="18000" rtlCol="0" anchor="ctr"/>
+          <a:bodyPr wrap="square" lIns="125999" tIns="90000" rIns="108000" bIns="54000" rtlCol="0" anchor="ctr"/>
           <a:lstStyle/>
           <a:p>
             <a:pPr algn="ctr">
               <a:lnSpc>
-                <a:spcPct val="120000"/>
+                <a:spcPct val="130000"/>
               </a:lnSpc>
+              <a:spcAft>
+                <a:spcPts val="500"/>
+              </a:spcAft>
             </a:pPr>
             <a:r>
-              <a:rPr sz="1700" b="1">
+              <a:rPr sz="1700" b="1" dirty="0" err="1">
                 <a:solidFill>
                   <a:srgbClr val="1F285A"/>
                 </a:solidFill>
@@ -4733,6 +4883,14 @@
               </a:rPr>
               <a:t>予約完了</a:t>
             </a:r>
+            <a:endParaRPr sz="1250" b="1" dirty="0">
+              <a:solidFill>
+                <a:srgbClr val="1F285A"/>
+              </a:solidFill>
+              <a:latin typeface="メイリオ"/>
+              <a:ea typeface="メイリオ"/>
+              <a:cs typeface="メイリオ"/>
+            </a:endParaRPr>
           </a:p>
         </p:txBody>
       </p:sp>
@@ -4787,7 +4945,7 @@
       </p:sp>
       <p:sp>
         <p:nvSpPr>
-          <p:cNvPr id="8" name="Rounded Rectangle 8"/>
+          <p:cNvPr id="8" name="Rounded Rectangle 4"/>
           <p:cNvSpPr/>
           <p:nvPr/>
         </p:nvSpPr>
@@ -4802,7 +4960,7 @@
             </a:avLst>
           </a:prstGeom>
           <a:solidFill>
-            <a:srgbClr val="06C755"/>
+            <a:srgbClr val="1F285A"/>
           </a:solidFill>
           <a:ln>
             <a:noFill/>
@@ -4848,7 +5006,7 @@
       </p:sp>
       <p:sp>
         <p:nvSpPr>
-          <p:cNvPr id="9" name="Right Arrow 7"/>
+          <p:cNvPr id="9" name="Right Arrow 5"/>
           <p:cNvSpPr/>
           <p:nvPr/>
         </p:nvSpPr>
@@ -4861,7 +5019,7 @@
             <a:avLst/>
           </a:prstGeom>
           <a:solidFill>
-            <a:srgbClr val="06C755"/>
+            <a:srgbClr val="1F285A"/>
           </a:solidFill>
           <a:ln>
             <a:noFill/>
@@ -4897,7 +5055,7 @@
       </p:sp>
       <p:sp>
         <p:nvSpPr>
-          <p:cNvPr id="10" name="Rounded Rectangle 8"/>
+          <p:cNvPr id="10" name="Rounded Rectangle 4"/>
           <p:cNvSpPr/>
           <p:nvPr/>
         </p:nvSpPr>
@@ -4912,7 +5070,7 @@
             </a:avLst>
           </a:prstGeom>
           <a:solidFill>
-            <a:srgbClr val="06C755"/>
+            <a:srgbClr val="1F285A"/>
           </a:solidFill>
           <a:ln>
             <a:noFill/>
@@ -4958,7 +5116,7 @@
       </p:sp>
       <p:sp>
         <p:nvSpPr>
-          <p:cNvPr id="11" name="Right Arrow 7"/>
+          <p:cNvPr id="11" name="Right Arrow 5"/>
           <p:cNvSpPr/>
           <p:nvPr/>
         </p:nvSpPr>
@@ -4971,7 +5129,7 @@
             <a:avLst/>
           </a:prstGeom>
           <a:solidFill>
-            <a:srgbClr val="06C755"/>
+            <a:srgbClr val="1F285A"/>
           </a:solidFill>
           <a:ln>
             <a:noFill/>
@@ -5007,7 +5165,7 @@
       </p:sp>
       <p:sp>
         <p:nvSpPr>
-          <p:cNvPr id="12" name="Rounded Rectangle 10"/>
+          <p:cNvPr id="12" name="Rounded Rectangle 12"/>
           <p:cNvSpPr/>
           <p:nvPr/>
         </p:nvSpPr>
@@ -5018,15 +5176,15 @@
           </a:xfrm>
           <a:prstGeom prst="roundRect">
             <a:avLst>
-              <a:gd name="adj" fmla="val 10000"/>
+              <a:gd name="adj" fmla="val 6000"/>
             </a:avLst>
           </a:prstGeom>
           <a:solidFill>
-            <a:srgbClr val="E8F8EE"/>
-          </a:solidFill>
-          <a:ln w="12700">
+            <a:srgbClr val="FFFFFF"/>
+          </a:solidFill>
+          <a:ln w="19050">
             <a:solidFill>
-              <a:srgbClr val="06C755"/>
+              <a:srgbClr val="1F285A"/>
             </a:solidFill>
           </a:ln>
           <a:effectLst/>
@@ -5046,18 +5204,21 @@
           </a:fontRef>
         </p:style>
         <p:txBody>
-          <a:bodyPr wrap="square" lIns="54000" tIns="18000" rIns="54000" bIns="18000" rtlCol="0" anchor="ctr"/>
+          <a:bodyPr wrap="square" lIns="125999" tIns="90000" rIns="108000" bIns="54000" rtlCol="0" anchor="ctr"/>
           <a:lstStyle/>
           <a:p>
             <a:pPr algn="ctr">
               <a:lnSpc>
-                <a:spcPct val="120000"/>
+                <a:spcPct val="130000"/>
               </a:lnSpc>
+              <a:spcAft>
+                <a:spcPts val="500"/>
+              </a:spcAft>
             </a:pPr>
             <a:r>
-              <a:rPr sz="1700" b="1">
-                <a:solidFill>
-                  <a:srgbClr val="0B7A3B"/>
+              <a:rPr sz="1700" b="1" dirty="0" err="1">
+                <a:solidFill>
+                  <a:srgbClr val="1F285A"/>
                 </a:solidFill>
                 <a:latin typeface="メイリオ"/>
                 <a:ea typeface="メイリオ"/>
@@ -5065,6 +5226,14 @@
               </a:rPr>
               <a:t>来店</a:t>
             </a:r>
+            <a:endParaRPr sz="1250" b="1" dirty="0">
+              <a:solidFill>
+                <a:srgbClr val="1F285A"/>
+              </a:solidFill>
+              <a:latin typeface="メイリオ"/>
+              <a:ea typeface="メイリオ"/>
+              <a:cs typeface="メイリオ"/>
+            </a:endParaRPr>
           </a:p>
         </p:txBody>
       </p:sp>
@@ -5085,7 +5254,7 @@
             </a:avLst>
           </a:prstGeom>
           <a:solidFill>
-            <a:srgbClr val="1F285A"/>
+            <a:srgbClr val="333333"/>
           </a:solidFill>
           <a:ln>
             <a:noFill/>
@@ -5131,7 +5300,7 @@
       </p:sp>
       <p:sp>
         <p:nvSpPr>
-          <p:cNvPr id="14" name="Rounded Rectangle 8"/>
+          <p:cNvPr id="14" name="Rounded Rectangle 4"/>
           <p:cNvSpPr/>
           <p:nvPr/>
         </p:nvSpPr>
@@ -5146,7 +5315,7 @@
             </a:avLst>
           </a:prstGeom>
           <a:solidFill>
-            <a:srgbClr val="06C755"/>
+            <a:srgbClr val="1F285A"/>
           </a:solidFill>
           <a:ln>
             <a:noFill/>
@@ -5210,7 +5379,7 @@
       </p:sp>
       <p:sp>
         <p:nvSpPr>
-          <p:cNvPr id="15" name="Rounded Rectangle 4"/>
+          <p:cNvPr id="15" name="Rounded Rectangle 12"/>
           <p:cNvSpPr/>
           <p:nvPr/>
         </p:nvSpPr>
@@ -5221,14 +5390,16 @@
           </a:xfrm>
           <a:prstGeom prst="roundRect">
             <a:avLst>
-              <a:gd name="adj" fmla="val 10000"/>
+              <a:gd name="adj" fmla="val 6000"/>
             </a:avLst>
           </a:prstGeom>
           <a:solidFill>
-            <a:srgbClr val="1F285A"/>
-          </a:solidFill>
-          <a:ln>
-            <a:noFill/>
+            <a:srgbClr val="FFFFFF"/>
+          </a:solidFill>
+          <a:ln w="19050">
+            <a:solidFill>
+              <a:srgbClr val="1F285A"/>
+            </a:solidFill>
           </a:ln>
           <a:effectLst/>
         </p:spPr>
@@ -5247,18 +5418,21 @@
           </a:fontRef>
         </p:style>
         <p:txBody>
-          <a:bodyPr wrap="square" lIns="54000" tIns="18000" rIns="54000" bIns="18000" rtlCol="0" anchor="ctr"/>
+          <a:bodyPr wrap="square" lIns="125999" tIns="90000" rIns="108000" bIns="54000" rtlCol="0" anchor="ctr"/>
           <a:lstStyle/>
           <a:p>
             <a:pPr algn="ctr">
               <a:lnSpc>
-                <a:spcPct val="120000"/>
+                <a:spcPct val="130000"/>
               </a:lnSpc>
+              <a:spcAft>
+                <a:spcPts val="500"/>
+              </a:spcAft>
             </a:pPr>
             <a:r>
-              <a:rPr sz="1500" b="0">
-                <a:solidFill>
-                  <a:srgbClr val="FFFFFF"/>
+              <a:rPr sz="1500" b="0" dirty="0" err="1">
+                <a:solidFill>
+                  <a:srgbClr val="1F285A"/>
                 </a:solidFill>
                 <a:latin typeface="メイリオ"/>
                 <a:ea typeface="メイリオ"/>
@@ -5266,17 +5440,28 @@
               </a:rPr>
               <a:t>保険見直し本舗</a:t>
             </a:r>
+            <a:endParaRPr sz="1250" b="1" dirty="0">
+              <a:solidFill>
+                <a:srgbClr val="1F285A"/>
+              </a:solidFill>
+              <a:latin typeface="メイリオ"/>
+              <a:ea typeface="メイリオ"/>
+              <a:cs typeface="メイリオ"/>
+            </a:endParaRPr>
           </a:p>
           <a:p>
             <a:pPr algn="ctr">
               <a:lnSpc>
-                <a:spcPct val="120000"/>
+                <a:spcPct val="130000"/>
               </a:lnSpc>
+              <a:spcAft>
+                <a:spcPts val="500"/>
+              </a:spcAft>
             </a:pPr>
             <a:r>
-              <a:rPr sz="2100" b="1">
-                <a:solidFill>
-                  <a:srgbClr val="FFFFFF"/>
+              <a:rPr sz="2100" b="1" dirty="0" err="1">
+                <a:solidFill>
+                  <a:srgbClr val="1F285A"/>
                 </a:solidFill>
                 <a:latin typeface="メイリオ"/>
                 <a:ea typeface="メイリオ"/>
@@ -5284,6 +5469,14 @@
               </a:rPr>
               <a:t>予約100件あたり 面談＋5件</a:t>
             </a:r>
+            <a:endParaRPr sz="1250" b="1" dirty="0">
+              <a:solidFill>
+                <a:srgbClr val="1F285A"/>
+              </a:solidFill>
+              <a:latin typeface="メイリオ"/>
+              <a:ea typeface="メイリオ"/>
+              <a:cs typeface="メイリオ"/>
+            </a:endParaRPr>
           </a:p>
         </p:txBody>
       </p:sp>
@@ -5481,7 +5674,7 @@
       </p:cxnSp>
       <p:sp>
         <p:nvSpPr>
-          <p:cNvPr id="6" name="Rounded Rectangle 4"/>
+          <p:cNvPr id="6" name="Rounded Rectangle 12"/>
           <p:cNvSpPr/>
           <p:nvPr/>
         </p:nvSpPr>
@@ -5492,15 +5685,15 @@
           </a:xfrm>
           <a:prstGeom prst="roundRect">
             <a:avLst>
-              <a:gd name="adj" fmla="val 10000"/>
+              <a:gd name="adj" fmla="val 6000"/>
             </a:avLst>
           </a:prstGeom>
           <a:solidFill>
-            <a:srgbClr val="F4F7FF"/>
-          </a:solidFill>
-          <a:ln w="12700">
+            <a:srgbClr val="FFFFFF"/>
+          </a:solidFill>
+          <a:ln w="19050">
             <a:solidFill>
-              <a:srgbClr val="D9D9D9"/>
+              <a:srgbClr val="1F285A"/>
             </a:solidFill>
           </a:ln>
           <a:effectLst/>
@@ -5520,16 +5713,19 @@
           </a:fontRef>
         </p:style>
         <p:txBody>
-          <a:bodyPr wrap="square" lIns="54000" tIns="18000" rIns="54000" bIns="18000" rtlCol="0" anchor="ctr"/>
+          <a:bodyPr wrap="square" lIns="125999" tIns="90000" rIns="108000" bIns="54000" rtlCol="0" anchor="ctr"/>
           <a:lstStyle/>
           <a:p>
             <a:pPr algn="ctr">
               <a:lnSpc>
-                <a:spcPct val="120000"/>
+                <a:spcPct val="130000"/>
               </a:lnSpc>
+              <a:spcAft>
+                <a:spcPts val="500"/>
+              </a:spcAft>
             </a:pPr>
             <a:r>
-              <a:rPr sz="1700" b="1">
+              <a:rPr sz="1700" b="1" dirty="0" err="1">
                 <a:solidFill>
                   <a:srgbClr val="1F285A"/>
                 </a:solidFill>
@@ -5539,6 +5735,14 @@
               </a:rPr>
               <a:t>資料請求</a:t>
             </a:r>
+            <a:endParaRPr sz="1250" b="1" dirty="0">
+              <a:solidFill>
+                <a:srgbClr val="1F285A"/>
+              </a:solidFill>
+              <a:latin typeface="メイリオ"/>
+              <a:ea typeface="メイリオ"/>
+              <a:cs typeface="メイリオ"/>
+            </a:endParaRPr>
           </a:p>
         </p:txBody>
       </p:sp>
@@ -5593,7 +5797,7 @@
       </p:sp>
       <p:sp>
         <p:nvSpPr>
-          <p:cNvPr id="8" name="Rounded Rectangle 8"/>
+          <p:cNvPr id="8" name="Rounded Rectangle 4"/>
           <p:cNvSpPr/>
           <p:nvPr/>
         </p:nvSpPr>
@@ -5608,7 +5812,7 @@
             </a:avLst>
           </a:prstGeom>
           <a:solidFill>
-            <a:srgbClr val="06C755"/>
+            <a:srgbClr val="1F285A"/>
           </a:solidFill>
           <a:ln>
             <a:noFill/>
@@ -5654,7 +5858,7 @@
       </p:sp>
       <p:sp>
         <p:nvSpPr>
-          <p:cNvPr id="9" name="Right Arrow 7"/>
+          <p:cNvPr id="9" name="Right Arrow 5"/>
           <p:cNvSpPr/>
           <p:nvPr/>
         </p:nvSpPr>
@@ -5667,7 +5871,7 @@
             <a:avLst/>
           </a:prstGeom>
           <a:solidFill>
-            <a:srgbClr val="06C755"/>
+            <a:srgbClr val="1F285A"/>
           </a:solidFill>
           <a:ln>
             <a:noFill/>
@@ -5703,7 +5907,7 @@
       </p:sp>
       <p:sp>
         <p:nvSpPr>
-          <p:cNvPr id="10" name="Rounded Rectangle 8"/>
+          <p:cNvPr id="10" name="Rounded Rectangle 4"/>
           <p:cNvSpPr/>
           <p:nvPr/>
         </p:nvSpPr>
@@ -5718,7 +5922,7 @@
             </a:avLst>
           </a:prstGeom>
           <a:solidFill>
-            <a:srgbClr val="06C755"/>
+            <a:srgbClr val="1F285A"/>
           </a:solidFill>
           <a:ln>
             <a:noFill/>
@@ -5782,7 +5986,7 @@
       </p:sp>
       <p:sp>
         <p:nvSpPr>
-          <p:cNvPr id="11" name="Right Arrow 7"/>
+          <p:cNvPr id="11" name="Right Arrow 5"/>
           <p:cNvSpPr/>
           <p:nvPr/>
         </p:nvSpPr>
@@ -5795,7 +5999,7 @@
             <a:avLst/>
           </a:prstGeom>
           <a:solidFill>
-            <a:srgbClr val="06C755"/>
+            <a:srgbClr val="1F285A"/>
           </a:solidFill>
           <a:ln>
             <a:noFill/>
@@ -5831,7 +6035,7 @@
       </p:sp>
       <p:sp>
         <p:nvSpPr>
-          <p:cNvPr id="12" name="Rounded Rectangle 10"/>
+          <p:cNvPr id="12" name="Rounded Rectangle 12"/>
           <p:cNvSpPr/>
           <p:nvPr/>
         </p:nvSpPr>
@@ -5842,15 +6046,15 @@
           </a:xfrm>
           <a:prstGeom prst="roundRect">
             <a:avLst>
-              <a:gd name="adj" fmla="val 10000"/>
+              <a:gd name="adj" fmla="val 6000"/>
             </a:avLst>
           </a:prstGeom>
           <a:solidFill>
-            <a:srgbClr val="E8F8EE"/>
-          </a:solidFill>
-          <a:ln w="12700">
+            <a:srgbClr val="FFFFFF"/>
+          </a:solidFill>
+          <a:ln w="19050">
             <a:solidFill>
-              <a:srgbClr val="06C755"/>
+              <a:srgbClr val="1F285A"/>
             </a:solidFill>
           </a:ln>
           <a:effectLst/>
@@ -5870,18 +6074,21 @@
           </a:fontRef>
         </p:style>
         <p:txBody>
-          <a:bodyPr wrap="square" lIns="54000" tIns="18000" rIns="54000" bIns="18000" rtlCol="0" anchor="ctr"/>
+          <a:bodyPr wrap="square" lIns="125999" tIns="90000" rIns="108000" bIns="54000" rtlCol="0" anchor="ctr"/>
           <a:lstStyle/>
           <a:p>
             <a:pPr algn="ctr">
               <a:lnSpc>
-                <a:spcPct val="120000"/>
+                <a:spcPct val="130000"/>
               </a:lnSpc>
+              <a:spcAft>
+                <a:spcPts val="500"/>
+              </a:spcAft>
             </a:pPr>
             <a:r>
-              <a:rPr sz="1700" b="1">
-                <a:solidFill>
-                  <a:srgbClr val="0B7A3B"/>
+              <a:rPr sz="1700" b="1" dirty="0" err="1">
+                <a:solidFill>
+                  <a:srgbClr val="1F285A"/>
                 </a:solidFill>
                 <a:latin typeface="メイリオ"/>
                 <a:ea typeface="メイリオ"/>
@@ -5889,17 +6096,28 @@
               </a:rPr>
               <a:t>見学・商談の</a:t>
             </a:r>
+            <a:endParaRPr sz="1250" b="1" dirty="0">
+              <a:solidFill>
+                <a:srgbClr val="1F285A"/>
+              </a:solidFill>
+              <a:latin typeface="メイリオ"/>
+              <a:ea typeface="メイリオ"/>
+              <a:cs typeface="メイリオ"/>
+            </a:endParaRPr>
           </a:p>
           <a:p>
             <a:pPr algn="ctr">
               <a:lnSpc>
-                <a:spcPct val="120000"/>
+                <a:spcPct val="130000"/>
               </a:lnSpc>
+              <a:spcAft>
+                <a:spcPts val="500"/>
+              </a:spcAft>
             </a:pPr>
             <a:r>
-              <a:rPr sz="1700" b="1">
-                <a:solidFill>
-                  <a:srgbClr val="0B7A3B"/>
+              <a:rPr sz="1700" b="1" dirty="0" err="1">
+                <a:solidFill>
+                  <a:srgbClr val="1F285A"/>
                 </a:solidFill>
                 <a:latin typeface="メイリオ"/>
                 <a:ea typeface="メイリオ"/>
@@ -5907,6 +6125,14 @@
               </a:rPr>
               <a:t>予約</a:t>
             </a:r>
+            <a:endParaRPr sz="1250" b="1" dirty="0">
+              <a:solidFill>
+                <a:srgbClr val="1F285A"/>
+              </a:solidFill>
+              <a:latin typeface="メイリオ"/>
+              <a:ea typeface="メイリオ"/>
+              <a:cs typeface="メイリオ"/>
+            </a:endParaRPr>
           </a:p>
         </p:txBody>
       </p:sp>
@@ -5927,7 +6153,7 @@
             </a:avLst>
           </a:prstGeom>
           <a:solidFill>
-            <a:srgbClr val="1F285A"/>
+            <a:srgbClr val="333333"/>
           </a:solidFill>
           <a:ln>
             <a:noFill/>
@@ -5973,7 +6199,7 @@
       </p:sp>
       <p:sp>
         <p:nvSpPr>
-          <p:cNvPr id="14" name="Rounded Rectangle 4"/>
+          <p:cNvPr id="14" name="Rounded Rectangle 12"/>
           <p:cNvSpPr/>
           <p:nvPr/>
         </p:nvSpPr>
@@ -5984,15 +6210,15 @@
           </a:xfrm>
           <a:prstGeom prst="roundRect">
             <a:avLst>
-              <a:gd name="adj" fmla="val 10000"/>
+              <a:gd name="adj" fmla="val 6000"/>
             </a:avLst>
           </a:prstGeom>
           <a:solidFill>
-            <a:srgbClr val="F4F7FF"/>
-          </a:solidFill>
-          <a:ln w="12700">
+            <a:srgbClr val="FFFFFF"/>
+          </a:solidFill>
+          <a:ln w="19050">
             <a:solidFill>
-              <a:srgbClr val="D9D9D9"/>
+              <a:srgbClr val="1F285A"/>
             </a:solidFill>
           </a:ln>
           <a:effectLst/>
@@ -6012,16 +6238,19 @@
           </a:fontRef>
         </p:style>
         <p:txBody>
-          <a:bodyPr wrap="square" lIns="54000" tIns="18000" rIns="54000" bIns="18000" rtlCol="0" anchor="ctr"/>
+          <a:bodyPr wrap="square" lIns="125999" tIns="90000" rIns="108000" bIns="54000" rtlCol="0" anchor="ctr"/>
           <a:lstStyle/>
           <a:p>
             <a:pPr algn="ctr">
               <a:lnSpc>
-                <a:spcPct val="120000"/>
+                <a:spcPct val="130000"/>
               </a:lnSpc>
+              <a:spcAft>
+                <a:spcPts val="500"/>
+              </a:spcAft>
             </a:pPr>
             <a:r>
-              <a:rPr sz="1500" b="0">
+              <a:rPr sz="1500" b="0" dirty="0" err="1">
                 <a:solidFill>
                   <a:srgbClr val="1F285A"/>
                 </a:solidFill>
@@ -6031,15 +6260,26 @@
               </a:rPr>
               <a:t>皮膚科クリニック</a:t>
             </a:r>
+            <a:endParaRPr sz="1250" b="1" dirty="0">
+              <a:solidFill>
+                <a:srgbClr val="1F285A"/>
+              </a:solidFill>
+              <a:latin typeface="メイリオ"/>
+              <a:ea typeface="メイリオ"/>
+              <a:cs typeface="メイリオ"/>
+            </a:endParaRPr>
           </a:p>
           <a:p>
             <a:pPr algn="ctr">
               <a:lnSpc>
-                <a:spcPct val="120000"/>
+                <a:spcPct val="130000"/>
               </a:lnSpc>
+              <a:spcAft>
+                <a:spcPts val="500"/>
+              </a:spcAft>
             </a:pPr>
             <a:r>
-              <a:rPr sz="2600" b="1">
+              <a:rPr sz="2600" b="1" dirty="0" err="1">
                 <a:solidFill>
                   <a:srgbClr val="1F285A"/>
                 </a:solidFill>
@@ -6049,12 +6289,20 @@
               </a:rPr>
               <a:t>予約数 約1.2倍</a:t>
             </a:r>
+            <a:endParaRPr sz="1250" b="1" dirty="0">
+              <a:solidFill>
+                <a:srgbClr val="1F285A"/>
+              </a:solidFill>
+              <a:latin typeface="メイリオ"/>
+              <a:ea typeface="メイリオ"/>
+              <a:cs typeface="メイリオ"/>
+            </a:endParaRPr>
           </a:p>
         </p:txBody>
       </p:sp>
       <p:sp>
         <p:nvSpPr>
-          <p:cNvPr id="15" name="Rounded Rectangle 4"/>
+          <p:cNvPr id="15" name="Rounded Rectangle 12"/>
           <p:cNvSpPr/>
           <p:nvPr/>
         </p:nvSpPr>
@@ -6065,15 +6313,15 @@
           </a:xfrm>
           <a:prstGeom prst="roundRect">
             <a:avLst>
-              <a:gd name="adj" fmla="val 10000"/>
+              <a:gd name="adj" fmla="val 6000"/>
             </a:avLst>
           </a:prstGeom>
           <a:solidFill>
-            <a:srgbClr val="F4F7FF"/>
-          </a:solidFill>
-          <a:ln w="12700">
+            <a:srgbClr val="FFFFFF"/>
+          </a:solidFill>
+          <a:ln w="19050">
             <a:solidFill>
-              <a:srgbClr val="D9D9D9"/>
+              <a:srgbClr val="1F285A"/>
             </a:solidFill>
           </a:ln>
           <a:effectLst/>
@@ -6093,16 +6341,19 @@
           </a:fontRef>
         </p:style>
         <p:txBody>
-          <a:bodyPr wrap="square" lIns="54000" tIns="18000" rIns="54000" bIns="18000" rtlCol="0" anchor="ctr"/>
+          <a:bodyPr wrap="square" lIns="125999" tIns="90000" rIns="108000" bIns="54000" rtlCol="0" anchor="ctr"/>
           <a:lstStyle/>
           <a:p>
             <a:pPr algn="ctr">
               <a:lnSpc>
-                <a:spcPct val="120000"/>
+                <a:spcPct val="130000"/>
               </a:lnSpc>
+              <a:spcAft>
+                <a:spcPts val="500"/>
+              </a:spcAft>
             </a:pPr>
             <a:r>
-              <a:rPr sz="1500" b="0">
+              <a:rPr sz="1500" b="0" dirty="0" err="1">
                 <a:solidFill>
                   <a:srgbClr val="1F285A"/>
                 </a:solidFill>
@@ -6112,15 +6363,26 @@
               </a:rPr>
               <a:t>就職支援（UZUZ）</a:t>
             </a:r>
+            <a:endParaRPr sz="1250" b="1" dirty="0">
+              <a:solidFill>
+                <a:srgbClr val="1F285A"/>
+              </a:solidFill>
+              <a:latin typeface="メイリオ"/>
+              <a:ea typeface="メイリオ"/>
+              <a:cs typeface="メイリオ"/>
+            </a:endParaRPr>
           </a:p>
           <a:p>
             <a:pPr algn="ctr">
               <a:lnSpc>
-                <a:spcPct val="120000"/>
+                <a:spcPct val="130000"/>
               </a:lnSpc>
+              <a:spcAft>
+                <a:spcPts val="500"/>
+              </a:spcAft>
             </a:pPr>
             <a:r>
-              <a:rPr sz="2600" b="1">
+              <a:rPr sz="2600" b="1" dirty="0" err="1">
                 <a:solidFill>
                   <a:srgbClr val="1F285A"/>
                 </a:solidFill>
@@ -6130,6 +6392,14 @@
               </a:rPr>
               <a:t>面談予約率 55%</a:t>
             </a:r>
+            <a:endParaRPr sz="1250" b="1" dirty="0">
+              <a:solidFill>
+                <a:srgbClr val="1F285A"/>
+              </a:solidFill>
+              <a:latin typeface="メイリオ"/>
+              <a:ea typeface="メイリオ"/>
+              <a:cs typeface="メイリオ"/>
+            </a:endParaRPr>
           </a:p>
         </p:txBody>
       </p:sp>

--- a/20261002_サンクスLINEのご提案.pptx
+++ b/20261002_サンクスLINEのご提案.pptx
@@ -3010,8 +3010,8 @@
         </p:nvSpPr>
         <p:spPr>
           <a:xfrm>
-            <a:off x="525600" y="1620000"/>
-            <a:ext cx="2088000" cy="1728000"/>
+            <a:off x="1080000" y="1944000"/>
+            <a:ext cx="1872000" cy="1007999"/>
           </a:xfrm>
           <a:prstGeom prst="roundRect">
             <a:avLst>
@@ -3055,7 +3055,7 @@
               </a:spcAft>
             </a:pPr>
             <a:r>
-              <a:rPr sz="2000" b="1" dirty="0" err="1">
+              <a:rPr sz="1600" b="1" dirty="0" err="1">
                 <a:solidFill>
                   <a:srgbClr val="1F285A"/>
                 </a:solidFill>
@@ -3084,8 +3084,8 @@
         </p:nvSpPr>
         <p:spPr>
           <a:xfrm>
-            <a:off x="2664000" y="2268000"/>
-            <a:ext cx="360000" cy="432000"/>
+            <a:off x="2970000" y="2268000"/>
+            <a:ext cx="360000" cy="360000"/>
           </a:xfrm>
           <a:prstGeom prst="rightArrow">
             <a:avLst/>
@@ -3133,8 +3133,8 @@
         </p:nvSpPr>
         <p:spPr>
           <a:xfrm>
-            <a:off x="3078000" y="1620000"/>
-            <a:ext cx="1944000" cy="1728000"/>
+            <a:off x="3384000" y="1944000"/>
+            <a:ext cx="1584000" cy="1007999"/>
           </a:xfrm>
           <a:prstGeom prst="roundRect">
             <a:avLst>
@@ -3173,7 +3173,7 @@
               </a:lnSpc>
             </a:pPr>
             <a:r>
-              <a:rPr sz="2000" b="1">
+              <a:rPr sz="1600" b="1">
                 <a:solidFill>
                   <a:srgbClr val="FFFFFF"/>
                 </a:solidFill>
@@ -3194,8 +3194,8 @@
         </p:nvSpPr>
         <p:spPr>
           <a:xfrm>
-            <a:off x="5076000" y="2268000"/>
-            <a:ext cx="360000" cy="432000"/>
+            <a:off x="4986000" y="2268000"/>
+            <a:ext cx="360000" cy="360000"/>
           </a:xfrm>
           <a:prstGeom prst="rightArrow">
             <a:avLst/>
@@ -3243,8 +3243,8 @@
         </p:nvSpPr>
         <p:spPr>
           <a:xfrm>
-            <a:off x="5490000" y="1620000"/>
-            <a:ext cx="3891600" cy="810000"/>
+            <a:off x="5400000" y="1944000"/>
+            <a:ext cx="3420000" cy="468000"/>
           </a:xfrm>
           <a:prstGeom prst="roundRect">
             <a:avLst>
@@ -3288,7 +3288,7 @@
               </a:spcAft>
             </a:pPr>
             <a:r>
-              <a:rPr sz="1700" b="1" dirty="0" err="1">
+              <a:rPr sz="1500" b="1" dirty="0" err="1">
                 <a:solidFill>
                   <a:srgbClr val="1F285A"/>
                 </a:solidFill>
@@ -3317,8 +3317,8 @@
         </p:nvSpPr>
         <p:spPr>
           <a:xfrm>
-            <a:off x="5490000" y="2538000"/>
-            <a:ext cx="3891600" cy="810000"/>
+            <a:off x="5400000" y="2484000"/>
+            <a:ext cx="3420000" cy="468000"/>
           </a:xfrm>
           <a:prstGeom prst="roundRect">
             <a:avLst>
@@ -3362,7 +3362,7 @@
               </a:spcAft>
             </a:pPr>
             <a:r>
-              <a:rPr sz="1700" b="1" dirty="0" err="1">
+              <a:rPr sz="1500" b="1" dirty="0" err="1">
                 <a:solidFill>
                   <a:srgbClr val="1F285A"/>
                 </a:solidFill>
@@ -3385,161 +3385,78 @@
       </p:sp>
       <p:sp>
         <p:nvSpPr>
-          <p:cNvPr id="12" name="Rounded Rectangle 12"/>
-          <p:cNvSpPr/>
+          <p:cNvPr id="12" name="TextBox 19"/>
+          <p:cNvSpPr txBox="1"/>
           <p:nvPr/>
         </p:nvSpPr>
         <p:spPr>
           <a:xfrm>
-            <a:off x="525600" y="3528000"/>
-            <a:ext cx="4392000" cy="1404000"/>
+            <a:off x="1080000" y="3564000"/>
+            <a:ext cx="7740000" cy="2520000"/>
           </a:xfrm>
-          <a:prstGeom prst="roundRect">
-            <a:avLst>
-              <a:gd name="adj" fmla="val 6000"/>
-            </a:avLst>
+          <a:prstGeom prst="rect">
+            <a:avLst/>
           </a:prstGeom>
-          <a:solidFill>
-            <a:srgbClr val="FFFFFF"/>
-          </a:solidFill>
-          <a:ln w="19050">
-            <a:solidFill>
-              <a:srgbClr val="1F285A"/>
-            </a:solidFill>
-          </a:ln>
-          <a:effectLst/>
+          <a:noFill/>
         </p:spPr>
-        <p:style>
-          <a:lnRef idx="1">
-            <a:schemeClr val="accent1"/>
-          </a:lnRef>
-          <a:fillRef idx="3">
-            <a:schemeClr val="accent1"/>
-          </a:fillRef>
-          <a:effectRef idx="2">
-            <a:schemeClr val="accent1"/>
-          </a:effectRef>
-          <a:fontRef idx="minor">
-            <a:schemeClr val="lt1"/>
-          </a:fontRef>
-        </p:style>
         <p:txBody>
-          <a:bodyPr wrap="square" lIns="125999" tIns="90000" rIns="108000" bIns="54000" rtlCol="0" anchor="ctr"/>
+          <a:bodyPr wrap="square" lIns="0" tIns="21600" rIns="0" bIns="21600" anchor="t">
+            <a:spAutoFit/>
+          </a:bodyPr>
           <a:lstStyle/>
           <a:p>
-            <a:pPr algn="ctr">
+            <a:pPr algn="l">
               <a:lnSpc>
-                <a:spcPct val="130000"/>
+                <a:spcPct val="115000"/>
               </a:lnSpc>
               <a:spcAft>
-                <a:spcPts val="500"/>
+                <a:spcPts val="1400"/>
               </a:spcAft>
             </a:pPr>
             <a:r>
-              <a:rPr sz="1600" b="1" dirty="0" err="1">
-                <a:solidFill>
-                  <a:srgbClr val="1F285A"/>
+              <a:rPr sz="2000" b="0">
+                <a:solidFill>
+                  <a:srgbClr val="333333"/>
                 </a:solidFill>
                 <a:latin typeface="メイリオ"/>
                 <a:ea typeface="メイリオ"/>
                 <a:cs typeface="メイリオ"/>
               </a:rPr>
-              <a:t>入力内容を引き継ぎ、配信の出し分けに活用</a:t>
+              <a:t>・入力内容を引き継ぎ、配信の出し分けに活用</a:t>
             </a:r>
-            <a:endParaRPr sz="1250" b="1" dirty="0">
-              <a:solidFill>
-                <a:srgbClr val="1F285A"/>
-              </a:solidFill>
-              <a:latin typeface="メイリオ"/>
-              <a:ea typeface="メイリオ"/>
-              <a:cs typeface="メイリオ"/>
-            </a:endParaRPr>
-          </a:p>
-        </p:txBody>
-      </p:sp>
-      <p:sp>
-        <p:nvSpPr>
-          <p:cNvPr id="13" name="Rounded Rectangle 12"/>
-          <p:cNvSpPr/>
-          <p:nvPr/>
-        </p:nvSpPr>
-        <p:spPr>
-          <a:xfrm>
-            <a:off x="4989600" y="3528000"/>
-            <a:ext cx="4392000" cy="1404000"/>
-          </a:xfrm>
-          <a:prstGeom prst="roundRect">
-            <a:avLst>
-              <a:gd name="adj" fmla="val 6000"/>
-            </a:avLst>
-          </a:prstGeom>
-          <a:solidFill>
-            <a:srgbClr val="FFFFFF"/>
-          </a:solidFill>
-          <a:ln w="19050">
-            <a:solidFill>
-              <a:srgbClr val="1F285A"/>
-            </a:solidFill>
-          </a:ln>
-          <a:effectLst/>
-        </p:spPr>
-        <p:style>
-          <a:lnRef idx="1">
-            <a:schemeClr val="accent1"/>
-          </a:lnRef>
-          <a:fillRef idx="3">
-            <a:schemeClr val="accent1"/>
-          </a:fillRef>
-          <a:effectRef idx="2">
-            <a:schemeClr val="accent1"/>
-          </a:effectRef>
-          <a:fontRef idx="minor">
-            <a:schemeClr val="lt1"/>
-          </a:fontRef>
-        </p:style>
-        <p:txBody>
-          <a:bodyPr wrap="square" lIns="125999" tIns="90000" rIns="108000" bIns="54000" rtlCol="0" anchor="ctr"/>
-          <a:lstStyle/>
-          <a:p>
-            <a:pPr algn="ctr">
+          </a:p>
+          <a:p>
+            <a:pPr algn="l">
               <a:lnSpc>
-                <a:spcPct val="130000"/>
+                <a:spcPct val="115000"/>
               </a:lnSpc>
               <a:spcAft>
-                <a:spcPts val="500"/>
+                <a:spcPts val="1400"/>
               </a:spcAft>
             </a:pPr>
             <a:r>
-              <a:rPr sz="1600" b="1" dirty="0" err="1">
-                <a:solidFill>
-                  <a:srgbClr val="1F285A"/>
+              <a:rPr sz="2000" b="0">
+                <a:solidFill>
+                  <a:srgbClr val="333333"/>
                 </a:solidFill>
                 <a:latin typeface="メイリオ"/>
                 <a:ea typeface="メイリオ"/>
                 <a:cs typeface="メイリオ"/>
               </a:rPr>
-              <a:t>今のアカウントにそのまま導入、</a:t>
+              <a:t>・今のアカウントにそのまま導入、APIツールとも併用可</a:t>
             </a:r>
-            <a:endParaRPr sz="1250" b="1" dirty="0">
-              <a:solidFill>
-                <a:srgbClr val="1F285A"/>
-              </a:solidFill>
-              <a:latin typeface="メイリオ"/>
-              <a:ea typeface="メイリオ"/>
-              <a:cs typeface="メイリオ"/>
-            </a:endParaRPr>
-          </a:p>
-          <a:p>
-            <a:pPr algn="ctr">
+          </a:p>
+          <a:p>
+            <a:pPr algn="l">
               <a:lnSpc>
-                <a:spcPct val="130000"/>
+                <a:spcPct val="115000"/>
               </a:lnSpc>
               <a:spcAft>
-                <a:spcPts val="500"/>
+                <a:spcPts val="0"/>
               </a:spcAft>
             </a:pPr>
             <a:r>
-              <a:rPr sz="1600" b="1" dirty="0" err="1">
+              <a:rPr sz="2000" b="1">
                 <a:solidFill>
                   <a:srgbClr val="1F285A"/>
                 </a:solidFill>
@@ -3547,76 +3464,7 @@
                 <a:ea typeface="メイリオ"/>
                 <a:cs typeface="メイリオ"/>
               </a:rPr>
-              <a:t>APIツールとも併用可</a:t>
-            </a:r>
-            <a:endParaRPr sz="1250" b="1" dirty="0">
-              <a:solidFill>
-                <a:srgbClr val="1F285A"/>
-              </a:solidFill>
-              <a:latin typeface="メイリオ"/>
-              <a:ea typeface="メイリオ"/>
-              <a:cs typeface="メイリオ"/>
-            </a:endParaRPr>
-          </a:p>
-        </p:txBody>
-      </p:sp>
-      <p:sp>
-        <p:nvSpPr>
-          <p:cNvPr id="14" name="Rounded Rectangle 4"/>
-          <p:cNvSpPr/>
-          <p:nvPr/>
-        </p:nvSpPr>
-        <p:spPr>
-          <a:xfrm>
-            <a:off x="525600" y="5076000"/>
-            <a:ext cx="8856000" cy="936000"/>
-          </a:xfrm>
-          <a:prstGeom prst="roundRect">
-            <a:avLst>
-              <a:gd name="adj" fmla="val 10000"/>
-            </a:avLst>
-          </a:prstGeom>
-          <a:solidFill>
-            <a:srgbClr val="333333"/>
-          </a:solidFill>
-          <a:ln>
-            <a:noFill/>
-          </a:ln>
-          <a:effectLst/>
-        </p:spPr>
-        <p:style>
-          <a:lnRef idx="1">
-            <a:schemeClr val="accent1"/>
-          </a:lnRef>
-          <a:fillRef idx="3">
-            <a:schemeClr val="accent1"/>
-          </a:fillRef>
-          <a:effectRef idx="2">
-            <a:schemeClr val="accent1"/>
-          </a:effectRef>
-          <a:fontRef idx="minor">
-            <a:schemeClr val="lt1"/>
-          </a:fontRef>
-        </p:style>
-        <p:txBody>
-          <a:bodyPr wrap="square" lIns="54000" tIns="18000" rIns="54000" bIns="18000" rtlCol="0" anchor="ctr"/>
-          <a:lstStyle/>
-          <a:p>
-            <a:pPr algn="ctr">
-              <a:lnSpc>
-                <a:spcPct val="120000"/>
-              </a:lnSpc>
-            </a:pPr>
-            <a:r>
-              <a:rPr sz="2400" b="1">
-                <a:solidFill>
-                  <a:srgbClr val="FFFFFF"/>
-                </a:solidFill>
-                <a:latin typeface="メイリオ"/>
-                <a:ea typeface="メイリオ"/>
-                <a:cs typeface="メイリオ"/>
-              </a:rPr>
-              <a:t>費用：初期15万円／月額3万円〜</a:t>
+              <a:t>・費用：初期15万円／月額3万円〜</a:t>
             </a:r>
           </a:p>
         </p:txBody>
@@ -3780,864 +3628,142 @@
       </p:cxnSp>
       <p:sp>
         <p:nvSpPr>
-          <p:cNvPr id="6" name="Rounded Rectangle 12"/>
-          <p:cNvSpPr/>
-          <p:nvPr/>
-        </p:nvSpPr>
-        <p:spPr>
-          <a:xfrm>
-            <a:off x="525600" y="1620000"/>
-            <a:ext cx="1872000" cy="827999"/>
-          </a:xfrm>
-          <a:prstGeom prst="roundRect">
-            <a:avLst>
-              <a:gd name="adj" fmla="val 6000"/>
-            </a:avLst>
-          </a:prstGeom>
-          <a:solidFill>
-            <a:srgbClr val="FFFFFF"/>
-          </a:solidFill>
-          <a:ln w="19050">
-            <a:solidFill>
-              <a:srgbClr val="1F285A"/>
-            </a:solidFill>
-          </a:ln>
-          <a:effectLst/>
-        </p:spPr>
-        <p:style>
-          <a:lnRef idx="1">
-            <a:schemeClr val="accent1"/>
-          </a:lnRef>
-          <a:fillRef idx="3">
-            <a:schemeClr val="accent1"/>
-          </a:fillRef>
-          <a:effectRef idx="2">
-            <a:schemeClr val="accent1"/>
-          </a:effectRef>
-          <a:fontRef idx="minor">
-            <a:schemeClr val="lt1"/>
-          </a:fontRef>
-        </p:style>
-        <p:txBody>
-          <a:bodyPr wrap="square" lIns="125999" tIns="90000" rIns="108000" bIns="54000" rtlCol="0" anchor="ctr"/>
-          <a:lstStyle/>
-          <a:p>
-            <a:pPr algn="ctr">
-              <a:lnSpc>
-                <a:spcPct val="130000"/>
-              </a:lnSpc>
-              <a:spcAft>
-                <a:spcPts val="500"/>
-              </a:spcAft>
-            </a:pPr>
-            <a:r>
-              <a:rPr sz="1600" b="1" dirty="0" err="1">
-                <a:solidFill>
-                  <a:srgbClr val="1F285A"/>
-                </a:solidFill>
-                <a:latin typeface="メイリオ"/>
-                <a:ea typeface="メイリオ"/>
-                <a:cs typeface="メイリオ"/>
-              </a:rPr>
-              <a:t>申込み・予約</a:t>
-            </a:r>
-            <a:endParaRPr sz="1250" b="1" dirty="0">
-              <a:solidFill>
-                <a:srgbClr val="1F285A"/>
-              </a:solidFill>
-              <a:latin typeface="メイリオ"/>
-              <a:ea typeface="メイリオ"/>
-              <a:cs typeface="メイリオ"/>
-            </a:endParaRPr>
-          </a:p>
-        </p:txBody>
-      </p:sp>
-      <p:sp>
-        <p:nvSpPr>
-          <p:cNvPr id="7" name="Rounded Rectangle 4"/>
-          <p:cNvSpPr/>
-          <p:nvPr/>
-        </p:nvSpPr>
-        <p:spPr>
-          <a:xfrm>
-            <a:off x="2484000" y="1620000"/>
-            <a:ext cx="6897600" cy="827999"/>
-          </a:xfrm>
-          <a:prstGeom prst="roundRect">
-            <a:avLst>
-              <a:gd name="adj" fmla="val 10000"/>
-            </a:avLst>
-          </a:prstGeom>
-          <a:solidFill>
-            <a:srgbClr val="1F285A"/>
-          </a:solidFill>
-          <a:ln>
-            <a:noFill/>
-          </a:ln>
-          <a:effectLst/>
-        </p:spPr>
-        <p:style>
-          <a:lnRef idx="1">
-            <a:schemeClr val="accent1"/>
-          </a:lnRef>
-          <a:fillRef idx="3">
-            <a:schemeClr val="accent1"/>
-          </a:fillRef>
-          <a:effectRef idx="2">
-            <a:schemeClr val="accent1"/>
-          </a:effectRef>
-          <a:fontRef idx="minor">
-            <a:schemeClr val="lt1"/>
-          </a:fontRef>
-        </p:style>
-        <p:txBody>
-          <a:bodyPr wrap="square" lIns="54000" tIns="18000" rIns="54000" bIns="18000" rtlCol="0" anchor="ctr"/>
-          <a:lstStyle/>
-          <a:p>
-            <a:pPr algn="ctr">
-              <a:lnSpc>
-                <a:spcPct val="120000"/>
-              </a:lnSpc>
-            </a:pPr>
-            <a:r>
-              <a:rPr sz="1800" b="1">
-                <a:solidFill>
-                  <a:srgbClr val="FFFFFF"/>
-                </a:solidFill>
-                <a:latin typeface="メイリオ"/>
-                <a:ea typeface="メイリオ"/>
-                <a:cs typeface="メイリオ"/>
-              </a:rPr>
-              <a:t>予約 100件</a:t>
-            </a:r>
-          </a:p>
-        </p:txBody>
-      </p:sp>
-      <p:sp>
-        <p:nvSpPr>
-          <p:cNvPr id="8" name="Rounded Rectangle 12"/>
-          <p:cNvSpPr/>
-          <p:nvPr/>
-        </p:nvSpPr>
-        <p:spPr>
-          <a:xfrm>
-            <a:off x="525600" y="2556000"/>
-            <a:ext cx="1872000" cy="827999"/>
-          </a:xfrm>
-          <a:prstGeom prst="roundRect">
-            <a:avLst>
-              <a:gd name="adj" fmla="val 6000"/>
-            </a:avLst>
-          </a:prstGeom>
-          <a:solidFill>
-            <a:srgbClr val="FFFFFF"/>
-          </a:solidFill>
-          <a:ln w="19050">
-            <a:solidFill>
-              <a:srgbClr val="1F285A"/>
-            </a:solidFill>
-          </a:ln>
-          <a:effectLst/>
-        </p:spPr>
-        <p:style>
-          <a:lnRef idx="1">
-            <a:schemeClr val="accent1"/>
-          </a:lnRef>
-          <a:fillRef idx="3">
-            <a:schemeClr val="accent1"/>
-          </a:fillRef>
-          <a:effectRef idx="2">
-            <a:schemeClr val="accent1"/>
-          </a:effectRef>
-          <a:fontRef idx="minor">
-            <a:schemeClr val="lt1"/>
-          </a:fontRef>
-        </p:style>
-        <p:txBody>
-          <a:bodyPr wrap="square" lIns="125999" tIns="90000" rIns="108000" bIns="54000" rtlCol="0" anchor="ctr"/>
-          <a:lstStyle/>
-          <a:p>
-            <a:pPr algn="ctr">
-              <a:lnSpc>
-                <a:spcPct val="130000"/>
-              </a:lnSpc>
-              <a:spcAft>
-                <a:spcPts val="500"/>
-              </a:spcAft>
-            </a:pPr>
-            <a:r>
-              <a:rPr sz="1600" b="1" dirty="0" err="1">
-                <a:solidFill>
-                  <a:srgbClr val="1F285A"/>
-                </a:solidFill>
-                <a:latin typeface="メイリオ"/>
-                <a:ea typeface="メイリオ"/>
-                <a:cs typeface="メイリオ"/>
-              </a:rPr>
-              <a:t>来店</a:t>
-            </a:r>
-            <a:endParaRPr sz="1250" b="1" dirty="0">
-              <a:solidFill>
-                <a:srgbClr val="1F285A"/>
-              </a:solidFill>
-              <a:latin typeface="メイリオ"/>
-              <a:ea typeface="メイリオ"/>
-              <a:cs typeface="メイリオ"/>
-            </a:endParaRPr>
-          </a:p>
-        </p:txBody>
-      </p:sp>
-      <p:sp>
-        <p:nvSpPr>
-          <p:cNvPr id="9" name="Rounded Rectangle 4"/>
-          <p:cNvSpPr/>
-          <p:nvPr/>
-        </p:nvSpPr>
-        <p:spPr>
-          <a:xfrm>
-            <a:off x="2484000" y="2556000"/>
-            <a:ext cx="5173200" cy="827999"/>
-          </a:xfrm>
-          <a:prstGeom prst="roundRect">
-            <a:avLst>
-              <a:gd name="adj" fmla="val 10000"/>
-            </a:avLst>
-          </a:prstGeom>
-          <a:solidFill>
-            <a:srgbClr val="1F285A"/>
-          </a:solidFill>
-          <a:ln>
-            <a:noFill/>
-          </a:ln>
-          <a:effectLst/>
-        </p:spPr>
-        <p:style>
-          <a:lnRef idx="1">
-            <a:schemeClr val="accent1"/>
-          </a:lnRef>
-          <a:fillRef idx="3">
-            <a:schemeClr val="accent1"/>
-          </a:fillRef>
-          <a:effectRef idx="2">
-            <a:schemeClr val="accent1"/>
-          </a:effectRef>
-          <a:fontRef idx="minor">
-            <a:schemeClr val="lt1"/>
-          </a:fontRef>
-        </p:style>
-        <p:txBody>
-          <a:bodyPr wrap="square" lIns="54000" tIns="18000" rIns="54000" bIns="18000" rtlCol="0" anchor="ctr"/>
-          <a:lstStyle/>
-          <a:p>
-            <a:pPr algn="ctr">
-              <a:lnSpc>
-                <a:spcPct val="120000"/>
-              </a:lnSpc>
-            </a:pPr>
-            <a:r>
-              <a:rPr sz="1800" b="1">
-                <a:solidFill>
-                  <a:srgbClr val="FFFFFF"/>
-                </a:solidFill>
-                <a:latin typeface="メイリオ"/>
-                <a:ea typeface="メイリオ"/>
-                <a:cs typeface="メイリオ"/>
-              </a:rPr>
-              <a:t>来店</a:t>
-            </a:r>
-          </a:p>
-        </p:txBody>
-      </p:sp>
-      <p:sp>
-        <p:nvSpPr>
-          <p:cNvPr id="10" name="Rounded Rectangle 12"/>
-          <p:cNvSpPr/>
-          <p:nvPr/>
-        </p:nvSpPr>
-        <p:spPr>
-          <a:xfrm>
-            <a:off x="7711200" y="2556000"/>
-            <a:ext cx="1670400" cy="827999"/>
-          </a:xfrm>
-          <a:prstGeom prst="roundRect">
-            <a:avLst>
-              <a:gd name="adj" fmla="val 6000"/>
-            </a:avLst>
-          </a:prstGeom>
-          <a:solidFill>
-            <a:srgbClr val="FFFFFF"/>
-          </a:solidFill>
-          <a:ln w="19050">
-            <a:solidFill>
-              <a:srgbClr val="1F285A"/>
-            </a:solidFill>
-          </a:ln>
-          <a:effectLst/>
-        </p:spPr>
-        <p:style>
-          <a:lnRef idx="1">
-            <a:schemeClr val="accent1"/>
-          </a:lnRef>
-          <a:fillRef idx="3">
-            <a:schemeClr val="accent1"/>
-          </a:fillRef>
-          <a:effectRef idx="2">
-            <a:schemeClr val="accent1"/>
-          </a:effectRef>
-          <a:fontRef idx="minor">
-            <a:schemeClr val="lt1"/>
-          </a:fontRef>
-        </p:style>
-        <p:txBody>
-          <a:bodyPr wrap="square" lIns="125999" tIns="90000" rIns="108000" bIns="54000" rtlCol="0" anchor="ctr"/>
-          <a:lstStyle/>
-          <a:p>
-            <a:pPr algn="ctr">
-              <a:lnSpc>
-                <a:spcPct val="130000"/>
-              </a:lnSpc>
-              <a:spcAft>
-                <a:spcPts val="500"/>
-              </a:spcAft>
-            </a:pPr>
-            <a:r>
-              <a:rPr sz="1300" b="1" dirty="0" err="1">
-                <a:solidFill>
-                  <a:srgbClr val="333333"/>
-                </a:solidFill>
-                <a:latin typeface="メイリオ"/>
-                <a:ea typeface="メイリオ"/>
-                <a:cs typeface="メイリオ"/>
-              </a:rPr>
-              <a:t>来店せず</a:t>
-            </a:r>
-            <a:endParaRPr sz="1250" b="1" dirty="0">
-              <a:solidFill>
-                <a:srgbClr val="1F285A"/>
-              </a:solidFill>
-              <a:latin typeface="メイリオ"/>
-              <a:ea typeface="メイリオ"/>
-              <a:cs typeface="メイリオ"/>
-            </a:endParaRPr>
-          </a:p>
-          <a:p>
-            <a:pPr algn="ctr">
-              <a:lnSpc>
-                <a:spcPct val="130000"/>
-              </a:lnSpc>
-              <a:spcAft>
-                <a:spcPts val="500"/>
-              </a:spcAft>
-            </a:pPr>
-            <a:r>
-              <a:rPr sz="1600" b="1" dirty="0" err="1">
-                <a:solidFill>
-                  <a:srgbClr val="333333"/>
-                </a:solidFill>
-                <a:latin typeface="メイリオ"/>
-                <a:ea typeface="メイリオ"/>
-                <a:cs typeface="メイリオ"/>
-              </a:rPr>
-              <a:t>2〜3割</a:t>
-            </a:r>
-            <a:endParaRPr sz="1250" b="1" dirty="0">
-              <a:solidFill>
-                <a:srgbClr val="1F285A"/>
-              </a:solidFill>
-              <a:latin typeface="メイリオ"/>
-              <a:ea typeface="メイリオ"/>
-              <a:cs typeface="メイリオ"/>
-            </a:endParaRPr>
-          </a:p>
-        </p:txBody>
-      </p:sp>
-      <p:sp>
-        <p:nvSpPr>
-          <p:cNvPr id="11" name="Rounded Rectangle 12"/>
-          <p:cNvSpPr/>
-          <p:nvPr/>
-        </p:nvSpPr>
-        <p:spPr>
-          <a:xfrm>
-            <a:off x="525600" y="3600000"/>
-            <a:ext cx="2664000" cy="1872000"/>
-          </a:xfrm>
-          <a:prstGeom prst="roundRect">
-            <a:avLst>
-              <a:gd name="adj" fmla="val 6000"/>
-            </a:avLst>
-          </a:prstGeom>
-          <a:solidFill>
-            <a:srgbClr val="FFFFFF"/>
-          </a:solidFill>
-          <a:ln w="19050">
-            <a:solidFill>
-              <a:srgbClr val="1F285A"/>
-            </a:solidFill>
-          </a:ln>
-          <a:effectLst/>
-        </p:spPr>
-        <p:style>
-          <a:lnRef idx="1">
-            <a:schemeClr val="accent1"/>
-          </a:lnRef>
-          <a:fillRef idx="3">
-            <a:schemeClr val="accent1"/>
-          </a:fillRef>
-          <a:effectRef idx="2">
-            <a:schemeClr val="accent1"/>
-          </a:effectRef>
-          <a:fontRef idx="minor">
-            <a:schemeClr val="lt1"/>
-          </a:fontRef>
-        </p:style>
-        <p:txBody>
-          <a:bodyPr wrap="square" lIns="125999" tIns="90000" rIns="108000" bIns="54000" rtlCol="0" anchor="ctr"/>
-          <a:lstStyle/>
-          <a:p>
-            <a:pPr algn="ctr">
-              <a:lnSpc>
-                <a:spcPct val="130000"/>
-              </a:lnSpc>
-              <a:spcAft>
-                <a:spcPts val="500"/>
-              </a:spcAft>
-            </a:pPr>
-            <a:r>
-              <a:rPr sz="1500" b="1" dirty="0" err="1">
-                <a:solidFill>
-                  <a:srgbClr val="1F285A"/>
-                </a:solidFill>
-                <a:latin typeface="メイリオ"/>
-                <a:ea typeface="メイリオ"/>
-                <a:cs typeface="メイリオ"/>
-              </a:rPr>
-              <a:t>申込み⇒来店までに</a:t>
-            </a:r>
-            <a:endParaRPr sz="1250" b="1" dirty="0">
-              <a:solidFill>
-                <a:srgbClr val="1F285A"/>
-              </a:solidFill>
-              <a:latin typeface="メイリオ"/>
-              <a:ea typeface="メイリオ"/>
-              <a:cs typeface="メイリオ"/>
-            </a:endParaRPr>
-          </a:p>
-          <a:p>
-            <a:pPr algn="ctr">
-              <a:lnSpc>
-                <a:spcPct val="130000"/>
-              </a:lnSpc>
-              <a:spcAft>
-                <a:spcPts val="500"/>
-              </a:spcAft>
-            </a:pPr>
-            <a:r>
-              <a:rPr sz="1500" b="1" dirty="0" err="1">
-                <a:solidFill>
-                  <a:srgbClr val="1F285A"/>
-                </a:solidFill>
-                <a:latin typeface="メイリオ"/>
-                <a:ea typeface="メイリオ"/>
-                <a:cs typeface="メイリオ"/>
-              </a:rPr>
-              <a:t>一定数が離脱する</a:t>
-            </a:r>
-            <a:endParaRPr sz="1250" b="1" dirty="0">
-              <a:solidFill>
-                <a:srgbClr val="1F285A"/>
-              </a:solidFill>
-              <a:latin typeface="メイリオ"/>
-              <a:ea typeface="メイリオ"/>
-              <a:cs typeface="メイリオ"/>
-            </a:endParaRPr>
-          </a:p>
-          <a:p>
-            <a:pPr algn="ctr">
-              <a:lnSpc>
-                <a:spcPct val="130000"/>
-              </a:lnSpc>
-              <a:spcAft>
-                <a:spcPts val="500"/>
-              </a:spcAft>
-            </a:pPr>
-            <a:r>
-              <a:rPr sz="1100" b="0" dirty="0" err="1">
-                <a:solidFill>
-                  <a:srgbClr val="333333"/>
-                </a:solidFill>
-                <a:latin typeface="メイリオ"/>
-                <a:ea typeface="メイリオ"/>
-                <a:cs typeface="メイリオ"/>
-              </a:rPr>
-              <a:t>（予約の2〜3割が来店せず／</a:t>
-            </a:r>
-            <a:endParaRPr sz="1250" b="1" dirty="0">
-              <a:solidFill>
-                <a:srgbClr val="1F285A"/>
-              </a:solidFill>
-              <a:latin typeface="メイリオ"/>
-              <a:ea typeface="メイリオ"/>
-              <a:cs typeface="メイリオ"/>
-            </a:endParaRPr>
-          </a:p>
-          <a:p>
-            <a:pPr algn="ctr">
-              <a:lnSpc>
-                <a:spcPct val="130000"/>
-              </a:lnSpc>
-              <a:spcAft>
-                <a:spcPts val="500"/>
-              </a:spcAft>
-            </a:pPr>
-            <a:r>
-              <a:rPr sz="1100" b="0" dirty="0" err="1">
-                <a:solidFill>
-                  <a:srgbClr val="333333"/>
-                </a:solidFill>
-                <a:latin typeface="メイリオ"/>
-                <a:ea typeface="メイリオ"/>
-                <a:cs typeface="メイリオ"/>
-              </a:rPr>
-              <a:t>保険見直し本舗）</a:t>
-            </a:r>
-            <a:endParaRPr sz="1250" b="1" dirty="0">
-              <a:solidFill>
-                <a:srgbClr val="1F285A"/>
-              </a:solidFill>
-              <a:latin typeface="メイリオ"/>
-              <a:ea typeface="メイリオ"/>
-              <a:cs typeface="メイリオ"/>
-            </a:endParaRPr>
-          </a:p>
-        </p:txBody>
-      </p:sp>
-      <p:sp>
-        <p:nvSpPr>
-          <p:cNvPr id="12" name="Right Arrow 5"/>
-          <p:cNvSpPr/>
-          <p:nvPr/>
-        </p:nvSpPr>
-        <p:spPr>
-          <a:xfrm>
-            <a:off x="3225599" y="4320000"/>
-            <a:ext cx="360000" cy="432000"/>
-          </a:xfrm>
-          <a:prstGeom prst="rightArrow">
-            <a:avLst/>
-          </a:prstGeom>
-          <a:solidFill>
-            <a:srgbClr val="1F285A"/>
-          </a:solidFill>
-          <a:ln>
-            <a:noFill/>
-          </a:ln>
-          <a:effectLst/>
-        </p:spPr>
-        <p:style>
-          <a:lnRef idx="1">
-            <a:schemeClr val="accent1"/>
-          </a:lnRef>
-          <a:fillRef idx="3">
-            <a:schemeClr val="accent1"/>
-          </a:fillRef>
-          <a:effectRef idx="2">
-            <a:schemeClr val="accent1"/>
-          </a:effectRef>
-          <a:fontRef idx="minor">
-            <a:schemeClr val="lt1"/>
-          </a:fontRef>
-        </p:style>
-        <p:txBody>
-          <a:bodyPr rtlCol="0" anchor="ctr"/>
-          <a:lstStyle/>
-          <a:p>
-            <a:pPr algn="ctr"/>
-            <a:endParaRPr>
-              <a:latin typeface="メイリオ"/>
-              <a:ea typeface="メイリオ"/>
-              <a:cs typeface="メイリオ"/>
-            </a:endParaRPr>
-          </a:p>
-        </p:txBody>
-      </p:sp>
-      <p:sp>
-        <p:nvSpPr>
-          <p:cNvPr id="13" name="Rounded Rectangle 12"/>
-          <p:cNvSpPr/>
-          <p:nvPr/>
-        </p:nvSpPr>
-        <p:spPr>
-          <a:xfrm>
-            <a:off x="3621599" y="3600000"/>
-            <a:ext cx="2664000" cy="1872000"/>
-          </a:xfrm>
-          <a:prstGeom prst="roundRect">
-            <a:avLst>
-              <a:gd name="adj" fmla="val 6000"/>
-            </a:avLst>
-          </a:prstGeom>
-          <a:solidFill>
-            <a:srgbClr val="FFFFFF"/>
-          </a:solidFill>
-          <a:ln w="19050">
-            <a:solidFill>
-              <a:srgbClr val="1F285A"/>
-            </a:solidFill>
-          </a:ln>
-          <a:effectLst/>
-        </p:spPr>
-        <p:style>
-          <a:lnRef idx="1">
-            <a:schemeClr val="accent1"/>
-          </a:lnRef>
-          <a:fillRef idx="3">
-            <a:schemeClr val="accent1"/>
-          </a:fillRef>
-          <a:effectRef idx="2">
-            <a:schemeClr val="accent1"/>
-          </a:effectRef>
-          <a:fontRef idx="minor">
-            <a:schemeClr val="lt1"/>
-          </a:fontRef>
-        </p:style>
-        <p:txBody>
-          <a:bodyPr wrap="square" lIns="125999" tIns="90000" rIns="108000" bIns="54000" rtlCol="0" anchor="ctr"/>
-          <a:lstStyle/>
-          <a:p>
-            <a:pPr algn="ctr">
-              <a:lnSpc>
-                <a:spcPct val="130000"/>
-              </a:lnSpc>
-              <a:spcAft>
-                <a:spcPts val="500"/>
-              </a:spcAft>
-            </a:pPr>
-            <a:r>
-              <a:rPr sz="1500" b="1" dirty="0" err="1">
-                <a:solidFill>
-                  <a:srgbClr val="1F285A"/>
-                </a:solidFill>
-                <a:latin typeface="メイリオ"/>
-                <a:ea typeface="メイリオ"/>
-                <a:cs typeface="メイリオ"/>
-              </a:rPr>
-              <a:t>広告費を増やしても、</a:t>
-            </a:r>
-            <a:endParaRPr sz="1250" b="1" dirty="0">
-              <a:solidFill>
-                <a:srgbClr val="1F285A"/>
-              </a:solidFill>
-              <a:latin typeface="メイリオ"/>
-              <a:ea typeface="メイリオ"/>
-              <a:cs typeface="メイリオ"/>
-            </a:endParaRPr>
-          </a:p>
-          <a:p>
-            <a:pPr algn="ctr">
-              <a:lnSpc>
-                <a:spcPct val="130000"/>
-              </a:lnSpc>
-              <a:spcAft>
-                <a:spcPts val="500"/>
-              </a:spcAft>
-            </a:pPr>
-            <a:r>
-              <a:rPr sz="1500" b="1" dirty="0" err="1">
-                <a:solidFill>
-                  <a:srgbClr val="1F285A"/>
-                </a:solidFill>
-                <a:latin typeface="メイリオ"/>
-                <a:ea typeface="メイリオ"/>
-                <a:cs typeface="メイリオ"/>
-              </a:rPr>
-              <a:t>この離脱層は減らない</a:t>
-            </a:r>
-            <a:endParaRPr sz="1250" b="1" dirty="0">
-              <a:solidFill>
-                <a:srgbClr val="1F285A"/>
-              </a:solidFill>
-              <a:latin typeface="メイリオ"/>
-              <a:ea typeface="メイリオ"/>
-              <a:cs typeface="メイリオ"/>
-            </a:endParaRPr>
-          </a:p>
-        </p:txBody>
-      </p:sp>
-      <p:sp>
-        <p:nvSpPr>
-          <p:cNvPr id="14" name="Right Arrow 5"/>
-          <p:cNvSpPr/>
-          <p:nvPr/>
-        </p:nvSpPr>
-        <p:spPr>
-          <a:xfrm>
-            <a:off x="6321600" y="4320000"/>
-            <a:ext cx="360000" cy="432000"/>
-          </a:xfrm>
-          <a:prstGeom prst="rightArrow">
-            <a:avLst/>
-          </a:prstGeom>
-          <a:solidFill>
-            <a:srgbClr val="1F285A"/>
-          </a:solidFill>
-          <a:ln>
-            <a:noFill/>
-          </a:ln>
-          <a:effectLst/>
-        </p:spPr>
-        <p:style>
-          <a:lnRef idx="1">
-            <a:schemeClr val="accent1"/>
-          </a:lnRef>
-          <a:fillRef idx="3">
-            <a:schemeClr val="accent1"/>
-          </a:fillRef>
-          <a:effectRef idx="2">
-            <a:schemeClr val="accent1"/>
-          </a:effectRef>
-          <a:fontRef idx="minor">
-            <a:schemeClr val="lt1"/>
-          </a:fontRef>
-        </p:style>
-        <p:txBody>
-          <a:bodyPr rtlCol="0" anchor="ctr"/>
-          <a:lstStyle/>
-          <a:p>
-            <a:pPr algn="ctr"/>
-            <a:endParaRPr>
-              <a:latin typeface="メイリオ"/>
-              <a:ea typeface="メイリオ"/>
-              <a:cs typeface="メイリオ"/>
-            </a:endParaRPr>
-          </a:p>
-        </p:txBody>
-      </p:sp>
-      <p:sp>
-        <p:nvSpPr>
-          <p:cNvPr id="15" name="Rounded Rectangle 4"/>
-          <p:cNvSpPr/>
-          <p:nvPr/>
-        </p:nvSpPr>
-        <p:spPr>
-          <a:xfrm>
-            <a:off x="6717600" y="3600000"/>
-            <a:ext cx="2664000" cy="1872000"/>
-          </a:xfrm>
-          <a:prstGeom prst="roundRect">
-            <a:avLst>
-              <a:gd name="adj" fmla="val 10000"/>
-            </a:avLst>
-          </a:prstGeom>
-          <a:solidFill>
-            <a:srgbClr val="1F285A"/>
-          </a:solidFill>
-          <a:ln>
-            <a:noFill/>
-          </a:ln>
-          <a:effectLst/>
-        </p:spPr>
-        <p:style>
-          <a:lnRef idx="1">
-            <a:schemeClr val="accent1"/>
-          </a:lnRef>
-          <a:fillRef idx="3">
-            <a:schemeClr val="accent1"/>
-          </a:fillRef>
-          <a:effectRef idx="2">
-            <a:schemeClr val="accent1"/>
-          </a:effectRef>
-          <a:fontRef idx="minor">
-            <a:schemeClr val="lt1"/>
-          </a:fontRef>
-        </p:style>
-        <p:txBody>
-          <a:bodyPr wrap="square" lIns="54000" tIns="18000" rIns="54000" bIns="18000" rtlCol="0" anchor="ctr"/>
-          <a:lstStyle/>
-          <a:p>
-            <a:pPr algn="ctr">
-              <a:lnSpc>
-                <a:spcPct val="120000"/>
-              </a:lnSpc>
-            </a:pPr>
-            <a:r>
-              <a:rPr sz="1500" b="1">
-                <a:solidFill>
-                  <a:srgbClr val="FFFFFF"/>
-                </a:solidFill>
-                <a:latin typeface="メイリオ"/>
-                <a:ea typeface="メイリオ"/>
-                <a:cs typeface="メイリオ"/>
-              </a:rPr>
-              <a:t>関心が一番高い</a:t>
-            </a:r>
-          </a:p>
-          <a:p>
-            <a:pPr algn="ctr">
-              <a:lnSpc>
-                <a:spcPct val="120000"/>
-              </a:lnSpc>
-            </a:pPr>
-            <a:r>
-              <a:rPr sz="1500" b="1">
-                <a:solidFill>
-                  <a:srgbClr val="FFFFFF"/>
-                </a:solidFill>
-                <a:latin typeface="メイリオ"/>
-                <a:ea typeface="メイリオ"/>
-                <a:cs typeface="メイリオ"/>
-              </a:rPr>
-              <a:t>申込み直後に、</a:t>
-            </a:r>
-          </a:p>
-          <a:p>
-            <a:pPr algn="ctr">
-              <a:lnSpc>
-                <a:spcPct val="120000"/>
-              </a:lnSpc>
-            </a:pPr>
-            <a:r>
-              <a:rPr sz="1500" b="1">
-                <a:solidFill>
-                  <a:srgbClr val="FFFFFF"/>
-                </a:solidFill>
-                <a:latin typeface="メイリオ"/>
-                <a:ea typeface="メイリオ"/>
-                <a:cs typeface="メイリオ"/>
-              </a:rPr>
-              <a:t>LINEでつながるのが最適</a:t>
-            </a:r>
-          </a:p>
-          <a:p>
-            <a:pPr algn="ctr">
-              <a:lnSpc>
-                <a:spcPct val="120000"/>
-              </a:lnSpc>
-            </a:pPr>
-            <a:r>
-              <a:rPr sz="1100" b="0">
-                <a:solidFill>
-                  <a:srgbClr val="FFFFFF"/>
-                </a:solidFill>
-                <a:latin typeface="メイリオ"/>
-                <a:ea typeface="メイリオ"/>
-                <a:cs typeface="メイリオ"/>
-              </a:rPr>
-              <a:t>（開封率 約70%／琴平バス）</a:t>
-            </a:r>
-          </a:p>
-        </p:txBody>
-      </p:sp>
-      <p:sp>
-        <p:nvSpPr>
-          <p:cNvPr id="16" name="TextBox 19"/>
+          <p:cNvPr id="6" name="TextBox 19"/>
           <p:cNvSpPr txBox="1"/>
           <p:nvPr/>
         </p:nvSpPr>
         <p:spPr>
           <a:xfrm>
-            <a:off x="525600" y="5580000"/>
-            <a:ext cx="8856000" cy="216000"/>
+            <a:off x="1080000" y="2160000"/>
+            <a:ext cx="7740000" cy="3420000"/>
+          </a:xfrm>
+          <a:prstGeom prst="rect">
+            <a:avLst/>
+          </a:prstGeom>
+          <a:noFill/>
+        </p:spPr>
+        <p:txBody>
+          <a:bodyPr wrap="square" lIns="0" tIns="21600" rIns="0" bIns="21600" anchor="t">
+            <a:spAutoFit/>
+          </a:bodyPr>
+          <a:lstStyle/>
+          <a:p>
+            <a:pPr algn="l">
+              <a:lnSpc>
+                <a:spcPct val="115000"/>
+              </a:lnSpc>
+              <a:spcAft>
+                <a:spcPts val="200"/>
+              </a:spcAft>
+            </a:pPr>
+            <a:r>
+              <a:rPr sz="2000" b="1">
+                <a:solidFill>
+                  <a:srgbClr val="1F285A"/>
+                </a:solidFill>
+                <a:latin typeface="メイリオ"/>
+                <a:ea typeface="メイリオ"/>
+                <a:cs typeface="メイリオ"/>
+              </a:rPr>
+              <a:t>・申込み⇒来店までに一定数が離脱する</a:t>
+            </a:r>
+          </a:p>
+          <a:p>
+            <a:pPr algn="l">
+              <a:lnSpc>
+                <a:spcPct val="115000"/>
+              </a:lnSpc>
+              <a:spcAft>
+                <a:spcPts val="2200"/>
+              </a:spcAft>
+            </a:pPr>
+            <a:r>
+              <a:rPr sz="1400" b="0">
+                <a:solidFill>
+                  <a:srgbClr val="7F7F7F"/>
+                </a:solidFill>
+                <a:latin typeface="メイリオ"/>
+                <a:ea typeface="メイリオ"/>
+                <a:cs typeface="メイリオ"/>
+              </a:rPr>
+              <a:t>　（予約の2〜3割が来店せず／保険見直し本舗）</a:t>
+            </a:r>
+          </a:p>
+          <a:p>
+            <a:pPr algn="l">
+              <a:lnSpc>
+                <a:spcPct val="115000"/>
+              </a:lnSpc>
+              <a:spcAft>
+                <a:spcPts val="2200"/>
+              </a:spcAft>
+            </a:pPr>
+            <a:r>
+              <a:rPr sz="2000" b="1">
+                <a:solidFill>
+                  <a:srgbClr val="1F285A"/>
+                </a:solidFill>
+                <a:latin typeface="メイリオ"/>
+                <a:ea typeface="メイリオ"/>
+                <a:cs typeface="メイリオ"/>
+              </a:rPr>
+              <a:t>・広告費を増やしても、この離脱層は減らない</a:t>
+            </a:r>
+          </a:p>
+          <a:p>
+            <a:pPr algn="l">
+              <a:lnSpc>
+                <a:spcPct val="115000"/>
+              </a:lnSpc>
+              <a:spcAft>
+                <a:spcPts val="200"/>
+              </a:spcAft>
+            </a:pPr>
+            <a:r>
+              <a:rPr sz="2000" b="1">
+                <a:solidFill>
+                  <a:srgbClr val="1F285A"/>
+                </a:solidFill>
+                <a:latin typeface="メイリオ"/>
+                <a:ea typeface="メイリオ"/>
+                <a:cs typeface="メイリオ"/>
+              </a:rPr>
+              <a:t>・関心が一番高い申込み直後に、LINEでつながるのが最適</a:t>
+            </a:r>
+          </a:p>
+          <a:p>
+            <a:pPr algn="l">
+              <a:lnSpc>
+                <a:spcPct val="115000"/>
+              </a:lnSpc>
+              <a:spcAft>
+                <a:spcPts val="0"/>
+              </a:spcAft>
+            </a:pPr>
+            <a:r>
+              <a:rPr sz="1400" b="0">
+                <a:solidFill>
+                  <a:srgbClr val="7F7F7F"/>
+                </a:solidFill>
+                <a:latin typeface="メイリオ"/>
+                <a:ea typeface="メイリオ"/>
+                <a:cs typeface="メイリオ"/>
+              </a:rPr>
+              <a:t>　（開封率 約70%／琴平バス）</a:t>
+            </a:r>
+          </a:p>
+        </p:txBody>
+      </p:sp>
+      <p:sp>
+        <p:nvSpPr>
+          <p:cNvPr id="7" name="TextBox 19"/>
+          <p:cNvSpPr txBox="1"/>
+          <p:nvPr/>
+        </p:nvSpPr>
+        <p:spPr>
+          <a:xfrm>
+            <a:off x="1080000" y="5903999"/>
+            <a:ext cx="7740000" cy="216000"/>
           </a:xfrm>
           <a:prstGeom prst="rect">
             <a:avLst/>
@@ -4828,8 +3954,8 @@
         </p:nvSpPr>
         <p:spPr>
           <a:xfrm>
-            <a:off x="525600" y="1620000"/>
-            <a:ext cx="1890000" cy="1584000"/>
+            <a:off x="1080000" y="1944000"/>
+            <a:ext cx="1638000" cy="1007999"/>
           </a:xfrm>
           <a:prstGeom prst="roundRect">
             <a:avLst>
@@ -4873,7 +3999,7 @@
               </a:spcAft>
             </a:pPr>
             <a:r>
-              <a:rPr sz="1700" b="1" dirty="0" err="1">
+              <a:rPr sz="1500" b="1" dirty="0" err="1">
                 <a:solidFill>
                   <a:srgbClr val="1F285A"/>
                 </a:solidFill>
@@ -4902,8 +4028,8 @@
         </p:nvSpPr>
         <p:spPr>
           <a:xfrm>
-            <a:off x="2451600" y="2196000"/>
-            <a:ext cx="360000" cy="432000"/>
+            <a:off x="2736000" y="2268000"/>
+            <a:ext cx="360000" cy="360000"/>
           </a:xfrm>
           <a:prstGeom prst="rightArrow">
             <a:avLst/>
@@ -4951,8 +4077,8 @@
         </p:nvSpPr>
         <p:spPr>
           <a:xfrm>
-            <a:off x="2847600" y="1620000"/>
-            <a:ext cx="1890000" cy="1584000"/>
+            <a:off x="3114000" y="1944000"/>
+            <a:ext cx="1638000" cy="1007999"/>
           </a:xfrm>
           <a:prstGeom prst="roundRect">
             <a:avLst>
@@ -4991,7 +4117,7 @@
               </a:lnSpc>
             </a:pPr>
             <a:r>
-              <a:rPr sz="1700" b="1">
+              <a:rPr sz="1500" b="1">
                 <a:solidFill>
                   <a:srgbClr val="FFFFFF"/>
                 </a:solidFill>
@@ -4999,7 +4125,25 @@
                 <a:ea typeface="メイリオ"/>
                 <a:cs typeface="メイリオ"/>
               </a:rPr>
-              <a:t>LINEで予約確認</a:t>
+              <a:t>LINEで</a:t>
+            </a:r>
+          </a:p>
+          <a:p>
+            <a:pPr algn="ctr">
+              <a:lnSpc>
+                <a:spcPct val="120000"/>
+              </a:lnSpc>
+            </a:pPr>
+            <a:r>
+              <a:rPr sz="1500" b="1">
+                <a:solidFill>
+                  <a:srgbClr val="FFFFFF"/>
+                </a:solidFill>
+                <a:latin typeface="メイリオ"/>
+                <a:ea typeface="メイリオ"/>
+                <a:cs typeface="メイリオ"/>
+              </a:rPr>
+              <a:t>予約確認</a:t>
             </a:r>
           </a:p>
         </p:txBody>
@@ -5012,8 +4156,8 @@
         </p:nvSpPr>
         <p:spPr>
           <a:xfrm>
-            <a:off x="4773600" y="2196000"/>
-            <a:ext cx="360000" cy="432000"/>
+            <a:off x="4770000" y="2268000"/>
+            <a:ext cx="360000" cy="360000"/>
           </a:xfrm>
           <a:prstGeom prst="rightArrow">
             <a:avLst/>
@@ -5061,8 +4205,8 @@
         </p:nvSpPr>
         <p:spPr>
           <a:xfrm>
-            <a:off x="5169600" y="1620000"/>
-            <a:ext cx="1890000" cy="1584000"/>
+            <a:off x="5148000" y="1944000"/>
+            <a:ext cx="1638000" cy="1007999"/>
           </a:xfrm>
           <a:prstGeom prst="roundRect">
             <a:avLst>
@@ -5101,7 +4245,7 @@
               </a:lnSpc>
             </a:pPr>
             <a:r>
-              <a:rPr sz="1700" b="1">
+              <a:rPr sz="1500" b="1">
                 <a:solidFill>
                   <a:srgbClr val="FFFFFF"/>
                 </a:solidFill>
@@ -5109,7 +4253,25 @@
                 <a:ea typeface="メイリオ"/>
                 <a:cs typeface="メイリオ"/>
               </a:rPr>
-              <a:t>前日にお知らせ</a:t>
+              <a:t>前日に</a:t>
+            </a:r>
+          </a:p>
+          <a:p>
+            <a:pPr algn="ctr">
+              <a:lnSpc>
+                <a:spcPct val="120000"/>
+              </a:lnSpc>
+            </a:pPr>
+            <a:r>
+              <a:rPr sz="1500" b="1">
+                <a:solidFill>
+                  <a:srgbClr val="FFFFFF"/>
+                </a:solidFill>
+                <a:latin typeface="メイリオ"/>
+                <a:ea typeface="メイリオ"/>
+                <a:cs typeface="メイリオ"/>
+              </a:rPr>
+              <a:t>お知らせ</a:t>
             </a:r>
           </a:p>
         </p:txBody>
@@ -5122,8 +4284,8 @@
         </p:nvSpPr>
         <p:spPr>
           <a:xfrm>
-            <a:off x="7095600" y="2196000"/>
-            <a:ext cx="360000" cy="432000"/>
+            <a:off x="6803999" y="2268000"/>
+            <a:ext cx="360000" cy="360000"/>
           </a:xfrm>
           <a:prstGeom prst="rightArrow">
             <a:avLst/>
@@ -5171,8 +4333,8 @@
         </p:nvSpPr>
         <p:spPr>
           <a:xfrm>
-            <a:off x="7491600" y="1620000"/>
-            <a:ext cx="1890000" cy="1584000"/>
+            <a:off x="7182000" y="1944000"/>
+            <a:ext cx="1638000" cy="1007999"/>
           </a:xfrm>
           <a:prstGeom prst="roundRect">
             <a:avLst>
@@ -5216,7 +4378,7 @@
               </a:spcAft>
             </a:pPr>
             <a:r>
-              <a:rPr sz="1700" b="1" dirty="0" err="1">
+              <a:rPr sz="1500" b="1" dirty="0" err="1">
                 <a:solidFill>
                   <a:srgbClr val="1F285A"/>
                 </a:solidFill>
@@ -5239,257 +4401,100 @@
       </p:sp>
       <p:sp>
         <p:nvSpPr>
-          <p:cNvPr id="13" name="Rounded Rectangle 4"/>
-          <p:cNvSpPr/>
-          <p:nvPr/>
-        </p:nvSpPr>
-        <p:spPr>
-          <a:xfrm>
-            <a:off x="525600" y="3348000"/>
-            <a:ext cx="8856000" cy="648000"/>
-          </a:xfrm>
-          <a:prstGeom prst="roundRect">
-            <a:avLst>
-              <a:gd name="adj" fmla="val 10000"/>
-            </a:avLst>
-          </a:prstGeom>
-          <a:solidFill>
-            <a:srgbClr val="333333"/>
-          </a:solidFill>
-          <a:ln>
-            <a:noFill/>
-          </a:ln>
-          <a:effectLst/>
-        </p:spPr>
-        <p:style>
-          <a:lnRef idx="1">
-            <a:schemeClr val="accent1"/>
-          </a:lnRef>
-          <a:fillRef idx="3">
-            <a:schemeClr val="accent1"/>
-          </a:fillRef>
-          <a:effectRef idx="2">
-            <a:schemeClr val="accent1"/>
-          </a:effectRef>
-          <a:fontRef idx="minor">
-            <a:schemeClr val="lt1"/>
-          </a:fontRef>
-        </p:style>
-        <p:txBody>
-          <a:bodyPr wrap="square" lIns="54000" tIns="18000" rIns="54000" bIns="18000" rtlCol="0" anchor="ctr"/>
-          <a:lstStyle/>
-          <a:p>
-            <a:pPr algn="ctr">
-              <a:lnSpc>
-                <a:spcPct val="120000"/>
-              </a:lnSpc>
-            </a:pPr>
-            <a:r>
-              <a:rPr sz="1900" b="1">
-                <a:solidFill>
-                  <a:srgbClr val="FFFFFF"/>
-                </a:solidFill>
-                <a:latin typeface="メイリオ"/>
-                <a:ea typeface="メイリオ"/>
-                <a:cs typeface="メイリオ"/>
-              </a:rPr>
-              <a:t>無断キャンセルを防ぎ、来店につなげる</a:t>
-            </a:r>
-          </a:p>
-        </p:txBody>
-      </p:sp>
-      <p:sp>
-        <p:nvSpPr>
-          <p:cNvPr id="14" name="Rounded Rectangle 4"/>
-          <p:cNvSpPr/>
-          <p:nvPr/>
-        </p:nvSpPr>
-        <p:spPr>
-          <a:xfrm>
-            <a:off x="525600" y="4140000"/>
-            <a:ext cx="4392000" cy="1655999"/>
-          </a:xfrm>
-          <a:prstGeom prst="roundRect">
-            <a:avLst>
-              <a:gd name="adj" fmla="val 10000"/>
-            </a:avLst>
-          </a:prstGeom>
-          <a:solidFill>
-            <a:srgbClr val="1F285A"/>
-          </a:solidFill>
-          <a:ln>
-            <a:noFill/>
-          </a:ln>
-          <a:effectLst/>
-        </p:spPr>
-        <p:style>
-          <a:lnRef idx="1">
-            <a:schemeClr val="accent1"/>
-          </a:lnRef>
-          <a:fillRef idx="3">
-            <a:schemeClr val="accent1"/>
-          </a:fillRef>
-          <a:effectRef idx="2">
-            <a:schemeClr val="accent1"/>
-          </a:effectRef>
-          <a:fontRef idx="minor">
-            <a:schemeClr val="lt1"/>
-          </a:fontRef>
-        </p:style>
-        <p:txBody>
-          <a:bodyPr wrap="square" lIns="54000" tIns="18000" rIns="54000" bIns="18000" rtlCol="0" anchor="ctr"/>
-          <a:lstStyle/>
-          <a:p>
-            <a:pPr algn="ctr">
-              <a:lnSpc>
-                <a:spcPct val="120000"/>
-              </a:lnSpc>
-            </a:pPr>
-            <a:r>
-              <a:rPr sz="1500" b="0">
-                <a:solidFill>
-                  <a:srgbClr val="FFFFFF"/>
-                </a:solidFill>
-                <a:latin typeface="メイリオ"/>
-                <a:ea typeface="メイリオ"/>
-                <a:cs typeface="メイリオ"/>
-              </a:rPr>
-              <a:t>美容クリニック（弊社）</a:t>
-            </a:r>
-          </a:p>
-          <a:p>
-            <a:pPr algn="ctr">
-              <a:lnSpc>
-                <a:spcPct val="120000"/>
-              </a:lnSpc>
-            </a:pPr>
-            <a:r>
-              <a:rPr sz="2100" b="1">
-                <a:solidFill>
-                  <a:srgbClr val="FFFFFF"/>
-                </a:solidFill>
-                <a:latin typeface="メイリオ"/>
-                <a:ea typeface="メイリオ"/>
-                <a:cs typeface="メイリオ"/>
-              </a:rPr>
-              <a:t>来院率 40〜50%改善</a:t>
-            </a:r>
-          </a:p>
-        </p:txBody>
-      </p:sp>
-      <p:sp>
-        <p:nvSpPr>
-          <p:cNvPr id="15" name="Rounded Rectangle 12"/>
-          <p:cNvSpPr/>
-          <p:nvPr/>
-        </p:nvSpPr>
-        <p:spPr>
-          <a:xfrm>
-            <a:off x="4989600" y="4140000"/>
-            <a:ext cx="4392000" cy="1655999"/>
-          </a:xfrm>
-          <a:prstGeom prst="roundRect">
-            <a:avLst>
-              <a:gd name="adj" fmla="val 6000"/>
-            </a:avLst>
-          </a:prstGeom>
-          <a:solidFill>
-            <a:srgbClr val="FFFFFF"/>
-          </a:solidFill>
-          <a:ln w="19050">
-            <a:solidFill>
-              <a:srgbClr val="1F285A"/>
-            </a:solidFill>
-          </a:ln>
-          <a:effectLst/>
-        </p:spPr>
-        <p:style>
-          <a:lnRef idx="1">
-            <a:schemeClr val="accent1"/>
-          </a:lnRef>
-          <a:fillRef idx="3">
-            <a:schemeClr val="accent1"/>
-          </a:fillRef>
-          <a:effectRef idx="2">
-            <a:schemeClr val="accent1"/>
-          </a:effectRef>
-          <a:fontRef idx="minor">
-            <a:schemeClr val="lt1"/>
-          </a:fontRef>
-        </p:style>
-        <p:txBody>
-          <a:bodyPr wrap="square" lIns="125999" tIns="90000" rIns="108000" bIns="54000" rtlCol="0" anchor="ctr"/>
-          <a:lstStyle/>
-          <a:p>
-            <a:pPr algn="ctr">
-              <a:lnSpc>
-                <a:spcPct val="130000"/>
-              </a:lnSpc>
-              <a:spcAft>
-                <a:spcPts val="500"/>
-              </a:spcAft>
-            </a:pPr>
-            <a:r>
-              <a:rPr sz="1500" b="0" dirty="0" err="1">
-                <a:solidFill>
-                  <a:srgbClr val="1F285A"/>
-                </a:solidFill>
-                <a:latin typeface="メイリオ"/>
-                <a:ea typeface="メイリオ"/>
-                <a:cs typeface="メイリオ"/>
-              </a:rPr>
-              <a:t>保険見直し本舗</a:t>
-            </a:r>
-            <a:endParaRPr sz="1250" b="1" dirty="0">
-              <a:solidFill>
-                <a:srgbClr val="1F285A"/>
-              </a:solidFill>
-              <a:latin typeface="メイリオ"/>
-              <a:ea typeface="メイリオ"/>
-              <a:cs typeface="メイリオ"/>
-            </a:endParaRPr>
-          </a:p>
-          <a:p>
-            <a:pPr algn="ctr">
-              <a:lnSpc>
-                <a:spcPct val="130000"/>
-              </a:lnSpc>
-              <a:spcAft>
-                <a:spcPts val="500"/>
-              </a:spcAft>
-            </a:pPr>
-            <a:r>
-              <a:rPr sz="2100" b="1" dirty="0" err="1">
-                <a:solidFill>
-                  <a:srgbClr val="1F285A"/>
-                </a:solidFill>
-                <a:latin typeface="メイリオ"/>
-                <a:ea typeface="メイリオ"/>
-                <a:cs typeface="メイリオ"/>
-              </a:rPr>
-              <a:t>予約100件あたり 面談＋5件</a:t>
-            </a:r>
-            <a:endParaRPr sz="1250" b="1" dirty="0">
-              <a:solidFill>
-                <a:srgbClr val="1F285A"/>
-              </a:solidFill>
-              <a:latin typeface="メイリオ"/>
-              <a:ea typeface="メイリオ"/>
-              <a:cs typeface="メイリオ"/>
-            </a:endParaRPr>
-          </a:p>
-        </p:txBody>
-      </p:sp>
-      <p:sp>
-        <p:nvSpPr>
-          <p:cNvPr id="16" name="TextBox 19"/>
+          <p:cNvPr id="13" name="TextBox 19"/>
           <p:cNvSpPr txBox="1"/>
           <p:nvPr/>
         </p:nvSpPr>
         <p:spPr>
           <a:xfrm>
-            <a:off x="525600" y="5903999"/>
-            <a:ext cx="8856000" cy="216000"/>
+            <a:off x="1080000" y="3564000"/>
+            <a:ext cx="7740000" cy="2520000"/>
+          </a:xfrm>
+          <a:prstGeom prst="rect">
+            <a:avLst/>
+          </a:prstGeom>
+          <a:noFill/>
+        </p:spPr>
+        <p:txBody>
+          <a:bodyPr wrap="square" lIns="0" tIns="21600" rIns="0" bIns="21600" anchor="t">
+            <a:spAutoFit/>
+          </a:bodyPr>
+          <a:lstStyle/>
+          <a:p>
+            <a:pPr algn="l">
+              <a:lnSpc>
+                <a:spcPct val="115000"/>
+              </a:lnSpc>
+              <a:spcAft>
+                <a:spcPts val="1800"/>
+              </a:spcAft>
+            </a:pPr>
+            <a:r>
+              <a:rPr sz="2000" b="0">
+                <a:solidFill>
+                  <a:srgbClr val="333333"/>
+                </a:solidFill>
+                <a:latin typeface="メイリオ"/>
+                <a:ea typeface="メイリオ"/>
+                <a:cs typeface="メイリオ"/>
+              </a:rPr>
+              <a:t>・無断キャンセルを防ぎ、来店につなげる</a:t>
+            </a:r>
+          </a:p>
+          <a:p>
+            <a:pPr algn="l">
+              <a:lnSpc>
+                <a:spcPct val="115000"/>
+              </a:lnSpc>
+              <a:spcAft>
+                <a:spcPts val="1400"/>
+              </a:spcAft>
+            </a:pPr>
+            <a:r>
+              <a:rPr sz="2000" b="1">
+                <a:solidFill>
+                  <a:srgbClr val="1F285A"/>
+                </a:solidFill>
+                <a:latin typeface="メイリオ"/>
+                <a:ea typeface="メイリオ"/>
+                <a:cs typeface="メイリオ"/>
+              </a:rPr>
+              <a:t>・実績：美容クリニック（弊社）　来院率 40〜50%改善</a:t>
+            </a:r>
+          </a:p>
+          <a:p>
+            <a:pPr algn="l">
+              <a:lnSpc>
+                <a:spcPct val="115000"/>
+              </a:lnSpc>
+              <a:spcAft>
+                <a:spcPts val="0"/>
+              </a:spcAft>
+            </a:pPr>
+            <a:r>
+              <a:rPr sz="2000" b="1">
+                <a:solidFill>
+                  <a:srgbClr val="1F285A"/>
+                </a:solidFill>
+                <a:latin typeface="メイリオ"/>
+                <a:ea typeface="メイリオ"/>
+                <a:cs typeface="メイリオ"/>
+              </a:rPr>
+              <a:t>・実績：保険見直し本舗　予約100件あたり 面談＋5件</a:t>
+            </a:r>
+          </a:p>
+        </p:txBody>
+      </p:sp>
+      <p:sp>
+        <p:nvSpPr>
+          <p:cNvPr id="14" name="TextBox 19"/>
+          <p:cNvSpPr txBox="1"/>
+          <p:nvPr/>
+        </p:nvSpPr>
+        <p:spPr>
+          <a:xfrm>
+            <a:off x="1080000" y="5903999"/>
+            <a:ext cx="7740000" cy="216000"/>
           </a:xfrm>
           <a:prstGeom prst="rect">
             <a:avLst/>
@@ -5680,8 +4685,8 @@
         </p:nvSpPr>
         <p:spPr>
           <a:xfrm>
-            <a:off x="525600" y="1620000"/>
-            <a:ext cx="1890000" cy="1584000"/>
+            <a:off x="1080000" y="1944000"/>
+            <a:ext cx="1638000" cy="1007999"/>
           </a:xfrm>
           <a:prstGeom prst="roundRect">
             <a:avLst>
@@ -5725,7 +4730,7 @@
               </a:spcAft>
             </a:pPr>
             <a:r>
-              <a:rPr sz="1700" b="1" dirty="0" err="1">
+              <a:rPr sz="1500" b="1" dirty="0" err="1">
                 <a:solidFill>
                   <a:srgbClr val="1F285A"/>
                 </a:solidFill>
@@ -5754,8 +4759,8 @@
         </p:nvSpPr>
         <p:spPr>
           <a:xfrm>
-            <a:off x="2451600" y="2196000"/>
-            <a:ext cx="360000" cy="432000"/>
+            <a:off x="2736000" y="2268000"/>
+            <a:ext cx="360000" cy="360000"/>
           </a:xfrm>
           <a:prstGeom prst="rightArrow">
             <a:avLst/>
@@ -5803,8 +4808,8 @@
         </p:nvSpPr>
         <p:spPr>
           <a:xfrm>
-            <a:off x="2847600" y="1620000"/>
-            <a:ext cx="1890000" cy="1584000"/>
+            <a:off x="3114000" y="1944000"/>
+            <a:ext cx="1638000" cy="1007999"/>
           </a:xfrm>
           <a:prstGeom prst="roundRect">
             <a:avLst>
@@ -5843,7 +4848,7 @@
               </a:lnSpc>
             </a:pPr>
             <a:r>
-              <a:rPr sz="1700" b="1">
+              <a:rPr sz="1500" b="1">
                 <a:solidFill>
                   <a:srgbClr val="FFFFFF"/>
                 </a:solidFill>
@@ -5864,8 +4869,8 @@
         </p:nvSpPr>
         <p:spPr>
           <a:xfrm>
-            <a:off x="4773600" y="2196000"/>
-            <a:ext cx="360000" cy="432000"/>
+            <a:off x="4770000" y="2268000"/>
+            <a:ext cx="360000" cy="360000"/>
           </a:xfrm>
           <a:prstGeom prst="rightArrow">
             <a:avLst/>
@@ -5913,8 +4918,8 @@
         </p:nvSpPr>
         <p:spPr>
           <a:xfrm>
-            <a:off x="5169600" y="1620000"/>
-            <a:ext cx="1890000" cy="1584000"/>
+            <a:off x="5148000" y="1944000"/>
+            <a:ext cx="1638000" cy="1007999"/>
           </a:xfrm>
           <a:prstGeom prst="roundRect">
             <a:avLst>
@@ -5953,7 +4958,7 @@
               </a:lnSpc>
             </a:pPr>
             <a:r>
-              <a:rPr sz="1700" b="1">
+              <a:rPr sz="1500" b="1">
                 <a:solidFill>
                   <a:srgbClr val="FFFFFF"/>
                 </a:solidFill>
@@ -5971,7 +4976,7 @@
               </a:lnSpc>
             </a:pPr>
             <a:r>
-              <a:rPr sz="1700" b="1">
+              <a:rPr sz="1500" b="1">
                 <a:solidFill>
                   <a:srgbClr val="FFFFFF"/>
                 </a:solidFill>
@@ -5992,8 +4997,8 @@
         </p:nvSpPr>
         <p:spPr>
           <a:xfrm>
-            <a:off x="7095600" y="2196000"/>
-            <a:ext cx="360000" cy="432000"/>
+            <a:off x="6803999" y="2268000"/>
+            <a:ext cx="360000" cy="360000"/>
           </a:xfrm>
           <a:prstGeom prst="rightArrow">
             <a:avLst/>
@@ -6041,8 +5046,8 @@
         </p:nvSpPr>
         <p:spPr>
           <a:xfrm>
-            <a:off x="7491600" y="1620000"/>
-            <a:ext cx="1890000" cy="1584000"/>
+            <a:off x="7182000" y="1944000"/>
+            <a:ext cx="1638000" cy="1007999"/>
           </a:xfrm>
           <a:prstGeom prst="roundRect">
             <a:avLst>
@@ -6086,7 +5091,7 @@
               </a:spcAft>
             </a:pPr>
             <a:r>
-              <a:rPr sz="1700" b="1" dirty="0" err="1">
+              <a:rPr sz="1500" b="1" dirty="0" err="1">
                 <a:solidFill>
                   <a:srgbClr val="1F285A"/>
                 </a:solidFill>
@@ -6115,7 +5120,7 @@
               </a:spcAft>
             </a:pPr>
             <a:r>
-              <a:rPr sz="1700" b="1" dirty="0" err="1">
+              <a:rPr sz="1500" b="1" dirty="0" err="1">
                 <a:solidFill>
                   <a:srgbClr val="1F285A"/>
                 </a:solidFill>
@@ -6138,281 +5143,100 @@
       </p:sp>
       <p:sp>
         <p:nvSpPr>
-          <p:cNvPr id="13" name="Rounded Rectangle 4"/>
-          <p:cNvSpPr/>
-          <p:nvPr/>
-        </p:nvSpPr>
-        <p:spPr>
-          <a:xfrm>
-            <a:off x="525600" y="3348000"/>
-            <a:ext cx="8856000" cy="648000"/>
-          </a:xfrm>
-          <a:prstGeom prst="roundRect">
-            <a:avLst>
-              <a:gd name="adj" fmla="val 10000"/>
-            </a:avLst>
-          </a:prstGeom>
-          <a:solidFill>
-            <a:srgbClr val="333333"/>
-          </a:solidFill>
-          <a:ln>
-            <a:noFill/>
-          </a:ln>
-          <a:effectLst/>
-        </p:spPr>
-        <p:style>
-          <a:lnRef idx="1">
-            <a:schemeClr val="accent1"/>
-          </a:lnRef>
-          <a:fillRef idx="3">
-            <a:schemeClr val="accent1"/>
-          </a:fillRef>
-          <a:effectRef idx="2">
-            <a:schemeClr val="accent1"/>
-          </a:effectRef>
-          <a:fontRef idx="minor">
-            <a:schemeClr val="lt1"/>
-          </a:fontRef>
-        </p:style>
-        <p:txBody>
-          <a:bodyPr wrap="square" lIns="54000" tIns="18000" rIns="54000" bIns="18000" rtlCol="0" anchor="ctr"/>
-          <a:lstStyle/>
-          <a:p>
-            <a:pPr algn="ctr">
-              <a:lnSpc>
-                <a:spcPct val="120000"/>
-              </a:lnSpc>
-            </a:pPr>
-            <a:r>
-              <a:rPr sz="1900" b="1">
-                <a:solidFill>
-                  <a:srgbClr val="FFFFFF"/>
-                </a:solidFill>
-                <a:latin typeface="メイリオ"/>
-                <a:ea typeface="メイリオ"/>
-                <a:cs typeface="メイリオ"/>
-              </a:rPr>
-              <a:t>資料請求のみで終わらせず、予約・商談につなげる</a:t>
-            </a:r>
-          </a:p>
-        </p:txBody>
-      </p:sp>
-      <p:sp>
-        <p:nvSpPr>
-          <p:cNvPr id="14" name="Rounded Rectangle 12"/>
-          <p:cNvSpPr/>
-          <p:nvPr/>
-        </p:nvSpPr>
-        <p:spPr>
-          <a:xfrm>
-            <a:off x="525600" y="4140000"/>
-            <a:ext cx="4392000" cy="1655999"/>
-          </a:xfrm>
-          <a:prstGeom prst="roundRect">
-            <a:avLst>
-              <a:gd name="adj" fmla="val 6000"/>
-            </a:avLst>
-          </a:prstGeom>
-          <a:solidFill>
-            <a:srgbClr val="FFFFFF"/>
-          </a:solidFill>
-          <a:ln w="19050">
-            <a:solidFill>
-              <a:srgbClr val="1F285A"/>
-            </a:solidFill>
-          </a:ln>
-          <a:effectLst/>
-        </p:spPr>
-        <p:style>
-          <a:lnRef idx="1">
-            <a:schemeClr val="accent1"/>
-          </a:lnRef>
-          <a:fillRef idx="3">
-            <a:schemeClr val="accent1"/>
-          </a:fillRef>
-          <a:effectRef idx="2">
-            <a:schemeClr val="accent1"/>
-          </a:effectRef>
-          <a:fontRef idx="minor">
-            <a:schemeClr val="lt1"/>
-          </a:fontRef>
-        </p:style>
-        <p:txBody>
-          <a:bodyPr wrap="square" lIns="125999" tIns="90000" rIns="108000" bIns="54000" rtlCol="0" anchor="ctr"/>
-          <a:lstStyle/>
-          <a:p>
-            <a:pPr algn="ctr">
-              <a:lnSpc>
-                <a:spcPct val="130000"/>
-              </a:lnSpc>
-              <a:spcAft>
-                <a:spcPts val="500"/>
-              </a:spcAft>
-            </a:pPr>
-            <a:r>
-              <a:rPr sz="1500" b="0" dirty="0" err="1">
-                <a:solidFill>
-                  <a:srgbClr val="1F285A"/>
-                </a:solidFill>
-                <a:latin typeface="メイリオ"/>
-                <a:ea typeface="メイリオ"/>
-                <a:cs typeface="メイリオ"/>
-              </a:rPr>
-              <a:t>皮膚科クリニック</a:t>
-            </a:r>
-            <a:endParaRPr sz="1250" b="1" dirty="0">
-              <a:solidFill>
-                <a:srgbClr val="1F285A"/>
-              </a:solidFill>
-              <a:latin typeface="メイリオ"/>
-              <a:ea typeface="メイリオ"/>
-              <a:cs typeface="メイリオ"/>
-            </a:endParaRPr>
-          </a:p>
-          <a:p>
-            <a:pPr algn="ctr">
-              <a:lnSpc>
-                <a:spcPct val="130000"/>
-              </a:lnSpc>
-              <a:spcAft>
-                <a:spcPts val="500"/>
-              </a:spcAft>
-            </a:pPr>
-            <a:r>
-              <a:rPr sz="2600" b="1" dirty="0" err="1">
-                <a:solidFill>
-                  <a:srgbClr val="1F285A"/>
-                </a:solidFill>
-                <a:latin typeface="メイリオ"/>
-                <a:ea typeface="メイリオ"/>
-                <a:cs typeface="メイリオ"/>
-              </a:rPr>
-              <a:t>予約数 約1.2倍</a:t>
-            </a:r>
-            <a:endParaRPr sz="1250" b="1" dirty="0">
-              <a:solidFill>
-                <a:srgbClr val="1F285A"/>
-              </a:solidFill>
-              <a:latin typeface="メイリオ"/>
-              <a:ea typeface="メイリオ"/>
-              <a:cs typeface="メイリオ"/>
-            </a:endParaRPr>
-          </a:p>
-        </p:txBody>
-      </p:sp>
-      <p:sp>
-        <p:nvSpPr>
-          <p:cNvPr id="15" name="Rounded Rectangle 12"/>
-          <p:cNvSpPr/>
-          <p:nvPr/>
-        </p:nvSpPr>
-        <p:spPr>
-          <a:xfrm>
-            <a:off x="4989600" y="4140000"/>
-            <a:ext cx="4392000" cy="1655999"/>
-          </a:xfrm>
-          <a:prstGeom prst="roundRect">
-            <a:avLst>
-              <a:gd name="adj" fmla="val 6000"/>
-            </a:avLst>
-          </a:prstGeom>
-          <a:solidFill>
-            <a:srgbClr val="FFFFFF"/>
-          </a:solidFill>
-          <a:ln w="19050">
-            <a:solidFill>
-              <a:srgbClr val="1F285A"/>
-            </a:solidFill>
-          </a:ln>
-          <a:effectLst/>
-        </p:spPr>
-        <p:style>
-          <a:lnRef idx="1">
-            <a:schemeClr val="accent1"/>
-          </a:lnRef>
-          <a:fillRef idx="3">
-            <a:schemeClr val="accent1"/>
-          </a:fillRef>
-          <a:effectRef idx="2">
-            <a:schemeClr val="accent1"/>
-          </a:effectRef>
-          <a:fontRef idx="minor">
-            <a:schemeClr val="lt1"/>
-          </a:fontRef>
-        </p:style>
-        <p:txBody>
-          <a:bodyPr wrap="square" lIns="125999" tIns="90000" rIns="108000" bIns="54000" rtlCol="0" anchor="ctr"/>
-          <a:lstStyle/>
-          <a:p>
-            <a:pPr algn="ctr">
-              <a:lnSpc>
-                <a:spcPct val="130000"/>
-              </a:lnSpc>
-              <a:spcAft>
-                <a:spcPts val="500"/>
-              </a:spcAft>
-            </a:pPr>
-            <a:r>
-              <a:rPr sz="1500" b="0" dirty="0" err="1">
-                <a:solidFill>
-                  <a:srgbClr val="1F285A"/>
-                </a:solidFill>
-                <a:latin typeface="メイリオ"/>
-                <a:ea typeface="メイリオ"/>
-                <a:cs typeface="メイリオ"/>
-              </a:rPr>
-              <a:t>就職支援（UZUZ）</a:t>
-            </a:r>
-            <a:endParaRPr sz="1250" b="1" dirty="0">
-              <a:solidFill>
-                <a:srgbClr val="1F285A"/>
-              </a:solidFill>
-              <a:latin typeface="メイリオ"/>
-              <a:ea typeface="メイリオ"/>
-              <a:cs typeface="メイリオ"/>
-            </a:endParaRPr>
-          </a:p>
-          <a:p>
-            <a:pPr algn="ctr">
-              <a:lnSpc>
-                <a:spcPct val="130000"/>
-              </a:lnSpc>
-              <a:spcAft>
-                <a:spcPts val="500"/>
-              </a:spcAft>
-            </a:pPr>
-            <a:r>
-              <a:rPr sz="2600" b="1" dirty="0" err="1">
-                <a:solidFill>
-                  <a:srgbClr val="1F285A"/>
-                </a:solidFill>
-                <a:latin typeface="メイリオ"/>
-                <a:ea typeface="メイリオ"/>
-                <a:cs typeface="メイリオ"/>
-              </a:rPr>
-              <a:t>面談予約率 55%</a:t>
-            </a:r>
-            <a:endParaRPr sz="1250" b="1" dirty="0">
-              <a:solidFill>
-                <a:srgbClr val="1F285A"/>
-              </a:solidFill>
-              <a:latin typeface="メイリオ"/>
-              <a:ea typeface="メイリオ"/>
-              <a:cs typeface="メイリオ"/>
-            </a:endParaRPr>
-          </a:p>
-        </p:txBody>
-      </p:sp>
-      <p:sp>
-        <p:nvSpPr>
-          <p:cNvPr id="16" name="TextBox 19"/>
+          <p:cNvPr id="13" name="TextBox 19"/>
           <p:cNvSpPr txBox="1"/>
           <p:nvPr/>
         </p:nvSpPr>
         <p:spPr>
           <a:xfrm>
-            <a:off x="525600" y="5903999"/>
-            <a:ext cx="8856000" cy="216000"/>
+            <a:off x="1080000" y="3564000"/>
+            <a:ext cx="7740000" cy="2520000"/>
+          </a:xfrm>
+          <a:prstGeom prst="rect">
+            <a:avLst/>
+          </a:prstGeom>
+          <a:noFill/>
+        </p:spPr>
+        <p:txBody>
+          <a:bodyPr wrap="square" lIns="0" tIns="21600" rIns="0" bIns="21600" anchor="t">
+            <a:spAutoFit/>
+          </a:bodyPr>
+          <a:lstStyle/>
+          <a:p>
+            <a:pPr algn="l">
+              <a:lnSpc>
+                <a:spcPct val="115000"/>
+              </a:lnSpc>
+              <a:spcAft>
+                <a:spcPts val="1800"/>
+              </a:spcAft>
+            </a:pPr>
+            <a:r>
+              <a:rPr sz="2000" b="0">
+                <a:solidFill>
+                  <a:srgbClr val="333333"/>
+                </a:solidFill>
+                <a:latin typeface="メイリオ"/>
+                <a:ea typeface="メイリオ"/>
+                <a:cs typeface="メイリオ"/>
+              </a:rPr>
+              <a:t>・資料請求のみで終わらせず、予約・商談につなげる</a:t>
+            </a:r>
+          </a:p>
+          <a:p>
+            <a:pPr algn="l">
+              <a:lnSpc>
+                <a:spcPct val="115000"/>
+              </a:lnSpc>
+              <a:spcAft>
+                <a:spcPts val="1400"/>
+              </a:spcAft>
+            </a:pPr>
+            <a:r>
+              <a:rPr sz="2000" b="1">
+                <a:solidFill>
+                  <a:srgbClr val="1F285A"/>
+                </a:solidFill>
+                <a:latin typeface="メイリオ"/>
+                <a:ea typeface="メイリオ"/>
+                <a:cs typeface="メイリオ"/>
+              </a:rPr>
+              <a:t>・実績：皮膚科クリニック　予約数 約1.2倍</a:t>
+            </a:r>
+          </a:p>
+          <a:p>
+            <a:pPr algn="l">
+              <a:lnSpc>
+                <a:spcPct val="115000"/>
+              </a:lnSpc>
+              <a:spcAft>
+                <a:spcPts val="0"/>
+              </a:spcAft>
+            </a:pPr>
+            <a:r>
+              <a:rPr sz="2000" b="1">
+                <a:solidFill>
+                  <a:srgbClr val="1F285A"/>
+                </a:solidFill>
+                <a:latin typeface="メイリオ"/>
+                <a:ea typeface="メイリオ"/>
+                <a:cs typeface="メイリオ"/>
+              </a:rPr>
+              <a:t>・実績：就職支援（UZUZ）　面談予約率 55%</a:t>
+            </a:r>
+          </a:p>
+        </p:txBody>
+      </p:sp>
+      <p:sp>
+        <p:nvSpPr>
+          <p:cNvPr id="14" name="TextBox 19"/>
+          <p:cNvSpPr txBox="1"/>
+          <p:nvPr/>
+        </p:nvSpPr>
+        <p:spPr>
+          <a:xfrm>
+            <a:off x="1080000" y="5903999"/>
+            <a:ext cx="7740000" cy="216000"/>
           </a:xfrm>
           <a:prstGeom prst="rect">
             <a:avLst/>

--- a/20261002_サンクスLINEのご提案.pptx
+++ b/20261002_サンクスLINEのご提案.pptx
@@ -3004,395 +3004,14 @@
       </p:cxnSp>
       <p:sp>
         <p:nvSpPr>
-          <p:cNvPr id="6" name="Rounded Rectangle 12"/>
-          <p:cNvSpPr/>
-          <p:nvPr/>
-        </p:nvSpPr>
-        <p:spPr>
-          <a:xfrm>
-            <a:off x="1080000" y="1944000"/>
-            <a:ext cx="1872000" cy="1007999"/>
-          </a:xfrm>
-          <a:prstGeom prst="roundRect">
-            <a:avLst>
-              <a:gd name="adj" fmla="val 6000"/>
-            </a:avLst>
-          </a:prstGeom>
-          <a:solidFill>
-            <a:srgbClr val="FFFFFF"/>
-          </a:solidFill>
-          <a:ln w="19050">
-            <a:solidFill>
-              <a:srgbClr val="1F285A"/>
-            </a:solidFill>
-          </a:ln>
-          <a:effectLst/>
-        </p:spPr>
-        <p:style>
-          <a:lnRef idx="1">
-            <a:schemeClr val="accent1"/>
-          </a:lnRef>
-          <a:fillRef idx="3">
-            <a:schemeClr val="accent1"/>
-          </a:fillRef>
-          <a:effectRef idx="2">
-            <a:schemeClr val="accent1"/>
-          </a:effectRef>
-          <a:fontRef idx="minor">
-            <a:schemeClr val="lt1"/>
-          </a:fontRef>
-        </p:style>
-        <p:txBody>
-          <a:bodyPr wrap="square" lIns="125999" tIns="90000" rIns="108000" bIns="54000" rtlCol="0" anchor="ctr"/>
-          <a:lstStyle/>
-          <a:p>
-            <a:pPr algn="ctr">
-              <a:lnSpc>
-                <a:spcPct val="130000"/>
-              </a:lnSpc>
-              <a:spcAft>
-                <a:spcPts val="500"/>
-              </a:spcAft>
-            </a:pPr>
-            <a:r>
-              <a:rPr sz="1600" b="1" dirty="0" err="1">
-                <a:solidFill>
-                  <a:srgbClr val="1F285A"/>
-                </a:solidFill>
-                <a:latin typeface="メイリオ"/>
-                <a:ea typeface="メイリオ"/>
-                <a:cs typeface="メイリオ"/>
-              </a:rPr>
-              <a:t>申込み完了画面</a:t>
-            </a:r>
-            <a:endParaRPr sz="1250" b="1" dirty="0">
-              <a:solidFill>
-                <a:srgbClr val="1F285A"/>
-              </a:solidFill>
-              <a:latin typeface="メイリオ"/>
-              <a:ea typeface="メイリオ"/>
-              <a:cs typeface="メイリオ"/>
-            </a:endParaRPr>
-          </a:p>
-        </p:txBody>
-      </p:sp>
-      <p:sp>
-        <p:nvSpPr>
-          <p:cNvPr id="7" name="Right Arrow 5"/>
-          <p:cNvSpPr/>
-          <p:nvPr/>
-        </p:nvSpPr>
-        <p:spPr>
-          <a:xfrm>
-            <a:off x="2970000" y="2268000"/>
-            <a:ext cx="360000" cy="360000"/>
-          </a:xfrm>
-          <a:prstGeom prst="rightArrow">
-            <a:avLst/>
-          </a:prstGeom>
-          <a:solidFill>
-            <a:srgbClr val="1F285A"/>
-          </a:solidFill>
-          <a:ln>
-            <a:noFill/>
-          </a:ln>
-          <a:effectLst/>
-        </p:spPr>
-        <p:style>
-          <a:lnRef idx="1">
-            <a:schemeClr val="accent1"/>
-          </a:lnRef>
-          <a:fillRef idx="3">
-            <a:schemeClr val="accent1"/>
-          </a:fillRef>
-          <a:effectRef idx="2">
-            <a:schemeClr val="accent1"/>
-          </a:effectRef>
-          <a:fontRef idx="minor">
-            <a:schemeClr val="lt1"/>
-          </a:fontRef>
-        </p:style>
-        <p:txBody>
-          <a:bodyPr rtlCol="0" anchor="ctr"/>
-          <a:lstStyle/>
-          <a:p>
-            <a:pPr algn="ctr"/>
-            <a:endParaRPr>
-              <a:latin typeface="メイリオ"/>
-              <a:ea typeface="メイリオ"/>
-              <a:cs typeface="メイリオ"/>
-            </a:endParaRPr>
-          </a:p>
-        </p:txBody>
-      </p:sp>
-      <p:sp>
-        <p:nvSpPr>
-          <p:cNvPr id="8" name="Rounded Rectangle 4"/>
-          <p:cNvSpPr/>
-          <p:nvPr/>
-        </p:nvSpPr>
-        <p:spPr>
-          <a:xfrm>
-            <a:off x="3384000" y="1944000"/>
-            <a:ext cx="1584000" cy="1007999"/>
-          </a:xfrm>
-          <a:prstGeom prst="roundRect">
-            <a:avLst>
-              <a:gd name="adj" fmla="val 10000"/>
-            </a:avLst>
-          </a:prstGeom>
-          <a:solidFill>
-            <a:srgbClr val="1F285A"/>
-          </a:solidFill>
-          <a:ln>
-            <a:noFill/>
-          </a:ln>
-          <a:effectLst/>
-        </p:spPr>
-        <p:style>
-          <a:lnRef idx="1">
-            <a:schemeClr val="accent1"/>
-          </a:lnRef>
-          <a:fillRef idx="3">
-            <a:schemeClr val="accent1"/>
-          </a:fillRef>
-          <a:effectRef idx="2">
-            <a:schemeClr val="accent1"/>
-          </a:effectRef>
-          <a:fontRef idx="minor">
-            <a:schemeClr val="lt1"/>
-          </a:fontRef>
-        </p:style>
-        <p:txBody>
-          <a:bodyPr wrap="square" lIns="54000" tIns="18000" rIns="54000" bIns="18000" rtlCol="0" anchor="ctr"/>
-          <a:lstStyle/>
-          <a:p>
-            <a:pPr algn="ctr">
-              <a:lnSpc>
-                <a:spcPct val="120000"/>
-              </a:lnSpc>
-            </a:pPr>
-            <a:r>
-              <a:rPr sz="1600" b="1">
-                <a:solidFill>
-                  <a:srgbClr val="FFFFFF"/>
-                </a:solidFill>
-                <a:latin typeface="メイリオ"/>
-                <a:ea typeface="メイリオ"/>
-                <a:cs typeface="メイリオ"/>
-              </a:rPr>
-              <a:t>LINEへ移行</a:t>
-            </a:r>
-          </a:p>
-        </p:txBody>
-      </p:sp>
-      <p:sp>
-        <p:nvSpPr>
-          <p:cNvPr id="9" name="Right Arrow 5"/>
-          <p:cNvSpPr/>
-          <p:nvPr/>
-        </p:nvSpPr>
-        <p:spPr>
-          <a:xfrm>
-            <a:off x="4986000" y="2268000"/>
-            <a:ext cx="360000" cy="360000"/>
-          </a:xfrm>
-          <a:prstGeom prst="rightArrow">
-            <a:avLst/>
-          </a:prstGeom>
-          <a:solidFill>
-            <a:srgbClr val="1F285A"/>
-          </a:solidFill>
-          <a:ln>
-            <a:noFill/>
-          </a:ln>
-          <a:effectLst/>
-        </p:spPr>
-        <p:style>
-          <a:lnRef idx="1">
-            <a:schemeClr val="accent1"/>
-          </a:lnRef>
-          <a:fillRef idx="3">
-            <a:schemeClr val="accent1"/>
-          </a:fillRef>
-          <a:effectRef idx="2">
-            <a:schemeClr val="accent1"/>
-          </a:effectRef>
-          <a:fontRef idx="minor">
-            <a:schemeClr val="lt1"/>
-          </a:fontRef>
-        </p:style>
-        <p:txBody>
-          <a:bodyPr rtlCol="0" anchor="ctr"/>
-          <a:lstStyle/>
-          <a:p>
-            <a:pPr algn="ctr"/>
-            <a:endParaRPr>
-              <a:latin typeface="メイリオ"/>
-              <a:ea typeface="メイリオ"/>
-              <a:cs typeface="メイリオ"/>
-            </a:endParaRPr>
-          </a:p>
-        </p:txBody>
-      </p:sp>
-      <p:sp>
-        <p:nvSpPr>
-          <p:cNvPr id="10" name="Rounded Rectangle 12"/>
-          <p:cNvSpPr/>
-          <p:nvPr/>
-        </p:nvSpPr>
-        <p:spPr>
-          <a:xfrm>
-            <a:off x="5400000" y="1944000"/>
-            <a:ext cx="3420000" cy="468000"/>
-          </a:xfrm>
-          <a:prstGeom prst="roundRect">
-            <a:avLst>
-              <a:gd name="adj" fmla="val 6000"/>
-            </a:avLst>
-          </a:prstGeom>
-          <a:solidFill>
-            <a:srgbClr val="FFFFFF"/>
-          </a:solidFill>
-          <a:ln w="19050">
-            <a:solidFill>
-              <a:srgbClr val="1F285A"/>
-            </a:solidFill>
-          </a:ln>
-          <a:effectLst/>
-        </p:spPr>
-        <p:style>
-          <a:lnRef idx="1">
-            <a:schemeClr val="accent1"/>
-          </a:lnRef>
-          <a:fillRef idx="3">
-            <a:schemeClr val="accent1"/>
-          </a:fillRef>
-          <a:effectRef idx="2">
-            <a:schemeClr val="accent1"/>
-          </a:effectRef>
-          <a:fontRef idx="minor">
-            <a:schemeClr val="lt1"/>
-          </a:fontRef>
-        </p:style>
-        <p:txBody>
-          <a:bodyPr wrap="square" lIns="125999" tIns="90000" rIns="108000" bIns="54000" rtlCol="0" anchor="ctr"/>
-          <a:lstStyle/>
-          <a:p>
-            <a:pPr algn="ctr">
-              <a:lnSpc>
-                <a:spcPct val="130000"/>
-              </a:lnSpc>
-              <a:spcAft>
-                <a:spcPts val="500"/>
-              </a:spcAft>
-            </a:pPr>
-            <a:r>
-              <a:rPr sz="1500" b="1" dirty="0" err="1">
-                <a:solidFill>
-                  <a:srgbClr val="1F285A"/>
-                </a:solidFill>
-                <a:latin typeface="メイリオ"/>
-                <a:ea typeface="メイリオ"/>
-                <a:cs typeface="メイリオ"/>
-              </a:rPr>
-              <a:t>新規 → 友だち追加</a:t>
-            </a:r>
-            <a:endParaRPr sz="1250" b="1" dirty="0">
-              <a:solidFill>
-                <a:srgbClr val="1F285A"/>
-              </a:solidFill>
-              <a:latin typeface="メイリオ"/>
-              <a:ea typeface="メイリオ"/>
-              <a:cs typeface="メイリオ"/>
-            </a:endParaRPr>
-          </a:p>
-        </p:txBody>
-      </p:sp>
-      <p:sp>
-        <p:nvSpPr>
-          <p:cNvPr id="11" name="Rounded Rectangle 12"/>
-          <p:cNvSpPr/>
-          <p:nvPr/>
-        </p:nvSpPr>
-        <p:spPr>
-          <a:xfrm>
-            <a:off x="5400000" y="2484000"/>
-            <a:ext cx="3420000" cy="468000"/>
-          </a:xfrm>
-          <a:prstGeom prst="roundRect">
-            <a:avLst>
-              <a:gd name="adj" fmla="val 6000"/>
-            </a:avLst>
-          </a:prstGeom>
-          <a:solidFill>
-            <a:srgbClr val="FFFFFF"/>
-          </a:solidFill>
-          <a:ln w="19050">
-            <a:solidFill>
-              <a:srgbClr val="1F285A"/>
-            </a:solidFill>
-          </a:ln>
-          <a:effectLst/>
-        </p:spPr>
-        <p:style>
-          <a:lnRef idx="1">
-            <a:schemeClr val="accent1"/>
-          </a:lnRef>
-          <a:fillRef idx="3">
-            <a:schemeClr val="accent1"/>
-          </a:fillRef>
-          <a:effectRef idx="2">
-            <a:schemeClr val="accent1"/>
-          </a:effectRef>
-          <a:fontRef idx="minor">
-            <a:schemeClr val="lt1"/>
-          </a:fontRef>
-        </p:style>
-        <p:txBody>
-          <a:bodyPr wrap="square" lIns="125999" tIns="90000" rIns="108000" bIns="54000" rtlCol="0" anchor="ctr"/>
-          <a:lstStyle/>
-          <a:p>
-            <a:pPr algn="ctr">
-              <a:lnSpc>
-                <a:spcPct val="130000"/>
-              </a:lnSpc>
-              <a:spcAft>
-                <a:spcPts val="500"/>
-              </a:spcAft>
-            </a:pPr>
-            <a:r>
-              <a:rPr sz="1500" b="1" dirty="0" err="1">
-                <a:solidFill>
-                  <a:srgbClr val="1F285A"/>
-                </a:solidFill>
-                <a:latin typeface="メイリオ"/>
-                <a:ea typeface="メイリオ"/>
-                <a:cs typeface="メイリオ"/>
-              </a:rPr>
-              <a:t>既存の友だち → トーク画面</a:t>
-            </a:r>
-            <a:endParaRPr sz="1250" b="1" dirty="0">
-              <a:solidFill>
-                <a:srgbClr val="1F285A"/>
-              </a:solidFill>
-              <a:latin typeface="メイリオ"/>
-              <a:ea typeface="メイリオ"/>
-              <a:cs typeface="メイリオ"/>
-            </a:endParaRPr>
-          </a:p>
-        </p:txBody>
-      </p:sp>
-      <p:sp>
-        <p:nvSpPr>
-          <p:cNvPr id="12" name="TextBox 19"/>
+          <p:cNvPr id="6" name="TextBox 19"/>
           <p:cNvSpPr txBox="1"/>
           <p:nvPr/>
         </p:nvSpPr>
         <p:spPr>
           <a:xfrm>
-            <a:off x="1080000" y="3564000"/>
-            <a:ext cx="7740000" cy="2520000"/>
+            <a:off x="5796000" y="2015999"/>
+            <a:ext cx="3311999" cy="3420000"/>
           </a:xfrm>
           <a:prstGeom prst="rect">
             <a:avLst/>
@@ -3414,7 +3033,7 @@
               </a:spcAft>
             </a:pPr>
             <a:r>
-              <a:rPr sz="2000" b="0">
+              <a:rPr sz="1600" b="0">
                 <a:solidFill>
                   <a:srgbClr val="333333"/>
                 </a:solidFill>
@@ -3422,7 +3041,7 @@
                 <a:ea typeface="メイリオ"/>
                 <a:cs typeface="メイリオ"/>
               </a:rPr>
-              <a:t>・入力内容を引き継ぎ、配信の出し分けに活用</a:t>
+              <a:t>・新規は友だち追加、既存の友だちはトーク画面へ</a:t>
             </a:r>
           </a:p>
           <a:p>
@@ -3435,7 +3054,28 @@
               </a:spcAft>
             </a:pPr>
             <a:r>
-              <a:rPr sz="2000" b="0">
+              <a:rPr sz="1600" b="0">
+                <a:solidFill>
+                  <a:srgbClr val="333333"/>
+                </a:solidFill>
+                <a:latin typeface="メイリオ"/>
+                <a:ea typeface="メイリオ"/>
+                <a:cs typeface="メイリオ"/>
+              </a:rPr>
+              <a:t>・入力内容を引き継ぎ、配信の出し分けに活用</a:t>
+            </a:r>
+          </a:p>
+          <a:p>
+            <a:pPr algn="l">
+              <a:lnSpc>
+                <a:spcPct val="115000"/>
+              </a:lnSpc>
+              <a:spcAft>
+                <a:spcPts val="1400"/>
+              </a:spcAft>
+            </a:pPr>
+            <a:r>
+              <a:rPr sz="1600" b="0">
                 <a:solidFill>
                   <a:srgbClr val="333333"/>
                 </a:solidFill>
@@ -3452,11 +3092,11 @@
                 <a:spcPct val="115000"/>
               </a:lnSpc>
               <a:spcAft>
-                <a:spcPts val="0"/>
+                <a:spcPts val="1400"/>
               </a:spcAft>
             </a:pPr>
             <a:r>
-              <a:rPr sz="2000" b="1">
+              <a:rPr sz="1600" b="1">
                 <a:solidFill>
                   <a:srgbClr val="1F285A"/>
                 </a:solidFill>
@@ -3465,6 +3105,74 @@
                 <a:cs typeface="メイリオ"/>
               </a:rPr>
               <a:t>・費用：初期15万円／月額3万円〜</a:t>
+            </a:r>
+          </a:p>
+        </p:txBody>
+      </p:sp>
+      <p:pic>
+        <p:nvPicPr>
+          <p:cNvPr id="7" name="Picture 12" descr="thanks_line_screen_start.png"/>
+          <p:cNvPicPr>
+            <a:picLocks noChangeAspect="1"/>
+          </p:cNvPicPr>
+          <p:nvPr/>
+        </p:nvPicPr>
+        <p:blipFill>
+          <a:blip r:embed="rId3"/>
+          <a:stretch>
+            <a:fillRect/>
+          </a:stretch>
+        </p:blipFill>
+        <p:spPr>
+          <a:xfrm>
+            <a:off x="864000" y="1872000"/>
+            <a:ext cx="4608000" cy="3815909"/>
+          </a:xfrm>
+          <a:prstGeom prst="rect">
+            <a:avLst/>
+          </a:prstGeom>
+        </p:spPr>
+      </p:pic>
+      <p:sp>
+        <p:nvSpPr>
+          <p:cNvPr id="8" name="TextBox 19"/>
+          <p:cNvSpPr txBox="1"/>
+          <p:nvPr/>
+        </p:nvSpPr>
+        <p:spPr>
+          <a:xfrm>
+            <a:off x="1080000" y="6048000"/>
+            <a:ext cx="7740000" cy="216000"/>
+          </a:xfrm>
+          <a:prstGeom prst="rect">
+            <a:avLst/>
+          </a:prstGeom>
+          <a:noFill/>
+        </p:spPr>
+        <p:txBody>
+          <a:bodyPr wrap="square" lIns="0" tIns="21600" rIns="0" bIns="21600" anchor="t">
+            <a:spAutoFit/>
+          </a:bodyPr>
+          <a:lstStyle/>
+          <a:p>
+            <a:pPr algn="l">
+              <a:lnSpc>
+                <a:spcPct val="115000"/>
+              </a:lnSpc>
+              <a:spcAft>
+                <a:spcPts val="1400"/>
+              </a:spcAft>
+            </a:pPr>
+            <a:r>
+              <a:rPr sz="1000" b="0">
+                <a:solidFill>
+                  <a:srgbClr val="7F7F7F"/>
+                </a:solidFill>
+                <a:latin typeface="メイリオ"/>
+                <a:ea typeface="メイリオ"/>
+                <a:cs typeface="メイリオ"/>
+              </a:rPr>
+              <a:t>※画面はイメージです</a:t>
             </a:r>
           </a:p>
         </p:txBody>

--- a/20261002_サンクスLINEのご提案.pptx
+++ b/20261002_サンクスLINEのご提案.pptx
@@ -12,7 +12,7 @@
     <p:handoutMasterId r:id="rId9"/>
   </p:handoutMasterIdLst>
   <p:sldIdLst>
-    <p:sldId id="2971" r:id="rId3"/>
+    <p:sldId id="3008" r:id="rId7"/>
     <p:sldId id="2972" r:id="rId4"/>
     <p:sldId id="2904" r:id="rId5"/>
     <p:sldId id="3007" r:id="rId6"/>
@@ -616,114 +616,6 @@
 </p:notesMaster>
 </file>
 
-<file path=ppt/notesSlides/notesSlide1.xml><?xml version="1.0" encoding="utf-8"?>
-<p:notes xmlns:a="http://schemas.openxmlformats.org/drawingml/2006/main" xmlns:r="http://schemas.openxmlformats.org/officeDocument/2006/relationships" xmlns:p="http://schemas.openxmlformats.org/presentationml/2006/main">
-  <p:cSld>
-    <p:spTree>
-      <p:nvGrpSpPr>
-        <p:cNvPr id="1" name="">
-          <a:extLst>
-            <a:ext uri="{FF2B5EF4-FFF2-40B4-BE49-F238E27FC236}">
-              <a16:creationId xmlns:a16="http://schemas.microsoft.com/office/drawing/2014/main" id="{74215D0A-BA72-DE45-32FA-363803F140CE}"/>
-            </a:ext>
-          </a:extLst>
-        </p:cNvPr>
-        <p:cNvGrpSpPr/>
-        <p:nvPr/>
-      </p:nvGrpSpPr>
-      <p:grpSpPr>
-        <a:xfrm>
-          <a:off x="0" y="0"/>
-          <a:ext cx="0" cy="0"/>
-          <a:chOff x="0" y="0"/>
-          <a:chExt cx="0" cy="0"/>
-        </a:xfrm>
-      </p:grpSpPr>
-      <p:sp>
-        <p:nvSpPr>
-          <p:cNvPr id="2" name="スライド イメージ プレースホルダー 1">
-            <a:extLst>
-              <a:ext uri="{FF2B5EF4-FFF2-40B4-BE49-F238E27FC236}">
-                <a16:creationId xmlns:a16="http://schemas.microsoft.com/office/drawing/2014/main" id="{27D2F8A3-D4B3-B9E6-A613-A157696B87F2}"/>
-              </a:ext>
-            </a:extLst>
-          </p:cNvPr>
-          <p:cNvSpPr>
-            <a:spLocks noGrp="1" noRot="1" noChangeAspect="1"/>
-          </p:cNvSpPr>
-          <p:nvPr>
-            <p:ph type="sldImg"/>
-          </p:nvPr>
-        </p:nvSpPr>
-        <p:spPr/>
-      </p:sp>
-      <p:sp>
-        <p:nvSpPr>
-          <p:cNvPr id="3" name="ノート プレースホルダー 2">
-            <a:extLst>
-              <a:ext uri="{FF2B5EF4-FFF2-40B4-BE49-F238E27FC236}">
-                <a16:creationId xmlns:a16="http://schemas.microsoft.com/office/drawing/2014/main" id="{933FBD4A-B575-3375-091A-F6A24B5A9BD0}"/>
-              </a:ext>
-            </a:extLst>
-          </p:cNvPr>
-          <p:cNvSpPr>
-            <a:spLocks noGrp="1"/>
-          </p:cNvSpPr>
-          <p:nvPr>
-            <p:ph type="body" idx="1"/>
-          </p:nvPr>
-        </p:nvSpPr>
-        <p:spPr/>
-        <p:txBody>
-          <a:bodyPr/>
-          <a:lstStyle/>
-          <a:p>
-            <a:endParaRPr kumimoji="1" lang="ja-JP" altLang="en-US" dirty="0"/>
-          </a:p>
-        </p:txBody>
-      </p:sp>
-      <p:sp>
-        <p:nvSpPr>
-          <p:cNvPr id="4" name="スライド番号プレースホルダー 3">
-            <a:extLst>
-              <a:ext uri="{FF2B5EF4-FFF2-40B4-BE49-F238E27FC236}">
-                <a16:creationId xmlns:a16="http://schemas.microsoft.com/office/drawing/2014/main" id="{4CAEAEB9-E37C-569F-CBB7-45D65E2A0906}"/>
-              </a:ext>
-            </a:extLst>
-          </p:cNvPr>
-          <p:cNvSpPr>
-            <a:spLocks noGrp="1"/>
-          </p:cNvSpPr>
-          <p:nvPr>
-            <p:ph type="sldNum" sz="quarter" idx="10"/>
-          </p:nvPr>
-        </p:nvSpPr>
-        <p:spPr/>
-        <p:txBody>
-          <a:bodyPr/>
-          <a:lstStyle/>
-          <a:p>
-            <a:fld id="{022E43C0-6795-4B13-B37C-259C826D4B6A}" type="slidenum">
-              <a:rPr kumimoji="1" lang="ja-JP" altLang="en-US" smtClean="0"/>
-              <a:t>1</a:t>
-            </a:fld>
-            <a:endParaRPr kumimoji="1" lang="ja-JP" altLang="en-US"/>
-          </a:p>
-        </p:txBody>
-      </p:sp>
-    </p:spTree>
-    <p:extLst>
-      <p:ext uri="{BB962C8B-B14F-4D97-AF65-F5344CB8AC3E}">
-        <p14:creationId xmlns:p14="http://schemas.microsoft.com/office/powerpoint/2010/main" val="1123847611"/>
-      </p:ext>
-    </p:extLst>
-  </p:cSld>
-  <p:clrMapOvr>
-    <a:masterClrMapping/>
-  </p:clrMapOvr>
-</p:notes>
-</file>
-
 <file path=ppt/notesSlides/notesSlide2.xml><?xml version="1.0" encoding="utf-8"?>
 <p:notes xmlns:a="http://schemas.openxmlformats.org/drawingml/2006/main" xmlns:r="http://schemas.openxmlformats.org/officeDocument/2006/relationships" xmlns:p="http://schemas.openxmlformats.org/presentationml/2006/main">
   <p:cSld>
@@ -2858,338 +2750,6 @@
 </p:sldMaster>
 </file>
 
-<file path=ppt/slides/slide1.xml><?xml version="1.0" encoding="utf-8"?>
-<p:sld xmlns:a="http://schemas.openxmlformats.org/drawingml/2006/main" xmlns:r="http://schemas.openxmlformats.org/officeDocument/2006/relationships" xmlns:p="http://schemas.openxmlformats.org/presentationml/2006/main">
-  <p:cSld>
-    <p:spTree>
-      <p:nvGrpSpPr>
-        <p:cNvPr id="2" name="">
-          <a:extLst>
-            <a:ext uri="{FF2B5EF4-FFF2-40B4-BE49-F238E27FC236}">
-              <a16:creationId xmlns:a16="http://schemas.microsoft.com/office/drawing/2014/main" id="{AD6A8E8E-25CB-4B86-C4F6-E5A7023586F7}"/>
-            </a:ext>
-          </a:extLst>
-        </p:cNvPr>
-        <p:cNvGrpSpPr/>
-        <p:nvPr/>
-      </p:nvGrpSpPr>
-      <p:grpSpPr>
-        <a:xfrm>
-          <a:off x="0" y="0"/>
-          <a:ext cx="0" cy="0"/>
-          <a:chOff x="0" y="0"/>
-          <a:chExt cx="0" cy="0"/>
-        </a:xfrm>
-      </p:grpSpPr>
-      <p:sp>
-        <p:nvSpPr>
-          <p:cNvPr id="3" name="TextBox 1"/>
-          <p:cNvSpPr txBox="1"/>
-          <p:nvPr/>
-        </p:nvSpPr>
-        <p:spPr>
-          <a:xfrm>
-            <a:off x="547200" y="161078"/>
-            <a:ext cx="8784000" cy="289843"/>
-          </a:xfrm>
-          <a:prstGeom prst="rect">
-            <a:avLst/>
-          </a:prstGeom>
-          <a:noFill/>
-        </p:spPr>
-        <p:txBody>
-          <a:bodyPr wrap="square" lIns="0" tIns="21600" rIns="0" bIns="21600" anchor="ctr">
-            <a:spAutoFit/>
-          </a:bodyPr>
-          <a:lstStyle/>
-          <a:p>
-            <a:pPr algn="l"/>
-            <a:r>
-              <a:rPr sz="1600" b="1" dirty="0">
-                <a:solidFill>
-                  <a:srgbClr val="002060"/>
-                </a:solidFill>
-                <a:latin typeface="メイリオ"/>
-                <a:ea typeface="メイリオ"/>
-                <a:cs typeface="メイリオ"/>
-              </a:rPr>
-              <a:t>サンクスLINE｜機能</a:t>
-            </a:r>
-          </a:p>
-        </p:txBody>
-      </p:sp>
-      <p:sp>
-        <p:nvSpPr>
-          <p:cNvPr id="4" name="TextBox 2"/>
-          <p:cNvSpPr txBox="1"/>
-          <p:nvPr/>
-        </p:nvSpPr>
-        <p:spPr>
-          <a:xfrm>
-            <a:off x="432000" y="684000"/>
-            <a:ext cx="9036000" cy="432000"/>
-          </a:xfrm>
-          <a:prstGeom prst="rect">
-            <a:avLst/>
-          </a:prstGeom>
-          <a:noFill/>
-        </p:spPr>
-        <p:txBody>
-          <a:bodyPr wrap="square" lIns="0" tIns="21600" rIns="0" bIns="21600" anchor="ctr">
-            <a:spAutoFit/>
-          </a:bodyPr>
-          <a:lstStyle/>
-          <a:p>
-            <a:pPr algn="l">
-              <a:lnSpc>
-                <a:spcPct val="130000"/>
-              </a:lnSpc>
-            </a:pPr>
-            <a:r>
-              <a:rPr lang="en-US" altLang="ja-JP" sz="1600" dirty="0" b="0">
-                <a:solidFill>
-                  <a:srgbClr val="333333"/>
-                </a:solidFill>
-                <a:latin typeface="メイリオ"/>
-                <a:ea typeface="メイリオ"/>
-                <a:cs typeface="メイリオ"/>
-              </a:rPr>
-              <a:t>申込み完了画面から、LINEへ移行</a:t>
-            </a:r>
-            <a:endParaRPr sz="1600" dirty="0">
-              <a:solidFill>
-                <a:srgbClr val="333333"/>
-              </a:solidFill>
-              <a:latin typeface="メイリオ"/>
-              <a:ea typeface="メイリオ"/>
-              <a:cs typeface="メイリオ"/>
-            </a:endParaRPr>
-          </a:p>
-        </p:txBody>
-      </p:sp>
-      <p:cxnSp>
-        <p:nvCxnSpPr>
-          <p:cNvPr id="5" name="Connector 3"/>
-          <p:cNvCxnSpPr/>
-          <p:nvPr/>
-        </p:nvCxnSpPr>
-        <p:spPr>
-          <a:xfrm>
-            <a:off x="0" y="1389600"/>
-            <a:ext cx="9907200" cy="0"/>
-          </a:xfrm>
-          <a:prstGeom prst="line">
-            <a:avLst/>
-          </a:prstGeom>
-          <a:ln w="12700">
-            <a:solidFill>
-              <a:srgbClr val="D9D9D9"/>
-            </a:solidFill>
-          </a:ln>
-        </p:spPr>
-        <p:style>
-          <a:lnRef idx="2">
-            <a:schemeClr val="accent1"/>
-          </a:lnRef>
-          <a:fillRef idx="0">
-            <a:schemeClr val="accent1"/>
-          </a:fillRef>
-          <a:effectRef idx="1">
-            <a:schemeClr val="accent1"/>
-          </a:effectRef>
-          <a:fontRef idx="minor">
-            <a:schemeClr val="tx1"/>
-          </a:fontRef>
-        </p:style>
-      </p:cxnSp>
-      <p:sp>
-        <p:nvSpPr>
-          <p:cNvPr id="6" name="TextBox 19"/>
-          <p:cNvSpPr txBox="1"/>
-          <p:nvPr/>
-        </p:nvSpPr>
-        <p:spPr>
-          <a:xfrm>
-            <a:off x="5796000" y="2015999"/>
-            <a:ext cx="3311999" cy="3420000"/>
-          </a:xfrm>
-          <a:prstGeom prst="rect">
-            <a:avLst/>
-          </a:prstGeom>
-          <a:noFill/>
-        </p:spPr>
-        <p:txBody>
-          <a:bodyPr wrap="square" lIns="0" tIns="21600" rIns="0" bIns="21600" anchor="t">
-            <a:spAutoFit/>
-          </a:bodyPr>
-          <a:lstStyle/>
-          <a:p>
-            <a:pPr algn="l">
-              <a:lnSpc>
-                <a:spcPct val="115000"/>
-              </a:lnSpc>
-              <a:spcAft>
-                <a:spcPts val="1400"/>
-              </a:spcAft>
-            </a:pPr>
-            <a:r>
-              <a:rPr sz="1600" b="0">
-                <a:solidFill>
-                  <a:srgbClr val="333333"/>
-                </a:solidFill>
-                <a:latin typeface="メイリオ"/>
-                <a:ea typeface="メイリオ"/>
-                <a:cs typeface="メイリオ"/>
-              </a:rPr>
-              <a:t>・新規は友だち追加、既存の友だちはトーク画面へ</a:t>
-            </a:r>
-          </a:p>
-          <a:p>
-            <a:pPr algn="l">
-              <a:lnSpc>
-                <a:spcPct val="115000"/>
-              </a:lnSpc>
-              <a:spcAft>
-                <a:spcPts val="1400"/>
-              </a:spcAft>
-            </a:pPr>
-            <a:r>
-              <a:rPr sz="1600" b="0">
-                <a:solidFill>
-                  <a:srgbClr val="333333"/>
-                </a:solidFill>
-                <a:latin typeface="メイリオ"/>
-                <a:ea typeface="メイリオ"/>
-                <a:cs typeface="メイリオ"/>
-              </a:rPr>
-              <a:t>・入力内容を引き継ぎ、配信の出し分けに活用</a:t>
-            </a:r>
-          </a:p>
-          <a:p>
-            <a:pPr algn="l">
-              <a:lnSpc>
-                <a:spcPct val="115000"/>
-              </a:lnSpc>
-              <a:spcAft>
-                <a:spcPts val="1400"/>
-              </a:spcAft>
-            </a:pPr>
-            <a:r>
-              <a:rPr sz="1600" b="0">
-                <a:solidFill>
-                  <a:srgbClr val="333333"/>
-                </a:solidFill>
-                <a:latin typeface="メイリオ"/>
-                <a:ea typeface="メイリオ"/>
-                <a:cs typeface="メイリオ"/>
-              </a:rPr>
-              <a:t>・今のアカウントにそのまま導入、APIツールとも併用可</a:t>
-            </a:r>
-          </a:p>
-          <a:p>
-            <a:pPr algn="l">
-              <a:lnSpc>
-                <a:spcPct val="115000"/>
-              </a:lnSpc>
-              <a:spcAft>
-                <a:spcPts val="1400"/>
-              </a:spcAft>
-            </a:pPr>
-            <a:r>
-              <a:rPr sz="1600" b="1">
-                <a:solidFill>
-                  <a:srgbClr val="1F285A"/>
-                </a:solidFill>
-                <a:latin typeface="メイリオ"/>
-                <a:ea typeface="メイリオ"/>
-                <a:cs typeface="メイリオ"/>
-              </a:rPr>
-              <a:t>・費用：初期15万円／月額3万円〜</a:t>
-            </a:r>
-          </a:p>
-        </p:txBody>
-      </p:sp>
-      <p:pic>
-        <p:nvPicPr>
-          <p:cNvPr id="7" name="Picture 12" descr="thanks_line_screen_start.png"/>
-          <p:cNvPicPr>
-            <a:picLocks noChangeAspect="1"/>
-          </p:cNvPicPr>
-          <p:nvPr/>
-        </p:nvPicPr>
-        <p:blipFill>
-          <a:blip r:embed="rId3"/>
-          <a:stretch>
-            <a:fillRect/>
-          </a:stretch>
-        </p:blipFill>
-        <p:spPr>
-          <a:xfrm>
-            <a:off x="864000" y="1872000"/>
-            <a:ext cx="4608000" cy="3815909"/>
-          </a:xfrm>
-          <a:prstGeom prst="rect">
-            <a:avLst/>
-          </a:prstGeom>
-        </p:spPr>
-      </p:pic>
-      <p:sp>
-        <p:nvSpPr>
-          <p:cNvPr id="8" name="TextBox 19"/>
-          <p:cNvSpPr txBox="1"/>
-          <p:nvPr/>
-        </p:nvSpPr>
-        <p:spPr>
-          <a:xfrm>
-            <a:off x="1080000" y="6048000"/>
-            <a:ext cx="7740000" cy="216000"/>
-          </a:xfrm>
-          <a:prstGeom prst="rect">
-            <a:avLst/>
-          </a:prstGeom>
-          <a:noFill/>
-        </p:spPr>
-        <p:txBody>
-          <a:bodyPr wrap="square" lIns="0" tIns="21600" rIns="0" bIns="21600" anchor="t">
-            <a:spAutoFit/>
-          </a:bodyPr>
-          <a:lstStyle/>
-          <a:p>
-            <a:pPr algn="l">
-              <a:lnSpc>
-                <a:spcPct val="115000"/>
-              </a:lnSpc>
-              <a:spcAft>
-                <a:spcPts val="1400"/>
-              </a:spcAft>
-            </a:pPr>
-            <a:r>
-              <a:rPr sz="1000" b="0">
-                <a:solidFill>
-                  <a:srgbClr val="7F7F7F"/>
-                </a:solidFill>
-                <a:latin typeface="メイリオ"/>
-                <a:ea typeface="メイリオ"/>
-                <a:cs typeface="メイリオ"/>
-              </a:rPr>
-              <a:t>※画面はイメージです</a:t>
-            </a:r>
-          </a:p>
-        </p:txBody>
-      </p:sp>
-    </p:spTree>
-    <p:extLst>
-      <p:ext uri="{BB962C8B-B14F-4D97-AF65-F5344CB8AC3E}">
-        <p14:creationId xmlns:p14="http://schemas.microsoft.com/office/powerpoint/2010/main" val="2378484531"/>
-      </p:ext>
-    </p:extLst>
-  </p:cSld>
-  <p:clrMapOvr>
-    <a:masterClrMapping/>
-  </p:clrMapOvr>
-</p:sld>
-</file>
-
 <file path=ppt/slides/slide2.xml><?xml version="1.0" encoding="utf-8"?>
 <p:sld xmlns:a="http://schemas.openxmlformats.org/drawingml/2006/main" xmlns:r="http://schemas.openxmlformats.org/officeDocument/2006/relationships" xmlns:p="http://schemas.openxmlformats.org/presentationml/2006/main">
   <p:cSld>
@@ -4973,6 +4533,4360 @@
               </a:rPr>
               <a:t>出典：LINEヤフー for Business 導入事例（アクネクリニック・UZUZ）</a:t>
             </a:r>
+          </a:p>
+        </p:txBody>
+      </p:sp>
+    </p:spTree>
+  </p:cSld>
+  <p:clrMapOvr>
+    <a:masterClrMapping/>
+  </p:clrMapOvr>
+</p:sld>
+</file>
+
+<file path=ppt/slides/slide5.xml><?xml version="1.0" encoding="utf-8"?>
+<p:sld xmlns:a="http://schemas.openxmlformats.org/drawingml/2006/main" xmlns:p="http://schemas.openxmlformats.org/presentationml/2006/main" xmlns:r="http://schemas.openxmlformats.org/officeDocument/2006/relationships">
+  <p:cSld>
+    <p:spTree>
+      <p:nvGrpSpPr>
+        <p:cNvPr id="1" name=""/>
+        <p:cNvGrpSpPr/>
+        <p:nvPr/>
+      </p:nvGrpSpPr>
+      <p:grpSpPr/>
+      <p:sp>
+        <p:nvSpPr>
+          <p:cNvPr id="22" name="Google Shape;752;p28">
+            <a:extLst>
+              <a:ext uri="{FF2B5EF4-FFF2-40B4-BE49-F238E27FC236}">
+                <a16:creationId xmlns:a16="http://schemas.microsoft.com/office/drawing/2014/main" id="{AA80CD04-9456-70DB-2E44-D3EDB1461933}"/>
+              </a:ext>
+            </a:extLst>
+          </p:cNvPr>
+          <p:cNvSpPr txBox="1"/>
+          <p:nvPr/>
+        </p:nvSpPr>
+        <p:spPr>
+          <a:xfrm>
+            <a:off x="548883" y="138137"/>
+            <a:ext cx="6276325" cy="338514"/>
+          </a:xfrm>
+          <a:prstGeom prst="rect">
+            <a:avLst/>
+          </a:prstGeom>
+          <a:noFill/>
+          <a:ln>
+            <a:noFill/>
+          </a:ln>
+        </p:spPr>
+        <p:txBody>
+          <a:bodyPr spcFirstLastPara="1" wrap="square" lIns="91425" tIns="45700" rIns="91425" bIns="45700" anchor="ctr" anchorCtr="0">
+            <a:spAutoFit/>
+          </a:bodyPr>
+          <a:lstStyle/>
+          <a:p>
+            <a:pPr lvl="0"/>
+            <a:r>
+              <a:rPr lang="ja-JP" altLang="en-US" sz="1600" b="1" dirty="0">
+                <a:solidFill>
+                  <a:srgbClr val="002060"/>
+                </a:solidFill>
+                <a:latin typeface="メイリオ"/>
+                <a:ea typeface="メイリオ"/>
+                <a:cs typeface="メイリオ"/>
+                <a:sym typeface="Meiryo"/>
+              </a:rPr>
+              <a:t>サンクスLINE｜機能</a:t>
+            </a:r>
+          </a:p>
+        </p:txBody>
+      </p:sp>
+      <p:sp>
+        <p:nvSpPr>
+          <p:cNvPr id="11" name="正方形/長方形 10">
+            <a:extLst>
+              <a:ext uri="{FF2B5EF4-FFF2-40B4-BE49-F238E27FC236}">
+                <a16:creationId xmlns:a16="http://schemas.microsoft.com/office/drawing/2014/main" id="{189A6A4C-E34E-E7CF-D6DD-C175E600A94D}"/>
+              </a:ext>
+            </a:extLst>
+          </p:cNvPr>
+          <p:cNvSpPr/>
+          <p:nvPr/>
+        </p:nvSpPr>
+        <p:spPr>
+          <a:xfrm>
+            <a:off x="1404798" y="1938056"/>
+            <a:ext cx="1859036" cy="244151"/>
+          </a:xfrm>
+          <a:prstGeom prst="rect">
+            <a:avLst/>
+          </a:prstGeom>
+          <a:solidFill>
+            <a:schemeClr val="bg1">
+              <a:lumMod val="95000"/>
+            </a:schemeClr>
+          </a:solidFill>
+          <a:ln>
+            <a:noFill/>
+          </a:ln>
+        </p:spPr>
+        <p:style>
+          <a:lnRef idx="2">
+            <a:schemeClr val="accent1">
+              <a:shade val="15000"/>
+            </a:schemeClr>
+          </a:lnRef>
+          <a:fillRef idx="1">
+            <a:schemeClr val="accent1"/>
+          </a:fillRef>
+          <a:effectRef idx="0">
+            <a:schemeClr val="accent1"/>
+          </a:effectRef>
+          <a:fontRef idx="minor">
+            <a:schemeClr val="lt1"/>
+          </a:fontRef>
+        </p:style>
+        <p:txBody>
+          <a:bodyPr rtlCol="0" anchor="ctr"/>
+          <a:lstStyle/>
+          <a:p>
+            <a:pPr algn="ctr"/>
+            <a:r>
+              <a:rPr kumimoji="1" lang="en-US" altLang="ja-JP" sz="1100" b="1" dirty="0">
+                <a:solidFill>
+                  <a:schemeClr val="tx1">
+                    <a:lumMod val="50000"/>
+                    <a:lumOff val="50000"/>
+                  </a:schemeClr>
+                </a:solidFill>
+                <a:latin typeface="メイリオ" panose="020B0604030504040204" pitchFamily="50" charset="-128"/>
+                <a:ea typeface="メイリオ" panose="020B0604030504040204" pitchFamily="50" charset="-128"/>
+                <a:cs typeface="メイリオ"/>
+              </a:rPr>
+              <a:t>WEB</a:t>
+            </a:r>
+            <a:r>
+              <a:rPr kumimoji="1" lang="ja-JP" altLang="en-US" sz="1100" b="1" dirty="0">
+                <a:solidFill>
+                  <a:schemeClr val="tx1">
+                    <a:lumMod val="50000"/>
+                    <a:lumOff val="50000"/>
+                  </a:schemeClr>
+                </a:solidFill>
+                <a:latin typeface="メイリオ" panose="020B0604030504040204" pitchFamily="50" charset="-128"/>
+                <a:ea typeface="メイリオ" panose="020B0604030504040204" pitchFamily="50" charset="-128"/>
+                <a:cs typeface="メイリオ"/>
+              </a:rPr>
+              <a:t>サイト</a:t>
+            </a:r>
+          </a:p>
+        </p:txBody>
+      </p:sp>
+      <p:sp>
+        <p:nvSpPr>
+          <p:cNvPr id="16" name="正方形/長方形 15">
+            <a:extLst>
+              <a:ext uri="{FF2B5EF4-FFF2-40B4-BE49-F238E27FC236}">
+                <a16:creationId xmlns:a16="http://schemas.microsoft.com/office/drawing/2014/main" id="{32BBF438-B1EF-A61A-EE3D-69CD39766C7E}"/>
+              </a:ext>
+            </a:extLst>
+          </p:cNvPr>
+          <p:cNvSpPr/>
+          <p:nvPr/>
+        </p:nvSpPr>
+        <p:spPr>
+          <a:xfrm>
+            <a:off x="5808682" y="2415743"/>
+            <a:ext cx="3748873" cy="1821208"/>
+          </a:xfrm>
+          <a:prstGeom prst="rect">
+            <a:avLst/>
+          </a:prstGeom>
+          <a:noFill/>
+          <a:ln>
+            <a:solidFill>
+              <a:schemeClr val="tx2">
+                <a:lumMod val="20000"/>
+                <a:lumOff val="80000"/>
+              </a:schemeClr>
+            </a:solidFill>
+          </a:ln>
+        </p:spPr>
+        <p:style>
+          <a:lnRef idx="2">
+            <a:schemeClr val="accent1">
+              <a:shade val="15000"/>
+            </a:schemeClr>
+          </a:lnRef>
+          <a:fillRef idx="1">
+            <a:schemeClr val="accent1"/>
+          </a:fillRef>
+          <a:effectRef idx="0">
+            <a:schemeClr val="accent1"/>
+          </a:effectRef>
+          <a:fontRef idx="minor">
+            <a:schemeClr val="lt1"/>
+          </a:fontRef>
+        </p:style>
+        <p:txBody>
+          <a:bodyPr rtlCol="0" anchor="ctr"/>
+          <a:lstStyle/>
+          <a:p>
+            <a:pPr algn="ctr"/>
+            <a:endParaRPr kumimoji="1" lang="ja-JP" altLang="en-US">
+              <a:latin typeface="メイリオ"/>
+              <a:ea typeface="メイリオ"/>
+              <a:cs typeface="メイリオ"/>
+            </a:endParaRPr>
+          </a:p>
+        </p:txBody>
+      </p:sp>
+      <p:sp>
+        <p:nvSpPr>
+          <p:cNvPr id="17" name="正方形/長方形 16">
+            <a:extLst>
+              <a:ext uri="{FF2B5EF4-FFF2-40B4-BE49-F238E27FC236}">
+                <a16:creationId xmlns:a16="http://schemas.microsoft.com/office/drawing/2014/main" id="{1A1E4128-77DC-C871-EE20-5BD43326E078}"/>
+              </a:ext>
+            </a:extLst>
+          </p:cNvPr>
+          <p:cNvSpPr/>
+          <p:nvPr/>
+        </p:nvSpPr>
+        <p:spPr>
+          <a:xfrm>
+            <a:off x="5808681" y="4588963"/>
+            <a:ext cx="3748873" cy="1821208"/>
+          </a:xfrm>
+          <a:prstGeom prst="rect">
+            <a:avLst/>
+          </a:prstGeom>
+          <a:noFill/>
+          <a:ln>
+            <a:solidFill>
+              <a:schemeClr val="tx2">
+                <a:lumMod val="20000"/>
+                <a:lumOff val="80000"/>
+              </a:schemeClr>
+            </a:solidFill>
+          </a:ln>
+        </p:spPr>
+        <p:style>
+          <a:lnRef idx="2">
+            <a:schemeClr val="accent1">
+              <a:shade val="15000"/>
+            </a:schemeClr>
+          </a:lnRef>
+          <a:fillRef idx="1">
+            <a:schemeClr val="accent1"/>
+          </a:fillRef>
+          <a:effectRef idx="0">
+            <a:schemeClr val="accent1"/>
+          </a:effectRef>
+          <a:fontRef idx="minor">
+            <a:schemeClr val="lt1"/>
+          </a:fontRef>
+        </p:style>
+        <p:txBody>
+          <a:bodyPr rtlCol="0" anchor="ctr"/>
+          <a:lstStyle/>
+          <a:p>
+            <a:pPr algn="ctr"/>
+            <a:endParaRPr kumimoji="1" lang="ja-JP" altLang="en-US">
+              <a:latin typeface="メイリオ"/>
+              <a:ea typeface="メイリオ"/>
+              <a:cs typeface="メイリオ"/>
+            </a:endParaRPr>
+          </a:p>
+        </p:txBody>
+      </p:sp>
+      <p:sp>
+        <p:nvSpPr>
+          <p:cNvPr id="20" name="正方形/長方形 19">
+            <a:extLst>
+              <a:ext uri="{FF2B5EF4-FFF2-40B4-BE49-F238E27FC236}">
+                <a16:creationId xmlns:a16="http://schemas.microsoft.com/office/drawing/2014/main" id="{F37BB268-660A-FEE4-BB39-0E338F1DDC23}"/>
+              </a:ext>
+            </a:extLst>
+          </p:cNvPr>
+          <p:cNvSpPr/>
+          <p:nvPr/>
+        </p:nvSpPr>
+        <p:spPr>
+          <a:xfrm>
+            <a:off x="5974632" y="2304788"/>
+            <a:ext cx="1859036" cy="244151"/>
+          </a:xfrm>
+          <a:prstGeom prst="rect">
+            <a:avLst/>
+          </a:prstGeom>
+          <a:solidFill>
+            <a:schemeClr val="accent1">
+              <a:lumMod val="20000"/>
+              <a:lumOff val="80000"/>
+            </a:schemeClr>
+          </a:solidFill>
+          <a:ln>
+            <a:noFill/>
+          </a:ln>
+        </p:spPr>
+        <p:style>
+          <a:lnRef idx="2">
+            <a:schemeClr val="accent1">
+              <a:shade val="15000"/>
+            </a:schemeClr>
+          </a:lnRef>
+          <a:fillRef idx="1">
+            <a:schemeClr val="accent1"/>
+          </a:fillRef>
+          <a:effectRef idx="0">
+            <a:schemeClr val="accent1"/>
+          </a:effectRef>
+          <a:fontRef idx="minor">
+            <a:schemeClr val="lt1"/>
+          </a:fontRef>
+        </p:style>
+        <p:txBody>
+          <a:bodyPr rtlCol="0" anchor="ctr"/>
+          <a:lstStyle/>
+          <a:p>
+            <a:pPr algn="ctr"/>
+            <a:r>
+              <a:rPr lang="ja-JP" altLang="en-US" sz="1100" b="1" dirty="0">
+                <a:solidFill>
+                  <a:schemeClr val="tx1"/>
+                </a:solidFill>
+                <a:latin typeface="メイリオ" panose="020B0604030504040204" pitchFamily="50" charset="-128"/>
+                <a:ea typeface="メイリオ" panose="020B0604030504040204" pitchFamily="50" charset="-128"/>
+                <a:cs typeface="メイリオ"/>
+              </a:rPr>
+              <a:t>非</a:t>
+            </a:r>
+            <a:r>
+              <a:rPr lang="en-US" altLang="ja-JP" sz="1100" b="1" dirty="0">
+                <a:solidFill>
+                  <a:schemeClr val="tx1"/>
+                </a:solidFill>
+                <a:latin typeface="メイリオ" panose="020B0604030504040204" pitchFamily="50" charset="-128"/>
+                <a:ea typeface="メイリオ" panose="020B0604030504040204" pitchFamily="50" charset="-128"/>
+                <a:cs typeface="メイリオ"/>
+              </a:rPr>
+              <a:t>LINE</a:t>
+            </a:r>
+            <a:r>
+              <a:rPr lang="ja-JP" altLang="en-US" sz="1100" b="1" dirty="0">
+                <a:solidFill>
+                  <a:schemeClr val="tx1"/>
+                </a:solidFill>
+                <a:latin typeface="メイリオ" panose="020B0604030504040204" pitchFamily="50" charset="-128"/>
+                <a:ea typeface="メイリオ" panose="020B0604030504040204" pitchFamily="50" charset="-128"/>
+                <a:cs typeface="メイリオ"/>
+              </a:rPr>
+              <a:t>友だちの場合</a:t>
+            </a:r>
+          </a:p>
+        </p:txBody>
+      </p:sp>
+      <p:sp>
+        <p:nvSpPr>
+          <p:cNvPr id="21" name="正方形/長方形 20">
+            <a:extLst>
+              <a:ext uri="{FF2B5EF4-FFF2-40B4-BE49-F238E27FC236}">
+                <a16:creationId xmlns:a16="http://schemas.microsoft.com/office/drawing/2014/main" id="{C9FF4626-FD17-CA1C-8064-F46606D0BCCE}"/>
+              </a:ext>
+            </a:extLst>
+          </p:cNvPr>
+          <p:cNvSpPr/>
+          <p:nvPr/>
+        </p:nvSpPr>
+        <p:spPr>
+          <a:xfrm>
+            <a:off x="5974632" y="4466888"/>
+            <a:ext cx="1859036" cy="244151"/>
+          </a:xfrm>
+          <a:prstGeom prst="rect">
+            <a:avLst/>
+          </a:prstGeom>
+          <a:solidFill>
+            <a:schemeClr val="accent1">
+              <a:lumMod val="20000"/>
+              <a:lumOff val="80000"/>
+            </a:schemeClr>
+          </a:solidFill>
+          <a:ln>
+            <a:noFill/>
+          </a:ln>
+        </p:spPr>
+        <p:style>
+          <a:lnRef idx="2">
+            <a:schemeClr val="accent1">
+              <a:shade val="15000"/>
+            </a:schemeClr>
+          </a:lnRef>
+          <a:fillRef idx="1">
+            <a:schemeClr val="accent1"/>
+          </a:fillRef>
+          <a:effectRef idx="0">
+            <a:schemeClr val="accent1"/>
+          </a:effectRef>
+          <a:fontRef idx="minor">
+            <a:schemeClr val="lt1"/>
+          </a:fontRef>
+        </p:style>
+        <p:txBody>
+          <a:bodyPr rtlCol="0" anchor="ctr"/>
+          <a:lstStyle/>
+          <a:p>
+            <a:pPr algn="ctr"/>
+            <a:r>
+              <a:rPr lang="ja-JP" altLang="en-US" sz="1100" b="1" dirty="0">
+                <a:solidFill>
+                  <a:schemeClr val="tx1"/>
+                </a:solidFill>
+                <a:latin typeface="メイリオ" panose="020B0604030504040204" pitchFamily="50" charset="-128"/>
+                <a:ea typeface="メイリオ" panose="020B0604030504040204" pitchFamily="50" charset="-128"/>
+                <a:cs typeface="メイリオ"/>
+              </a:rPr>
+              <a:t>既存の</a:t>
+            </a:r>
+            <a:r>
+              <a:rPr lang="en-US" altLang="ja-JP" sz="1100" b="1" dirty="0">
+                <a:solidFill>
+                  <a:schemeClr val="tx1"/>
+                </a:solidFill>
+                <a:latin typeface="メイリオ" panose="020B0604030504040204" pitchFamily="50" charset="-128"/>
+                <a:ea typeface="メイリオ" panose="020B0604030504040204" pitchFamily="50" charset="-128"/>
+                <a:cs typeface="メイリオ"/>
+              </a:rPr>
+              <a:t>LINE</a:t>
+            </a:r>
+            <a:r>
+              <a:rPr lang="ja-JP" altLang="en-US" sz="1100" b="1" dirty="0">
+                <a:solidFill>
+                  <a:schemeClr val="tx1"/>
+                </a:solidFill>
+                <a:latin typeface="メイリオ" panose="020B0604030504040204" pitchFamily="50" charset="-128"/>
+                <a:ea typeface="メイリオ" panose="020B0604030504040204" pitchFamily="50" charset="-128"/>
+                <a:cs typeface="メイリオ"/>
+              </a:rPr>
+              <a:t>友だちの場合</a:t>
+            </a:r>
+          </a:p>
+        </p:txBody>
+      </p:sp>
+      <p:cxnSp>
+        <p:nvCxnSpPr>
+          <p:cNvPr id="23" name="直線矢印コネクタ 22">
+            <a:extLst>
+              <a:ext uri="{FF2B5EF4-FFF2-40B4-BE49-F238E27FC236}">
+                <a16:creationId xmlns:a16="http://schemas.microsoft.com/office/drawing/2014/main" id="{8F202453-7FF9-8AE7-D10D-66F74A74A2F4}"/>
+              </a:ext>
+            </a:extLst>
+          </p:cNvPr>
+          <p:cNvCxnSpPr/>
+          <p:nvPr/>
+        </p:nvCxnSpPr>
+        <p:spPr>
+          <a:xfrm>
+            <a:off x="4361857" y="3239708"/>
+            <a:ext cx="1407469" cy="0"/>
+          </a:xfrm>
+          <a:prstGeom prst="straightConnector1">
+            <a:avLst/>
+          </a:prstGeom>
+          <a:ln w="19050">
+            <a:solidFill>
+              <a:srgbClr val="00B050">
+                <a:alpha val="80000"/>
+              </a:srgbClr>
+            </a:solidFill>
+            <a:prstDash val="sysDot"/>
+            <a:tailEnd type="triangle"/>
+          </a:ln>
+        </p:spPr>
+        <p:style>
+          <a:lnRef idx="1">
+            <a:schemeClr val="accent1"/>
+          </a:lnRef>
+          <a:fillRef idx="0">
+            <a:schemeClr val="accent1"/>
+          </a:fillRef>
+          <a:effectRef idx="0">
+            <a:schemeClr val="accent1"/>
+          </a:effectRef>
+          <a:fontRef idx="minor">
+            <a:schemeClr val="tx1"/>
+          </a:fontRef>
+        </p:style>
+      </p:cxnSp>
+      <p:cxnSp>
+        <p:nvCxnSpPr>
+          <p:cNvPr id="24" name="直線矢印コネクタ 23">
+            <a:extLst>
+              <a:ext uri="{FF2B5EF4-FFF2-40B4-BE49-F238E27FC236}">
+                <a16:creationId xmlns:a16="http://schemas.microsoft.com/office/drawing/2014/main" id="{C92F6E28-BBFF-1A56-AC22-CA16D2F1B1EA}"/>
+              </a:ext>
+            </a:extLst>
+          </p:cNvPr>
+          <p:cNvCxnSpPr>
+            <a:cxnSpLocks/>
+          </p:cNvCxnSpPr>
+          <p:nvPr/>
+        </p:nvCxnSpPr>
+        <p:spPr>
+          <a:xfrm>
+            <a:off x="4361857" y="3392108"/>
+            <a:ext cx="1407469" cy="1358385"/>
+          </a:xfrm>
+          <a:prstGeom prst="straightConnector1">
+            <a:avLst/>
+          </a:prstGeom>
+          <a:ln w="19050">
+            <a:solidFill>
+              <a:srgbClr val="00B050">
+                <a:alpha val="80000"/>
+              </a:srgbClr>
+            </a:solidFill>
+            <a:prstDash val="sysDot"/>
+            <a:tailEnd type="triangle"/>
+          </a:ln>
+        </p:spPr>
+        <p:style>
+          <a:lnRef idx="1">
+            <a:schemeClr val="accent1"/>
+          </a:lnRef>
+          <a:fillRef idx="0">
+            <a:schemeClr val="accent1"/>
+          </a:fillRef>
+          <a:effectRef idx="0">
+            <a:schemeClr val="accent1"/>
+          </a:effectRef>
+          <a:fontRef idx="minor">
+            <a:schemeClr val="tx1"/>
+          </a:fontRef>
+        </p:style>
+      </p:cxnSp>
+      <p:sp>
+        <p:nvSpPr>
+          <p:cNvPr id="29" name="正方形/長方形 28">
+            <a:extLst>
+              <a:ext uri="{FF2B5EF4-FFF2-40B4-BE49-F238E27FC236}">
+                <a16:creationId xmlns:a16="http://schemas.microsoft.com/office/drawing/2014/main" id="{1D29A9C3-A3E8-0780-A758-0C8E7E376668}"/>
+              </a:ext>
+            </a:extLst>
+          </p:cNvPr>
+          <p:cNvSpPr/>
+          <p:nvPr/>
+        </p:nvSpPr>
+        <p:spPr>
+          <a:xfrm>
+            <a:off x="4867227" y="2304788"/>
+            <a:ext cx="374449" cy="3205847"/>
+          </a:xfrm>
+          <a:prstGeom prst="rect">
+            <a:avLst/>
+          </a:prstGeom>
+          <a:solidFill>
+            <a:srgbClr val="00FF00">
+              <a:alpha val="40000"/>
+            </a:srgbClr>
+          </a:solidFill>
+          <a:ln>
+            <a:noFill/>
+          </a:ln>
+        </p:spPr>
+        <p:style>
+          <a:lnRef idx="2">
+            <a:schemeClr val="accent1">
+              <a:shade val="15000"/>
+            </a:schemeClr>
+          </a:lnRef>
+          <a:fillRef idx="1">
+            <a:schemeClr val="accent1"/>
+          </a:fillRef>
+          <a:effectRef idx="0">
+            <a:schemeClr val="accent1"/>
+          </a:effectRef>
+          <a:fontRef idx="minor">
+            <a:schemeClr val="lt1"/>
+          </a:fontRef>
+        </p:style>
+        <p:txBody>
+          <a:bodyPr rtlCol="0" anchor="ctr"/>
+          <a:lstStyle/>
+          <a:p>
+            <a:pPr algn="ctr"/>
+            <a:r>
+              <a:rPr lang="ja-JP" altLang="en-US" sz="1100" b="1" dirty="0">
+                <a:solidFill>
+                  <a:schemeClr val="tx1"/>
+                </a:solidFill>
+                <a:latin typeface="メイリオ" panose="020B0604030504040204" pitchFamily="50" charset="-128"/>
+                <a:ea typeface="メイリオ" panose="020B0604030504040204" pitchFamily="50" charset="-128"/>
+                <a:cs typeface="メイリオ"/>
+              </a:rPr>
+              <a:t>｜</a:t>
+            </a:r>
+            <a:r>
+              <a:rPr lang="en-US" altLang="ja-JP" sz="1100" b="1" dirty="0">
+                <a:solidFill>
+                  <a:schemeClr val="tx1"/>
+                </a:solidFill>
+                <a:latin typeface="メイリオ" panose="020B0604030504040204" pitchFamily="50" charset="-128"/>
+                <a:ea typeface="メイリオ" panose="020B0604030504040204" pitchFamily="50" charset="-128"/>
+                <a:cs typeface="メイリオ"/>
+              </a:rPr>
+              <a:t>D</a:t>
+            </a:r>
+          </a:p>
+          <a:p>
+            <a:pPr algn="ctr"/>
+            <a:r>
+              <a:rPr kumimoji="1" lang="en-US" altLang="ja-JP" sz="1100" b="1" dirty="0">
+                <a:solidFill>
+                  <a:schemeClr val="tx1"/>
+                </a:solidFill>
+                <a:latin typeface="メイリオ" panose="020B0604030504040204" pitchFamily="50" charset="-128"/>
+                <a:ea typeface="メイリオ" panose="020B0604030504040204" pitchFamily="50" charset="-128"/>
+                <a:cs typeface="メイリオ"/>
+              </a:rPr>
+              <a:t>Y</a:t>
+            </a:r>
+          </a:p>
+          <a:p>
+            <a:pPr algn="ctr"/>
+            <a:r>
+              <a:rPr lang="en-US" altLang="ja-JP" sz="1100" b="1" dirty="0">
+                <a:solidFill>
+                  <a:schemeClr val="tx1"/>
+                </a:solidFill>
+                <a:latin typeface="メイリオ" panose="020B0604030504040204" pitchFamily="50" charset="-128"/>
+                <a:ea typeface="メイリオ" panose="020B0604030504040204" pitchFamily="50" charset="-128"/>
+                <a:cs typeface="メイリオ"/>
+              </a:rPr>
+              <a:t>M</a:t>
+            </a:r>
+            <a:r>
+              <a:rPr lang="ja-JP" altLang="en-US" sz="1100" b="1" dirty="0">
+                <a:solidFill>
+                  <a:schemeClr val="tx1"/>
+                </a:solidFill>
+                <a:latin typeface="メイリオ" panose="020B0604030504040204" pitchFamily="50" charset="-128"/>
+                <a:ea typeface="メイリオ" panose="020B0604030504040204" pitchFamily="50" charset="-128"/>
+                <a:cs typeface="メイリオ"/>
+              </a:rPr>
+              <a:t>ツ</a:t>
+            </a:r>
+            <a:endParaRPr lang="en-US" altLang="ja-JP" sz="1100" b="1" dirty="0">
+              <a:solidFill>
+                <a:schemeClr val="tx1"/>
+              </a:solidFill>
+              <a:latin typeface="メイリオ" panose="020B0604030504040204" pitchFamily="50" charset="-128"/>
+              <a:ea typeface="メイリオ" panose="020B0604030504040204" pitchFamily="50" charset="-128"/>
+              <a:cs typeface="メイリオ"/>
+            </a:endParaRPr>
+          </a:p>
+          <a:p>
+            <a:pPr algn="ctr"/>
+            <a:r>
+              <a:rPr kumimoji="1" lang="ja-JP" altLang="en-US" sz="1100" b="1" dirty="0">
+                <a:solidFill>
+                  <a:schemeClr val="tx1"/>
+                </a:solidFill>
+                <a:latin typeface="メイリオ" panose="020B0604030504040204" pitchFamily="50" charset="-128"/>
+                <a:ea typeface="メイリオ" panose="020B0604030504040204" pitchFamily="50" charset="-128"/>
+                <a:cs typeface="メイリオ"/>
+              </a:rPr>
+              <a:t>｜ルで</a:t>
+            </a:r>
+            <a:endParaRPr kumimoji="1" lang="en-US" altLang="ja-JP" sz="1100" b="1" dirty="0">
+              <a:solidFill>
+                <a:schemeClr val="tx1"/>
+              </a:solidFill>
+              <a:latin typeface="メイリオ" panose="020B0604030504040204" pitchFamily="50" charset="-128"/>
+              <a:ea typeface="メイリオ" panose="020B0604030504040204" pitchFamily="50" charset="-128"/>
+              <a:cs typeface="メイリオ"/>
+            </a:endParaRPr>
+          </a:p>
+          <a:p>
+            <a:pPr algn="ctr"/>
+            <a:r>
+              <a:rPr kumimoji="1" lang="en-US" altLang="ja-JP" sz="1100" b="1" dirty="0">
+                <a:solidFill>
+                  <a:schemeClr val="tx1"/>
+                </a:solidFill>
+                <a:latin typeface="メイリオ" panose="020B0604030504040204" pitchFamily="50" charset="-128"/>
+                <a:ea typeface="メイリオ" panose="020B0604030504040204" pitchFamily="50" charset="-128"/>
+                <a:cs typeface="メイリオ"/>
+              </a:rPr>
+              <a:t>L</a:t>
+            </a:r>
+            <a:br>
+              <a:rPr kumimoji="1" lang="en-US" altLang="ja-JP" sz="1100" b="1" dirty="0">
+                <a:solidFill>
+                  <a:schemeClr val="tx1"/>
+                </a:solidFill>
+                <a:latin typeface="メイリオ" panose="020B0604030504040204" pitchFamily="50" charset="-128"/>
+                <a:ea typeface="メイリオ" panose="020B0604030504040204" pitchFamily="50" charset="-128"/>
+                <a:cs typeface="メイリオ"/>
+              </a:rPr>
+            </a:br>
+            <a:r>
+              <a:rPr kumimoji="1" lang="en-US" altLang="ja-JP" sz="1100" b="1" dirty="0">
+                <a:solidFill>
+                  <a:schemeClr val="tx1"/>
+                </a:solidFill>
+                <a:latin typeface="メイリオ" panose="020B0604030504040204" pitchFamily="50" charset="-128"/>
+                <a:ea typeface="メイリオ" panose="020B0604030504040204" pitchFamily="50" charset="-128"/>
+                <a:cs typeface="メイリオ"/>
+              </a:rPr>
+              <a:t>I</a:t>
+            </a:r>
+          </a:p>
+          <a:p>
+            <a:pPr algn="ctr"/>
+            <a:r>
+              <a:rPr lang="en-US" altLang="ja-JP" sz="1100" b="1" dirty="0">
+                <a:solidFill>
+                  <a:schemeClr val="tx1"/>
+                </a:solidFill>
+                <a:latin typeface="メイリオ" panose="020B0604030504040204" pitchFamily="50" charset="-128"/>
+                <a:ea typeface="メイリオ" panose="020B0604030504040204" pitchFamily="50" charset="-128"/>
+                <a:cs typeface="メイリオ"/>
+              </a:rPr>
+              <a:t>N</a:t>
+            </a:r>
+            <a:br>
+              <a:rPr lang="en-US" altLang="ja-JP" sz="1100" b="1" dirty="0">
+                <a:solidFill>
+                  <a:schemeClr val="tx1"/>
+                </a:solidFill>
+                <a:latin typeface="メイリオ" panose="020B0604030504040204" pitchFamily="50" charset="-128"/>
+                <a:ea typeface="メイリオ" panose="020B0604030504040204" pitchFamily="50" charset="-128"/>
+                <a:cs typeface="メイリオ"/>
+              </a:rPr>
+            </a:br>
+            <a:r>
+              <a:rPr lang="en-US" altLang="ja-JP" sz="1100" b="1" dirty="0">
+                <a:solidFill>
+                  <a:schemeClr val="tx1"/>
+                </a:solidFill>
+                <a:latin typeface="メイリオ" panose="020B0604030504040204" pitchFamily="50" charset="-128"/>
+                <a:ea typeface="メイリオ" panose="020B0604030504040204" pitchFamily="50" charset="-128"/>
+                <a:cs typeface="メイリオ"/>
+              </a:rPr>
+              <a:t>E</a:t>
+            </a:r>
+          </a:p>
+          <a:p>
+            <a:pPr algn="ctr"/>
+            <a:r>
+              <a:rPr kumimoji="1" lang="ja-JP" altLang="en-US" sz="1100" b="1" dirty="0">
+                <a:solidFill>
+                  <a:schemeClr val="tx1"/>
+                </a:solidFill>
+                <a:latin typeface="メイリオ" panose="020B0604030504040204" pitchFamily="50" charset="-128"/>
+                <a:ea typeface="メイリオ" panose="020B0604030504040204" pitchFamily="50" charset="-128"/>
+                <a:cs typeface="メイリオ"/>
+              </a:rPr>
+              <a:t>動線</a:t>
+            </a:r>
+            <a:endParaRPr kumimoji="1" lang="en-US" altLang="ja-JP" sz="1100" b="1" dirty="0">
+              <a:solidFill>
+                <a:schemeClr val="tx1"/>
+              </a:solidFill>
+              <a:latin typeface="メイリオ" panose="020B0604030504040204" pitchFamily="50" charset="-128"/>
+              <a:ea typeface="メイリオ" panose="020B0604030504040204" pitchFamily="50" charset="-128"/>
+              <a:cs typeface="メイリオ"/>
+            </a:endParaRPr>
+          </a:p>
+          <a:p>
+            <a:pPr algn="ctr"/>
+            <a:r>
+              <a:rPr lang="ja-JP" altLang="en-US" sz="1100" b="1" dirty="0">
+                <a:solidFill>
+                  <a:schemeClr val="tx1"/>
+                </a:solidFill>
+                <a:latin typeface="メイリオ" panose="020B0604030504040204" pitchFamily="50" charset="-128"/>
+                <a:ea typeface="メイリオ" panose="020B0604030504040204" pitchFamily="50" charset="-128"/>
+                <a:cs typeface="メイリオ"/>
+              </a:rPr>
+              <a:t>に</a:t>
+            </a:r>
+            <a:endParaRPr kumimoji="1" lang="en-US" altLang="ja-JP" sz="1100" b="1" dirty="0">
+              <a:solidFill>
+                <a:schemeClr val="tx1"/>
+              </a:solidFill>
+              <a:latin typeface="メイリオ" panose="020B0604030504040204" pitchFamily="50" charset="-128"/>
+              <a:ea typeface="メイリオ" panose="020B0604030504040204" pitchFamily="50" charset="-128"/>
+              <a:cs typeface="メイリオ"/>
+            </a:endParaRPr>
+          </a:p>
+          <a:p>
+            <a:pPr algn="ctr"/>
+            <a:r>
+              <a:rPr kumimoji="1" lang="ja-JP" altLang="en-US" sz="1100" b="1" dirty="0">
+                <a:solidFill>
+                  <a:schemeClr val="tx1"/>
+                </a:solidFill>
+                <a:latin typeface="メイリオ" panose="020B0604030504040204" pitchFamily="50" charset="-128"/>
+                <a:ea typeface="メイリオ" panose="020B0604030504040204" pitchFamily="50" charset="-128"/>
+                <a:cs typeface="メイリオ"/>
+              </a:rPr>
+              <a:t>｜</a:t>
+            </a:r>
+          </a:p>
+        </p:txBody>
+      </p:sp>
+      <p:pic>
+        <p:nvPicPr>
+          <p:cNvPr id="45" name="図 44" descr="グラフィカル ユーザー インターフェイス, アプリケーション, Teams&#10;&#10;AI 生成コンテンツは誤りを含む可能性があります。">
+            <a:extLst>
+              <a:ext uri="{FF2B5EF4-FFF2-40B4-BE49-F238E27FC236}">
+                <a16:creationId xmlns:a16="http://schemas.microsoft.com/office/drawing/2014/main" id="{E91CA7A5-62B3-F1F8-38C3-DDCE33E1CC3D}"/>
+              </a:ext>
+            </a:extLst>
+          </p:cNvPr>
+          <p:cNvPicPr>
+            <a:picLocks noChangeAspect="1"/>
+          </p:cNvPicPr>
+          <p:nvPr/>
+        </p:nvPicPr>
+        <p:blipFill>
+          <a:blip r:embed="rId2" cstate="print">
+            <a:extLst>
+              <a:ext uri="{28A0092B-C50C-407E-A947-70E740481C1C}">
+                <a14:useLocalDpi xmlns:a14="http://schemas.microsoft.com/office/drawing/2010/main" val="0"/>
+              </a:ext>
+            </a:extLst>
+          </a:blip>
+          <a:srcRect t="4580"/>
+          <a:stretch>
+            <a:fillRect/>
+          </a:stretch>
+        </p:blipFill>
+        <p:spPr>
+          <a:xfrm>
+            <a:off x="7999618" y="2128994"/>
+            <a:ext cx="1231081" cy="2085097"/>
+          </a:xfrm>
+          <a:prstGeom prst="rect">
+            <a:avLst/>
+          </a:prstGeom>
+        </p:spPr>
+      </p:pic>
+      <p:pic>
+        <p:nvPicPr>
+          <p:cNvPr id="46" name="図 45" descr="電卓の写真のスマートフォンのスクリーンショット&#10;&#10;AI 生成コンテンツは誤りを含む可能性があります。">
+            <a:extLst>
+              <a:ext uri="{FF2B5EF4-FFF2-40B4-BE49-F238E27FC236}">
+                <a16:creationId xmlns:a16="http://schemas.microsoft.com/office/drawing/2014/main" id="{31EEAD2C-3BE8-0210-FD8E-46D52B30A0AE}"/>
+              </a:ext>
+            </a:extLst>
+          </p:cNvPr>
+          <p:cNvPicPr>
+            <a:picLocks noChangeAspect="1"/>
+          </p:cNvPicPr>
+          <p:nvPr/>
+        </p:nvPicPr>
+        <p:blipFill>
+          <a:blip r:embed="rId3" cstate="print">
+            <a:extLst>
+              <a:ext uri="{28A0092B-C50C-407E-A947-70E740481C1C}">
+                <a14:useLocalDpi xmlns:a14="http://schemas.microsoft.com/office/drawing/2010/main" val="0"/>
+              </a:ext>
+            </a:extLst>
+          </a:blip>
+          <a:srcRect t="4580"/>
+          <a:stretch>
+            <a:fillRect/>
+          </a:stretch>
+        </p:blipFill>
+        <p:spPr>
+          <a:xfrm>
+            <a:off x="7999618" y="4325046"/>
+            <a:ext cx="1231081" cy="2085098"/>
+          </a:xfrm>
+          <a:prstGeom prst="rect">
+            <a:avLst/>
+          </a:prstGeom>
+        </p:spPr>
+      </p:pic>
+      <p:sp>
+        <p:nvSpPr>
+          <p:cNvPr id="48" name="テキスト ボックス 47">
+            <a:extLst>
+              <a:ext uri="{FF2B5EF4-FFF2-40B4-BE49-F238E27FC236}">
+                <a16:creationId xmlns:a16="http://schemas.microsoft.com/office/drawing/2014/main" id="{E989AEB3-EF0E-8885-B426-8B6A5E01F40A}"/>
+              </a:ext>
+            </a:extLst>
+          </p:cNvPr>
+          <p:cNvSpPr txBox="1"/>
+          <p:nvPr/>
+        </p:nvSpPr>
+        <p:spPr>
+          <a:xfrm>
+            <a:off x="5974631" y="2701376"/>
+            <a:ext cx="1859035" cy="430887"/>
+          </a:xfrm>
+          <a:prstGeom prst="rect">
+            <a:avLst/>
+          </a:prstGeom>
+          <a:noFill/>
+        </p:spPr>
+        <p:txBody>
+          <a:bodyPr wrap="square">
+            <a:spAutoFit/>
+          </a:bodyPr>
+          <a:lstStyle/>
+          <a:p>
+            <a:r>
+              <a:rPr kumimoji="1" lang="ja-JP" altLang="en-US" sz="1100" b="1" dirty="0">
+                <a:latin typeface="メイリオ" panose="020B0604030504040204" pitchFamily="50" charset="-128"/>
+                <a:ea typeface="メイリオ" panose="020B0604030504040204" pitchFamily="50" charset="-128"/>
+                <a:cs typeface="メイリオ"/>
+              </a:rPr>
+              <a:t>公式アカウントの</a:t>
+            </a:r>
+            <a:r>
+              <a:rPr lang="ja-JP" altLang="en-US" sz="1100" b="1" dirty="0">
+                <a:latin typeface="メイリオ" panose="020B0604030504040204" pitchFamily="50" charset="-128"/>
+                <a:ea typeface="メイリオ" panose="020B0604030504040204" pitchFamily="50" charset="-128"/>
+                <a:cs typeface="メイリオ"/>
+              </a:rPr>
+              <a:t>友だち</a:t>
+            </a:r>
+            <a:endParaRPr lang="en-US" altLang="ja-JP" sz="1100" b="1" dirty="0">
+              <a:latin typeface="メイリオ" panose="020B0604030504040204" pitchFamily="50" charset="-128"/>
+              <a:ea typeface="メイリオ" panose="020B0604030504040204" pitchFamily="50" charset="-128"/>
+              <a:cs typeface="メイリオ"/>
+            </a:endParaRPr>
+          </a:p>
+          <a:p>
+            <a:r>
+              <a:rPr lang="ja-JP" altLang="en-US" sz="1100" b="1" dirty="0">
+                <a:latin typeface="メイリオ" panose="020B0604030504040204" pitchFamily="50" charset="-128"/>
+                <a:ea typeface="メイリオ" panose="020B0604030504040204" pitchFamily="50" charset="-128"/>
+                <a:cs typeface="メイリオ"/>
+              </a:rPr>
+              <a:t>登録ページ</a:t>
+            </a:r>
+            <a:r>
+              <a:rPr lang="ja-JP" altLang="en-US" sz="1100" dirty="0">
+                <a:latin typeface="メイリオ" panose="020B0604030504040204" pitchFamily="50" charset="-128"/>
+                <a:ea typeface="メイリオ" panose="020B0604030504040204" pitchFamily="50" charset="-128"/>
+                <a:cs typeface="メイリオ"/>
+              </a:rPr>
+              <a:t>へ遷移する。</a:t>
+            </a:r>
+            <a:endParaRPr kumimoji="1" lang="ja-JP" altLang="en-US" sz="1100" dirty="0">
+              <a:latin typeface="メイリオ" panose="020B0604030504040204" pitchFamily="50" charset="-128"/>
+              <a:ea typeface="メイリオ" panose="020B0604030504040204" pitchFamily="50" charset="-128"/>
+              <a:cs typeface="メイリオ"/>
+            </a:endParaRPr>
+          </a:p>
+        </p:txBody>
+      </p:sp>
+      <p:sp>
+        <p:nvSpPr>
+          <p:cNvPr id="49" name="テキスト ボックス 48">
+            <a:extLst>
+              <a:ext uri="{FF2B5EF4-FFF2-40B4-BE49-F238E27FC236}">
+                <a16:creationId xmlns:a16="http://schemas.microsoft.com/office/drawing/2014/main" id="{4E6D08E3-E0B3-1DF4-0533-E4EE67240415}"/>
+              </a:ext>
+            </a:extLst>
+          </p:cNvPr>
+          <p:cNvSpPr txBox="1"/>
+          <p:nvPr/>
+        </p:nvSpPr>
+        <p:spPr>
+          <a:xfrm>
+            <a:off x="5971905" y="4914274"/>
+            <a:ext cx="1859035" cy="1384995"/>
+          </a:xfrm>
+          <a:prstGeom prst="rect">
+            <a:avLst/>
+          </a:prstGeom>
+          <a:noFill/>
+        </p:spPr>
+        <p:txBody>
+          <a:bodyPr wrap="square">
+            <a:spAutoFit/>
+          </a:bodyPr>
+          <a:lstStyle/>
+          <a:p>
+            <a:r>
+              <a:rPr kumimoji="1" lang="ja-JP" altLang="en-US" sz="1100" b="1" dirty="0">
+                <a:latin typeface="メイリオ" panose="020B0604030504040204" pitchFamily="50" charset="-128"/>
+                <a:ea typeface="メイリオ" panose="020B0604030504040204" pitchFamily="50" charset="-128"/>
+                <a:cs typeface="メイリオ"/>
+              </a:rPr>
+              <a:t>公式アカウントの</a:t>
+            </a:r>
+            <a:r>
+              <a:rPr lang="ja-JP" altLang="en-US" sz="1100" b="1" dirty="0">
+                <a:latin typeface="メイリオ" panose="020B0604030504040204" pitchFamily="50" charset="-128"/>
+                <a:ea typeface="メイリオ" panose="020B0604030504040204" pitchFamily="50" charset="-128"/>
+                <a:cs typeface="メイリオ"/>
+              </a:rPr>
+              <a:t>トーク</a:t>
+            </a:r>
+            <a:endParaRPr lang="en-US" altLang="ja-JP" sz="1100" b="1" dirty="0">
+              <a:latin typeface="メイリオ" panose="020B0604030504040204" pitchFamily="50" charset="-128"/>
+              <a:ea typeface="メイリオ" panose="020B0604030504040204" pitchFamily="50" charset="-128"/>
+              <a:cs typeface="メイリオ"/>
+            </a:endParaRPr>
+          </a:p>
+          <a:p>
+            <a:r>
+              <a:rPr lang="ja-JP" altLang="en-US" sz="1100" b="1" dirty="0">
+                <a:latin typeface="メイリオ" panose="020B0604030504040204" pitchFamily="50" charset="-128"/>
+                <a:ea typeface="メイリオ" panose="020B0604030504040204" pitchFamily="50" charset="-128"/>
+                <a:cs typeface="メイリオ"/>
+              </a:rPr>
+              <a:t>画面</a:t>
+            </a:r>
+            <a:r>
+              <a:rPr lang="ja-JP" altLang="en-US" sz="1100" dirty="0">
+                <a:latin typeface="メイリオ" panose="020B0604030504040204" pitchFamily="50" charset="-128"/>
+                <a:ea typeface="メイリオ" panose="020B0604030504040204" pitchFamily="50" charset="-128"/>
+                <a:cs typeface="メイリオ"/>
+              </a:rPr>
+              <a:t>へ遷移する。</a:t>
+            </a:r>
+            <a:endParaRPr lang="en-US" altLang="ja-JP" sz="1100" dirty="0">
+              <a:latin typeface="メイリオ" panose="020B0604030504040204" pitchFamily="50" charset="-128"/>
+              <a:ea typeface="メイリオ" panose="020B0604030504040204" pitchFamily="50" charset="-128"/>
+              <a:cs typeface="メイリオ"/>
+            </a:endParaRPr>
+          </a:p>
+          <a:p>
+            <a:r>
+              <a:rPr kumimoji="1" lang="en-US" altLang="ja-JP" sz="1000" dirty="0">
+                <a:solidFill>
+                  <a:srgbClr val="FF0000"/>
+                </a:solidFill>
+                <a:latin typeface="メイリオ" panose="020B0604030504040204" pitchFamily="50" charset="-128"/>
+                <a:ea typeface="メイリオ" panose="020B0604030504040204" pitchFamily="50" charset="-128"/>
+                <a:cs typeface="メイリオ"/>
+              </a:rPr>
+              <a:t>※</a:t>
+            </a:r>
+            <a:r>
+              <a:rPr kumimoji="1" lang="ja-JP" altLang="en-US" sz="1000" dirty="0">
+                <a:solidFill>
+                  <a:srgbClr val="FF0000"/>
+                </a:solidFill>
+                <a:latin typeface="メイリオ" panose="020B0604030504040204" pitchFamily="50" charset="-128"/>
+                <a:ea typeface="メイリオ" panose="020B0604030504040204" pitchFamily="50" charset="-128"/>
+                <a:cs typeface="メイリオ"/>
+              </a:rPr>
+              <a:t>設定によりフォーム入力</a:t>
+            </a:r>
+            <a:endParaRPr kumimoji="1" lang="en-US" altLang="ja-JP" sz="1000" dirty="0">
+              <a:solidFill>
+                <a:srgbClr val="FF0000"/>
+              </a:solidFill>
+              <a:latin typeface="メイリオ" panose="020B0604030504040204" pitchFamily="50" charset="-128"/>
+              <a:ea typeface="メイリオ" panose="020B0604030504040204" pitchFamily="50" charset="-128"/>
+              <a:cs typeface="メイリオ"/>
+            </a:endParaRPr>
+          </a:p>
+          <a:p>
+            <a:r>
+              <a:rPr lang="ja-JP" altLang="en-US" sz="1000" dirty="0">
+                <a:solidFill>
+                  <a:srgbClr val="FF0000"/>
+                </a:solidFill>
+                <a:latin typeface="メイリオ" panose="020B0604030504040204" pitchFamily="50" charset="-128"/>
+                <a:ea typeface="メイリオ" panose="020B0604030504040204" pitchFamily="50" charset="-128"/>
+                <a:cs typeface="メイリオ"/>
+              </a:rPr>
+              <a:t>　内容を踏襲した入力画面</a:t>
+            </a:r>
+            <a:endParaRPr lang="en-US" altLang="ja-JP" sz="1000" dirty="0">
+              <a:solidFill>
+                <a:srgbClr val="FF0000"/>
+              </a:solidFill>
+              <a:latin typeface="メイリオ" panose="020B0604030504040204" pitchFamily="50" charset="-128"/>
+              <a:ea typeface="メイリオ" panose="020B0604030504040204" pitchFamily="50" charset="-128"/>
+              <a:cs typeface="メイリオ"/>
+            </a:endParaRPr>
+          </a:p>
+          <a:p>
+            <a:r>
+              <a:rPr kumimoji="1" lang="ja-JP" altLang="en-US" sz="1000" dirty="0">
+                <a:solidFill>
+                  <a:srgbClr val="FF0000"/>
+                </a:solidFill>
+                <a:latin typeface="メイリオ" panose="020B0604030504040204" pitchFamily="50" charset="-128"/>
+                <a:ea typeface="メイリオ" panose="020B0604030504040204" pitchFamily="50" charset="-128"/>
+                <a:cs typeface="メイリオ"/>
+              </a:rPr>
+              <a:t>　を表示させることが可能。</a:t>
+            </a:r>
+            <a:endParaRPr kumimoji="1" lang="en-US" altLang="ja-JP" sz="1000" dirty="0">
+              <a:solidFill>
+                <a:srgbClr val="FF0000"/>
+              </a:solidFill>
+              <a:latin typeface="メイリオ" panose="020B0604030504040204" pitchFamily="50" charset="-128"/>
+              <a:ea typeface="メイリオ" panose="020B0604030504040204" pitchFamily="50" charset="-128"/>
+              <a:cs typeface="メイリオ"/>
+            </a:endParaRPr>
+          </a:p>
+          <a:p>
+            <a:endParaRPr lang="en-US" altLang="ja-JP" sz="1000" dirty="0">
+              <a:solidFill>
+                <a:srgbClr val="FF0000"/>
+              </a:solidFill>
+              <a:latin typeface="メイリオ" panose="020B0604030504040204" pitchFamily="50" charset="-128"/>
+              <a:ea typeface="メイリオ" panose="020B0604030504040204" pitchFamily="50" charset="-128"/>
+              <a:cs typeface="メイリオ"/>
+            </a:endParaRPr>
+          </a:p>
+          <a:p>
+            <a:r>
+              <a:rPr lang="ja-JP" altLang="en-US" sz="1100" b="1" dirty="0">
+                <a:latin typeface="メイリオ" panose="020B0604030504040204" pitchFamily="50" charset="-128"/>
+                <a:ea typeface="メイリオ" panose="020B0604030504040204" pitchFamily="50" charset="-128"/>
+                <a:cs typeface="メイリオ"/>
+              </a:rPr>
+              <a:t>↓</a:t>
+            </a:r>
+            <a:endParaRPr lang="en-US" altLang="ja-JP" sz="1100" b="1" dirty="0">
+              <a:latin typeface="メイリオ" panose="020B0604030504040204" pitchFamily="50" charset="-128"/>
+              <a:ea typeface="メイリオ" panose="020B0604030504040204" pitchFamily="50" charset="-128"/>
+              <a:cs typeface="メイリオ"/>
+            </a:endParaRPr>
+          </a:p>
+          <a:p>
+            <a:r>
+              <a:rPr kumimoji="1" lang="ja-JP" altLang="en-US" sz="1100" b="1" dirty="0">
+                <a:latin typeface="メイリオ" panose="020B0604030504040204" pitchFamily="50" charset="-128"/>
+                <a:ea typeface="メイリオ" panose="020B0604030504040204" pitchFamily="50" charset="-128"/>
+                <a:cs typeface="メイリオ"/>
+              </a:rPr>
+              <a:t>配信セグメントに利用可</a:t>
+            </a:r>
+            <a:endParaRPr kumimoji="1" lang="ja-JP" altLang="en-US" sz="1100" dirty="0">
+              <a:latin typeface="メイリオ" panose="020B0604030504040204" pitchFamily="50" charset="-128"/>
+              <a:ea typeface="メイリオ" panose="020B0604030504040204" pitchFamily="50" charset="-128"/>
+              <a:cs typeface="メイリオ"/>
+            </a:endParaRPr>
+          </a:p>
+        </p:txBody>
+      </p:sp>
+      <p:pic>
+        <p:nvPicPr>
+          <p:cNvPr id="56" name="図 55">
+            <a:extLst>
+              <a:ext uri="{FF2B5EF4-FFF2-40B4-BE49-F238E27FC236}">
+                <a16:creationId xmlns:a16="http://schemas.microsoft.com/office/drawing/2014/main" id="{0B7B313D-7D5F-4357-9B38-DFC3DBC5FCF6}"/>
+              </a:ext>
+            </a:extLst>
+          </p:cNvPr>
+          <p:cNvPicPr>
+            <a:picLocks noChangeAspect="1"/>
+          </p:cNvPicPr>
+          <p:nvPr/>
+        </p:nvPicPr>
+        <p:blipFill>
+          <a:blip r:embed="rId4"/>
+          <a:stretch>
+            <a:fillRect/>
+          </a:stretch>
+        </p:blipFill>
+        <p:spPr>
+          <a:xfrm>
+            <a:off x="8048301" y="3085325"/>
+            <a:ext cx="1133712" cy="110223"/>
+          </a:xfrm>
+          <a:prstGeom prst="rect">
+            <a:avLst/>
+          </a:prstGeom>
+        </p:spPr>
+      </p:pic>
+      <p:pic>
+        <p:nvPicPr>
+          <p:cNvPr id="57" name="図 56">
+            <a:extLst>
+              <a:ext uri="{FF2B5EF4-FFF2-40B4-BE49-F238E27FC236}">
+                <a16:creationId xmlns:a16="http://schemas.microsoft.com/office/drawing/2014/main" id="{A8EA42C4-338F-850B-B276-B83DC2A73148}"/>
+              </a:ext>
+            </a:extLst>
+          </p:cNvPr>
+          <p:cNvPicPr>
+            <a:picLocks noChangeAspect="1"/>
+          </p:cNvPicPr>
+          <p:nvPr/>
+        </p:nvPicPr>
+        <p:blipFill>
+          <a:blip r:embed="rId5"/>
+          <a:stretch>
+            <a:fillRect/>
+          </a:stretch>
+        </p:blipFill>
+        <p:spPr>
+          <a:xfrm>
+            <a:off x="8378027" y="3091633"/>
+            <a:ext cx="479964" cy="106659"/>
+          </a:xfrm>
+          <a:prstGeom prst="rect">
+            <a:avLst/>
+          </a:prstGeom>
+        </p:spPr>
+      </p:pic>
+      <p:pic>
+        <p:nvPicPr>
+          <p:cNvPr id="58" name="図 57">
+            <a:extLst>
+              <a:ext uri="{FF2B5EF4-FFF2-40B4-BE49-F238E27FC236}">
+                <a16:creationId xmlns:a16="http://schemas.microsoft.com/office/drawing/2014/main" id="{CCB04072-A708-EEE7-1345-D4C9E9FA9C1D}"/>
+              </a:ext>
+            </a:extLst>
+          </p:cNvPr>
+          <p:cNvPicPr>
+            <a:picLocks noChangeAspect="1"/>
+          </p:cNvPicPr>
+          <p:nvPr/>
+        </p:nvPicPr>
+        <p:blipFill>
+          <a:blip r:embed="rId5"/>
+          <a:stretch>
+            <a:fillRect/>
+          </a:stretch>
+        </p:blipFill>
+        <p:spPr>
+          <a:xfrm>
+            <a:off x="8395919" y="4322141"/>
+            <a:ext cx="334412" cy="74315"/>
+          </a:xfrm>
+          <a:prstGeom prst="rect">
+            <a:avLst/>
+          </a:prstGeom>
+        </p:spPr>
+      </p:pic>
+      <p:pic>
+        <p:nvPicPr>
+          <p:cNvPr id="59" name="図 58">
+            <a:extLst>
+              <a:ext uri="{FF2B5EF4-FFF2-40B4-BE49-F238E27FC236}">
+                <a16:creationId xmlns:a16="http://schemas.microsoft.com/office/drawing/2014/main" id="{EDED354B-362F-AAF7-76A6-52D8547EDC91}"/>
+              </a:ext>
+            </a:extLst>
+          </p:cNvPr>
+          <p:cNvPicPr>
+            <a:picLocks noChangeAspect="1"/>
+          </p:cNvPicPr>
+          <p:nvPr/>
+        </p:nvPicPr>
+        <p:blipFill>
+          <a:blip r:embed="rId5"/>
+          <a:stretch>
+            <a:fillRect/>
+          </a:stretch>
+        </p:blipFill>
+        <p:spPr>
+          <a:xfrm>
+            <a:off x="8548319" y="4474541"/>
+            <a:ext cx="334412" cy="74315"/>
+          </a:xfrm>
+          <a:prstGeom prst="rect">
+            <a:avLst/>
+          </a:prstGeom>
+        </p:spPr>
+      </p:pic>
+      <p:sp>
+        <p:nvSpPr>
+          <p:cNvPr id="1030" name="楕円 1029">
+            <a:extLst>
+              <a:ext uri="{FF2B5EF4-FFF2-40B4-BE49-F238E27FC236}">
+                <a16:creationId xmlns:a16="http://schemas.microsoft.com/office/drawing/2014/main" id="{A0934BB8-8F8D-D4F0-8D59-8F32A6A6E03A}"/>
+              </a:ext>
+            </a:extLst>
+          </p:cNvPr>
+          <p:cNvSpPr/>
+          <p:nvPr/>
+        </p:nvSpPr>
+        <p:spPr>
+          <a:xfrm>
+            <a:off x="8414131" y="2644225"/>
+            <a:ext cx="396000" cy="396000"/>
+          </a:xfrm>
+          <a:prstGeom prst="ellipse">
+            <a:avLst/>
+          </a:prstGeom>
+          <a:solidFill>
+            <a:schemeClr val="bg1">
+              <a:lumMod val="95000"/>
+            </a:schemeClr>
+          </a:solidFill>
+          <a:ln w="9525">
+            <a:solidFill>
+              <a:schemeClr val="tx1"/>
+            </a:solidFill>
+          </a:ln>
+        </p:spPr>
+        <p:style>
+          <a:lnRef idx="2">
+            <a:schemeClr val="accent1">
+              <a:shade val="15000"/>
+            </a:schemeClr>
+          </a:lnRef>
+          <a:fillRef idx="1">
+            <a:schemeClr val="accent1"/>
+          </a:fillRef>
+          <a:effectRef idx="0">
+            <a:schemeClr val="accent1"/>
+          </a:effectRef>
+          <a:fontRef idx="minor">
+            <a:schemeClr val="lt1"/>
+          </a:fontRef>
+        </p:style>
+        <p:txBody>
+          <a:bodyPr rtlCol="0" anchor="ctr"/>
+          <a:lstStyle/>
+          <a:p>
+            <a:pPr algn="ctr"/>
+            <a:r>
+              <a:rPr kumimoji="1" lang="ja-JP" altLang="en-US" sz="800" dirty="0">
+                <a:solidFill>
+                  <a:schemeClr val="tx1"/>
+                </a:solidFill>
+                <a:latin typeface="メイリオ" panose="020B0604030504040204" pitchFamily="50" charset="-128"/>
+                <a:ea typeface="メイリオ" panose="020B0604030504040204" pitchFamily="50" charset="-128"/>
+                <a:cs typeface="メイリオ"/>
+              </a:rPr>
+              <a:t>ロゴ</a:t>
+            </a:r>
+          </a:p>
+        </p:txBody>
+      </p:sp>
+      <p:sp>
+        <p:nvSpPr>
+          <p:cNvPr id="34" name="正方形/長方形 33">
+            <a:extLst>
+              <a:ext uri="{FF2B5EF4-FFF2-40B4-BE49-F238E27FC236}">
+                <a16:creationId xmlns:a16="http://schemas.microsoft.com/office/drawing/2014/main" id="{A593FC72-954C-48DC-E845-1A5FCE4C9E00}"/>
+              </a:ext>
+            </a:extLst>
+          </p:cNvPr>
+          <p:cNvSpPr/>
+          <p:nvPr/>
+        </p:nvSpPr>
+        <p:spPr>
+          <a:xfrm>
+            <a:off x="315283" y="2196668"/>
+            <a:ext cx="1778402" cy="3994401"/>
+          </a:xfrm>
+          <a:prstGeom prst="rect">
+            <a:avLst/>
+          </a:prstGeom>
+          <a:noFill/>
+          <a:ln>
+            <a:solidFill>
+              <a:schemeClr val="tx2">
+                <a:lumMod val="20000"/>
+                <a:lumOff val="80000"/>
+              </a:schemeClr>
+            </a:solidFill>
+          </a:ln>
+        </p:spPr>
+        <p:style>
+          <a:lnRef idx="2">
+            <a:schemeClr val="accent1">
+              <a:shade val="15000"/>
+            </a:schemeClr>
+          </a:lnRef>
+          <a:fillRef idx="1">
+            <a:schemeClr val="accent1"/>
+          </a:fillRef>
+          <a:effectRef idx="0">
+            <a:schemeClr val="accent1"/>
+          </a:effectRef>
+          <a:fontRef idx="minor">
+            <a:schemeClr val="lt1"/>
+          </a:fontRef>
+        </p:style>
+        <p:txBody>
+          <a:bodyPr rtlCol="0" anchor="ctr"/>
+          <a:lstStyle/>
+          <a:p>
+            <a:pPr algn="ctr"/>
+            <a:endParaRPr kumimoji="1" lang="ja-JP" altLang="en-US">
+              <a:latin typeface="メイリオ"/>
+              <a:ea typeface="メイリオ"/>
+              <a:cs typeface="メイリオ"/>
+            </a:endParaRPr>
+          </a:p>
+        </p:txBody>
+      </p:sp>
+      <p:sp>
+        <p:nvSpPr>
+          <p:cNvPr id="35" name="二等辺三角形 34">
+            <a:extLst>
+              <a:ext uri="{FF2B5EF4-FFF2-40B4-BE49-F238E27FC236}">
+                <a16:creationId xmlns:a16="http://schemas.microsoft.com/office/drawing/2014/main" id="{D9FB7255-AF30-7B82-6180-D447A3754744}"/>
+              </a:ext>
+            </a:extLst>
+          </p:cNvPr>
+          <p:cNvSpPr/>
+          <p:nvPr/>
+        </p:nvSpPr>
+        <p:spPr>
+          <a:xfrm rot="5400000">
+            <a:off x="2108593" y="2360745"/>
+            <a:ext cx="252701" cy="198744"/>
+          </a:xfrm>
+          <a:prstGeom prst="triangle">
+            <a:avLst/>
+          </a:prstGeom>
+          <a:solidFill>
+            <a:schemeClr val="tx2"/>
+          </a:solidFill>
+          <a:ln>
+            <a:noFill/>
+          </a:ln>
+        </p:spPr>
+        <p:style>
+          <a:lnRef idx="2">
+            <a:schemeClr val="accent1">
+              <a:shade val="15000"/>
+            </a:schemeClr>
+          </a:lnRef>
+          <a:fillRef idx="1">
+            <a:schemeClr val="accent1"/>
+          </a:fillRef>
+          <a:effectRef idx="0">
+            <a:schemeClr val="accent1"/>
+          </a:effectRef>
+          <a:fontRef idx="minor">
+            <a:schemeClr val="lt1"/>
+          </a:fontRef>
+        </p:style>
+        <p:txBody>
+          <a:bodyPr rtlCol="0" anchor="ctr"/>
+          <a:lstStyle/>
+          <a:p>
+            <a:pPr algn="ctr"/>
+            <a:endParaRPr kumimoji="1" lang="ja-JP" altLang="en-US">
+              <a:latin typeface="メイリオ"/>
+              <a:ea typeface="メイリオ"/>
+              <a:cs typeface="メイリオ"/>
+            </a:endParaRPr>
+          </a:p>
+        </p:txBody>
+      </p:sp>
+      <p:sp>
+        <p:nvSpPr>
+          <p:cNvPr id="36" name="二等辺三角形 35">
+            <a:extLst>
+              <a:ext uri="{FF2B5EF4-FFF2-40B4-BE49-F238E27FC236}">
+                <a16:creationId xmlns:a16="http://schemas.microsoft.com/office/drawing/2014/main" id="{626832A8-575E-5E2B-73F4-BE5567514E57}"/>
+              </a:ext>
+            </a:extLst>
+          </p:cNvPr>
+          <p:cNvSpPr/>
+          <p:nvPr/>
+        </p:nvSpPr>
+        <p:spPr>
+          <a:xfrm rot="5400000">
+            <a:off x="2225165" y="2360745"/>
+            <a:ext cx="252701" cy="198744"/>
+          </a:xfrm>
+          <a:prstGeom prst="triangle">
+            <a:avLst/>
+          </a:prstGeom>
+          <a:solidFill>
+            <a:schemeClr val="tx2"/>
+          </a:solidFill>
+          <a:ln>
+            <a:noFill/>
+          </a:ln>
+        </p:spPr>
+        <p:style>
+          <a:lnRef idx="2">
+            <a:schemeClr val="accent1">
+              <a:shade val="15000"/>
+            </a:schemeClr>
+          </a:lnRef>
+          <a:fillRef idx="1">
+            <a:schemeClr val="accent1"/>
+          </a:fillRef>
+          <a:effectRef idx="0">
+            <a:schemeClr val="accent1"/>
+          </a:effectRef>
+          <a:fontRef idx="minor">
+            <a:schemeClr val="lt1"/>
+          </a:fontRef>
+        </p:style>
+        <p:txBody>
+          <a:bodyPr rtlCol="0" anchor="ctr"/>
+          <a:lstStyle/>
+          <a:p>
+            <a:pPr algn="ctr"/>
+            <a:endParaRPr kumimoji="1" lang="ja-JP" altLang="en-US">
+              <a:latin typeface="メイリオ"/>
+              <a:ea typeface="メイリオ"/>
+              <a:cs typeface="メイリオ"/>
+            </a:endParaRPr>
+          </a:p>
+        </p:txBody>
+      </p:sp>
+      <p:sp>
+        <p:nvSpPr>
+          <p:cNvPr id="37" name="二等辺三角形 36">
+            <a:extLst>
+              <a:ext uri="{FF2B5EF4-FFF2-40B4-BE49-F238E27FC236}">
+                <a16:creationId xmlns:a16="http://schemas.microsoft.com/office/drawing/2014/main" id="{9D8E2C96-1207-00B8-6FC3-23370EFD7A03}"/>
+              </a:ext>
+            </a:extLst>
+          </p:cNvPr>
+          <p:cNvSpPr/>
+          <p:nvPr/>
+        </p:nvSpPr>
+        <p:spPr>
+          <a:xfrm rot="5400000">
+            <a:off x="2341737" y="2360745"/>
+            <a:ext cx="252701" cy="198744"/>
+          </a:xfrm>
+          <a:prstGeom prst="triangle">
+            <a:avLst/>
+          </a:prstGeom>
+          <a:solidFill>
+            <a:schemeClr val="tx2"/>
+          </a:solidFill>
+          <a:ln>
+            <a:noFill/>
+          </a:ln>
+        </p:spPr>
+        <p:style>
+          <a:lnRef idx="2">
+            <a:schemeClr val="accent1">
+              <a:shade val="15000"/>
+            </a:schemeClr>
+          </a:lnRef>
+          <a:fillRef idx="1">
+            <a:schemeClr val="accent1"/>
+          </a:fillRef>
+          <a:effectRef idx="0">
+            <a:schemeClr val="accent1"/>
+          </a:effectRef>
+          <a:fontRef idx="minor">
+            <a:schemeClr val="lt1"/>
+          </a:fontRef>
+        </p:style>
+        <p:txBody>
+          <a:bodyPr rtlCol="0" anchor="ctr"/>
+          <a:lstStyle/>
+          <a:p>
+            <a:pPr algn="ctr"/>
+            <a:endParaRPr kumimoji="1" lang="ja-JP" altLang="en-US">
+              <a:latin typeface="メイリオ"/>
+              <a:ea typeface="メイリオ"/>
+              <a:cs typeface="メイリオ"/>
+            </a:endParaRPr>
+          </a:p>
+        </p:txBody>
+      </p:sp>
+      <p:sp>
+        <p:nvSpPr>
+          <p:cNvPr id="38" name="正方形/長方形 37">
+            <a:extLst>
+              <a:ext uri="{FF2B5EF4-FFF2-40B4-BE49-F238E27FC236}">
+                <a16:creationId xmlns:a16="http://schemas.microsoft.com/office/drawing/2014/main" id="{28671F13-F479-AFF6-9832-C7C00D2D05EE}"/>
+              </a:ext>
+            </a:extLst>
+          </p:cNvPr>
+          <p:cNvSpPr/>
+          <p:nvPr/>
+        </p:nvSpPr>
+        <p:spPr>
+          <a:xfrm>
+            <a:off x="614547" y="4198381"/>
+            <a:ext cx="1154315" cy="244151"/>
+          </a:xfrm>
+          <a:prstGeom prst="rect">
+            <a:avLst/>
+          </a:prstGeom>
+          <a:solidFill>
+            <a:schemeClr val="bg1">
+              <a:lumMod val="75000"/>
+            </a:schemeClr>
+          </a:solidFill>
+          <a:ln>
+            <a:noFill/>
+          </a:ln>
+        </p:spPr>
+        <p:style>
+          <a:lnRef idx="2">
+            <a:schemeClr val="accent1">
+              <a:shade val="15000"/>
+            </a:schemeClr>
+          </a:lnRef>
+          <a:fillRef idx="1">
+            <a:schemeClr val="accent1"/>
+          </a:fillRef>
+          <a:effectRef idx="0">
+            <a:schemeClr val="accent1"/>
+          </a:effectRef>
+          <a:fontRef idx="minor">
+            <a:schemeClr val="lt1"/>
+          </a:fontRef>
+        </p:style>
+        <p:txBody>
+          <a:bodyPr rtlCol="0" anchor="ctr"/>
+          <a:lstStyle/>
+          <a:p>
+            <a:pPr algn="ctr"/>
+            <a:r>
+              <a:rPr kumimoji="1" lang="ja-JP" altLang="en-US" sz="1100" b="1" dirty="0">
+                <a:latin typeface="メイリオ" panose="020B0604030504040204" pitchFamily="50" charset="-128"/>
+                <a:ea typeface="メイリオ" panose="020B0604030504040204" pitchFamily="50" charset="-128"/>
+                <a:cs typeface="メイリオ"/>
+              </a:rPr>
+              <a:t>フォーム</a:t>
+            </a:r>
+          </a:p>
+        </p:txBody>
+      </p:sp>
+      <p:pic>
+        <p:nvPicPr>
+          <p:cNvPr id="40" name="図 39" descr="テキスト, 手紙&#10;&#10;AI 生成コンテンツは誤りを含む可能性があります。">
+            <a:extLst>
+              <a:ext uri="{FF2B5EF4-FFF2-40B4-BE49-F238E27FC236}">
+                <a16:creationId xmlns:a16="http://schemas.microsoft.com/office/drawing/2014/main" id="{2B8DDCE0-83B3-5BAA-0FFE-3D329FBE2D94}"/>
+              </a:ext>
+            </a:extLst>
+          </p:cNvPr>
+          <p:cNvPicPr>
+            <a:picLocks noChangeAspect="1"/>
+          </p:cNvPicPr>
+          <p:nvPr/>
+        </p:nvPicPr>
+        <p:blipFill>
+          <a:blip r:embed="rId6" cstate="print">
+            <a:extLst>
+              <a:ext uri="{28A0092B-C50C-407E-A947-70E740481C1C}">
+                <a14:useLocalDpi xmlns:a14="http://schemas.microsoft.com/office/drawing/2010/main" val="0"/>
+              </a:ext>
+            </a:extLst>
+          </a:blip>
+          <a:srcRect t="4580"/>
+          <a:stretch>
+            <a:fillRect/>
+          </a:stretch>
+        </p:blipFill>
+        <p:spPr>
+          <a:xfrm>
+            <a:off x="663353" y="2289246"/>
+            <a:ext cx="1048252" cy="1775437"/>
+          </a:xfrm>
+          <a:prstGeom prst="rect">
+            <a:avLst/>
+          </a:prstGeom>
+        </p:spPr>
+      </p:pic>
+      <p:pic>
+        <p:nvPicPr>
+          <p:cNvPr id="41" name="図 40">
+            <a:extLst>
+              <a:ext uri="{FF2B5EF4-FFF2-40B4-BE49-F238E27FC236}">
+                <a16:creationId xmlns:a16="http://schemas.microsoft.com/office/drawing/2014/main" id="{EE7C7FD3-78CB-4D67-F96A-D6F8017FE224}"/>
+              </a:ext>
+            </a:extLst>
+          </p:cNvPr>
+          <p:cNvPicPr>
+            <a:picLocks noChangeAspect="1"/>
+          </p:cNvPicPr>
+          <p:nvPr/>
+        </p:nvPicPr>
+        <p:blipFill>
+          <a:blip r:embed="rId7"/>
+          <a:stretch>
+            <a:fillRect/>
+          </a:stretch>
+        </p:blipFill>
+        <p:spPr>
+          <a:xfrm>
+            <a:off x="641171" y="2325575"/>
+            <a:ext cx="494484" cy="86136"/>
+          </a:xfrm>
+          <a:prstGeom prst="rect">
+            <a:avLst/>
+          </a:prstGeom>
+        </p:spPr>
+      </p:pic>
+      <p:pic>
+        <p:nvPicPr>
+          <p:cNvPr id="42" name="図 41">
+            <a:extLst>
+              <a:ext uri="{FF2B5EF4-FFF2-40B4-BE49-F238E27FC236}">
+                <a16:creationId xmlns:a16="http://schemas.microsoft.com/office/drawing/2014/main" id="{2E6CA8C2-2D04-CD9A-C431-4766768BBF3D}"/>
+              </a:ext>
+            </a:extLst>
+          </p:cNvPr>
+          <p:cNvPicPr>
+            <a:picLocks noChangeAspect="1"/>
+          </p:cNvPicPr>
+          <p:nvPr/>
+        </p:nvPicPr>
+        <p:blipFill>
+          <a:blip r:embed="rId7"/>
+          <a:stretch>
+            <a:fillRect/>
+          </a:stretch>
+        </p:blipFill>
+        <p:spPr>
+          <a:xfrm>
+            <a:off x="630233" y="2328011"/>
+            <a:ext cx="494484" cy="86136"/>
+          </a:xfrm>
+          <a:prstGeom prst="rect">
+            <a:avLst/>
+          </a:prstGeom>
+        </p:spPr>
+      </p:pic>
+      <p:pic>
+        <p:nvPicPr>
+          <p:cNvPr id="47" name="図 46">
+            <a:extLst>
+              <a:ext uri="{FF2B5EF4-FFF2-40B4-BE49-F238E27FC236}">
+                <a16:creationId xmlns:a16="http://schemas.microsoft.com/office/drawing/2014/main" id="{E5BE860E-2799-E5F4-ADCA-4ADBD44E0D0C}"/>
+              </a:ext>
+            </a:extLst>
+          </p:cNvPr>
+          <p:cNvPicPr>
+            <a:picLocks noChangeAspect="1"/>
+          </p:cNvPicPr>
+          <p:nvPr/>
+        </p:nvPicPr>
+        <p:blipFill>
+          <a:blip r:embed="rId7"/>
+          <a:stretch>
+            <a:fillRect/>
+          </a:stretch>
+        </p:blipFill>
+        <p:spPr>
+          <a:xfrm>
+            <a:off x="810116" y="3773334"/>
+            <a:ext cx="494484" cy="86136"/>
+          </a:xfrm>
+          <a:prstGeom prst="rect">
+            <a:avLst/>
+          </a:prstGeom>
+        </p:spPr>
+      </p:pic>
+      <p:pic>
+        <p:nvPicPr>
+          <p:cNvPr id="55" name="図 54">
+            <a:extLst>
+              <a:ext uri="{FF2B5EF4-FFF2-40B4-BE49-F238E27FC236}">
+                <a16:creationId xmlns:a16="http://schemas.microsoft.com/office/drawing/2014/main" id="{8AF12F67-4C9A-867F-4608-8FE9DA811630}"/>
+              </a:ext>
+            </a:extLst>
+          </p:cNvPr>
+          <p:cNvPicPr>
+            <a:picLocks noChangeAspect="1"/>
+          </p:cNvPicPr>
+          <p:nvPr/>
+        </p:nvPicPr>
+        <p:blipFill>
+          <a:blip r:embed="rId8"/>
+          <a:stretch>
+            <a:fillRect/>
+          </a:stretch>
+        </p:blipFill>
+        <p:spPr>
+          <a:xfrm>
+            <a:off x="647157" y="2445202"/>
+            <a:ext cx="1076073" cy="1468487"/>
+          </a:xfrm>
+          <a:prstGeom prst="rect">
+            <a:avLst/>
+          </a:prstGeom>
+        </p:spPr>
+      </p:pic>
+      <p:pic>
+        <p:nvPicPr>
+          <p:cNvPr id="1024" name="図 1023">
+            <a:extLst>
+              <a:ext uri="{FF2B5EF4-FFF2-40B4-BE49-F238E27FC236}">
+                <a16:creationId xmlns:a16="http://schemas.microsoft.com/office/drawing/2014/main" id="{E5E4719A-E6F5-34E0-F2FD-37322E2A76AA}"/>
+              </a:ext>
+            </a:extLst>
+          </p:cNvPr>
+          <p:cNvPicPr>
+            <a:picLocks noChangeAspect="1"/>
+          </p:cNvPicPr>
+          <p:nvPr/>
+        </p:nvPicPr>
+        <p:blipFill>
+          <a:blip r:embed="rId9"/>
+          <a:stretch>
+            <a:fillRect/>
+          </a:stretch>
+        </p:blipFill>
+        <p:spPr>
+          <a:xfrm>
+            <a:off x="1125324" y="2303179"/>
+            <a:ext cx="560995" cy="133465"/>
+          </a:xfrm>
+          <a:prstGeom prst="rect">
+            <a:avLst/>
+          </a:prstGeom>
+        </p:spPr>
+      </p:pic>
+      <p:sp>
+        <p:nvSpPr>
+          <p:cNvPr id="1026" name="テキスト ボックス 1025">
+            <a:extLst>
+              <a:ext uri="{FF2B5EF4-FFF2-40B4-BE49-F238E27FC236}">
+                <a16:creationId xmlns:a16="http://schemas.microsoft.com/office/drawing/2014/main" id="{1B57767B-4EA3-C247-B88C-4D505A95BD20}"/>
+              </a:ext>
+            </a:extLst>
+          </p:cNvPr>
+          <p:cNvSpPr txBox="1"/>
+          <p:nvPr/>
+        </p:nvSpPr>
+        <p:spPr>
+          <a:xfrm>
+            <a:off x="-490844" y="4711039"/>
+            <a:ext cx="3405553" cy="400110"/>
+          </a:xfrm>
+          <a:prstGeom prst="rect">
+            <a:avLst/>
+          </a:prstGeom>
+          <a:noFill/>
+        </p:spPr>
+        <p:txBody>
+          <a:bodyPr wrap="square">
+            <a:spAutoFit/>
+          </a:bodyPr>
+          <a:lstStyle/>
+          <a:p>
+            <a:pPr algn="ctr"/>
+            <a:r>
+              <a:rPr lang="en-US" altLang="ja-JP" sz="1000" b="1" dirty="0">
+                <a:solidFill>
+                  <a:srgbClr val="FF0000"/>
+                </a:solidFill>
+                <a:latin typeface="メイリオ" panose="020B0604030504040204" pitchFamily="50" charset="-128"/>
+                <a:ea typeface="メイリオ" panose="020B0604030504040204" pitchFamily="50" charset="-128"/>
+                <a:cs typeface="メイリオ"/>
+              </a:rPr>
+              <a:t>※</a:t>
+            </a:r>
+            <a:r>
+              <a:rPr lang="ja-JP" altLang="en-US" sz="1000" b="1" dirty="0">
+                <a:solidFill>
+                  <a:srgbClr val="FF0000"/>
+                </a:solidFill>
+                <a:latin typeface="メイリオ" panose="020B0604030504040204" pitchFamily="50" charset="-128"/>
+                <a:ea typeface="メイリオ" panose="020B0604030504040204" pitchFamily="50" charset="-128"/>
+                <a:cs typeface="メイリオ"/>
+              </a:rPr>
+              <a:t>入力した内容を</a:t>
+            </a:r>
+            <a:endParaRPr lang="en-US" altLang="ja-JP" sz="1000" b="1" dirty="0">
+              <a:solidFill>
+                <a:srgbClr val="FF0000"/>
+              </a:solidFill>
+              <a:latin typeface="メイリオ" panose="020B0604030504040204" pitchFamily="50" charset="-128"/>
+              <a:ea typeface="メイリオ" panose="020B0604030504040204" pitchFamily="50" charset="-128"/>
+              <a:cs typeface="メイリオ"/>
+            </a:endParaRPr>
+          </a:p>
+          <a:p>
+            <a:pPr algn="ctr"/>
+            <a:r>
+              <a:rPr lang="ja-JP" altLang="en-US" sz="1000" b="1" dirty="0">
+                <a:solidFill>
+                  <a:srgbClr val="FF0000"/>
+                </a:solidFill>
+                <a:latin typeface="メイリオ" panose="020B0604030504040204" pitchFamily="50" charset="-128"/>
+                <a:ea typeface="メイリオ" panose="020B0604030504040204" pitchFamily="50" charset="-128"/>
+                <a:cs typeface="メイリオ"/>
+              </a:rPr>
+              <a:t>トークに反映が可能。</a:t>
+            </a:r>
+            <a:endParaRPr lang="en-US" altLang="ja-JP" sz="1000" b="1" dirty="0">
+              <a:solidFill>
+                <a:srgbClr val="FF0000"/>
+              </a:solidFill>
+              <a:latin typeface="メイリオ" panose="020B0604030504040204" pitchFamily="50" charset="-128"/>
+              <a:ea typeface="メイリオ" panose="020B0604030504040204" pitchFamily="50" charset="-128"/>
+              <a:cs typeface="メイリオ"/>
+            </a:endParaRPr>
+          </a:p>
+        </p:txBody>
+      </p:sp>
+      <p:sp>
+        <p:nvSpPr>
+          <p:cNvPr id="1032" name="正方形/長方形 1031">
+            <a:extLst>
+              <a:ext uri="{FF2B5EF4-FFF2-40B4-BE49-F238E27FC236}">
+                <a16:creationId xmlns:a16="http://schemas.microsoft.com/office/drawing/2014/main" id="{D1D96D42-255C-636E-49E5-2CDA95DD6764}"/>
+              </a:ext>
+            </a:extLst>
+          </p:cNvPr>
+          <p:cNvSpPr/>
+          <p:nvPr/>
+        </p:nvSpPr>
+        <p:spPr>
+          <a:xfrm>
+            <a:off x="2584156" y="2196668"/>
+            <a:ext cx="1778402" cy="3994401"/>
+          </a:xfrm>
+          <a:prstGeom prst="rect">
+            <a:avLst/>
+          </a:prstGeom>
+          <a:solidFill>
+            <a:schemeClr val="bg1"/>
+          </a:solidFill>
+          <a:ln>
+            <a:solidFill>
+              <a:schemeClr val="tx2">
+                <a:lumMod val="20000"/>
+                <a:lumOff val="80000"/>
+              </a:schemeClr>
+            </a:solidFill>
+          </a:ln>
+        </p:spPr>
+        <p:style>
+          <a:lnRef idx="2">
+            <a:schemeClr val="accent1">
+              <a:shade val="15000"/>
+            </a:schemeClr>
+          </a:lnRef>
+          <a:fillRef idx="1">
+            <a:schemeClr val="accent1"/>
+          </a:fillRef>
+          <a:effectRef idx="0">
+            <a:schemeClr val="accent1"/>
+          </a:effectRef>
+          <a:fontRef idx="minor">
+            <a:schemeClr val="lt1"/>
+          </a:fontRef>
+        </p:style>
+        <p:txBody>
+          <a:bodyPr rtlCol="0" anchor="ctr"/>
+          <a:lstStyle/>
+          <a:p>
+            <a:pPr algn="ctr"/>
+            <a:endParaRPr kumimoji="1" lang="ja-JP" altLang="en-US">
+              <a:latin typeface="メイリオ"/>
+              <a:ea typeface="メイリオ"/>
+              <a:cs typeface="メイリオ"/>
+            </a:endParaRPr>
+          </a:p>
+        </p:txBody>
+      </p:sp>
+      <p:sp>
+        <p:nvSpPr>
+          <p:cNvPr id="1034" name="正方形/長方形 1033">
+            <a:extLst>
+              <a:ext uri="{FF2B5EF4-FFF2-40B4-BE49-F238E27FC236}">
+                <a16:creationId xmlns:a16="http://schemas.microsoft.com/office/drawing/2014/main" id="{8693E451-BCB1-207B-6B73-131F2A8588BF}"/>
+              </a:ext>
+            </a:extLst>
+          </p:cNvPr>
+          <p:cNvSpPr/>
+          <p:nvPr/>
+        </p:nvSpPr>
+        <p:spPr>
+          <a:xfrm>
+            <a:off x="2909322" y="4198381"/>
+            <a:ext cx="1154315" cy="244151"/>
+          </a:xfrm>
+          <a:prstGeom prst="rect">
+            <a:avLst/>
+          </a:prstGeom>
+          <a:solidFill>
+            <a:schemeClr val="tx1">
+              <a:lumMod val="65000"/>
+              <a:lumOff val="35000"/>
+            </a:schemeClr>
+          </a:solidFill>
+          <a:ln>
+            <a:noFill/>
+          </a:ln>
+        </p:spPr>
+        <p:style>
+          <a:lnRef idx="2">
+            <a:schemeClr val="accent1">
+              <a:shade val="15000"/>
+            </a:schemeClr>
+          </a:lnRef>
+          <a:fillRef idx="1">
+            <a:schemeClr val="accent1"/>
+          </a:fillRef>
+          <a:effectRef idx="0">
+            <a:schemeClr val="accent1"/>
+          </a:effectRef>
+          <a:fontRef idx="minor">
+            <a:schemeClr val="lt1"/>
+          </a:fontRef>
+        </p:style>
+        <p:txBody>
+          <a:bodyPr rtlCol="0" anchor="ctr"/>
+          <a:lstStyle/>
+          <a:p>
+            <a:pPr algn="ctr"/>
+            <a:r>
+              <a:rPr kumimoji="1" lang="en-US" altLang="ja-JP" sz="1100" b="1" dirty="0">
+                <a:latin typeface="メイリオ" panose="020B0604030504040204" pitchFamily="50" charset="-128"/>
+                <a:ea typeface="メイリオ" panose="020B0604030504040204" pitchFamily="50" charset="-128"/>
+                <a:cs typeface="メイリオ"/>
+              </a:rPr>
+              <a:t>CV</a:t>
+            </a:r>
+            <a:endParaRPr kumimoji="1" lang="ja-JP" altLang="en-US" sz="1100" b="1" dirty="0">
+              <a:latin typeface="メイリオ" panose="020B0604030504040204" pitchFamily="50" charset="-128"/>
+              <a:ea typeface="メイリオ" panose="020B0604030504040204" pitchFamily="50" charset="-128"/>
+              <a:cs typeface="メイリオ"/>
+            </a:endParaRPr>
+          </a:p>
+        </p:txBody>
+      </p:sp>
+      <p:sp>
+        <p:nvSpPr>
+          <p:cNvPr id="1036" name="正方形/長方形 1035">
+            <a:extLst>
+              <a:ext uri="{FF2B5EF4-FFF2-40B4-BE49-F238E27FC236}">
+                <a16:creationId xmlns:a16="http://schemas.microsoft.com/office/drawing/2014/main" id="{43EEA9CC-C52C-B219-FF18-6E6EA44E4D24}"/>
+              </a:ext>
+            </a:extLst>
+          </p:cNvPr>
+          <p:cNvSpPr/>
+          <p:nvPr/>
+        </p:nvSpPr>
+        <p:spPr>
+          <a:xfrm>
+            <a:off x="2692868" y="4436119"/>
+            <a:ext cx="1396722" cy="1045027"/>
+          </a:xfrm>
+          <a:prstGeom prst="rect">
+            <a:avLst/>
+          </a:prstGeom>
+          <a:solidFill>
+            <a:schemeClr val="bg1"/>
+          </a:solidFill>
+          <a:ln>
+            <a:noFill/>
+          </a:ln>
+        </p:spPr>
+        <p:style>
+          <a:lnRef idx="2">
+            <a:schemeClr val="accent1">
+              <a:shade val="15000"/>
+            </a:schemeClr>
+          </a:lnRef>
+          <a:fillRef idx="1">
+            <a:schemeClr val="accent1"/>
+          </a:fillRef>
+          <a:effectRef idx="0">
+            <a:schemeClr val="accent1"/>
+          </a:effectRef>
+          <a:fontRef idx="minor">
+            <a:schemeClr val="lt1"/>
+          </a:fontRef>
+        </p:style>
+        <p:txBody>
+          <a:bodyPr rtlCol="0" anchor="ctr"/>
+          <a:lstStyle/>
+          <a:p>
+            <a:r>
+              <a:rPr kumimoji="1" lang="ja-JP" altLang="en-US" sz="1100" b="1" dirty="0">
+                <a:solidFill>
+                  <a:schemeClr val="tx1">
+                    <a:lumMod val="50000"/>
+                    <a:lumOff val="50000"/>
+                  </a:schemeClr>
+                </a:solidFill>
+                <a:latin typeface="メイリオ" panose="020B0604030504040204" pitchFamily="50" charset="-128"/>
+                <a:ea typeface="メイリオ" panose="020B0604030504040204" pitchFamily="50" charset="-128"/>
+                <a:cs typeface="メイリオ"/>
+              </a:rPr>
+              <a:t>・購入完了</a:t>
+            </a:r>
+            <a:endParaRPr kumimoji="1" lang="en-US" altLang="ja-JP" sz="1100" b="1" dirty="0">
+              <a:solidFill>
+                <a:schemeClr val="tx1">
+                  <a:lumMod val="50000"/>
+                  <a:lumOff val="50000"/>
+                </a:schemeClr>
+              </a:solidFill>
+              <a:latin typeface="メイリオ" panose="020B0604030504040204" pitchFamily="50" charset="-128"/>
+              <a:ea typeface="メイリオ" panose="020B0604030504040204" pitchFamily="50" charset="-128"/>
+              <a:cs typeface="メイリオ"/>
+            </a:endParaRPr>
+          </a:p>
+          <a:p>
+            <a:r>
+              <a:rPr kumimoji="1" lang="ja-JP" altLang="en-US" sz="1100" b="1" dirty="0">
+                <a:solidFill>
+                  <a:schemeClr val="tx1">
+                    <a:lumMod val="50000"/>
+                    <a:lumOff val="50000"/>
+                  </a:schemeClr>
+                </a:solidFill>
+                <a:latin typeface="メイリオ" panose="020B0604030504040204" pitchFamily="50" charset="-128"/>
+                <a:ea typeface="メイリオ" panose="020B0604030504040204" pitchFamily="50" charset="-128"/>
+                <a:cs typeface="メイリオ"/>
+              </a:rPr>
+              <a:t>・セミナー予約</a:t>
+            </a:r>
+            <a:endParaRPr kumimoji="1" lang="en-US" altLang="ja-JP" sz="1100" b="1" dirty="0">
+              <a:solidFill>
+                <a:schemeClr val="tx1">
+                  <a:lumMod val="50000"/>
+                  <a:lumOff val="50000"/>
+                </a:schemeClr>
+              </a:solidFill>
+              <a:latin typeface="メイリオ" panose="020B0604030504040204" pitchFamily="50" charset="-128"/>
+              <a:ea typeface="メイリオ" panose="020B0604030504040204" pitchFamily="50" charset="-128"/>
+              <a:cs typeface="メイリオ"/>
+            </a:endParaRPr>
+          </a:p>
+          <a:p>
+            <a:r>
+              <a:rPr kumimoji="1" lang="ja-JP" altLang="en-US" sz="1100" b="1" dirty="0">
+                <a:solidFill>
+                  <a:schemeClr val="tx1">
+                    <a:lumMod val="50000"/>
+                    <a:lumOff val="50000"/>
+                  </a:schemeClr>
+                </a:solidFill>
+                <a:latin typeface="メイリオ" panose="020B0604030504040204" pitchFamily="50" charset="-128"/>
+                <a:ea typeface="メイリオ" panose="020B0604030504040204" pitchFamily="50" charset="-128"/>
+                <a:cs typeface="メイリオ"/>
+              </a:rPr>
+              <a:t>・登録完了</a:t>
+            </a:r>
+            <a:endParaRPr kumimoji="1" lang="en-US" altLang="ja-JP" sz="1100" b="1" dirty="0">
+              <a:solidFill>
+                <a:schemeClr val="tx1">
+                  <a:lumMod val="50000"/>
+                  <a:lumOff val="50000"/>
+                </a:schemeClr>
+              </a:solidFill>
+              <a:latin typeface="メイリオ" panose="020B0604030504040204" pitchFamily="50" charset="-128"/>
+              <a:ea typeface="メイリオ" panose="020B0604030504040204" pitchFamily="50" charset="-128"/>
+              <a:cs typeface="メイリオ"/>
+            </a:endParaRPr>
+          </a:p>
+          <a:p>
+            <a:r>
+              <a:rPr lang="ja-JP" altLang="en-US" sz="1100" b="1" dirty="0">
+                <a:solidFill>
+                  <a:schemeClr val="tx1">
+                    <a:lumMod val="50000"/>
+                    <a:lumOff val="50000"/>
+                  </a:schemeClr>
+                </a:solidFill>
+                <a:latin typeface="メイリオ" panose="020B0604030504040204" pitchFamily="50" charset="-128"/>
+                <a:ea typeface="メイリオ" panose="020B0604030504040204" pitchFamily="50" charset="-128"/>
+                <a:cs typeface="メイリオ"/>
+              </a:rPr>
+              <a:t>・メルマガ登録</a:t>
+            </a:r>
+            <a:endParaRPr lang="en-US" altLang="ja-JP" sz="1100" b="1" dirty="0">
+              <a:solidFill>
+                <a:schemeClr val="tx1">
+                  <a:lumMod val="50000"/>
+                  <a:lumOff val="50000"/>
+                </a:schemeClr>
+              </a:solidFill>
+              <a:latin typeface="メイリオ" panose="020B0604030504040204" pitchFamily="50" charset="-128"/>
+              <a:ea typeface="メイリオ" panose="020B0604030504040204" pitchFamily="50" charset="-128"/>
+              <a:cs typeface="メイリオ"/>
+            </a:endParaRPr>
+          </a:p>
+          <a:p>
+            <a:r>
+              <a:rPr kumimoji="1" lang="ja-JP" altLang="en-US" sz="1100" b="1" dirty="0">
+                <a:solidFill>
+                  <a:schemeClr val="tx1">
+                    <a:lumMod val="50000"/>
+                    <a:lumOff val="50000"/>
+                  </a:schemeClr>
+                </a:solidFill>
+                <a:latin typeface="メイリオ" panose="020B0604030504040204" pitchFamily="50" charset="-128"/>
+                <a:ea typeface="メイリオ" panose="020B0604030504040204" pitchFamily="50" charset="-128"/>
+                <a:cs typeface="メイリオ"/>
+              </a:rPr>
+              <a:t>・その他</a:t>
+            </a:r>
+          </a:p>
+        </p:txBody>
+      </p:sp>
+      <p:pic>
+        <p:nvPicPr>
+          <p:cNvPr id="1038" name="図 1037" descr="テキスト, 手紙&#10;&#10;AI 生成コンテンツは誤りを含む可能性があります。">
+            <a:extLst>
+              <a:ext uri="{FF2B5EF4-FFF2-40B4-BE49-F238E27FC236}">
+                <a16:creationId xmlns:a16="http://schemas.microsoft.com/office/drawing/2014/main" id="{85260668-6C66-A032-FFE0-0276021F9433}"/>
+              </a:ext>
+            </a:extLst>
+          </p:cNvPr>
+          <p:cNvPicPr>
+            <a:picLocks noChangeAspect="1"/>
+          </p:cNvPicPr>
+          <p:nvPr/>
+        </p:nvPicPr>
+        <p:blipFill>
+          <a:blip r:embed="rId6" cstate="print">
+            <a:extLst>
+              <a:ext uri="{28A0092B-C50C-407E-A947-70E740481C1C}">
+                <a14:useLocalDpi xmlns:a14="http://schemas.microsoft.com/office/drawing/2010/main" val="0"/>
+              </a:ext>
+            </a:extLst>
+          </a:blip>
+          <a:srcRect t="4580"/>
+          <a:stretch>
+            <a:fillRect/>
+          </a:stretch>
+        </p:blipFill>
+        <p:spPr>
+          <a:xfrm>
+            <a:off x="2977448" y="2296209"/>
+            <a:ext cx="1048252" cy="1775437"/>
+          </a:xfrm>
+          <a:prstGeom prst="rect">
+            <a:avLst/>
+          </a:prstGeom>
+        </p:spPr>
+      </p:pic>
+      <p:pic>
+        <p:nvPicPr>
+          <p:cNvPr id="1039" name="Picture 2" descr="買い物完了！イラスト｜無料イラスト・フリー素材なら「イラストAC」">
+            <a:extLst>
+              <a:ext uri="{FF2B5EF4-FFF2-40B4-BE49-F238E27FC236}">
+                <a16:creationId xmlns:a16="http://schemas.microsoft.com/office/drawing/2014/main" id="{23D05307-D6FE-6284-27D3-3433EE0122E2}"/>
+              </a:ext>
+            </a:extLst>
+          </p:cNvPr>
+          <p:cNvPicPr>
+            <a:picLocks noChangeAspect="1" noChangeArrowheads="1"/>
+          </p:cNvPicPr>
+          <p:nvPr/>
+        </p:nvPicPr>
+        <p:blipFill rotWithShape="1">
+          <a:blip r:embed="rId10" cstate="print">
+            <a:extLst>
+              <a:ext uri="{28A0092B-C50C-407E-A947-70E740481C1C}">
+                <a14:useLocalDpi xmlns:a14="http://schemas.microsoft.com/office/drawing/2010/main" val="0"/>
+              </a:ext>
+            </a:extLst>
+          </a:blip>
+          <a:srcRect l="20270" r="23682"/>
+          <a:stretch>
+            <a:fillRect/>
+          </a:stretch>
+        </p:blipFill>
+        <p:spPr bwMode="auto">
+          <a:xfrm>
+            <a:off x="3866329" y="4627146"/>
+            <a:ext cx="395417" cy="529521"/>
+          </a:xfrm>
+          <a:prstGeom prst="rect">
+            <a:avLst/>
+          </a:prstGeom>
+          <a:noFill/>
+          <a:extLst>
+            <a:ext uri="{909E8E84-426E-40DD-AFC4-6F175D3DCCD1}">
+              <a14:hiddenFill xmlns:a14="http://schemas.microsoft.com/office/drawing/2010/main">
+                <a:solidFill>
+                  <a:srgbClr val="FFFFFF"/>
+                </a:solidFill>
+              </a14:hiddenFill>
+            </a:ext>
+          </a:extLst>
+        </p:spPr>
+      </p:pic>
+      <p:pic>
+        <p:nvPicPr>
+          <p:cNvPr id="1040" name="図 1039">
+            <a:extLst>
+              <a:ext uri="{FF2B5EF4-FFF2-40B4-BE49-F238E27FC236}">
+                <a16:creationId xmlns:a16="http://schemas.microsoft.com/office/drawing/2014/main" id="{D40EFC68-F8C8-CACE-392A-C804A102B410}"/>
+              </a:ext>
+            </a:extLst>
+          </p:cNvPr>
+          <p:cNvPicPr>
+            <a:picLocks noChangeAspect="1"/>
+          </p:cNvPicPr>
+          <p:nvPr/>
+        </p:nvPicPr>
+        <p:blipFill>
+          <a:blip r:embed="rId7"/>
+          <a:stretch>
+            <a:fillRect/>
+          </a:stretch>
+        </p:blipFill>
+        <p:spPr>
+          <a:xfrm>
+            <a:off x="2955266" y="2332538"/>
+            <a:ext cx="494484" cy="86136"/>
+          </a:xfrm>
+          <a:prstGeom prst="rect">
+            <a:avLst/>
+          </a:prstGeom>
+        </p:spPr>
+      </p:pic>
+      <p:pic>
+        <p:nvPicPr>
+          <p:cNvPr id="1041" name="図 1040">
+            <a:extLst>
+              <a:ext uri="{FF2B5EF4-FFF2-40B4-BE49-F238E27FC236}">
+                <a16:creationId xmlns:a16="http://schemas.microsoft.com/office/drawing/2014/main" id="{BA9B0596-4197-6BA5-B58D-7E67FD1379B1}"/>
+              </a:ext>
+            </a:extLst>
+          </p:cNvPr>
+          <p:cNvPicPr>
+            <a:picLocks noChangeAspect="1"/>
+          </p:cNvPicPr>
+          <p:nvPr/>
+        </p:nvPicPr>
+        <p:blipFill>
+          <a:blip r:embed="rId7"/>
+          <a:stretch>
+            <a:fillRect/>
+          </a:stretch>
+        </p:blipFill>
+        <p:spPr>
+          <a:xfrm>
+            <a:off x="2944328" y="2334974"/>
+            <a:ext cx="494484" cy="86136"/>
+          </a:xfrm>
+          <a:prstGeom prst="rect">
+            <a:avLst/>
+          </a:prstGeom>
+        </p:spPr>
+      </p:pic>
+      <p:pic>
+        <p:nvPicPr>
+          <p:cNvPr id="1042" name="図 1041">
+            <a:extLst>
+              <a:ext uri="{FF2B5EF4-FFF2-40B4-BE49-F238E27FC236}">
+                <a16:creationId xmlns:a16="http://schemas.microsoft.com/office/drawing/2014/main" id="{A3D5D1CE-703D-3244-20B5-0CBB6C5EB467}"/>
+              </a:ext>
+            </a:extLst>
+          </p:cNvPr>
+          <p:cNvPicPr>
+            <a:picLocks noChangeAspect="1"/>
+          </p:cNvPicPr>
+          <p:nvPr/>
+        </p:nvPicPr>
+        <p:blipFill>
+          <a:blip r:embed="rId7"/>
+          <a:stretch>
+            <a:fillRect/>
+          </a:stretch>
+        </p:blipFill>
+        <p:spPr>
+          <a:xfrm>
+            <a:off x="3124211" y="3780297"/>
+            <a:ext cx="494484" cy="86136"/>
+          </a:xfrm>
+          <a:prstGeom prst="rect">
+            <a:avLst/>
+          </a:prstGeom>
+        </p:spPr>
+      </p:pic>
+      <p:sp>
+        <p:nvSpPr>
+          <p:cNvPr id="1043" name="テキスト ボックス 1042">
+            <a:extLst>
+              <a:ext uri="{FF2B5EF4-FFF2-40B4-BE49-F238E27FC236}">
+                <a16:creationId xmlns:a16="http://schemas.microsoft.com/office/drawing/2014/main" id="{434489DF-76E5-B08D-AB93-7A020A3C23F0}"/>
+              </a:ext>
+            </a:extLst>
+          </p:cNvPr>
+          <p:cNvSpPr txBox="1"/>
+          <p:nvPr/>
+        </p:nvSpPr>
+        <p:spPr>
+          <a:xfrm>
+            <a:off x="360000" y="5400000"/>
+            <a:ext cx="1679395" cy="338554"/>
+          </a:xfrm>
+          <a:prstGeom prst="rect">
+            <a:avLst/>
+          </a:prstGeom>
+          <a:solidFill>
+            <a:schemeClr val="bg1">
+              <a:alpha val="56000"/>
+            </a:schemeClr>
+          </a:solidFill>
+        </p:spPr>
+        <p:txBody>
+          <a:bodyPr wrap="square">
+            <a:spAutoFit/>
+          </a:bodyPr>
+          <a:lstStyle/>
+          <a:p>
+            <a:pPr algn="ctr"/>
+            <a:r>
+              <a:rPr lang="en-US" altLang="ja-JP" sz="800" b="1" dirty="0">
+                <a:solidFill>
+                  <a:schemeClr val="bg1">
+                    <a:lumMod val="85000"/>
+                  </a:schemeClr>
+                </a:solidFill>
+                <a:latin typeface="メイリオ" panose="020B0604030504040204" pitchFamily="50" charset="-128"/>
+                <a:ea typeface="メイリオ" panose="020B0604030504040204" pitchFamily="50" charset="-128"/>
+                <a:cs typeface="メイリオ"/>
+              </a:rPr>
+              <a:t>※</a:t>
+            </a:r>
+            <a:r>
+              <a:rPr lang="ja-JP" altLang="en-US" sz="800" b="1" dirty="0">
+                <a:solidFill>
+                  <a:schemeClr val="bg1">
+                    <a:lumMod val="85000"/>
+                  </a:schemeClr>
+                </a:solidFill>
+                <a:latin typeface="メイリオ" panose="020B0604030504040204" pitchFamily="50" charset="-128"/>
+                <a:ea typeface="メイリオ" panose="020B0604030504040204" pitchFamily="50" charset="-128"/>
+                <a:cs typeface="メイリオ"/>
+              </a:rPr>
+              <a:t>ユーザーの個人情報収集が</a:t>
+            </a:r>
+            <a:endParaRPr lang="en-US" altLang="ja-JP" sz="800" b="1" dirty="0">
+              <a:solidFill>
+                <a:schemeClr val="bg1">
+                  <a:lumMod val="85000"/>
+                </a:schemeClr>
+              </a:solidFill>
+              <a:latin typeface="メイリオ" panose="020B0604030504040204" pitchFamily="50" charset="-128"/>
+              <a:ea typeface="メイリオ" panose="020B0604030504040204" pitchFamily="50" charset="-128"/>
+              <a:cs typeface="メイリオ"/>
+            </a:endParaRPr>
+          </a:p>
+          <a:p>
+            <a:pPr algn="ctr"/>
+            <a:r>
+              <a:rPr lang="ja-JP" altLang="en-US" sz="800" b="1" dirty="0">
+                <a:solidFill>
+                  <a:schemeClr val="bg1">
+                    <a:lumMod val="85000"/>
+                  </a:schemeClr>
+                </a:solidFill>
+                <a:latin typeface="メイリオ" panose="020B0604030504040204" pitchFamily="50" charset="-128"/>
+                <a:ea typeface="メイリオ" panose="020B0604030504040204" pitchFamily="50" charset="-128"/>
+                <a:cs typeface="メイリオ"/>
+              </a:rPr>
+              <a:t>完了したタイミング</a:t>
+            </a:r>
+            <a:endParaRPr kumimoji="1" lang="ja-JP" altLang="en-US" sz="800" b="1" dirty="0">
+              <a:solidFill>
+                <a:schemeClr val="bg1">
+                  <a:lumMod val="85000"/>
+                </a:schemeClr>
+              </a:solidFill>
+              <a:latin typeface="メイリオ" panose="020B0604030504040204" pitchFamily="50" charset="-128"/>
+              <a:ea typeface="メイリオ" panose="020B0604030504040204" pitchFamily="50" charset="-128"/>
+              <a:cs typeface="メイリオ"/>
+            </a:endParaRPr>
+          </a:p>
+        </p:txBody>
+      </p:sp>
+      <p:grpSp>
+        <p:nvGrpSpPr>
+          <p:cNvPr id="3" name="グループ化 2">
+            <a:extLst>
+              <a:ext uri="{FF2B5EF4-FFF2-40B4-BE49-F238E27FC236}">
+                <a16:creationId xmlns:a16="http://schemas.microsoft.com/office/drawing/2014/main" id="{E76D8F54-2926-2D56-7238-F66ACCBC4F20}"/>
+              </a:ext>
+            </a:extLst>
+          </p:cNvPr>
+          <p:cNvGrpSpPr/>
+          <p:nvPr/>
+        </p:nvGrpSpPr>
+        <p:grpSpPr>
+          <a:xfrm>
+            <a:off x="543398" y="777681"/>
+            <a:ext cx="3105325" cy="485102"/>
+            <a:chOff x="507969" y="928495"/>
+            <a:chExt cx="3105325" cy="485102"/>
+          </a:xfrm>
+        </p:grpSpPr>
+        <p:sp>
+          <p:nvSpPr>
+            <p:cNvPr id="4" name="Google Shape;51;p19">
+              <a:extLst>
+                <a:ext uri="{FF2B5EF4-FFF2-40B4-BE49-F238E27FC236}">
+                  <a16:creationId xmlns:a16="http://schemas.microsoft.com/office/drawing/2014/main" id="{98F6BB16-EFC6-9846-2A11-E624E876E64B}"/>
+                </a:ext>
+              </a:extLst>
+            </p:cNvPr>
+            <p:cNvSpPr/>
+            <p:nvPr/>
+          </p:nvSpPr>
+          <p:spPr>
+            <a:xfrm>
+              <a:off x="507969" y="928495"/>
+              <a:ext cx="3105325" cy="485102"/>
+            </a:xfrm>
+            <a:prstGeom prst="roundRect">
+              <a:avLst>
+                <a:gd name="adj" fmla="val 16667"/>
+              </a:avLst>
+            </a:prstGeom>
+            <a:solidFill>
+              <a:schemeClr val="dk1"/>
+            </a:solidFill>
+            <a:ln>
+              <a:noFill/>
+            </a:ln>
+          </p:spPr>
+          <p:txBody>
+            <a:bodyPr spcFirstLastPara="1" wrap="square" lIns="91425" tIns="45700" rIns="91425" bIns="45700" anchor="ctr" anchorCtr="0">
+              <a:noAutofit/>
+            </a:bodyPr>
+            <a:lstStyle>
+              <a:defPPr marR="0" lvl="0" algn="l" rtl="0">
+                <a:lnSpc>
+                  <a:spcPct val="100000"/>
+                </a:lnSpc>
+                <a:spcBef>
+                  <a:spcPts val="0"/>
+                </a:spcBef>
+                <a:spcAft>
+                  <a:spcPts val="0"/>
+                </a:spcAft>
+              </a:defPPr>
+              <a:lvl1pPr marR="0" lvl="0" algn="l" rtl="0">
+                <a:lnSpc>
+                  <a:spcPct val="100000"/>
+                </a:lnSpc>
+                <a:spcBef>
+                  <a:spcPts val="0"/>
+                </a:spcBef>
+                <a:spcAft>
+                  <a:spcPts val="0"/>
+                </a:spcAft>
+                <a:buClr>
+                  <a:srgbClr val="000000"/>
+                </a:buClr>
+                <a:buFont typeface="Arial"/>
+                <a:defRPr sz="1400" b="0" i="0" u="none" strike="noStrike" cap="none">
+                  <a:solidFill>
+                    <a:srgbClr val="000000"/>
+                  </a:solidFill>
+                  <a:latin typeface="メイリオ"/>
+                  <a:ea typeface="メイリオ"/>
+                  <a:cs typeface="メイリオ"/>
+                  <a:sym typeface="Arial"/>
+                </a:defRPr>
+              </a:lvl1pPr>
+              <a:lvl2pPr marR="0" lvl="1" algn="l" rtl="0">
+                <a:lnSpc>
+                  <a:spcPct val="100000"/>
+                </a:lnSpc>
+                <a:spcBef>
+                  <a:spcPts val="0"/>
+                </a:spcBef>
+                <a:spcAft>
+                  <a:spcPts val="0"/>
+                </a:spcAft>
+                <a:buClr>
+                  <a:srgbClr val="000000"/>
+                </a:buClr>
+                <a:buFont typeface="Arial"/>
+                <a:defRPr sz="1400" b="0" i="0" u="none" strike="noStrike" cap="none">
+                  <a:solidFill>
+                    <a:srgbClr val="000000"/>
+                  </a:solidFill>
+                  <a:latin typeface="メイリオ"/>
+                  <a:ea typeface="メイリオ"/>
+                  <a:cs typeface="メイリオ"/>
+                  <a:sym typeface="Arial"/>
+                </a:defRPr>
+              </a:lvl2pPr>
+              <a:lvl3pPr marR="0" lvl="2" algn="l" rtl="0">
+                <a:lnSpc>
+                  <a:spcPct val="100000"/>
+                </a:lnSpc>
+                <a:spcBef>
+                  <a:spcPts val="0"/>
+                </a:spcBef>
+                <a:spcAft>
+                  <a:spcPts val="0"/>
+                </a:spcAft>
+                <a:buClr>
+                  <a:srgbClr val="000000"/>
+                </a:buClr>
+                <a:buFont typeface="Arial"/>
+                <a:defRPr sz="1400" b="0" i="0" u="none" strike="noStrike" cap="none">
+                  <a:solidFill>
+                    <a:srgbClr val="000000"/>
+                  </a:solidFill>
+                  <a:latin typeface="メイリオ"/>
+                  <a:ea typeface="メイリオ"/>
+                  <a:cs typeface="メイリオ"/>
+                  <a:sym typeface="Arial"/>
+                </a:defRPr>
+              </a:lvl3pPr>
+              <a:lvl4pPr marR="0" lvl="3" algn="l" rtl="0">
+                <a:lnSpc>
+                  <a:spcPct val="100000"/>
+                </a:lnSpc>
+                <a:spcBef>
+                  <a:spcPts val="0"/>
+                </a:spcBef>
+                <a:spcAft>
+                  <a:spcPts val="0"/>
+                </a:spcAft>
+                <a:buClr>
+                  <a:srgbClr val="000000"/>
+                </a:buClr>
+                <a:buFont typeface="Arial"/>
+                <a:defRPr sz="1400" b="0" i="0" u="none" strike="noStrike" cap="none">
+                  <a:solidFill>
+                    <a:srgbClr val="000000"/>
+                  </a:solidFill>
+                  <a:latin typeface="メイリオ"/>
+                  <a:ea typeface="メイリオ"/>
+                  <a:cs typeface="メイリオ"/>
+                  <a:sym typeface="Arial"/>
+                </a:defRPr>
+              </a:lvl4pPr>
+              <a:lvl5pPr marR="0" lvl="4" algn="l" rtl="0">
+                <a:lnSpc>
+                  <a:spcPct val="100000"/>
+                </a:lnSpc>
+                <a:spcBef>
+                  <a:spcPts val="0"/>
+                </a:spcBef>
+                <a:spcAft>
+                  <a:spcPts val="0"/>
+                </a:spcAft>
+                <a:buClr>
+                  <a:srgbClr val="000000"/>
+                </a:buClr>
+                <a:buFont typeface="Arial"/>
+                <a:defRPr sz="1400" b="0" i="0" u="none" strike="noStrike" cap="none">
+                  <a:solidFill>
+                    <a:srgbClr val="000000"/>
+                  </a:solidFill>
+                  <a:latin typeface="メイリオ"/>
+                  <a:ea typeface="メイリオ"/>
+                  <a:cs typeface="メイリオ"/>
+                  <a:sym typeface="Arial"/>
+                </a:defRPr>
+              </a:lvl5pPr>
+              <a:lvl6pPr marR="0" lvl="5" algn="l" rtl="0">
+                <a:lnSpc>
+                  <a:spcPct val="100000"/>
+                </a:lnSpc>
+                <a:spcBef>
+                  <a:spcPts val="0"/>
+                </a:spcBef>
+                <a:spcAft>
+                  <a:spcPts val="0"/>
+                </a:spcAft>
+                <a:buClr>
+                  <a:srgbClr val="000000"/>
+                </a:buClr>
+                <a:buFont typeface="Arial"/>
+                <a:defRPr sz="1400" b="0" i="0" u="none" strike="noStrike" cap="none">
+                  <a:solidFill>
+                    <a:srgbClr val="000000"/>
+                  </a:solidFill>
+                  <a:latin typeface="メイリオ"/>
+                  <a:ea typeface="メイリオ"/>
+                  <a:cs typeface="メイリオ"/>
+                  <a:sym typeface="Arial"/>
+                </a:defRPr>
+              </a:lvl6pPr>
+              <a:lvl7pPr marR="0" lvl="6" algn="l" rtl="0">
+                <a:lnSpc>
+                  <a:spcPct val="100000"/>
+                </a:lnSpc>
+                <a:spcBef>
+                  <a:spcPts val="0"/>
+                </a:spcBef>
+                <a:spcAft>
+                  <a:spcPts val="0"/>
+                </a:spcAft>
+                <a:buClr>
+                  <a:srgbClr val="000000"/>
+                </a:buClr>
+                <a:buFont typeface="Arial"/>
+                <a:defRPr sz="1400" b="0" i="0" u="none" strike="noStrike" cap="none">
+                  <a:solidFill>
+                    <a:srgbClr val="000000"/>
+                  </a:solidFill>
+                  <a:latin typeface="メイリオ"/>
+                  <a:ea typeface="メイリオ"/>
+                  <a:cs typeface="メイリオ"/>
+                  <a:sym typeface="Arial"/>
+                </a:defRPr>
+              </a:lvl7pPr>
+              <a:lvl8pPr marR="0" lvl="7" algn="l" rtl="0">
+                <a:lnSpc>
+                  <a:spcPct val="100000"/>
+                </a:lnSpc>
+                <a:spcBef>
+                  <a:spcPts val="0"/>
+                </a:spcBef>
+                <a:spcAft>
+                  <a:spcPts val="0"/>
+                </a:spcAft>
+                <a:buClr>
+                  <a:srgbClr val="000000"/>
+                </a:buClr>
+                <a:buFont typeface="Arial"/>
+                <a:defRPr sz="1400" b="0" i="0" u="none" strike="noStrike" cap="none">
+                  <a:solidFill>
+                    <a:srgbClr val="000000"/>
+                  </a:solidFill>
+                  <a:latin typeface="メイリオ"/>
+                  <a:ea typeface="メイリオ"/>
+                  <a:cs typeface="メイリオ"/>
+                  <a:sym typeface="Arial"/>
+                </a:defRPr>
+              </a:lvl8pPr>
+              <a:lvl9pPr marR="0" lvl="8" algn="l" rtl="0">
+                <a:lnSpc>
+                  <a:spcPct val="100000"/>
+                </a:lnSpc>
+                <a:spcBef>
+                  <a:spcPts val="0"/>
+                </a:spcBef>
+                <a:spcAft>
+                  <a:spcPts val="0"/>
+                </a:spcAft>
+                <a:buClr>
+                  <a:srgbClr val="000000"/>
+                </a:buClr>
+                <a:buFont typeface="Arial"/>
+                <a:defRPr sz="1400" b="0" i="0" u="none" strike="noStrike" cap="none">
+                  <a:solidFill>
+                    <a:srgbClr val="000000"/>
+                  </a:solidFill>
+                  <a:latin typeface="メイリオ"/>
+                  <a:ea typeface="メイリオ"/>
+                  <a:cs typeface="メイリオ"/>
+                  <a:sym typeface="Arial"/>
+                </a:defRPr>
+              </a:lvl9pPr>
+            </a:lstStyle>
+            <a:p>
+              <a:pPr marL="0" marR="0" lvl="0" indent="0" algn="ctr" rtl="0">
+                <a:lnSpc>
+                  <a:spcPct val="100000"/>
+                </a:lnSpc>
+                <a:spcBef>
+                  <a:spcPts val="0"/>
+                </a:spcBef>
+                <a:spcAft>
+                  <a:spcPts val="0"/>
+                </a:spcAft>
+                <a:buClr>
+                  <a:srgbClr val="000000"/>
+                </a:buClr>
+                <a:buSzPts val="1400"/>
+                <a:buFont typeface="Arial"/>
+                <a:buNone/>
+              </a:pPr>
+              <a:endParaRPr sz="1400" b="1" i="0" u="none" strike="noStrike" cap="none" dirty="0">
+                <a:solidFill>
+                  <a:schemeClr val="lt1"/>
+                </a:solidFill>
+                <a:latin typeface="メイリオ"/>
+                <a:ea typeface="メイリオ"/>
+                <a:cs typeface="メイリオ"/>
+                <a:sym typeface="Meiryo"/>
+              </a:endParaRPr>
+            </a:p>
+          </p:txBody>
+        </p:sp>
+        <p:sp>
+          <p:nvSpPr>
+            <p:cNvPr id="5" name="テキスト ボックス 4">
+              <a:extLst>
+                <a:ext uri="{FF2B5EF4-FFF2-40B4-BE49-F238E27FC236}">
+                  <a16:creationId xmlns:a16="http://schemas.microsoft.com/office/drawing/2014/main" id="{560EDF30-5F09-B70A-2993-8CD4F9E40EFA}"/>
+                </a:ext>
+              </a:extLst>
+            </p:cNvPr>
+            <p:cNvSpPr txBox="1"/>
+            <p:nvPr/>
+          </p:nvSpPr>
+          <p:spPr>
+            <a:xfrm>
+              <a:off x="1140096" y="988192"/>
+              <a:ext cx="1832553" cy="357790"/>
+            </a:xfrm>
+            <a:prstGeom prst="rect">
+              <a:avLst/>
+            </a:prstGeom>
+            <a:noFill/>
+          </p:spPr>
+          <p:txBody>
+            <a:bodyPr wrap="none" rtlCol="0">
+              <a:spAutoFit/>
+            </a:bodyPr>
+            <a:lstStyle>
+              <a:defPPr marR="0" lvl="0" algn="l" rtl="0">
+                <a:lnSpc>
+                  <a:spcPct val="100000"/>
+                </a:lnSpc>
+                <a:spcBef>
+                  <a:spcPts val="0"/>
+                </a:spcBef>
+                <a:spcAft>
+                  <a:spcPts val="0"/>
+                </a:spcAft>
+              </a:defPPr>
+              <a:lvl1pPr marR="0" lvl="0" algn="l" rtl="0">
+                <a:lnSpc>
+                  <a:spcPct val="100000"/>
+                </a:lnSpc>
+                <a:spcBef>
+                  <a:spcPts val="0"/>
+                </a:spcBef>
+                <a:spcAft>
+                  <a:spcPts val="0"/>
+                </a:spcAft>
+                <a:buClr>
+                  <a:srgbClr val="000000"/>
+                </a:buClr>
+                <a:buFont typeface="Arial"/>
+                <a:defRPr sz="1400" b="0" i="0" u="none" strike="noStrike" cap="none">
+                  <a:solidFill>
+                    <a:srgbClr val="000000"/>
+                  </a:solidFill>
+                  <a:latin typeface="メイリオ"/>
+                  <a:ea typeface="メイリオ"/>
+                  <a:cs typeface="メイリオ"/>
+                  <a:sym typeface="Arial"/>
+                </a:defRPr>
+              </a:lvl1pPr>
+              <a:lvl2pPr marR="0" lvl="1" algn="l" rtl="0">
+                <a:lnSpc>
+                  <a:spcPct val="100000"/>
+                </a:lnSpc>
+                <a:spcBef>
+                  <a:spcPts val="0"/>
+                </a:spcBef>
+                <a:spcAft>
+                  <a:spcPts val="0"/>
+                </a:spcAft>
+                <a:buClr>
+                  <a:srgbClr val="000000"/>
+                </a:buClr>
+                <a:buFont typeface="Arial"/>
+                <a:defRPr sz="1400" b="0" i="0" u="none" strike="noStrike" cap="none">
+                  <a:solidFill>
+                    <a:srgbClr val="000000"/>
+                  </a:solidFill>
+                  <a:latin typeface="メイリオ"/>
+                  <a:ea typeface="メイリオ"/>
+                  <a:cs typeface="メイリオ"/>
+                  <a:sym typeface="Arial"/>
+                </a:defRPr>
+              </a:lvl2pPr>
+              <a:lvl3pPr marR="0" lvl="2" algn="l" rtl="0">
+                <a:lnSpc>
+                  <a:spcPct val="100000"/>
+                </a:lnSpc>
+                <a:spcBef>
+                  <a:spcPts val="0"/>
+                </a:spcBef>
+                <a:spcAft>
+                  <a:spcPts val="0"/>
+                </a:spcAft>
+                <a:buClr>
+                  <a:srgbClr val="000000"/>
+                </a:buClr>
+                <a:buFont typeface="Arial"/>
+                <a:defRPr sz="1400" b="0" i="0" u="none" strike="noStrike" cap="none">
+                  <a:solidFill>
+                    <a:srgbClr val="000000"/>
+                  </a:solidFill>
+                  <a:latin typeface="メイリオ"/>
+                  <a:ea typeface="メイリオ"/>
+                  <a:cs typeface="メイリオ"/>
+                  <a:sym typeface="Arial"/>
+                </a:defRPr>
+              </a:lvl3pPr>
+              <a:lvl4pPr marR="0" lvl="3" algn="l" rtl="0">
+                <a:lnSpc>
+                  <a:spcPct val="100000"/>
+                </a:lnSpc>
+                <a:spcBef>
+                  <a:spcPts val="0"/>
+                </a:spcBef>
+                <a:spcAft>
+                  <a:spcPts val="0"/>
+                </a:spcAft>
+                <a:buClr>
+                  <a:srgbClr val="000000"/>
+                </a:buClr>
+                <a:buFont typeface="Arial"/>
+                <a:defRPr sz="1400" b="0" i="0" u="none" strike="noStrike" cap="none">
+                  <a:solidFill>
+                    <a:srgbClr val="000000"/>
+                  </a:solidFill>
+                  <a:latin typeface="メイリオ"/>
+                  <a:ea typeface="メイリオ"/>
+                  <a:cs typeface="メイリオ"/>
+                  <a:sym typeface="Arial"/>
+                </a:defRPr>
+              </a:lvl4pPr>
+              <a:lvl5pPr marR="0" lvl="4" algn="l" rtl="0">
+                <a:lnSpc>
+                  <a:spcPct val="100000"/>
+                </a:lnSpc>
+                <a:spcBef>
+                  <a:spcPts val="0"/>
+                </a:spcBef>
+                <a:spcAft>
+                  <a:spcPts val="0"/>
+                </a:spcAft>
+                <a:buClr>
+                  <a:srgbClr val="000000"/>
+                </a:buClr>
+                <a:buFont typeface="Arial"/>
+                <a:defRPr sz="1400" b="0" i="0" u="none" strike="noStrike" cap="none">
+                  <a:solidFill>
+                    <a:srgbClr val="000000"/>
+                  </a:solidFill>
+                  <a:latin typeface="メイリオ"/>
+                  <a:ea typeface="メイリオ"/>
+                  <a:cs typeface="メイリオ"/>
+                  <a:sym typeface="Arial"/>
+                </a:defRPr>
+              </a:lvl5pPr>
+              <a:lvl6pPr marR="0" lvl="5" algn="l" rtl="0">
+                <a:lnSpc>
+                  <a:spcPct val="100000"/>
+                </a:lnSpc>
+                <a:spcBef>
+                  <a:spcPts val="0"/>
+                </a:spcBef>
+                <a:spcAft>
+                  <a:spcPts val="0"/>
+                </a:spcAft>
+                <a:buClr>
+                  <a:srgbClr val="000000"/>
+                </a:buClr>
+                <a:buFont typeface="Arial"/>
+                <a:defRPr sz="1400" b="0" i="0" u="none" strike="noStrike" cap="none">
+                  <a:solidFill>
+                    <a:srgbClr val="000000"/>
+                  </a:solidFill>
+                  <a:latin typeface="メイリオ"/>
+                  <a:ea typeface="メイリオ"/>
+                  <a:cs typeface="メイリオ"/>
+                  <a:sym typeface="Arial"/>
+                </a:defRPr>
+              </a:lvl6pPr>
+              <a:lvl7pPr marR="0" lvl="6" algn="l" rtl="0">
+                <a:lnSpc>
+                  <a:spcPct val="100000"/>
+                </a:lnSpc>
+                <a:spcBef>
+                  <a:spcPts val="0"/>
+                </a:spcBef>
+                <a:spcAft>
+                  <a:spcPts val="0"/>
+                </a:spcAft>
+                <a:buClr>
+                  <a:srgbClr val="000000"/>
+                </a:buClr>
+                <a:buFont typeface="Arial"/>
+                <a:defRPr sz="1400" b="0" i="0" u="none" strike="noStrike" cap="none">
+                  <a:solidFill>
+                    <a:srgbClr val="000000"/>
+                  </a:solidFill>
+                  <a:latin typeface="メイリオ"/>
+                  <a:ea typeface="メイリオ"/>
+                  <a:cs typeface="メイリオ"/>
+                  <a:sym typeface="Arial"/>
+                </a:defRPr>
+              </a:lvl7pPr>
+              <a:lvl8pPr marR="0" lvl="7" algn="l" rtl="0">
+                <a:lnSpc>
+                  <a:spcPct val="100000"/>
+                </a:lnSpc>
+                <a:spcBef>
+                  <a:spcPts val="0"/>
+                </a:spcBef>
+                <a:spcAft>
+                  <a:spcPts val="0"/>
+                </a:spcAft>
+                <a:buClr>
+                  <a:srgbClr val="000000"/>
+                </a:buClr>
+                <a:buFont typeface="Arial"/>
+                <a:defRPr sz="1400" b="0" i="0" u="none" strike="noStrike" cap="none">
+                  <a:solidFill>
+                    <a:srgbClr val="000000"/>
+                  </a:solidFill>
+                  <a:latin typeface="メイリオ"/>
+                  <a:ea typeface="メイリオ"/>
+                  <a:cs typeface="メイリオ"/>
+                  <a:sym typeface="Arial"/>
+                </a:defRPr>
+              </a:lvl8pPr>
+              <a:lvl9pPr marR="0" lvl="8" algn="l" rtl="0">
+                <a:lnSpc>
+                  <a:spcPct val="100000"/>
+                </a:lnSpc>
+                <a:spcBef>
+                  <a:spcPts val="0"/>
+                </a:spcBef>
+                <a:spcAft>
+                  <a:spcPts val="0"/>
+                </a:spcAft>
+                <a:buClr>
+                  <a:srgbClr val="000000"/>
+                </a:buClr>
+                <a:buFont typeface="Arial"/>
+                <a:defRPr sz="1400" b="0" i="0" u="none" strike="noStrike" cap="none">
+                  <a:solidFill>
+                    <a:srgbClr val="000000"/>
+                  </a:solidFill>
+                  <a:latin typeface="メイリオ"/>
+                  <a:ea typeface="メイリオ"/>
+                  <a:cs typeface="メイリオ"/>
+                  <a:sym typeface="Arial"/>
+                </a:defRPr>
+              </a:lvl9pPr>
+            </a:lstStyle>
+            <a:p>
+              <a:pPr>
+                <a:lnSpc>
+                  <a:spcPct val="120000"/>
+                </a:lnSpc>
+              </a:pPr>
+              <a:r>
+                <a:rPr kumimoji="1" lang="ja-JP" altLang="en-US" sz="1500" b="1" dirty="0">
+                  <a:solidFill>
+                    <a:schemeClr val="bg1"/>
+                  </a:solidFill>
+                  <a:latin typeface="メイリオ" panose="020B0604030504040204" pitchFamily="34" charset="-128"/>
+                  <a:ea typeface="メイリオ" panose="020B0604030504040204" pitchFamily="34" charset="-128"/>
+                  <a:cs typeface="メイリオ"/>
+                </a:rPr>
+                <a:t>サンクス</a:t>
+              </a:r>
+              <a:r>
+                <a:rPr kumimoji="1" lang="en-US" altLang="ja-JP" sz="1500" b="1" dirty="0">
+                  <a:solidFill>
+                    <a:schemeClr val="bg1"/>
+                  </a:solidFill>
+                  <a:latin typeface="メイリオ" panose="020B0604030504040204" pitchFamily="34" charset="-128"/>
+                  <a:ea typeface="メイリオ" panose="020B0604030504040204" pitchFamily="34" charset="-128"/>
+                  <a:cs typeface="メイリオ"/>
+                </a:rPr>
+                <a:t>LINE</a:t>
+              </a:r>
+              <a:r>
+                <a:rPr kumimoji="1" lang="ja-JP" altLang="en-US" sz="1500" b="1" dirty="0">
+                  <a:solidFill>
+                    <a:schemeClr val="bg1"/>
+                  </a:solidFill>
+                  <a:latin typeface="メイリオ" panose="020B0604030504040204" pitchFamily="34" charset="-128"/>
+                  <a:ea typeface="メイリオ" panose="020B0604030504040204" pitchFamily="34" charset="-128"/>
+                  <a:cs typeface="メイリオ"/>
+                </a:rPr>
+                <a:t>誘導</a:t>
+              </a:r>
+            </a:p>
+          </p:txBody>
+        </p:sp>
+      </p:grpSp>
+      <p:sp>
+        <p:nvSpPr>
+          <p:cNvPr id="6" name="正方形/長方形 5">
+            <a:extLst>
+              <a:ext uri="{FF2B5EF4-FFF2-40B4-BE49-F238E27FC236}">
+                <a16:creationId xmlns:a16="http://schemas.microsoft.com/office/drawing/2014/main" id="{8B20BFF3-9D3E-A4D7-FF5A-70927F78FC9D}"/>
+              </a:ext>
+            </a:extLst>
+          </p:cNvPr>
+          <p:cNvSpPr/>
+          <p:nvPr/>
+        </p:nvSpPr>
+        <p:spPr>
+          <a:xfrm>
+            <a:off x="8247347" y="4702330"/>
+            <a:ext cx="899499" cy="799596"/>
+          </a:xfrm>
+          <a:prstGeom prst="rect">
+            <a:avLst/>
+          </a:prstGeom>
+          <a:noFill/>
+          <a:ln>
+            <a:solidFill>
+              <a:srgbClr val="FF0000"/>
+            </a:solidFill>
+          </a:ln>
+        </p:spPr>
+        <p:style>
+          <a:lnRef idx="2">
+            <a:schemeClr val="accent1">
+              <a:shade val="15000"/>
+            </a:schemeClr>
+          </a:lnRef>
+          <a:fillRef idx="1">
+            <a:schemeClr val="accent1"/>
+          </a:fillRef>
+          <a:effectRef idx="0">
+            <a:schemeClr val="accent1"/>
+          </a:effectRef>
+          <a:fontRef idx="minor">
+            <a:schemeClr val="lt1"/>
+          </a:fontRef>
+        </p:style>
+        <p:txBody>
+          <a:bodyPr rtlCol="0" anchor="ctr"/>
+          <a:lstStyle/>
+          <a:p>
+            <a:pPr algn="ctr"/>
+            <a:endParaRPr kumimoji="1" lang="ja-JP" altLang="en-US">
+              <a:latin typeface="メイリオ"/>
+              <a:ea typeface="メイリオ"/>
+              <a:cs typeface="メイリオ"/>
+            </a:endParaRPr>
+          </a:p>
+        </p:txBody>
+      </p:sp>
+      <p:cxnSp>
+        <p:nvCxnSpPr>
+          <p:cNvPr id="7" name="コネクタ: カギ線 6">
+            <a:extLst>
+              <a:ext uri="{FF2B5EF4-FFF2-40B4-BE49-F238E27FC236}">
+                <a16:creationId xmlns:a16="http://schemas.microsoft.com/office/drawing/2014/main" id="{C5EB654A-0759-70F8-6BA7-95CA3A0F983F}"/>
+              </a:ext>
+            </a:extLst>
+          </p:cNvPr>
+          <p:cNvCxnSpPr>
+            <a:cxnSpLocks/>
+          </p:cNvCxnSpPr>
+          <p:nvPr/>
+        </p:nvCxnSpPr>
+        <p:spPr>
+          <a:xfrm flipV="1">
+            <a:off x="7672763" y="5102505"/>
+            <a:ext cx="574585" cy="332494"/>
+          </a:xfrm>
+          <a:prstGeom prst="bentConnector3">
+            <a:avLst>
+              <a:gd name="adj1" fmla="val 50000"/>
+            </a:avLst>
+          </a:prstGeom>
+          <a:ln w="15875">
+            <a:solidFill>
+              <a:srgbClr val="FF0000"/>
+            </a:solidFill>
+            <a:prstDash val="sysDot"/>
+            <a:tailEnd type="triangle"/>
+          </a:ln>
+        </p:spPr>
+        <p:style>
+          <a:lnRef idx="1">
+            <a:schemeClr val="accent1"/>
+          </a:lnRef>
+          <a:fillRef idx="0">
+            <a:schemeClr val="accent1"/>
+          </a:fillRef>
+          <a:effectRef idx="0">
+            <a:schemeClr val="accent1"/>
+          </a:effectRef>
+          <a:fontRef idx="minor">
+            <a:schemeClr val="tx1"/>
+          </a:fontRef>
+        </p:style>
+      </p:cxnSp>
+      <p:cxnSp>
+        <p:nvCxnSpPr>
+          <p:cNvPr id="13" name="直線矢印コネクタ 12">
+            <a:extLst>
+              <a:ext uri="{FF2B5EF4-FFF2-40B4-BE49-F238E27FC236}">
+                <a16:creationId xmlns:a16="http://schemas.microsoft.com/office/drawing/2014/main" id="{218E3FE3-7B20-5966-421F-4ECB81603538}"/>
+              </a:ext>
+            </a:extLst>
+          </p:cNvPr>
+          <p:cNvCxnSpPr>
+            <a:cxnSpLocks/>
+            <a:stCxn id="48" idx="2"/>
+            <a:endCxn id="21" idx="0"/>
+          </p:cNvCxnSpPr>
+          <p:nvPr/>
+        </p:nvCxnSpPr>
+        <p:spPr>
+          <a:xfrm>
+            <a:off x="6904149" y="3132263"/>
+            <a:ext cx="1" cy="1334625"/>
+          </a:xfrm>
+          <a:prstGeom prst="straightConnector1">
+            <a:avLst/>
+          </a:prstGeom>
+          <a:ln w="19050">
+            <a:solidFill>
+              <a:srgbClr val="00B050">
+                <a:alpha val="80000"/>
+              </a:srgbClr>
+            </a:solidFill>
+            <a:prstDash val="sysDot"/>
+            <a:tailEnd type="triangle"/>
+          </a:ln>
+        </p:spPr>
+        <p:style>
+          <a:lnRef idx="1">
+            <a:schemeClr val="accent1"/>
+          </a:lnRef>
+          <a:fillRef idx="0">
+            <a:schemeClr val="accent1"/>
+          </a:fillRef>
+          <a:effectRef idx="0">
+            <a:schemeClr val="accent1"/>
+          </a:effectRef>
+          <a:fontRef idx="minor">
+            <a:schemeClr val="tx1"/>
+          </a:fontRef>
+        </p:style>
+      </p:cxnSp>
+      <p:sp>
+        <p:nvSpPr>
+          <p:cNvPr id="19" name="テキスト ボックス 18">
+            <a:extLst>
+              <a:ext uri="{FF2B5EF4-FFF2-40B4-BE49-F238E27FC236}">
+                <a16:creationId xmlns:a16="http://schemas.microsoft.com/office/drawing/2014/main" id="{DBDB9444-3A0E-B235-58FC-9F8C81BAEA44}"/>
+              </a:ext>
+            </a:extLst>
+          </p:cNvPr>
+          <p:cNvSpPr txBox="1"/>
+          <p:nvPr/>
+        </p:nvSpPr>
+        <p:spPr>
+          <a:xfrm>
+            <a:off x="6323825" y="3523709"/>
+            <a:ext cx="1161782" cy="261610"/>
+          </a:xfrm>
+          <a:prstGeom prst="rect">
+            <a:avLst/>
+          </a:prstGeom>
+          <a:solidFill>
+            <a:schemeClr val="bg1">
+              <a:alpha val="70000"/>
+            </a:schemeClr>
+          </a:solidFill>
+        </p:spPr>
+        <p:txBody>
+          <a:bodyPr wrap="square">
+            <a:spAutoFit/>
+          </a:bodyPr>
+          <a:lstStyle/>
+          <a:p>
+            <a:pPr algn="ctr"/>
+            <a:r>
+              <a:rPr kumimoji="1" lang="ja-JP" altLang="en-US" sz="1100" b="1" dirty="0">
+                <a:solidFill>
+                  <a:srgbClr val="00C057"/>
+                </a:solidFill>
+                <a:latin typeface="メイリオ" panose="020B0604030504040204" pitchFamily="50" charset="-128"/>
+                <a:ea typeface="メイリオ" panose="020B0604030504040204" pitchFamily="50" charset="-128"/>
+                <a:cs typeface="メイリオ"/>
+              </a:rPr>
+              <a:t>友だち追加後</a:t>
+            </a:r>
+            <a:endParaRPr lang="ja-JP" altLang="en-US" sz="1100" dirty="0">
+              <a:solidFill>
+                <a:srgbClr val="00C057"/>
+              </a:solidFill>
+              <a:latin typeface="メイリオ"/>
+              <a:ea typeface="メイリオ"/>
+              <a:cs typeface="メイリオ"/>
+            </a:endParaRPr>
+          </a:p>
+        </p:txBody>
+      </p:sp>
+      <p:sp>
+        <p:nvSpPr>
+          <p:cNvPr id="9" name="正方形/長方形 8">
+            <a:extLst>
+              <a:ext uri="{FF2B5EF4-FFF2-40B4-BE49-F238E27FC236}">
+                <a16:creationId xmlns:a16="http://schemas.microsoft.com/office/drawing/2014/main" id="{DC4FF56C-47EE-47DB-92F1-3F0EF57613D9}"/>
+              </a:ext>
+            </a:extLst>
+          </p:cNvPr>
+          <p:cNvSpPr/>
+          <p:nvPr/>
+        </p:nvSpPr>
+        <p:spPr>
+          <a:xfrm>
+            <a:off x="3806311" y="788165"/>
+            <a:ext cx="5880088" cy="584775"/>
+          </a:xfrm>
+          <a:prstGeom prst="rect">
+            <a:avLst/>
+          </a:prstGeom>
+        </p:spPr>
+        <p:txBody>
+          <a:bodyPr wrap="square">
+            <a:spAutoFit/>
+          </a:bodyPr>
+          <a:lstStyle/>
+          <a:p>
+            <a:pPr lvl="0" algn="ctr">
+              <a:buClr>
+                <a:schemeClr val="dk1"/>
+              </a:buClr>
+              <a:buSzPts val="1500"/>
+            </a:pPr>
+            <a:r>
+              <a:rPr lang="ja-JP" altLang="en-US" sz="1600" dirty="0">
+                <a:latin typeface="メイリオ"/>
+                <a:ea typeface="メイリオ"/>
+                <a:cs typeface="メイリオ"/>
+                <a:sym typeface="Meiryo"/>
+              </a:rPr>
+              <a:t>サンクス到達時の</a:t>
+            </a:r>
+            <a:r>
+              <a:rPr lang="en-US" altLang="ja-JP" sz="1600" dirty="0">
+                <a:latin typeface="メイリオ"/>
+                <a:ea typeface="メイリオ"/>
+                <a:cs typeface="メイリオ"/>
+                <a:sym typeface="Meiryo"/>
+              </a:rPr>
+              <a:t>LINE</a:t>
+            </a:r>
+            <a:r>
+              <a:rPr lang="ja-JP" altLang="en-US" sz="1600" dirty="0">
+                <a:latin typeface="メイリオ"/>
+                <a:ea typeface="メイリオ"/>
+                <a:cs typeface="メイリオ"/>
+                <a:sym typeface="Meiryo"/>
+              </a:rPr>
+              <a:t>動線が弊社開発により可能に。</a:t>
+            </a:r>
+            <a:endParaRPr lang="en-US" altLang="ja-JP" sz="1600" dirty="0">
+              <a:latin typeface="メイリオ"/>
+              <a:ea typeface="メイリオ"/>
+              <a:cs typeface="メイリオ"/>
+              <a:sym typeface="Meiryo"/>
+            </a:endParaRPr>
+          </a:p>
+          <a:p>
+            <a:pPr lvl="0" algn="ctr">
+              <a:buClr>
+                <a:schemeClr val="dk1"/>
+              </a:buClr>
+              <a:buSzPts val="1500"/>
+            </a:pPr>
+            <a:r>
+              <a:rPr lang="ja-JP" altLang="en-US" sz="1600" dirty="0">
+                <a:latin typeface="メイリオ"/>
+                <a:ea typeface="メイリオ"/>
+                <a:cs typeface="メイリオ"/>
+                <a:sym typeface="Meiryo"/>
+              </a:rPr>
+              <a:t>費用を抑えての導入が可能で、新規反響の質改善に寄与。</a:t>
+            </a:r>
+          </a:p>
+        </p:txBody>
+      </p:sp>
+      <p:sp>
+        <p:nvSpPr>
+          <p:cNvPr id="14" name="テキスト ボックス 13">
+            <a:extLst>
+              <a:ext uri="{FF2B5EF4-FFF2-40B4-BE49-F238E27FC236}">
+                <a16:creationId xmlns:a16="http://schemas.microsoft.com/office/drawing/2014/main" id="{5ED6F7D2-546D-BF9F-9805-58455D7E2831}"/>
+              </a:ext>
+            </a:extLst>
+          </p:cNvPr>
+          <p:cNvSpPr txBox="1"/>
+          <p:nvPr/>
+        </p:nvSpPr>
+        <p:spPr>
+          <a:xfrm>
+            <a:off x="4091506" y="1404000"/>
+            <a:ext cx="4718625" cy="230832"/>
+          </a:xfrm>
+          <a:prstGeom prst="rect">
+            <a:avLst/>
+          </a:prstGeom>
+          <a:noFill/>
+        </p:spPr>
+        <p:txBody>
+          <a:bodyPr wrap="square">
+            <a:spAutoFit/>
+          </a:bodyPr>
+          <a:lstStyle/>
+          <a:p>
+            <a:r>
+              <a:rPr lang="en-US" altLang="ja-JP" sz="900" dirty="0">
+                <a:solidFill>
+                  <a:srgbClr val="FF0000"/>
+                </a:solidFill>
+                <a:latin typeface="メイリオ" panose="020B0604030504040204" pitchFamily="50" charset="-128"/>
+                <a:ea typeface="メイリオ" panose="020B0604030504040204" pitchFamily="50" charset="-128"/>
+                <a:cs typeface="メイリオ"/>
+                <a:sym typeface="Meiryo"/>
+              </a:rPr>
+              <a:t>※</a:t>
+            </a:r>
+            <a:r>
+              <a:rPr lang="ja-JP" altLang="en-US" sz="900" dirty="0">
+                <a:solidFill>
+                  <a:srgbClr val="FF0000"/>
+                </a:solidFill>
+                <a:latin typeface="メイリオ" panose="020B0604030504040204" pitchFamily="50" charset="-128"/>
+                <a:ea typeface="メイリオ" panose="020B0604030504040204" pitchFamily="50" charset="-128"/>
+                <a:cs typeface="メイリオ"/>
+                <a:sym typeface="Meiryo"/>
+              </a:rPr>
+              <a:t>既存</a:t>
+            </a:r>
+            <a:r>
+              <a:rPr lang="en-US" altLang="ja-JP" sz="900" dirty="0">
+                <a:solidFill>
+                  <a:srgbClr val="FF0000"/>
+                </a:solidFill>
+                <a:latin typeface="メイリオ" panose="020B0604030504040204" pitchFamily="50" charset="-128"/>
+                <a:ea typeface="メイリオ" panose="020B0604030504040204" pitchFamily="50" charset="-128"/>
+                <a:cs typeface="メイリオ"/>
+                <a:sym typeface="Meiryo"/>
+              </a:rPr>
+              <a:t>API</a:t>
+            </a:r>
+            <a:r>
+              <a:rPr lang="ja-JP" altLang="en-US" sz="900" dirty="0">
+                <a:solidFill>
+                  <a:srgbClr val="FF0000"/>
+                </a:solidFill>
+                <a:latin typeface="メイリオ" panose="020B0604030504040204" pitchFamily="50" charset="-128"/>
+                <a:ea typeface="メイリオ" panose="020B0604030504040204" pitchFamily="50" charset="-128"/>
+                <a:cs typeface="メイリオ"/>
+                <a:sym typeface="Meiryo"/>
+              </a:rPr>
+              <a:t>ツールとの併用についても、問題なく稼働が可能。</a:t>
+            </a:r>
+            <a:endParaRPr lang="ja-JP" altLang="en-US" sz="900" dirty="0">
+              <a:solidFill>
+                <a:srgbClr val="FF0000"/>
+              </a:solidFill>
+              <a:latin typeface="メイリオ"/>
+              <a:ea typeface="メイリオ"/>
+              <a:cs typeface="メイリオ"/>
+            </a:endParaRPr>
+          </a:p>
+        </p:txBody>
+      </p:sp>
+      <p:sp>
+        <p:nvSpPr>
+          <p:cNvPr id="8" name="正方形/長方形 7">
+            <a:extLst>
+              <a:ext uri="{FF2B5EF4-FFF2-40B4-BE49-F238E27FC236}">
+                <a16:creationId xmlns:a16="http://schemas.microsoft.com/office/drawing/2014/main" id="{F5B8C83A-7191-D772-EF88-AE268D007E63}"/>
+              </a:ext>
+            </a:extLst>
+          </p:cNvPr>
+          <p:cNvSpPr/>
+          <p:nvPr/>
+        </p:nvSpPr>
+        <p:spPr>
+          <a:xfrm>
+            <a:off x="5769326" y="1938056"/>
+            <a:ext cx="3788228" cy="244151"/>
+          </a:xfrm>
+          <a:prstGeom prst="rect">
+            <a:avLst/>
+          </a:prstGeom>
+          <a:solidFill>
+            <a:schemeClr val="tx2"/>
+          </a:solidFill>
+          <a:ln>
+            <a:noFill/>
+          </a:ln>
+        </p:spPr>
+        <p:style>
+          <a:lnRef idx="2">
+            <a:schemeClr val="accent1">
+              <a:shade val="15000"/>
+            </a:schemeClr>
+          </a:lnRef>
+          <a:fillRef idx="1">
+            <a:schemeClr val="accent1"/>
+          </a:fillRef>
+          <a:effectRef idx="0">
+            <a:schemeClr val="accent1"/>
+          </a:effectRef>
+          <a:fontRef idx="minor">
+            <a:schemeClr val="lt1"/>
+          </a:fontRef>
+        </p:style>
+        <p:txBody>
+          <a:bodyPr rtlCol="0" anchor="ctr"/>
+          <a:lstStyle/>
+          <a:p>
+            <a:pPr algn="ctr"/>
+            <a:r>
+              <a:rPr lang="ja-JP" altLang="en-US" sz="1100" b="1" dirty="0">
+                <a:solidFill>
+                  <a:schemeClr val="bg1"/>
+                </a:solidFill>
+                <a:latin typeface="メイリオ" panose="020B0604030504040204" pitchFamily="50" charset="-128"/>
+                <a:ea typeface="メイリオ" panose="020B0604030504040204" pitchFamily="50" charset="-128"/>
+                <a:cs typeface="メイリオ"/>
+              </a:rPr>
+              <a:t>動作イメージ</a:t>
+            </a:r>
+            <a:endParaRPr kumimoji="1" lang="ja-JP" altLang="en-US" sz="1100" b="1" dirty="0">
+              <a:solidFill>
+                <a:schemeClr val="bg1"/>
+              </a:solidFill>
+              <a:latin typeface="メイリオ" panose="020B0604030504040204" pitchFamily="50" charset="-128"/>
+              <a:ea typeface="メイリオ" panose="020B0604030504040204" pitchFamily="50" charset="-128"/>
+              <a:cs typeface="メイリオ"/>
+            </a:endParaRPr>
+          </a:p>
+        </p:txBody>
+      </p:sp>
+      <p:sp>
+        <p:nvSpPr>
+          <p:cNvPr id="26" name="Google Shape;51;p19">
+            <a:extLst>
+              <a:ext uri="{FF2B5EF4-FFF2-40B4-BE49-F238E27FC236}">
+                <a16:creationId xmlns:a16="http://schemas.microsoft.com/office/drawing/2014/main" id="{A4070FDA-7C99-27DE-6A9C-437C1D5DD3B3}"/>
+              </a:ext>
+            </a:extLst>
+          </p:cNvPr>
+          <p:cNvSpPr/>
+          <p:nvPr/>
+        </p:nvSpPr>
+        <p:spPr>
+          <a:xfrm>
+            <a:off x="543399" y="1321261"/>
+            <a:ext cx="1510826" cy="485102"/>
+          </a:xfrm>
+          <a:prstGeom prst="roundRect">
+            <a:avLst>
+              <a:gd name="adj" fmla="val 16667"/>
+            </a:avLst>
+          </a:prstGeom>
+          <a:solidFill>
+            <a:schemeClr val="tx2"/>
+          </a:solidFill>
+          <a:ln>
+            <a:noFill/>
+          </a:ln>
+        </p:spPr>
+        <p:txBody>
+          <a:bodyPr spcFirstLastPara="1" wrap="square" lIns="91425" tIns="45700" rIns="91425" bIns="45700" anchor="ctr" anchorCtr="0">
+            <a:noAutofit/>
+          </a:bodyPr>
+          <a:lstStyle>
+            <a:defPPr marR="0" lvl="0" algn="l" rtl="0">
+              <a:lnSpc>
+                <a:spcPct val="100000"/>
+              </a:lnSpc>
+              <a:spcBef>
+                <a:spcPts val="0"/>
+              </a:spcBef>
+              <a:spcAft>
+                <a:spcPts val="0"/>
+              </a:spcAft>
+            </a:defPPr>
+            <a:lvl1pPr marR="0" lvl="0" algn="l" rtl="0">
+              <a:lnSpc>
+                <a:spcPct val="100000"/>
+              </a:lnSpc>
+              <a:spcBef>
+                <a:spcPts val="0"/>
+              </a:spcBef>
+              <a:spcAft>
+                <a:spcPts val="0"/>
+              </a:spcAft>
+              <a:buClr>
+                <a:srgbClr val="000000"/>
+              </a:buClr>
+              <a:buFont typeface="Arial"/>
+              <a:defRPr sz="1400" b="0" i="0" u="none" strike="noStrike" cap="none">
+                <a:solidFill>
+                  <a:srgbClr val="000000"/>
+                </a:solidFill>
+                <a:latin typeface="メイリオ"/>
+                <a:ea typeface="メイリオ"/>
+                <a:cs typeface="メイリオ"/>
+                <a:sym typeface="Arial"/>
+              </a:defRPr>
+            </a:lvl1pPr>
+            <a:lvl2pPr marR="0" lvl="1" algn="l" rtl="0">
+              <a:lnSpc>
+                <a:spcPct val="100000"/>
+              </a:lnSpc>
+              <a:spcBef>
+                <a:spcPts val="0"/>
+              </a:spcBef>
+              <a:spcAft>
+                <a:spcPts val="0"/>
+              </a:spcAft>
+              <a:buClr>
+                <a:srgbClr val="000000"/>
+              </a:buClr>
+              <a:buFont typeface="Arial"/>
+              <a:defRPr sz="1400" b="0" i="0" u="none" strike="noStrike" cap="none">
+                <a:solidFill>
+                  <a:srgbClr val="000000"/>
+                </a:solidFill>
+                <a:latin typeface="メイリオ"/>
+                <a:ea typeface="メイリオ"/>
+                <a:cs typeface="メイリオ"/>
+                <a:sym typeface="Arial"/>
+              </a:defRPr>
+            </a:lvl2pPr>
+            <a:lvl3pPr marR="0" lvl="2" algn="l" rtl="0">
+              <a:lnSpc>
+                <a:spcPct val="100000"/>
+              </a:lnSpc>
+              <a:spcBef>
+                <a:spcPts val="0"/>
+              </a:spcBef>
+              <a:spcAft>
+                <a:spcPts val="0"/>
+              </a:spcAft>
+              <a:buClr>
+                <a:srgbClr val="000000"/>
+              </a:buClr>
+              <a:buFont typeface="Arial"/>
+              <a:defRPr sz="1400" b="0" i="0" u="none" strike="noStrike" cap="none">
+                <a:solidFill>
+                  <a:srgbClr val="000000"/>
+                </a:solidFill>
+                <a:latin typeface="メイリオ"/>
+                <a:ea typeface="メイリオ"/>
+                <a:cs typeface="メイリオ"/>
+                <a:sym typeface="Arial"/>
+              </a:defRPr>
+            </a:lvl3pPr>
+            <a:lvl4pPr marR="0" lvl="3" algn="l" rtl="0">
+              <a:lnSpc>
+                <a:spcPct val="100000"/>
+              </a:lnSpc>
+              <a:spcBef>
+                <a:spcPts val="0"/>
+              </a:spcBef>
+              <a:spcAft>
+                <a:spcPts val="0"/>
+              </a:spcAft>
+              <a:buClr>
+                <a:srgbClr val="000000"/>
+              </a:buClr>
+              <a:buFont typeface="Arial"/>
+              <a:defRPr sz="1400" b="0" i="0" u="none" strike="noStrike" cap="none">
+                <a:solidFill>
+                  <a:srgbClr val="000000"/>
+                </a:solidFill>
+                <a:latin typeface="メイリオ"/>
+                <a:ea typeface="メイリオ"/>
+                <a:cs typeface="メイリオ"/>
+                <a:sym typeface="Arial"/>
+              </a:defRPr>
+            </a:lvl4pPr>
+            <a:lvl5pPr marR="0" lvl="4" algn="l" rtl="0">
+              <a:lnSpc>
+                <a:spcPct val="100000"/>
+              </a:lnSpc>
+              <a:spcBef>
+                <a:spcPts val="0"/>
+              </a:spcBef>
+              <a:spcAft>
+                <a:spcPts val="0"/>
+              </a:spcAft>
+              <a:buClr>
+                <a:srgbClr val="000000"/>
+              </a:buClr>
+              <a:buFont typeface="Arial"/>
+              <a:defRPr sz="1400" b="0" i="0" u="none" strike="noStrike" cap="none">
+                <a:solidFill>
+                  <a:srgbClr val="000000"/>
+                </a:solidFill>
+                <a:latin typeface="メイリオ"/>
+                <a:ea typeface="メイリオ"/>
+                <a:cs typeface="メイリオ"/>
+                <a:sym typeface="Arial"/>
+              </a:defRPr>
+            </a:lvl5pPr>
+            <a:lvl6pPr marR="0" lvl="5" algn="l" rtl="0">
+              <a:lnSpc>
+                <a:spcPct val="100000"/>
+              </a:lnSpc>
+              <a:spcBef>
+                <a:spcPts val="0"/>
+              </a:spcBef>
+              <a:spcAft>
+                <a:spcPts val="0"/>
+              </a:spcAft>
+              <a:buClr>
+                <a:srgbClr val="000000"/>
+              </a:buClr>
+              <a:buFont typeface="Arial"/>
+              <a:defRPr sz="1400" b="0" i="0" u="none" strike="noStrike" cap="none">
+                <a:solidFill>
+                  <a:srgbClr val="000000"/>
+                </a:solidFill>
+                <a:latin typeface="メイリオ"/>
+                <a:ea typeface="メイリオ"/>
+                <a:cs typeface="メイリオ"/>
+                <a:sym typeface="Arial"/>
+              </a:defRPr>
+            </a:lvl6pPr>
+            <a:lvl7pPr marR="0" lvl="6" algn="l" rtl="0">
+              <a:lnSpc>
+                <a:spcPct val="100000"/>
+              </a:lnSpc>
+              <a:spcBef>
+                <a:spcPts val="0"/>
+              </a:spcBef>
+              <a:spcAft>
+                <a:spcPts val="0"/>
+              </a:spcAft>
+              <a:buClr>
+                <a:srgbClr val="000000"/>
+              </a:buClr>
+              <a:buFont typeface="Arial"/>
+              <a:defRPr sz="1400" b="0" i="0" u="none" strike="noStrike" cap="none">
+                <a:solidFill>
+                  <a:srgbClr val="000000"/>
+                </a:solidFill>
+                <a:latin typeface="メイリオ"/>
+                <a:ea typeface="メイリオ"/>
+                <a:cs typeface="メイリオ"/>
+                <a:sym typeface="Arial"/>
+              </a:defRPr>
+            </a:lvl7pPr>
+            <a:lvl8pPr marR="0" lvl="7" algn="l" rtl="0">
+              <a:lnSpc>
+                <a:spcPct val="100000"/>
+              </a:lnSpc>
+              <a:spcBef>
+                <a:spcPts val="0"/>
+              </a:spcBef>
+              <a:spcAft>
+                <a:spcPts val="0"/>
+              </a:spcAft>
+              <a:buClr>
+                <a:srgbClr val="000000"/>
+              </a:buClr>
+              <a:buFont typeface="Arial"/>
+              <a:defRPr sz="1400" b="0" i="0" u="none" strike="noStrike" cap="none">
+                <a:solidFill>
+                  <a:srgbClr val="000000"/>
+                </a:solidFill>
+                <a:latin typeface="メイリオ"/>
+                <a:ea typeface="メイリオ"/>
+                <a:cs typeface="メイリオ"/>
+                <a:sym typeface="Arial"/>
+              </a:defRPr>
+            </a:lvl8pPr>
+            <a:lvl9pPr marR="0" lvl="8" algn="l" rtl="0">
+              <a:lnSpc>
+                <a:spcPct val="100000"/>
+              </a:lnSpc>
+              <a:spcBef>
+                <a:spcPts val="0"/>
+              </a:spcBef>
+              <a:spcAft>
+                <a:spcPts val="0"/>
+              </a:spcAft>
+              <a:buClr>
+                <a:srgbClr val="000000"/>
+              </a:buClr>
+              <a:buFont typeface="Arial"/>
+              <a:defRPr sz="1400" b="0" i="0" u="none" strike="noStrike" cap="none">
+                <a:solidFill>
+                  <a:srgbClr val="000000"/>
+                </a:solidFill>
+                <a:latin typeface="メイリオ"/>
+                <a:ea typeface="メイリオ"/>
+                <a:cs typeface="メイリオ"/>
+                <a:sym typeface="Arial"/>
+              </a:defRPr>
+            </a:lvl9pPr>
+          </a:lstStyle>
+          <a:p>
+            <a:pPr marL="0" marR="0" lvl="0" indent="0" algn="ctr" rtl="0">
+              <a:lnSpc>
+                <a:spcPct val="100000"/>
+              </a:lnSpc>
+              <a:spcBef>
+                <a:spcPts val="0"/>
+              </a:spcBef>
+              <a:spcAft>
+                <a:spcPts val="0"/>
+              </a:spcAft>
+              <a:buClr>
+                <a:srgbClr val="000000"/>
+              </a:buClr>
+              <a:buSzPts val="1400"/>
+              <a:buFont typeface="Arial"/>
+              <a:buNone/>
+            </a:pPr>
+            <a:r>
+              <a:rPr lang="ja-JP" altLang="en-US" sz="1400" b="1" i="0" u="none" strike="noStrike" cap="none" dirty="0">
+                <a:solidFill>
+                  <a:schemeClr val="lt1"/>
+                </a:solidFill>
+                <a:latin typeface="メイリオ"/>
+                <a:ea typeface="メイリオ"/>
+                <a:cs typeface="メイリオ"/>
+                <a:sym typeface="Meiryo"/>
+              </a:rPr>
+              <a:t>初期：</a:t>
+            </a:r>
+            <a:r>
+              <a:rPr lang="en-US" altLang="ja-JP" sz="1400" b="1" i="0" u="none" strike="noStrike" cap="none" dirty="0">
+                <a:solidFill>
+                  <a:schemeClr val="lt1"/>
+                </a:solidFill>
+                <a:latin typeface="メイリオ"/>
+                <a:ea typeface="メイリオ"/>
+                <a:cs typeface="メイリオ"/>
+                <a:sym typeface="Meiryo"/>
+              </a:rPr>
+              <a:t>15</a:t>
+            </a:r>
+            <a:r>
+              <a:rPr lang="ja-JP" altLang="en-US" sz="1400" b="1" i="0" u="none" strike="noStrike" cap="none" dirty="0">
+                <a:solidFill>
+                  <a:schemeClr val="lt1"/>
+                </a:solidFill>
+                <a:latin typeface="メイリオ"/>
+                <a:ea typeface="メイリオ"/>
+                <a:cs typeface="メイリオ"/>
+                <a:sym typeface="Meiryo"/>
+              </a:rPr>
+              <a:t>万円</a:t>
+            </a:r>
+            <a:endParaRPr sz="1400" b="1" i="0" u="none" strike="noStrike" cap="none" dirty="0">
+              <a:solidFill>
+                <a:schemeClr val="lt1"/>
+              </a:solidFill>
+              <a:latin typeface="メイリオ"/>
+              <a:ea typeface="メイリオ"/>
+              <a:cs typeface="メイリオ"/>
+              <a:sym typeface="Meiryo"/>
+            </a:endParaRPr>
+          </a:p>
+        </p:txBody>
+      </p:sp>
+      <p:sp>
+        <p:nvSpPr>
+          <p:cNvPr id="28" name="Google Shape;51;p19">
+            <a:extLst>
+              <a:ext uri="{FF2B5EF4-FFF2-40B4-BE49-F238E27FC236}">
+                <a16:creationId xmlns:a16="http://schemas.microsoft.com/office/drawing/2014/main" id="{40C4675F-5DCC-DD57-BE14-B3A7697A02CD}"/>
+              </a:ext>
+            </a:extLst>
+          </p:cNvPr>
+          <p:cNvSpPr/>
+          <p:nvPr/>
+        </p:nvSpPr>
+        <p:spPr>
+          <a:xfrm>
+            <a:off x="2137897" y="1321261"/>
+            <a:ext cx="1510826" cy="485102"/>
+          </a:xfrm>
+          <a:prstGeom prst="roundRect">
+            <a:avLst>
+              <a:gd name="adj" fmla="val 16667"/>
+            </a:avLst>
+          </a:prstGeom>
+          <a:solidFill>
+            <a:schemeClr val="tx2"/>
+          </a:solidFill>
+          <a:ln>
+            <a:noFill/>
+          </a:ln>
+        </p:spPr>
+        <p:txBody>
+          <a:bodyPr spcFirstLastPara="1" wrap="square" lIns="91425" tIns="45700" rIns="91425" bIns="45700" anchor="ctr" anchorCtr="0">
+            <a:noAutofit/>
+          </a:bodyPr>
+          <a:lstStyle>
+            <a:defPPr marR="0" lvl="0" algn="l" rtl="0">
+              <a:lnSpc>
+                <a:spcPct val="100000"/>
+              </a:lnSpc>
+              <a:spcBef>
+                <a:spcPts val="0"/>
+              </a:spcBef>
+              <a:spcAft>
+                <a:spcPts val="0"/>
+              </a:spcAft>
+            </a:defPPr>
+            <a:lvl1pPr marR="0" lvl="0" algn="l" rtl="0">
+              <a:lnSpc>
+                <a:spcPct val="100000"/>
+              </a:lnSpc>
+              <a:spcBef>
+                <a:spcPts val="0"/>
+              </a:spcBef>
+              <a:spcAft>
+                <a:spcPts val="0"/>
+              </a:spcAft>
+              <a:buClr>
+                <a:srgbClr val="000000"/>
+              </a:buClr>
+              <a:buFont typeface="Arial"/>
+              <a:defRPr sz="1400" b="0" i="0" u="none" strike="noStrike" cap="none">
+                <a:solidFill>
+                  <a:srgbClr val="000000"/>
+                </a:solidFill>
+                <a:latin typeface="メイリオ"/>
+                <a:ea typeface="メイリオ"/>
+                <a:cs typeface="メイリオ"/>
+                <a:sym typeface="Arial"/>
+              </a:defRPr>
+            </a:lvl1pPr>
+            <a:lvl2pPr marR="0" lvl="1" algn="l" rtl="0">
+              <a:lnSpc>
+                <a:spcPct val="100000"/>
+              </a:lnSpc>
+              <a:spcBef>
+                <a:spcPts val="0"/>
+              </a:spcBef>
+              <a:spcAft>
+                <a:spcPts val="0"/>
+              </a:spcAft>
+              <a:buClr>
+                <a:srgbClr val="000000"/>
+              </a:buClr>
+              <a:buFont typeface="Arial"/>
+              <a:defRPr sz="1400" b="0" i="0" u="none" strike="noStrike" cap="none">
+                <a:solidFill>
+                  <a:srgbClr val="000000"/>
+                </a:solidFill>
+                <a:latin typeface="メイリオ"/>
+                <a:ea typeface="メイリオ"/>
+                <a:cs typeface="メイリオ"/>
+                <a:sym typeface="Arial"/>
+              </a:defRPr>
+            </a:lvl2pPr>
+            <a:lvl3pPr marR="0" lvl="2" algn="l" rtl="0">
+              <a:lnSpc>
+                <a:spcPct val="100000"/>
+              </a:lnSpc>
+              <a:spcBef>
+                <a:spcPts val="0"/>
+              </a:spcBef>
+              <a:spcAft>
+                <a:spcPts val="0"/>
+              </a:spcAft>
+              <a:buClr>
+                <a:srgbClr val="000000"/>
+              </a:buClr>
+              <a:buFont typeface="Arial"/>
+              <a:defRPr sz="1400" b="0" i="0" u="none" strike="noStrike" cap="none">
+                <a:solidFill>
+                  <a:srgbClr val="000000"/>
+                </a:solidFill>
+                <a:latin typeface="メイリオ"/>
+                <a:ea typeface="メイリオ"/>
+                <a:cs typeface="メイリオ"/>
+                <a:sym typeface="Arial"/>
+              </a:defRPr>
+            </a:lvl3pPr>
+            <a:lvl4pPr marR="0" lvl="3" algn="l" rtl="0">
+              <a:lnSpc>
+                <a:spcPct val="100000"/>
+              </a:lnSpc>
+              <a:spcBef>
+                <a:spcPts val="0"/>
+              </a:spcBef>
+              <a:spcAft>
+                <a:spcPts val="0"/>
+              </a:spcAft>
+              <a:buClr>
+                <a:srgbClr val="000000"/>
+              </a:buClr>
+              <a:buFont typeface="Arial"/>
+              <a:defRPr sz="1400" b="0" i="0" u="none" strike="noStrike" cap="none">
+                <a:solidFill>
+                  <a:srgbClr val="000000"/>
+                </a:solidFill>
+                <a:latin typeface="メイリオ"/>
+                <a:ea typeface="メイリオ"/>
+                <a:cs typeface="メイリオ"/>
+                <a:sym typeface="Arial"/>
+              </a:defRPr>
+            </a:lvl4pPr>
+            <a:lvl5pPr marR="0" lvl="4" algn="l" rtl="0">
+              <a:lnSpc>
+                <a:spcPct val="100000"/>
+              </a:lnSpc>
+              <a:spcBef>
+                <a:spcPts val="0"/>
+              </a:spcBef>
+              <a:spcAft>
+                <a:spcPts val="0"/>
+              </a:spcAft>
+              <a:buClr>
+                <a:srgbClr val="000000"/>
+              </a:buClr>
+              <a:buFont typeface="Arial"/>
+              <a:defRPr sz="1400" b="0" i="0" u="none" strike="noStrike" cap="none">
+                <a:solidFill>
+                  <a:srgbClr val="000000"/>
+                </a:solidFill>
+                <a:latin typeface="メイリオ"/>
+                <a:ea typeface="メイリオ"/>
+                <a:cs typeface="メイリオ"/>
+                <a:sym typeface="Arial"/>
+              </a:defRPr>
+            </a:lvl5pPr>
+            <a:lvl6pPr marR="0" lvl="5" algn="l" rtl="0">
+              <a:lnSpc>
+                <a:spcPct val="100000"/>
+              </a:lnSpc>
+              <a:spcBef>
+                <a:spcPts val="0"/>
+              </a:spcBef>
+              <a:spcAft>
+                <a:spcPts val="0"/>
+              </a:spcAft>
+              <a:buClr>
+                <a:srgbClr val="000000"/>
+              </a:buClr>
+              <a:buFont typeface="Arial"/>
+              <a:defRPr sz="1400" b="0" i="0" u="none" strike="noStrike" cap="none">
+                <a:solidFill>
+                  <a:srgbClr val="000000"/>
+                </a:solidFill>
+                <a:latin typeface="メイリオ"/>
+                <a:ea typeface="メイリオ"/>
+                <a:cs typeface="メイリオ"/>
+                <a:sym typeface="Arial"/>
+              </a:defRPr>
+            </a:lvl6pPr>
+            <a:lvl7pPr marR="0" lvl="6" algn="l" rtl="0">
+              <a:lnSpc>
+                <a:spcPct val="100000"/>
+              </a:lnSpc>
+              <a:spcBef>
+                <a:spcPts val="0"/>
+              </a:spcBef>
+              <a:spcAft>
+                <a:spcPts val="0"/>
+              </a:spcAft>
+              <a:buClr>
+                <a:srgbClr val="000000"/>
+              </a:buClr>
+              <a:buFont typeface="Arial"/>
+              <a:defRPr sz="1400" b="0" i="0" u="none" strike="noStrike" cap="none">
+                <a:solidFill>
+                  <a:srgbClr val="000000"/>
+                </a:solidFill>
+                <a:latin typeface="メイリオ"/>
+                <a:ea typeface="メイリオ"/>
+                <a:cs typeface="メイリオ"/>
+                <a:sym typeface="Arial"/>
+              </a:defRPr>
+            </a:lvl7pPr>
+            <a:lvl8pPr marR="0" lvl="7" algn="l" rtl="0">
+              <a:lnSpc>
+                <a:spcPct val="100000"/>
+              </a:lnSpc>
+              <a:spcBef>
+                <a:spcPts val="0"/>
+              </a:spcBef>
+              <a:spcAft>
+                <a:spcPts val="0"/>
+              </a:spcAft>
+              <a:buClr>
+                <a:srgbClr val="000000"/>
+              </a:buClr>
+              <a:buFont typeface="Arial"/>
+              <a:defRPr sz="1400" b="0" i="0" u="none" strike="noStrike" cap="none">
+                <a:solidFill>
+                  <a:srgbClr val="000000"/>
+                </a:solidFill>
+                <a:latin typeface="メイリオ"/>
+                <a:ea typeface="メイリオ"/>
+                <a:cs typeface="メイリオ"/>
+                <a:sym typeface="Arial"/>
+              </a:defRPr>
+            </a:lvl8pPr>
+            <a:lvl9pPr marR="0" lvl="8" algn="l" rtl="0">
+              <a:lnSpc>
+                <a:spcPct val="100000"/>
+              </a:lnSpc>
+              <a:spcBef>
+                <a:spcPts val="0"/>
+              </a:spcBef>
+              <a:spcAft>
+                <a:spcPts val="0"/>
+              </a:spcAft>
+              <a:buClr>
+                <a:srgbClr val="000000"/>
+              </a:buClr>
+              <a:buFont typeface="Arial"/>
+              <a:defRPr sz="1400" b="0" i="0" u="none" strike="noStrike" cap="none">
+                <a:solidFill>
+                  <a:srgbClr val="000000"/>
+                </a:solidFill>
+                <a:latin typeface="メイリオ"/>
+                <a:ea typeface="メイリオ"/>
+                <a:cs typeface="メイリオ"/>
+                <a:sym typeface="Arial"/>
+              </a:defRPr>
+            </a:lvl9pPr>
+          </a:lstStyle>
+          <a:p>
+            <a:pPr marL="0" marR="0" lvl="0" indent="0" algn="ctr" rtl="0">
+              <a:lnSpc>
+                <a:spcPct val="100000"/>
+              </a:lnSpc>
+              <a:spcBef>
+                <a:spcPts val="0"/>
+              </a:spcBef>
+              <a:spcAft>
+                <a:spcPts val="0"/>
+              </a:spcAft>
+              <a:buClr>
+                <a:srgbClr val="000000"/>
+              </a:buClr>
+              <a:buSzPts val="1400"/>
+              <a:buFont typeface="Arial"/>
+              <a:buNone/>
+            </a:pPr>
+            <a:r>
+              <a:rPr lang="ja-JP" altLang="en-US" sz="1400" b="1" i="0" u="none" strike="noStrike" cap="none" dirty="0">
+                <a:solidFill>
+                  <a:schemeClr val="lt1"/>
+                </a:solidFill>
+                <a:latin typeface="メイリオ"/>
+                <a:ea typeface="メイリオ"/>
+                <a:cs typeface="メイリオ"/>
+                <a:sym typeface="Meiryo"/>
+              </a:rPr>
+              <a:t>月額</a:t>
+            </a:r>
+            <a:r>
+              <a:rPr lang="en-US" altLang="ja-JP" sz="1400" b="1" i="0" u="none" strike="noStrike" cap="none" dirty="0">
+                <a:solidFill>
+                  <a:schemeClr val="lt1"/>
+                </a:solidFill>
+                <a:latin typeface="メイリオ"/>
+                <a:ea typeface="メイリオ"/>
+                <a:cs typeface="メイリオ"/>
+                <a:sym typeface="Meiryo"/>
+              </a:rPr>
+              <a:t>3</a:t>
+            </a:r>
+            <a:r>
+              <a:rPr lang="ja-JP" altLang="en-US" sz="1400" b="1" i="0" u="none" strike="noStrike" cap="none" dirty="0">
+                <a:solidFill>
+                  <a:schemeClr val="lt1"/>
+                </a:solidFill>
+                <a:latin typeface="メイリオ"/>
+                <a:ea typeface="メイリオ"/>
+                <a:cs typeface="メイリオ"/>
+                <a:sym typeface="Meiryo"/>
+              </a:rPr>
+              <a:t>万円～</a:t>
+            </a:r>
+            <a:endParaRPr lang="en-US" altLang="ja-JP" sz="1400" b="1" i="0" u="none" strike="noStrike" cap="none" dirty="0">
+              <a:solidFill>
+                <a:schemeClr val="lt1"/>
+              </a:solidFill>
+              <a:latin typeface="メイリオ"/>
+              <a:ea typeface="メイリオ"/>
+              <a:cs typeface="メイリオ"/>
+              <a:sym typeface="Meiryo"/>
+            </a:endParaRPr>
+          </a:p>
+          <a:p>
+            <a:pPr marL="0" marR="0" lvl="0" indent="0" algn="ctr" rtl="0">
+              <a:lnSpc>
+                <a:spcPct val="100000"/>
+              </a:lnSpc>
+              <a:spcBef>
+                <a:spcPts val="0"/>
+              </a:spcBef>
+              <a:spcAft>
+                <a:spcPts val="0"/>
+              </a:spcAft>
+              <a:buClr>
+                <a:srgbClr val="000000"/>
+              </a:buClr>
+              <a:buSzPts val="1400"/>
+              <a:buFont typeface="Arial"/>
+              <a:buNone/>
+            </a:pPr>
+            <a:r>
+              <a:rPr lang="en-US" altLang="ja-JP" sz="1050" b="1" dirty="0">
+                <a:solidFill>
+                  <a:srgbClr val="FFFF00"/>
+                </a:solidFill>
+                <a:latin typeface="メイリオ"/>
+                <a:ea typeface="メイリオ"/>
+                <a:cs typeface="メイリオ"/>
+                <a:sym typeface="Meiryo"/>
+              </a:rPr>
+              <a:t>+</a:t>
+            </a:r>
+            <a:r>
+              <a:rPr lang="ja-JP" altLang="en-US" sz="1050" b="1" dirty="0">
+                <a:solidFill>
+                  <a:srgbClr val="FFFF00"/>
+                </a:solidFill>
+                <a:latin typeface="メイリオ"/>
+                <a:ea typeface="メイリオ"/>
+                <a:cs typeface="メイリオ"/>
+                <a:sym typeface="Meiryo"/>
+              </a:rPr>
+              <a:t>設定地点追加</a:t>
+            </a:r>
+            <a:endParaRPr sz="1050" b="1" i="0" u="none" strike="noStrike" cap="none" dirty="0">
+              <a:solidFill>
+                <a:srgbClr val="FFFF00"/>
+              </a:solidFill>
+              <a:latin typeface="メイリオ"/>
+              <a:ea typeface="メイリオ"/>
+              <a:cs typeface="メイリオ"/>
+              <a:sym typeface="Meiryo"/>
+            </a:endParaRPr>
+          </a:p>
+        </p:txBody>
+      </p:sp>
+      <p:cxnSp>
+        <p:nvCxnSpPr>
+          <p:cNvPr id="30" name="コネクタ: カギ線 29">
+            <a:extLst>
+              <a:ext uri="{FF2B5EF4-FFF2-40B4-BE49-F238E27FC236}">
+                <a16:creationId xmlns:a16="http://schemas.microsoft.com/office/drawing/2014/main" id="{D9706AF3-2C8D-6646-76C8-7802A4F734FC}"/>
+              </a:ext>
+            </a:extLst>
+          </p:cNvPr>
+          <p:cNvCxnSpPr>
+            <a:cxnSpLocks/>
+          </p:cNvCxnSpPr>
+          <p:nvPr/>
+        </p:nvCxnSpPr>
+        <p:spPr>
+          <a:xfrm rot="16200000" flipH="1">
+            <a:off x="3294819" y="3047336"/>
+            <a:ext cx="430977" cy="4596748"/>
+          </a:xfrm>
+          <a:prstGeom prst="bentConnector2">
+            <a:avLst/>
+          </a:prstGeom>
+          <a:ln w="15875">
+            <a:solidFill>
+              <a:srgbClr val="FF0000"/>
+            </a:solidFill>
+            <a:prstDash val="sysDot"/>
+            <a:tailEnd type="triangle"/>
+          </a:ln>
+        </p:spPr>
+        <p:style>
+          <a:lnRef idx="1">
+            <a:schemeClr val="accent1"/>
+          </a:lnRef>
+          <a:fillRef idx="0">
+            <a:schemeClr val="accent1"/>
+          </a:fillRef>
+          <a:effectRef idx="0">
+            <a:schemeClr val="accent1"/>
+          </a:effectRef>
+          <a:fontRef idx="minor">
+            <a:schemeClr val="tx1"/>
+          </a:fontRef>
+        </p:style>
+      </p:cxnSp>
+      <p:sp>
+        <p:nvSpPr>
+          <p:cNvPr id="50" name="テキスト ボックス 49">
+            <a:extLst>
+              <a:ext uri="{FF2B5EF4-FFF2-40B4-BE49-F238E27FC236}">
+                <a16:creationId xmlns:a16="http://schemas.microsoft.com/office/drawing/2014/main" id="{97C92C6B-4F06-7ED3-0627-D0C168299913}"/>
+              </a:ext>
+            </a:extLst>
+          </p:cNvPr>
+          <p:cNvSpPr txBox="1"/>
+          <p:nvPr/>
+        </p:nvSpPr>
+        <p:spPr>
+          <a:xfrm>
+            <a:off x="115187" y="5639542"/>
+            <a:ext cx="5785781" cy="461665"/>
+          </a:xfrm>
+          <a:prstGeom prst="rect">
+            <a:avLst/>
+          </a:prstGeom>
+          <a:solidFill>
+            <a:schemeClr val="bg1">
+              <a:alpha val="62000"/>
+            </a:schemeClr>
+          </a:solidFill>
+        </p:spPr>
+        <p:txBody>
+          <a:bodyPr wrap="square">
+            <a:spAutoFit/>
+          </a:bodyPr>
+          <a:lstStyle/>
+          <a:p>
+            <a:pPr algn="ctr"/>
+            <a:r>
+              <a:rPr lang="ja-JP" altLang="ja-JP" sz="1200" dirty="0">
+                <a:latin typeface="メイリオ" panose="020B0604030504040204" pitchFamily="50" charset="-128"/>
+                <a:ea typeface="メイリオ" panose="020B0604030504040204" pitchFamily="50" charset="-128"/>
+                <a:cs typeface="メイリオ"/>
+              </a:rPr>
+              <a:t>高開封率のLINEに誘導</a:t>
+            </a:r>
+            <a:r>
+              <a:rPr lang="ja-JP" altLang="en-US" sz="1200" dirty="0">
+                <a:latin typeface="メイリオ" panose="020B0604030504040204" pitchFamily="50" charset="-128"/>
+                <a:ea typeface="メイリオ" panose="020B0604030504040204" pitchFamily="50" charset="-128"/>
+                <a:cs typeface="メイリオ"/>
+              </a:rPr>
+              <a:t>して</a:t>
+            </a:r>
+            <a:r>
+              <a:rPr lang="ja-JP" altLang="ja-JP" sz="1200" dirty="0">
+                <a:latin typeface="メイリオ" panose="020B0604030504040204" pitchFamily="50" charset="-128"/>
+                <a:ea typeface="メイリオ" panose="020B0604030504040204" pitchFamily="50" charset="-128"/>
+                <a:cs typeface="メイリオ"/>
+              </a:rPr>
+              <a:t>反響→実売上への引上げ率、リピート率改善。</a:t>
+            </a:r>
+            <a:endParaRPr lang="en-US" altLang="ja-JP" sz="1200" dirty="0">
+              <a:latin typeface="メイリオ" panose="020B0604030504040204" pitchFamily="50" charset="-128"/>
+              <a:ea typeface="メイリオ" panose="020B0604030504040204" pitchFamily="50" charset="-128"/>
+              <a:cs typeface="メイリオ"/>
+            </a:endParaRPr>
+          </a:p>
+          <a:p>
+            <a:pPr algn="ctr"/>
+            <a:r>
+              <a:rPr lang="ja-JP" altLang="ja-JP" sz="1200" dirty="0" b="1">
+                <a:solidFill>
+                  <a:srgbClr val="1F285A"/>
+                </a:solidFill>
+                <a:latin typeface="メイリオ" panose="020B0604030504040204" pitchFamily="50" charset="-128"/>
+                <a:ea typeface="メイリオ" panose="020B0604030504040204" pitchFamily="50" charset="-128"/>
+                <a:cs typeface="メイリオ"/>
+              </a:rPr>
+              <a:t>弊社運用の美容クリニック様では、予約後来院率が40〜50%改善</a:t>
+            </a:r>
+            <a:endParaRPr lang="ja-JP" altLang="en-US" sz="1200" dirty="0">
+              <a:latin typeface="メイリオ" panose="020B0604030504040204" pitchFamily="50" charset="-128"/>
+              <a:ea typeface="メイリオ" panose="020B0604030504040204" pitchFamily="50" charset="-128"/>
+              <a:cs typeface="メイリオ"/>
+            </a:endParaRPr>
           </a:p>
         </p:txBody>
       </p:sp>

--- a/20261002_サンクスLINEのご提案.pptx
+++ b/20261002_サンクスLINEのご提案.pptx
@@ -2954,7 +2954,7 @@
                 <a:ea typeface="メイリオ"/>
                 <a:cs typeface="メイリオ"/>
               </a:rPr>
-              <a:t>　（予約の2〜3割が来店せず／保険見直し本舗）</a:t>
+              <a:t>　（予約の2〜3割が来店せず／保険相談）</a:t>
             </a:r>
           </a:p>
           <a:p>
@@ -3017,48 +3017,7 @@
                 <a:ea typeface="メイリオ"/>
                 <a:cs typeface="メイリオ"/>
               </a:rPr>
-              <a:t>　（開封率 約70%／琴平バス）</a:t>
-            </a:r>
-          </a:p>
-        </p:txBody>
-      </p:sp>
-      <p:sp>
-        <p:nvSpPr>
-          <p:cNvPr id="7" name="TextBox 19"/>
-          <p:cNvSpPr txBox="1"/>
-          <p:nvPr/>
-        </p:nvSpPr>
-        <p:spPr>
-          <a:xfrm>
-            <a:off x="1080000" y="5903999"/>
-            <a:ext cx="7740000" cy="216000"/>
-          </a:xfrm>
-          <a:prstGeom prst="rect">
-            <a:avLst/>
-          </a:prstGeom>
-          <a:noFill/>
-        </p:spPr>
-        <p:txBody>
-          <a:bodyPr wrap="square" lIns="0" tIns="21600" rIns="0" bIns="21600" anchor="t">
-            <a:spAutoFit/>
-          </a:bodyPr>
-          <a:lstStyle/>
-          <a:p>
-            <a:pPr algn="l">
-              <a:lnSpc>
-                <a:spcPct val="115000"/>
-              </a:lnSpc>
-            </a:pPr>
-            <a:r>
-              <a:rPr sz="1000" b="0">
-                <a:solidFill>
-                  <a:srgbClr val="7F7F7F"/>
-                </a:solidFill>
-                <a:latin typeface="メイリオ"/>
-                <a:ea typeface="メイリオ"/>
-                <a:cs typeface="メイリオ"/>
-              </a:rPr>
-              <a:t>出典：LINEヤフー for Business 導入事例（保険見直し本舗・琴平バス）</a:t>
+              <a:t>　（開封率 約70%／バス会社）</a:t>
             </a:r>
           </a:p>
         </p:txBody>
@@ -3727,7 +3686,7 @@
                 <a:ea typeface="メイリオ"/>
                 <a:cs typeface="メイリオ"/>
               </a:rPr>
-              <a:t>・実績：美容クリニック（弊社）　来院率 40〜50%改善</a:t>
+              <a:t>・実績：美容クリニック　来院率 40〜50%改善</a:t>
             </a:r>
           </a:p>
           <a:p>
@@ -3748,48 +3707,7 @@
                 <a:ea typeface="メイリオ"/>
                 <a:cs typeface="メイリオ"/>
               </a:rPr>
-              <a:t>・実績：保険見直し本舗　予約100件あたり 面談＋5件</a:t>
-            </a:r>
-          </a:p>
-        </p:txBody>
-      </p:sp>
-      <p:sp>
-        <p:nvSpPr>
-          <p:cNvPr id="14" name="TextBox 19"/>
-          <p:cNvSpPr txBox="1"/>
-          <p:nvPr/>
-        </p:nvSpPr>
-        <p:spPr>
-          <a:xfrm>
-            <a:off x="1080000" y="5903999"/>
-            <a:ext cx="7740000" cy="216000"/>
-          </a:xfrm>
-          <a:prstGeom prst="rect">
-            <a:avLst/>
-          </a:prstGeom>
-          <a:noFill/>
-        </p:spPr>
-        <p:txBody>
-          <a:bodyPr wrap="square" lIns="0" tIns="21600" rIns="0" bIns="21600" anchor="t">
-            <a:spAutoFit/>
-          </a:bodyPr>
-          <a:lstStyle/>
-          <a:p>
-            <a:pPr algn="l">
-              <a:lnSpc>
-                <a:spcPct val="115000"/>
-              </a:lnSpc>
-            </a:pPr>
-            <a:r>
-              <a:rPr sz="1000" b="0">
-                <a:solidFill>
-                  <a:srgbClr val="7F7F7F"/>
-                </a:solidFill>
-                <a:latin typeface="メイリオ"/>
-                <a:ea typeface="メイリオ"/>
-                <a:cs typeface="メイリオ"/>
-              </a:rPr>
-              <a:t>出典：弊社運用実績／LINEヤフー for Business 導入事例（保険見直し本舗）</a:t>
+              <a:t>・実績：保険相談　予約100件あたり 面談＋5件</a:t>
             </a:r>
           </a:p>
         </p:txBody>
@@ -4490,48 +4408,7 @@
                 <a:ea typeface="メイリオ"/>
                 <a:cs typeface="メイリオ"/>
               </a:rPr>
-              <a:t>・実績：就職支援（UZUZ）　面談予約率 55%</a:t>
-            </a:r>
-          </a:p>
-        </p:txBody>
-      </p:sp>
-      <p:sp>
-        <p:nvSpPr>
-          <p:cNvPr id="14" name="TextBox 19"/>
-          <p:cNvSpPr txBox="1"/>
-          <p:nvPr/>
-        </p:nvSpPr>
-        <p:spPr>
-          <a:xfrm>
-            <a:off x="1080000" y="5903999"/>
-            <a:ext cx="7740000" cy="216000"/>
-          </a:xfrm>
-          <a:prstGeom prst="rect">
-            <a:avLst/>
-          </a:prstGeom>
-          <a:noFill/>
-        </p:spPr>
-        <p:txBody>
-          <a:bodyPr wrap="square" lIns="0" tIns="21600" rIns="0" bIns="21600" anchor="t">
-            <a:spAutoFit/>
-          </a:bodyPr>
-          <a:lstStyle/>
-          <a:p>
-            <a:pPr algn="l">
-              <a:lnSpc>
-                <a:spcPct val="115000"/>
-              </a:lnSpc>
-            </a:pPr>
-            <a:r>
-              <a:rPr sz="1000" b="0">
-                <a:solidFill>
-                  <a:srgbClr val="7F7F7F"/>
-                </a:solidFill>
-                <a:latin typeface="メイリオ"/>
-                <a:ea typeface="メイリオ"/>
-                <a:cs typeface="メイリオ"/>
-              </a:rPr>
-              <a:t>出典：LINEヤフー for Business 導入事例（アクネクリニック・UZUZ）</a:t>
+              <a:t>・実績：就職支援　面談予約率 55%</a:t>
             </a:r>
           </a:p>
         </p:txBody>
@@ -8880,7 +8757,7 @@
                 <a:ea typeface="メイリオ" panose="020B0604030504040204" pitchFamily="50" charset="-128"/>
                 <a:cs typeface="メイリオ"/>
               </a:rPr>
-              <a:t>弊社運用の美容クリニック様では、予約後来院率が40〜50%改善</a:t>
+              <a:t>美容クリニックでは、予約後来院率が40〜50%改善</a:t>
             </a:r>
             <a:endParaRPr lang="ja-JP" altLang="en-US" sz="1200" dirty="0">
               <a:latin typeface="メイリオ" panose="020B0604030504040204" pitchFamily="50" charset="-128"/>

--- a/20261002_サンクスLINEのご提案.pptx
+++ b/20261002_サンクスLINEのご提案.pptx
@@ -2750,1678 +2750,7 @@
 </p:sldMaster>
 </file>
 
-<file path=ppt/slides/slide2.xml><?xml version="1.0" encoding="utf-8"?>
-<p:sld xmlns:a="http://schemas.openxmlformats.org/drawingml/2006/main" xmlns:r="http://schemas.openxmlformats.org/officeDocument/2006/relationships" xmlns:p="http://schemas.openxmlformats.org/presentationml/2006/main">
-  <p:cSld>
-    <p:spTree>
-      <p:nvGrpSpPr>
-        <p:cNvPr id="2" name="">
-          <a:extLst>
-            <a:ext uri="{FF2B5EF4-FFF2-40B4-BE49-F238E27FC236}">
-              <a16:creationId xmlns:a16="http://schemas.microsoft.com/office/drawing/2014/main" id="{E70E5221-666F-DE20-B9E8-FDFC607CC22D}"/>
-            </a:ext>
-          </a:extLst>
-        </p:cNvPr>
-        <p:cNvGrpSpPr/>
-        <p:nvPr/>
-      </p:nvGrpSpPr>
-      <p:grpSpPr>
-        <a:xfrm>
-          <a:off x="0" y="0"/>
-          <a:ext cx="0" cy="0"/>
-          <a:chOff x="0" y="0"/>
-          <a:chExt cx="0" cy="0"/>
-        </a:xfrm>
-      </p:grpSpPr>
-      <p:sp>
-        <p:nvSpPr>
-          <p:cNvPr id="3" name="TextBox 1"/>
-          <p:cNvSpPr txBox="1"/>
-          <p:nvPr/>
-        </p:nvSpPr>
-        <p:spPr>
-          <a:xfrm>
-            <a:off x="547200" y="136800"/>
-            <a:ext cx="8784000" cy="338400"/>
-          </a:xfrm>
-          <a:prstGeom prst="rect">
-            <a:avLst/>
-          </a:prstGeom>
-          <a:noFill/>
-        </p:spPr>
-        <p:txBody>
-          <a:bodyPr wrap="square" lIns="0" tIns="21600" rIns="0" bIns="21600" anchor="ctr">
-            <a:spAutoFit/>
-          </a:bodyPr>
-          <a:lstStyle/>
-          <a:p>
-            <a:pPr algn="l"/>
-            <a:r>
-              <a:rPr sz="1600" b="1">
-                <a:solidFill>
-                  <a:srgbClr val="002060"/>
-                </a:solidFill>
-                <a:latin typeface="メイリオ"/>
-                <a:ea typeface="メイリオ"/>
-                <a:cs typeface="メイリオ"/>
-              </a:rPr>
-              <a:t>サンクスLINE｜重要性</a:t>
-            </a:r>
-          </a:p>
-        </p:txBody>
-      </p:sp>
-      <p:sp>
-        <p:nvSpPr>
-          <p:cNvPr id="4" name="TextBox 2"/>
-          <p:cNvSpPr txBox="1"/>
-          <p:nvPr/>
-        </p:nvSpPr>
-        <p:spPr>
-          <a:xfrm>
-            <a:off x="432000" y="684000"/>
-            <a:ext cx="9036000" cy="432000"/>
-          </a:xfrm>
-          <a:prstGeom prst="rect">
-            <a:avLst/>
-          </a:prstGeom>
-          <a:noFill/>
-        </p:spPr>
-        <p:txBody>
-          <a:bodyPr wrap="square" lIns="0" tIns="21600" rIns="0" bIns="21600" anchor="ctr">
-            <a:spAutoFit/>
-          </a:bodyPr>
-          <a:lstStyle/>
-          <a:p>
-            <a:pPr algn="l">
-              <a:lnSpc>
-                <a:spcPct val="130000"/>
-              </a:lnSpc>
-            </a:pPr>
-            <a:r>
-              <a:rPr sz="1600" dirty="0" err="1" b="0">
-                <a:solidFill>
-                  <a:srgbClr val="333333"/>
-                </a:solidFill>
-                <a:latin typeface="メイリオ"/>
-                <a:ea typeface="メイリオ"/>
-                <a:cs typeface="メイリオ"/>
-              </a:rPr>
-              <a:t>申込みの直後に、LINEでつながる</a:t>
-            </a:r>
-            <a:endParaRPr lang="en-US" sz="1600" dirty="0">
-              <a:solidFill>
-                <a:srgbClr val="333333"/>
-              </a:solidFill>
-              <a:latin typeface="メイリオ"/>
-              <a:ea typeface="メイリオ"/>
-              <a:cs typeface="メイリオ"/>
-            </a:endParaRPr>
-          </a:p>
-        </p:txBody>
-      </p:sp>
-      <p:cxnSp>
-        <p:nvCxnSpPr>
-          <p:cNvPr id="5" name="Connector 3"/>
-          <p:cNvCxnSpPr/>
-          <p:nvPr/>
-        </p:nvCxnSpPr>
-        <p:spPr>
-          <a:xfrm>
-            <a:off x="0" y="1389600"/>
-            <a:ext cx="9907200" cy="0"/>
-          </a:xfrm>
-          <a:prstGeom prst="line">
-            <a:avLst/>
-          </a:prstGeom>
-          <a:ln w="12700">
-            <a:solidFill>
-              <a:srgbClr val="D9D9D9"/>
-            </a:solidFill>
-          </a:ln>
-        </p:spPr>
-        <p:style>
-          <a:lnRef idx="2">
-            <a:schemeClr val="accent1"/>
-          </a:lnRef>
-          <a:fillRef idx="0">
-            <a:schemeClr val="accent1"/>
-          </a:fillRef>
-          <a:effectRef idx="1">
-            <a:schemeClr val="accent1"/>
-          </a:effectRef>
-          <a:fontRef idx="minor">
-            <a:schemeClr val="tx1"/>
-          </a:fontRef>
-        </p:style>
-      </p:cxnSp>
-      <p:sp>
-        <p:nvSpPr>
-          <p:cNvPr id="6" name="TextBox 19"/>
-          <p:cNvSpPr txBox="1"/>
-          <p:nvPr/>
-        </p:nvSpPr>
-        <p:spPr>
-          <a:xfrm>
-            <a:off x="1080000" y="2160000"/>
-            <a:ext cx="7740000" cy="3420000"/>
-          </a:xfrm>
-          <a:prstGeom prst="rect">
-            <a:avLst/>
-          </a:prstGeom>
-          <a:noFill/>
-        </p:spPr>
-        <p:txBody>
-          <a:bodyPr wrap="square" lIns="0" tIns="21600" rIns="0" bIns="21600" anchor="t">
-            <a:spAutoFit/>
-          </a:bodyPr>
-          <a:lstStyle/>
-          <a:p>
-            <a:pPr algn="l">
-              <a:lnSpc>
-                <a:spcPct val="115000"/>
-              </a:lnSpc>
-              <a:spcAft>
-                <a:spcPts val="200"/>
-              </a:spcAft>
-            </a:pPr>
-            <a:r>
-              <a:rPr sz="2000" b="1">
-                <a:solidFill>
-                  <a:srgbClr val="1F285A"/>
-                </a:solidFill>
-                <a:latin typeface="メイリオ"/>
-                <a:ea typeface="メイリオ"/>
-                <a:cs typeface="メイリオ"/>
-              </a:rPr>
-              <a:t>・申込み⇒来店までに一定数が離脱する</a:t>
-            </a:r>
-          </a:p>
-          <a:p>
-            <a:pPr algn="l">
-              <a:lnSpc>
-                <a:spcPct val="115000"/>
-              </a:lnSpc>
-              <a:spcAft>
-                <a:spcPts val="2200"/>
-              </a:spcAft>
-            </a:pPr>
-            <a:r>
-              <a:rPr sz="1400" b="0">
-                <a:solidFill>
-                  <a:srgbClr val="7F7F7F"/>
-                </a:solidFill>
-                <a:latin typeface="メイリオ"/>
-                <a:ea typeface="メイリオ"/>
-                <a:cs typeface="メイリオ"/>
-              </a:rPr>
-              <a:t>　（予約の2〜3割が来店せず／保険相談）</a:t>
-            </a:r>
-          </a:p>
-          <a:p>
-            <a:pPr algn="l">
-              <a:lnSpc>
-                <a:spcPct val="115000"/>
-              </a:lnSpc>
-              <a:spcAft>
-                <a:spcPts val="2200"/>
-              </a:spcAft>
-            </a:pPr>
-            <a:r>
-              <a:rPr sz="2000" b="1">
-                <a:solidFill>
-                  <a:srgbClr val="1F285A"/>
-                </a:solidFill>
-                <a:latin typeface="メイリオ"/>
-                <a:ea typeface="メイリオ"/>
-                <a:cs typeface="メイリオ"/>
-              </a:rPr>
-              <a:t>・広告費を増やしても、この離脱層は減らない</a:t>
-            </a:r>
-          </a:p>
-          <a:p>
-            <a:pPr algn="l">
-              <a:lnSpc>
-                <a:spcPct val="115000"/>
-              </a:lnSpc>
-              <a:spcAft>
-                <a:spcPts val="200"/>
-              </a:spcAft>
-            </a:pPr>
-            <a:r>
-              <a:rPr sz="2000" b="1">
-                <a:solidFill>
-                  <a:srgbClr val="1F285A"/>
-                </a:solidFill>
-                <a:latin typeface="メイリオ"/>
-                <a:ea typeface="メイリオ"/>
-                <a:cs typeface="メイリオ"/>
-              </a:rPr>
-              <a:t>・関心が一番高い申込み直後に、LINEでつながるのが最適</a:t>
-            </a:r>
-          </a:p>
-          <a:p>
-            <a:pPr algn="l">
-              <a:lnSpc>
-                <a:spcPct val="115000"/>
-              </a:lnSpc>
-              <a:spcAft>
-                <a:spcPts val="0"/>
-              </a:spcAft>
-            </a:pPr>
-            <a:r>
-              <a:rPr sz="1400" b="0">
-                <a:solidFill>
-                  <a:srgbClr val="7F7F7F"/>
-                </a:solidFill>
-                <a:latin typeface="メイリオ"/>
-                <a:ea typeface="メイリオ"/>
-                <a:cs typeface="メイリオ"/>
-              </a:rPr>
-              <a:t>　（開封率 約70%／バス会社）</a:t>
-            </a:r>
-          </a:p>
-        </p:txBody>
-      </p:sp>
-    </p:spTree>
-    <p:extLst>
-      <p:ext uri="{BB962C8B-B14F-4D97-AF65-F5344CB8AC3E}">
-        <p14:creationId xmlns:p14="http://schemas.microsoft.com/office/powerpoint/2010/main" val="1715909323"/>
-      </p:ext>
-    </p:extLst>
-  </p:cSld>
-  <p:clrMapOvr>
-    <a:masterClrMapping/>
-  </p:clrMapOvr>
-</p:sld>
-</file>
-
-<file path=ppt/slides/slide3.xml><?xml version="1.0" encoding="utf-8"?>
-<p:sld xmlns:a="http://schemas.openxmlformats.org/drawingml/2006/main" xmlns:r="http://schemas.openxmlformats.org/officeDocument/2006/relationships" xmlns:p="http://schemas.openxmlformats.org/presentationml/2006/main">
-  <p:cSld>
-    <p:spTree>
-      <p:nvGrpSpPr>
-        <p:cNvPr id="2" name=""/>
-        <p:cNvGrpSpPr/>
-        <p:nvPr/>
-      </p:nvGrpSpPr>
-      <p:grpSpPr>
-        <a:xfrm>
-          <a:off x="0" y="0"/>
-          <a:ext cx="0" cy="0"/>
-          <a:chOff x="0" y="0"/>
-          <a:chExt cx="0" cy="0"/>
-        </a:xfrm>
-      </p:grpSpPr>
-      <p:sp>
-        <p:nvSpPr>
-          <p:cNvPr id="3" name="TextBox 1"/>
-          <p:cNvSpPr txBox="1"/>
-          <p:nvPr/>
-        </p:nvSpPr>
-        <p:spPr>
-          <a:xfrm>
-            <a:off x="547200" y="136800"/>
-            <a:ext cx="8784000" cy="338400"/>
-          </a:xfrm>
-          <a:prstGeom prst="rect">
-            <a:avLst/>
-          </a:prstGeom>
-          <a:noFill/>
-        </p:spPr>
-        <p:txBody>
-          <a:bodyPr wrap="square" lIns="0" tIns="21600" rIns="0" bIns="21600" anchor="ctr">
-            <a:spAutoFit/>
-          </a:bodyPr>
-          <a:lstStyle/>
-          <a:p>
-            <a:pPr algn="l"/>
-            <a:r>
-              <a:rPr sz="1600" b="1">
-                <a:solidFill>
-                  <a:srgbClr val="002060"/>
-                </a:solidFill>
-                <a:latin typeface="メイリオ"/>
-                <a:ea typeface="メイリオ"/>
-                <a:cs typeface="メイリオ"/>
-              </a:rPr>
-              <a:t>シーン1｜来店・来院の予約</a:t>
-            </a:r>
-          </a:p>
-        </p:txBody>
-      </p:sp>
-      <p:sp>
-        <p:nvSpPr>
-          <p:cNvPr id="4" name="TextBox 2"/>
-          <p:cNvSpPr txBox="1"/>
-          <p:nvPr/>
-        </p:nvSpPr>
-        <p:spPr>
-          <a:xfrm>
-            <a:off x="432000" y="684000"/>
-            <a:ext cx="9036000" cy="432000"/>
-          </a:xfrm>
-          <a:prstGeom prst="rect">
-            <a:avLst/>
-          </a:prstGeom>
-          <a:noFill/>
-        </p:spPr>
-        <p:txBody>
-          <a:bodyPr wrap="square" lIns="0" tIns="21600" rIns="0" bIns="21600" anchor="ctr">
-            <a:spAutoFit/>
-          </a:bodyPr>
-          <a:lstStyle/>
-          <a:p>
-            <a:pPr algn="l">
-              <a:lnSpc>
-                <a:spcPct val="130000"/>
-              </a:lnSpc>
-            </a:pPr>
-            <a:r>
-              <a:rPr sz="1600" dirty="0" err="1" b="0">
-                <a:solidFill>
-                  <a:srgbClr val="333333"/>
-                </a:solidFill>
-                <a:latin typeface="メイリオ"/>
-                <a:ea typeface="メイリオ"/>
-                <a:cs typeface="メイリオ"/>
-              </a:rPr>
-              <a:t>予約を、来店・来院につなげる</a:t>
-            </a:r>
-            <a:endParaRPr sz="1600" dirty="0">
-              <a:solidFill>
-                <a:srgbClr val="333333"/>
-              </a:solidFill>
-              <a:latin typeface="メイリオ"/>
-              <a:ea typeface="メイリオ"/>
-              <a:cs typeface="メイリオ"/>
-            </a:endParaRPr>
-          </a:p>
-        </p:txBody>
-      </p:sp>
-      <p:cxnSp>
-        <p:nvCxnSpPr>
-          <p:cNvPr id="5" name="Connector 3"/>
-          <p:cNvCxnSpPr/>
-          <p:nvPr/>
-        </p:nvCxnSpPr>
-        <p:spPr>
-          <a:xfrm>
-            <a:off x="0" y="1389600"/>
-            <a:ext cx="9907200" cy="0"/>
-          </a:xfrm>
-          <a:prstGeom prst="line">
-            <a:avLst/>
-          </a:prstGeom>
-          <a:ln w="12700">
-            <a:solidFill>
-              <a:srgbClr val="D9D9D9"/>
-            </a:solidFill>
-          </a:ln>
-        </p:spPr>
-        <p:style>
-          <a:lnRef idx="2">
-            <a:schemeClr val="accent1"/>
-          </a:lnRef>
-          <a:fillRef idx="0">
-            <a:schemeClr val="accent1"/>
-          </a:fillRef>
-          <a:effectRef idx="1">
-            <a:schemeClr val="accent1"/>
-          </a:effectRef>
-          <a:fontRef idx="minor">
-            <a:schemeClr val="tx1"/>
-          </a:fontRef>
-        </p:style>
-      </p:cxnSp>
-      <p:sp>
-        <p:nvSpPr>
-          <p:cNvPr id="6" name="Rounded Rectangle 12"/>
-          <p:cNvSpPr/>
-          <p:nvPr/>
-        </p:nvSpPr>
-        <p:spPr>
-          <a:xfrm>
-            <a:off x="1080000" y="1944000"/>
-            <a:ext cx="1638000" cy="1007999"/>
-          </a:xfrm>
-          <a:prstGeom prst="roundRect">
-            <a:avLst>
-              <a:gd name="adj" fmla="val 6000"/>
-            </a:avLst>
-          </a:prstGeom>
-          <a:solidFill>
-            <a:srgbClr val="FFFFFF"/>
-          </a:solidFill>
-          <a:ln w="19050">
-            <a:solidFill>
-              <a:srgbClr val="1F285A"/>
-            </a:solidFill>
-          </a:ln>
-          <a:effectLst/>
-        </p:spPr>
-        <p:style>
-          <a:lnRef idx="1">
-            <a:schemeClr val="accent1"/>
-          </a:lnRef>
-          <a:fillRef idx="3">
-            <a:schemeClr val="accent1"/>
-          </a:fillRef>
-          <a:effectRef idx="2">
-            <a:schemeClr val="accent1"/>
-          </a:effectRef>
-          <a:fontRef idx="minor">
-            <a:schemeClr val="lt1"/>
-          </a:fontRef>
-        </p:style>
-        <p:txBody>
-          <a:bodyPr wrap="square" lIns="125999" tIns="90000" rIns="108000" bIns="54000" rtlCol="0" anchor="ctr"/>
-          <a:lstStyle/>
-          <a:p>
-            <a:pPr algn="ctr">
-              <a:lnSpc>
-                <a:spcPct val="130000"/>
-              </a:lnSpc>
-              <a:spcAft>
-                <a:spcPts val="500"/>
-              </a:spcAft>
-            </a:pPr>
-            <a:r>
-              <a:rPr sz="1500" b="1" dirty="0" err="1">
-                <a:solidFill>
-                  <a:srgbClr val="1F285A"/>
-                </a:solidFill>
-                <a:latin typeface="メイリオ"/>
-                <a:ea typeface="メイリオ"/>
-                <a:cs typeface="メイリオ"/>
-              </a:rPr>
-              <a:t>予約完了</a:t>
-            </a:r>
-            <a:endParaRPr sz="1250" b="1" dirty="0">
-              <a:solidFill>
-                <a:srgbClr val="1F285A"/>
-              </a:solidFill>
-              <a:latin typeface="メイリオ"/>
-              <a:ea typeface="メイリオ"/>
-              <a:cs typeface="メイリオ"/>
-            </a:endParaRPr>
-          </a:p>
-        </p:txBody>
-      </p:sp>
-      <p:sp>
-        <p:nvSpPr>
-          <p:cNvPr id="7" name="Right Arrow 5"/>
-          <p:cNvSpPr/>
-          <p:nvPr/>
-        </p:nvSpPr>
-        <p:spPr>
-          <a:xfrm>
-            <a:off x="2736000" y="2268000"/>
-            <a:ext cx="360000" cy="360000"/>
-          </a:xfrm>
-          <a:prstGeom prst="rightArrow">
-            <a:avLst/>
-          </a:prstGeom>
-          <a:solidFill>
-            <a:srgbClr val="1F285A"/>
-          </a:solidFill>
-          <a:ln>
-            <a:noFill/>
-          </a:ln>
-          <a:effectLst/>
-        </p:spPr>
-        <p:style>
-          <a:lnRef idx="1">
-            <a:schemeClr val="accent1"/>
-          </a:lnRef>
-          <a:fillRef idx="3">
-            <a:schemeClr val="accent1"/>
-          </a:fillRef>
-          <a:effectRef idx="2">
-            <a:schemeClr val="accent1"/>
-          </a:effectRef>
-          <a:fontRef idx="minor">
-            <a:schemeClr val="lt1"/>
-          </a:fontRef>
-        </p:style>
-        <p:txBody>
-          <a:bodyPr rtlCol="0" anchor="ctr"/>
-          <a:lstStyle/>
-          <a:p>
-            <a:pPr algn="ctr"/>
-            <a:endParaRPr>
-              <a:latin typeface="メイリオ"/>
-              <a:ea typeface="メイリオ"/>
-              <a:cs typeface="メイリオ"/>
-            </a:endParaRPr>
-          </a:p>
-        </p:txBody>
-      </p:sp>
-      <p:sp>
-        <p:nvSpPr>
-          <p:cNvPr id="8" name="Rounded Rectangle 4"/>
-          <p:cNvSpPr/>
-          <p:nvPr/>
-        </p:nvSpPr>
-        <p:spPr>
-          <a:xfrm>
-            <a:off x="3114000" y="1944000"/>
-            <a:ext cx="1638000" cy="1007999"/>
-          </a:xfrm>
-          <a:prstGeom prst="roundRect">
-            <a:avLst>
-              <a:gd name="adj" fmla="val 10000"/>
-            </a:avLst>
-          </a:prstGeom>
-          <a:solidFill>
-            <a:srgbClr val="1F285A"/>
-          </a:solidFill>
-          <a:ln>
-            <a:noFill/>
-          </a:ln>
-          <a:effectLst/>
-        </p:spPr>
-        <p:style>
-          <a:lnRef idx="1">
-            <a:schemeClr val="accent1"/>
-          </a:lnRef>
-          <a:fillRef idx="3">
-            <a:schemeClr val="accent1"/>
-          </a:fillRef>
-          <a:effectRef idx="2">
-            <a:schemeClr val="accent1"/>
-          </a:effectRef>
-          <a:fontRef idx="minor">
-            <a:schemeClr val="lt1"/>
-          </a:fontRef>
-        </p:style>
-        <p:txBody>
-          <a:bodyPr wrap="square" lIns="54000" tIns="18000" rIns="54000" bIns="18000" rtlCol="0" anchor="ctr"/>
-          <a:lstStyle/>
-          <a:p>
-            <a:pPr algn="ctr">
-              <a:lnSpc>
-                <a:spcPct val="120000"/>
-              </a:lnSpc>
-            </a:pPr>
-            <a:r>
-              <a:rPr sz="1500" b="1">
-                <a:solidFill>
-                  <a:srgbClr val="FFFFFF"/>
-                </a:solidFill>
-                <a:latin typeface="メイリオ"/>
-                <a:ea typeface="メイリオ"/>
-                <a:cs typeface="メイリオ"/>
-              </a:rPr>
-              <a:t>LINEで</a:t>
-            </a:r>
-          </a:p>
-          <a:p>
-            <a:pPr algn="ctr">
-              <a:lnSpc>
-                <a:spcPct val="120000"/>
-              </a:lnSpc>
-            </a:pPr>
-            <a:r>
-              <a:rPr sz="1500" b="1">
-                <a:solidFill>
-                  <a:srgbClr val="FFFFFF"/>
-                </a:solidFill>
-                <a:latin typeface="メイリオ"/>
-                <a:ea typeface="メイリオ"/>
-                <a:cs typeface="メイリオ"/>
-              </a:rPr>
-              <a:t>予約確認</a:t>
-            </a:r>
-          </a:p>
-        </p:txBody>
-      </p:sp>
-      <p:sp>
-        <p:nvSpPr>
-          <p:cNvPr id="9" name="Right Arrow 5"/>
-          <p:cNvSpPr/>
-          <p:nvPr/>
-        </p:nvSpPr>
-        <p:spPr>
-          <a:xfrm>
-            <a:off x="4770000" y="2268000"/>
-            <a:ext cx="360000" cy="360000"/>
-          </a:xfrm>
-          <a:prstGeom prst="rightArrow">
-            <a:avLst/>
-          </a:prstGeom>
-          <a:solidFill>
-            <a:srgbClr val="1F285A"/>
-          </a:solidFill>
-          <a:ln>
-            <a:noFill/>
-          </a:ln>
-          <a:effectLst/>
-        </p:spPr>
-        <p:style>
-          <a:lnRef idx="1">
-            <a:schemeClr val="accent1"/>
-          </a:lnRef>
-          <a:fillRef idx="3">
-            <a:schemeClr val="accent1"/>
-          </a:fillRef>
-          <a:effectRef idx="2">
-            <a:schemeClr val="accent1"/>
-          </a:effectRef>
-          <a:fontRef idx="minor">
-            <a:schemeClr val="lt1"/>
-          </a:fontRef>
-        </p:style>
-        <p:txBody>
-          <a:bodyPr rtlCol="0" anchor="ctr"/>
-          <a:lstStyle/>
-          <a:p>
-            <a:pPr algn="ctr"/>
-            <a:endParaRPr>
-              <a:latin typeface="メイリオ"/>
-              <a:ea typeface="メイリオ"/>
-              <a:cs typeface="メイリオ"/>
-            </a:endParaRPr>
-          </a:p>
-        </p:txBody>
-      </p:sp>
-      <p:sp>
-        <p:nvSpPr>
-          <p:cNvPr id="10" name="Rounded Rectangle 4"/>
-          <p:cNvSpPr/>
-          <p:nvPr/>
-        </p:nvSpPr>
-        <p:spPr>
-          <a:xfrm>
-            <a:off x="5148000" y="1944000"/>
-            <a:ext cx="1638000" cy="1007999"/>
-          </a:xfrm>
-          <a:prstGeom prst="roundRect">
-            <a:avLst>
-              <a:gd name="adj" fmla="val 10000"/>
-            </a:avLst>
-          </a:prstGeom>
-          <a:solidFill>
-            <a:srgbClr val="1F285A"/>
-          </a:solidFill>
-          <a:ln>
-            <a:noFill/>
-          </a:ln>
-          <a:effectLst/>
-        </p:spPr>
-        <p:style>
-          <a:lnRef idx="1">
-            <a:schemeClr val="accent1"/>
-          </a:lnRef>
-          <a:fillRef idx="3">
-            <a:schemeClr val="accent1"/>
-          </a:fillRef>
-          <a:effectRef idx="2">
-            <a:schemeClr val="accent1"/>
-          </a:effectRef>
-          <a:fontRef idx="minor">
-            <a:schemeClr val="lt1"/>
-          </a:fontRef>
-        </p:style>
-        <p:txBody>
-          <a:bodyPr wrap="square" lIns="54000" tIns="18000" rIns="54000" bIns="18000" rtlCol="0" anchor="ctr"/>
-          <a:lstStyle/>
-          <a:p>
-            <a:pPr algn="ctr">
-              <a:lnSpc>
-                <a:spcPct val="120000"/>
-              </a:lnSpc>
-            </a:pPr>
-            <a:r>
-              <a:rPr sz="1500" b="1">
-                <a:solidFill>
-                  <a:srgbClr val="FFFFFF"/>
-                </a:solidFill>
-                <a:latin typeface="メイリオ"/>
-                <a:ea typeface="メイリオ"/>
-                <a:cs typeface="メイリオ"/>
-              </a:rPr>
-              <a:t>前日に</a:t>
-            </a:r>
-          </a:p>
-          <a:p>
-            <a:pPr algn="ctr">
-              <a:lnSpc>
-                <a:spcPct val="120000"/>
-              </a:lnSpc>
-            </a:pPr>
-            <a:r>
-              <a:rPr sz="1500" b="1">
-                <a:solidFill>
-                  <a:srgbClr val="FFFFFF"/>
-                </a:solidFill>
-                <a:latin typeface="メイリオ"/>
-                <a:ea typeface="メイリオ"/>
-                <a:cs typeface="メイリオ"/>
-              </a:rPr>
-              <a:t>お知らせ</a:t>
-            </a:r>
-          </a:p>
-        </p:txBody>
-      </p:sp>
-      <p:sp>
-        <p:nvSpPr>
-          <p:cNvPr id="11" name="Right Arrow 5"/>
-          <p:cNvSpPr/>
-          <p:nvPr/>
-        </p:nvSpPr>
-        <p:spPr>
-          <a:xfrm>
-            <a:off x="6803999" y="2268000"/>
-            <a:ext cx="360000" cy="360000"/>
-          </a:xfrm>
-          <a:prstGeom prst="rightArrow">
-            <a:avLst/>
-          </a:prstGeom>
-          <a:solidFill>
-            <a:srgbClr val="1F285A"/>
-          </a:solidFill>
-          <a:ln>
-            <a:noFill/>
-          </a:ln>
-          <a:effectLst/>
-        </p:spPr>
-        <p:style>
-          <a:lnRef idx="1">
-            <a:schemeClr val="accent1"/>
-          </a:lnRef>
-          <a:fillRef idx="3">
-            <a:schemeClr val="accent1"/>
-          </a:fillRef>
-          <a:effectRef idx="2">
-            <a:schemeClr val="accent1"/>
-          </a:effectRef>
-          <a:fontRef idx="minor">
-            <a:schemeClr val="lt1"/>
-          </a:fontRef>
-        </p:style>
-        <p:txBody>
-          <a:bodyPr rtlCol="0" anchor="ctr"/>
-          <a:lstStyle/>
-          <a:p>
-            <a:pPr algn="ctr"/>
-            <a:endParaRPr>
-              <a:latin typeface="メイリオ"/>
-              <a:ea typeface="メイリオ"/>
-              <a:cs typeface="メイリオ"/>
-            </a:endParaRPr>
-          </a:p>
-        </p:txBody>
-      </p:sp>
-      <p:sp>
-        <p:nvSpPr>
-          <p:cNvPr id="12" name="Rounded Rectangle 12"/>
-          <p:cNvSpPr/>
-          <p:nvPr/>
-        </p:nvSpPr>
-        <p:spPr>
-          <a:xfrm>
-            <a:off x="7182000" y="1944000"/>
-            <a:ext cx="1638000" cy="1007999"/>
-          </a:xfrm>
-          <a:prstGeom prst="roundRect">
-            <a:avLst>
-              <a:gd name="adj" fmla="val 6000"/>
-            </a:avLst>
-          </a:prstGeom>
-          <a:solidFill>
-            <a:srgbClr val="FFFFFF"/>
-          </a:solidFill>
-          <a:ln w="19050">
-            <a:solidFill>
-              <a:srgbClr val="1F285A"/>
-            </a:solidFill>
-          </a:ln>
-          <a:effectLst/>
-        </p:spPr>
-        <p:style>
-          <a:lnRef idx="1">
-            <a:schemeClr val="accent1"/>
-          </a:lnRef>
-          <a:fillRef idx="3">
-            <a:schemeClr val="accent1"/>
-          </a:fillRef>
-          <a:effectRef idx="2">
-            <a:schemeClr val="accent1"/>
-          </a:effectRef>
-          <a:fontRef idx="minor">
-            <a:schemeClr val="lt1"/>
-          </a:fontRef>
-        </p:style>
-        <p:txBody>
-          <a:bodyPr wrap="square" lIns="125999" tIns="90000" rIns="108000" bIns="54000" rtlCol="0" anchor="ctr"/>
-          <a:lstStyle/>
-          <a:p>
-            <a:pPr algn="ctr">
-              <a:lnSpc>
-                <a:spcPct val="130000"/>
-              </a:lnSpc>
-              <a:spcAft>
-                <a:spcPts val="500"/>
-              </a:spcAft>
-            </a:pPr>
-            <a:r>
-              <a:rPr sz="1500" b="1" dirty="0" err="1">
-                <a:solidFill>
-                  <a:srgbClr val="1F285A"/>
-                </a:solidFill>
-                <a:latin typeface="メイリオ"/>
-                <a:ea typeface="メイリオ"/>
-                <a:cs typeface="メイリオ"/>
-              </a:rPr>
-              <a:t>来店</a:t>
-            </a:r>
-            <a:endParaRPr sz="1250" b="1" dirty="0">
-              <a:solidFill>
-                <a:srgbClr val="1F285A"/>
-              </a:solidFill>
-              <a:latin typeface="メイリオ"/>
-              <a:ea typeface="メイリオ"/>
-              <a:cs typeface="メイリオ"/>
-            </a:endParaRPr>
-          </a:p>
-        </p:txBody>
-      </p:sp>
-      <p:sp>
-        <p:nvSpPr>
-          <p:cNvPr id="13" name="TextBox 19"/>
-          <p:cNvSpPr txBox="1"/>
-          <p:nvPr/>
-        </p:nvSpPr>
-        <p:spPr>
-          <a:xfrm>
-            <a:off x="1080000" y="3564000"/>
-            <a:ext cx="7740000" cy="2520000"/>
-          </a:xfrm>
-          <a:prstGeom prst="rect">
-            <a:avLst/>
-          </a:prstGeom>
-          <a:noFill/>
-        </p:spPr>
-        <p:txBody>
-          <a:bodyPr wrap="square" lIns="0" tIns="21600" rIns="0" bIns="21600" anchor="t">
-            <a:spAutoFit/>
-          </a:bodyPr>
-          <a:lstStyle/>
-          <a:p>
-            <a:pPr algn="l">
-              <a:lnSpc>
-                <a:spcPct val="115000"/>
-              </a:lnSpc>
-              <a:spcAft>
-                <a:spcPts val="1800"/>
-              </a:spcAft>
-            </a:pPr>
-            <a:r>
-              <a:rPr sz="2000" b="0">
-                <a:solidFill>
-                  <a:srgbClr val="333333"/>
-                </a:solidFill>
-                <a:latin typeface="メイリオ"/>
-                <a:ea typeface="メイリオ"/>
-                <a:cs typeface="メイリオ"/>
-              </a:rPr>
-              <a:t>・無断キャンセルを防ぎ、来店につなげる</a:t>
-            </a:r>
-          </a:p>
-          <a:p>
-            <a:pPr algn="l">
-              <a:lnSpc>
-                <a:spcPct val="115000"/>
-              </a:lnSpc>
-              <a:spcAft>
-                <a:spcPts val="1400"/>
-              </a:spcAft>
-            </a:pPr>
-            <a:r>
-              <a:rPr sz="2000" b="1">
-                <a:solidFill>
-                  <a:srgbClr val="1F285A"/>
-                </a:solidFill>
-                <a:latin typeface="メイリオ"/>
-                <a:ea typeface="メイリオ"/>
-                <a:cs typeface="メイリオ"/>
-              </a:rPr>
-              <a:t>・実績：美容クリニック　来院率 40〜50%改善</a:t>
-            </a:r>
-          </a:p>
-          <a:p>
-            <a:pPr algn="l">
-              <a:lnSpc>
-                <a:spcPct val="115000"/>
-              </a:lnSpc>
-              <a:spcAft>
-                <a:spcPts val="0"/>
-              </a:spcAft>
-            </a:pPr>
-            <a:r>
-              <a:rPr sz="2000" b="1">
-                <a:solidFill>
-                  <a:srgbClr val="1F285A"/>
-                </a:solidFill>
-                <a:latin typeface="メイリオ"/>
-                <a:ea typeface="メイリオ"/>
-                <a:cs typeface="メイリオ"/>
-              </a:rPr>
-              <a:t>・実績：保険相談　予約100件あたり 面談＋5件</a:t>
-            </a:r>
-          </a:p>
-        </p:txBody>
-      </p:sp>
-    </p:spTree>
-    <p:extLst>
-      <p:ext uri="{BB962C8B-B14F-4D97-AF65-F5344CB8AC3E}">
-        <p14:creationId xmlns:p14="http://schemas.microsoft.com/office/powerpoint/2010/main" val="3939997984"/>
-      </p:ext>
-    </p:extLst>
-  </p:cSld>
-  <p:clrMapOvr>
-    <a:masterClrMapping/>
-  </p:clrMapOvr>
-</p:sld>
-</file>
-
-<file path=ppt/slides/slide4.xml><?xml version="1.0" encoding="utf-8"?>
-<p:sld xmlns:a="http://schemas.openxmlformats.org/drawingml/2006/main" xmlns:r="http://schemas.openxmlformats.org/officeDocument/2006/relationships" xmlns:p="http://schemas.openxmlformats.org/presentationml/2006/main">
-  <p:cSld>
-    <p:spTree>
-      <p:nvGrpSpPr>
-        <p:cNvPr id="2" name=""/>
-        <p:cNvGrpSpPr/>
-        <p:nvPr/>
-      </p:nvGrpSpPr>
-      <p:grpSpPr>
-        <a:xfrm>
-          <a:off x="0" y="0"/>
-          <a:ext cx="0" cy="0"/>
-          <a:chOff x="0" y="0"/>
-          <a:chExt cx="0" cy="0"/>
-        </a:xfrm>
-      </p:grpSpPr>
-      <p:sp>
-        <p:nvSpPr>
-          <p:cNvPr id="3" name="TextBox 1"/>
-          <p:cNvSpPr txBox="1"/>
-          <p:nvPr/>
-        </p:nvSpPr>
-        <p:spPr>
-          <a:xfrm>
-            <a:off x="547200" y="136800"/>
-            <a:ext cx="8784000" cy="338400"/>
-          </a:xfrm>
-          <a:prstGeom prst="rect">
-            <a:avLst/>
-          </a:prstGeom>
-          <a:noFill/>
-        </p:spPr>
-        <p:txBody>
-          <a:bodyPr wrap="square" lIns="0" tIns="21600" rIns="0" bIns="21600" anchor="ctr">
-            <a:spAutoFit/>
-          </a:bodyPr>
-          <a:lstStyle/>
-          <a:p>
-            <a:pPr algn="l"/>
-            <a:r>
-              <a:rPr sz="1600" b="1">
-                <a:solidFill>
-                  <a:srgbClr val="002060"/>
-                </a:solidFill>
-                <a:latin typeface="メイリオ"/>
-                <a:ea typeface="メイリオ"/>
-                <a:cs typeface="メイリオ"/>
-              </a:rPr>
-              <a:t>シーン2｜資料請求</a:t>
-            </a:r>
-          </a:p>
-        </p:txBody>
-      </p:sp>
-      <p:sp>
-        <p:nvSpPr>
-          <p:cNvPr id="4" name="TextBox 2"/>
-          <p:cNvSpPr txBox="1"/>
-          <p:nvPr/>
-        </p:nvSpPr>
-        <p:spPr>
-          <a:xfrm>
-            <a:off x="432000" y="684000"/>
-            <a:ext cx="9036000" cy="432000"/>
-          </a:xfrm>
-          <a:prstGeom prst="rect">
-            <a:avLst/>
-          </a:prstGeom>
-          <a:noFill/>
-        </p:spPr>
-        <p:txBody>
-          <a:bodyPr wrap="square" lIns="0" tIns="21600" rIns="0" bIns="21600" anchor="ctr">
-            <a:spAutoFit/>
-          </a:bodyPr>
-          <a:lstStyle/>
-          <a:p>
-            <a:pPr algn="l">
-              <a:lnSpc>
-                <a:spcPct val="130000"/>
-              </a:lnSpc>
-            </a:pPr>
-            <a:r>
-              <a:rPr sz="1600" dirty="0" err="1" b="0">
-                <a:solidFill>
-                  <a:srgbClr val="333333"/>
-                </a:solidFill>
-                <a:latin typeface="メイリオ"/>
-                <a:ea typeface="メイリオ"/>
-                <a:cs typeface="メイリオ"/>
-              </a:rPr>
-              <a:t>資料請求を、予約・商談につなげる</a:t>
-            </a:r>
-            <a:endParaRPr sz="1600" dirty="0">
-              <a:solidFill>
-                <a:srgbClr val="333333"/>
-              </a:solidFill>
-              <a:latin typeface="メイリオ"/>
-              <a:ea typeface="メイリオ"/>
-              <a:cs typeface="メイリオ"/>
-            </a:endParaRPr>
-          </a:p>
-        </p:txBody>
-      </p:sp>
-      <p:cxnSp>
-        <p:nvCxnSpPr>
-          <p:cNvPr id="5" name="Connector 3"/>
-          <p:cNvCxnSpPr/>
-          <p:nvPr/>
-        </p:nvCxnSpPr>
-        <p:spPr>
-          <a:xfrm>
-            <a:off x="0" y="1389600"/>
-            <a:ext cx="9907200" cy="0"/>
-          </a:xfrm>
-          <a:prstGeom prst="line">
-            <a:avLst/>
-          </a:prstGeom>
-          <a:ln w="12700">
-            <a:solidFill>
-              <a:srgbClr val="D9D9D9"/>
-            </a:solidFill>
-          </a:ln>
-        </p:spPr>
-        <p:style>
-          <a:lnRef idx="2">
-            <a:schemeClr val="accent1"/>
-          </a:lnRef>
-          <a:fillRef idx="0">
-            <a:schemeClr val="accent1"/>
-          </a:fillRef>
-          <a:effectRef idx="1">
-            <a:schemeClr val="accent1"/>
-          </a:effectRef>
-          <a:fontRef idx="minor">
-            <a:schemeClr val="tx1"/>
-          </a:fontRef>
-        </p:style>
-      </p:cxnSp>
-      <p:sp>
-        <p:nvSpPr>
-          <p:cNvPr id="6" name="Rounded Rectangle 12"/>
-          <p:cNvSpPr/>
-          <p:nvPr/>
-        </p:nvSpPr>
-        <p:spPr>
-          <a:xfrm>
-            <a:off x="1080000" y="1944000"/>
-            <a:ext cx="1638000" cy="1007999"/>
-          </a:xfrm>
-          <a:prstGeom prst="roundRect">
-            <a:avLst>
-              <a:gd name="adj" fmla="val 6000"/>
-            </a:avLst>
-          </a:prstGeom>
-          <a:solidFill>
-            <a:srgbClr val="FFFFFF"/>
-          </a:solidFill>
-          <a:ln w="19050">
-            <a:solidFill>
-              <a:srgbClr val="1F285A"/>
-            </a:solidFill>
-          </a:ln>
-          <a:effectLst/>
-        </p:spPr>
-        <p:style>
-          <a:lnRef idx="1">
-            <a:schemeClr val="accent1"/>
-          </a:lnRef>
-          <a:fillRef idx="3">
-            <a:schemeClr val="accent1"/>
-          </a:fillRef>
-          <a:effectRef idx="2">
-            <a:schemeClr val="accent1"/>
-          </a:effectRef>
-          <a:fontRef idx="minor">
-            <a:schemeClr val="lt1"/>
-          </a:fontRef>
-        </p:style>
-        <p:txBody>
-          <a:bodyPr wrap="square" lIns="125999" tIns="90000" rIns="108000" bIns="54000" rtlCol="0" anchor="ctr"/>
-          <a:lstStyle/>
-          <a:p>
-            <a:pPr algn="ctr">
-              <a:lnSpc>
-                <a:spcPct val="130000"/>
-              </a:lnSpc>
-              <a:spcAft>
-                <a:spcPts val="500"/>
-              </a:spcAft>
-            </a:pPr>
-            <a:r>
-              <a:rPr sz="1500" b="1" dirty="0" err="1">
-                <a:solidFill>
-                  <a:srgbClr val="1F285A"/>
-                </a:solidFill>
-                <a:latin typeface="メイリオ"/>
-                <a:ea typeface="メイリオ"/>
-                <a:cs typeface="メイリオ"/>
-              </a:rPr>
-              <a:t>資料請求</a:t>
-            </a:r>
-            <a:endParaRPr sz="1250" b="1" dirty="0">
-              <a:solidFill>
-                <a:srgbClr val="1F285A"/>
-              </a:solidFill>
-              <a:latin typeface="メイリオ"/>
-              <a:ea typeface="メイリオ"/>
-              <a:cs typeface="メイリオ"/>
-            </a:endParaRPr>
-          </a:p>
-        </p:txBody>
-      </p:sp>
-      <p:sp>
-        <p:nvSpPr>
-          <p:cNvPr id="7" name="Right Arrow 5"/>
-          <p:cNvSpPr/>
-          <p:nvPr/>
-        </p:nvSpPr>
-        <p:spPr>
-          <a:xfrm>
-            <a:off x="2736000" y="2268000"/>
-            <a:ext cx="360000" cy="360000"/>
-          </a:xfrm>
-          <a:prstGeom prst="rightArrow">
-            <a:avLst/>
-          </a:prstGeom>
-          <a:solidFill>
-            <a:srgbClr val="1F285A"/>
-          </a:solidFill>
-          <a:ln>
-            <a:noFill/>
-          </a:ln>
-          <a:effectLst/>
-        </p:spPr>
-        <p:style>
-          <a:lnRef idx="1">
-            <a:schemeClr val="accent1"/>
-          </a:lnRef>
-          <a:fillRef idx="3">
-            <a:schemeClr val="accent1"/>
-          </a:fillRef>
-          <a:effectRef idx="2">
-            <a:schemeClr val="accent1"/>
-          </a:effectRef>
-          <a:fontRef idx="minor">
-            <a:schemeClr val="lt1"/>
-          </a:fontRef>
-        </p:style>
-        <p:txBody>
-          <a:bodyPr rtlCol="0" anchor="ctr"/>
-          <a:lstStyle/>
-          <a:p>
-            <a:pPr algn="ctr"/>
-            <a:endParaRPr>
-              <a:latin typeface="メイリオ"/>
-              <a:ea typeface="メイリオ"/>
-              <a:cs typeface="メイリオ"/>
-            </a:endParaRPr>
-          </a:p>
-        </p:txBody>
-      </p:sp>
-      <p:sp>
-        <p:nvSpPr>
-          <p:cNvPr id="8" name="Rounded Rectangle 4"/>
-          <p:cNvSpPr/>
-          <p:nvPr/>
-        </p:nvSpPr>
-        <p:spPr>
-          <a:xfrm>
-            <a:off x="3114000" y="1944000"/>
-            <a:ext cx="1638000" cy="1007999"/>
-          </a:xfrm>
-          <a:prstGeom prst="roundRect">
-            <a:avLst>
-              <a:gd name="adj" fmla="val 10000"/>
-            </a:avLst>
-          </a:prstGeom>
-          <a:solidFill>
-            <a:srgbClr val="1F285A"/>
-          </a:solidFill>
-          <a:ln>
-            <a:noFill/>
-          </a:ln>
-          <a:effectLst/>
-        </p:spPr>
-        <p:style>
-          <a:lnRef idx="1">
-            <a:schemeClr val="accent1"/>
-          </a:lnRef>
-          <a:fillRef idx="3">
-            <a:schemeClr val="accent1"/>
-          </a:fillRef>
-          <a:effectRef idx="2">
-            <a:schemeClr val="accent1"/>
-          </a:effectRef>
-          <a:fontRef idx="minor">
-            <a:schemeClr val="lt1"/>
-          </a:fontRef>
-        </p:style>
-        <p:txBody>
-          <a:bodyPr wrap="square" lIns="54000" tIns="18000" rIns="54000" bIns="18000" rtlCol="0" anchor="ctr"/>
-          <a:lstStyle/>
-          <a:p>
-            <a:pPr algn="ctr">
-              <a:lnSpc>
-                <a:spcPct val="120000"/>
-              </a:lnSpc>
-            </a:pPr>
-            <a:r>
-              <a:rPr sz="1500" b="1">
-                <a:solidFill>
-                  <a:srgbClr val="FFFFFF"/>
-                </a:solidFill>
-                <a:latin typeface="メイリオ"/>
-                <a:ea typeface="メイリオ"/>
-                <a:cs typeface="メイリオ"/>
-              </a:rPr>
-              <a:t>LINEへ案内</a:t>
-            </a:r>
-          </a:p>
-        </p:txBody>
-      </p:sp>
-      <p:sp>
-        <p:nvSpPr>
-          <p:cNvPr id="9" name="Right Arrow 5"/>
-          <p:cNvSpPr/>
-          <p:nvPr/>
-        </p:nvSpPr>
-        <p:spPr>
-          <a:xfrm>
-            <a:off x="4770000" y="2268000"/>
-            <a:ext cx="360000" cy="360000"/>
-          </a:xfrm>
-          <a:prstGeom prst="rightArrow">
-            <a:avLst/>
-          </a:prstGeom>
-          <a:solidFill>
-            <a:srgbClr val="1F285A"/>
-          </a:solidFill>
-          <a:ln>
-            <a:noFill/>
-          </a:ln>
-          <a:effectLst/>
-        </p:spPr>
-        <p:style>
-          <a:lnRef idx="1">
-            <a:schemeClr val="accent1"/>
-          </a:lnRef>
-          <a:fillRef idx="3">
-            <a:schemeClr val="accent1"/>
-          </a:fillRef>
-          <a:effectRef idx="2">
-            <a:schemeClr val="accent1"/>
-          </a:effectRef>
-          <a:fontRef idx="minor">
-            <a:schemeClr val="lt1"/>
-          </a:fontRef>
-        </p:style>
-        <p:txBody>
-          <a:bodyPr rtlCol="0" anchor="ctr"/>
-          <a:lstStyle/>
-          <a:p>
-            <a:pPr algn="ctr"/>
-            <a:endParaRPr>
-              <a:latin typeface="メイリオ"/>
-              <a:ea typeface="メイリオ"/>
-              <a:cs typeface="メイリオ"/>
-            </a:endParaRPr>
-          </a:p>
-        </p:txBody>
-      </p:sp>
-      <p:sp>
-        <p:nvSpPr>
-          <p:cNvPr id="10" name="Rounded Rectangle 4"/>
-          <p:cNvSpPr/>
-          <p:nvPr/>
-        </p:nvSpPr>
-        <p:spPr>
-          <a:xfrm>
-            <a:off x="5148000" y="1944000"/>
-            <a:ext cx="1638000" cy="1007999"/>
-          </a:xfrm>
-          <a:prstGeom prst="roundRect">
-            <a:avLst>
-              <a:gd name="adj" fmla="val 10000"/>
-            </a:avLst>
-          </a:prstGeom>
-          <a:solidFill>
-            <a:srgbClr val="1F285A"/>
-          </a:solidFill>
-          <a:ln>
-            <a:noFill/>
-          </a:ln>
-          <a:effectLst/>
-        </p:spPr>
-        <p:style>
-          <a:lnRef idx="1">
-            <a:schemeClr val="accent1"/>
-          </a:lnRef>
-          <a:fillRef idx="3">
-            <a:schemeClr val="accent1"/>
-          </a:fillRef>
-          <a:effectRef idx="2">
-            <a:schemeClr val="accent1"/>
-          </a:effectRef>
-          <a:fontRef idx="minor">
-            <a:schemeClr val="lt1"/>
-          </a:fontRef>
-        </p:style>
-        <p:txBody>
-          <a:bodyPr wrap="square" lIns="54000" tIns="18000" rIns="54000" bIns="18000" rtlCol="0" anchor="ctr"/>
-          <a:lstStyle/>
-          <a:p>
-            <a:pPr algn="ctr">
-              <a:lnSpc>
-                <a:spcPct val="120000"/>
-              </a:lnSpc>
-            </a:pPr>
-            <a:r>
-              <a:rPr sz="1500" b="1">
-                <a:solidFill>
-                  <a:srgbClr val="FFFFFF"/>
-                </a:solidFill>
-                <a:latin typeface="メイリオ"/>
-                <a:ea typeface="メイリオ"/>
-                <a:cs typeface="メイリオ"/>
-              </a:rPr>
-              <a:t>事例・動画を</a:t>
-            </a:r>
-          </a:p>
-          <a:p>
-            <a:pPr algn="ctr">
-              <a:lnSpc>
-                <a:spcPct val="120000"/>
-              </a:lnSpc>
-            </a:pPr>
-            <a:r>
-              <a:rPr sz="1500" b="1">
-                <a:solidFill>
-                  <a:srgbClr val="FFFFFF"/>
-                </a:solidFill>
-                <a:latin typeface="メイリオ"/>
-                <a:ea typeface="メイリオ"/>
-                <a:cs typeface="メイリオ"/>
-              </a:rPr>
-              <a:t>配信</a:t>
-            </a:r>
-          </a:p>
-        </p:txBody>
-      </p:sp>
-      <p:sp>
-        <p:nvSpPr>
-          <p:cNvPr id="11" name="Right Arrow 5"/>
-          <p:cNvSpPr/>
-          <p:nvPr/>
-        </p:nvSpPr>
-        <p:spPr>
-          <a:xfrm>
-            <a:off x="6803999" y="2268000"/>
-            <a:ext cx="360000" cy="360000"/>
-          </a:xfrm>
-          <a:prstGeom prst="rightArrow">
-            <a:avLst/>
-          </a:prstGeom>
-          <a:solidFill>
-            <a:srgbClr val="1F285A"/>
-          </a:solidFill>
-          <a:ln>
-            <a:noFill/>
-          </a:ln>
-          <a:effectLst/>
-        </p:spPr>
-        <p:style>
-          <a:lnRef idx="1">
-            <a:schemeClr val="accent1"/>
-          </a:lnRef>
-          <a:fillRef idx="3">
-            <a:schemeClr val="accent1"/>
-          </a:fillRef>
-          <a:effectRef idx="2">
-            <a:schemeClr val="accent1"/>
-          </a:effectRef>
-          <a:fontRef idx="minor">
-            <a:schemeClr val="lt1"/>
-          </a:fontRef>
-        </p:style>
-        <p:txBody>
-          <a:bodyPr rtlCol="0" anchor="ctr"/>
-          <a:lstStyle/>
-          <a:p>
-            <a:pPr algn="ctr"/>
-            <a:endParaRPr>
-              <a:latin typeface="メイリオ"/>
-              <a:ea typeface="メイリオ"/>
-              <a:cs typeface="メイリオ"/>
-            </a:endParaRPr>
-          </a:p>
-        </p:txBody>
-      </p:sp>
-      <p:sp>
-        <p:nvSpPr>
-          <p:cNvPr id="12" name="Rounded Rectangle 12"/>
-          <p:cNvSpPr/>
-          <p:nvPr/>
-        </p:nvSpPr>
-        <p:spPr>
-          <a:xfrm>
-            <a:off x="7182000" y="1944000"/>
-            <a:ext cx="1638000" cy="1007999"/>
-          </a:xfrm>
-          <a:prstGeom prst="roundRect">
-            <a:avLst>
-              <a:gd name="adj" fmla="val 6000"/>
-            </a:avLst>
-          </a:prstGeom>
-          <a:solidFill>
-            <a:srgbClr val="FFFFFF"/>
-          </a:solidFill>
-          <a:ln w="19050">
-            <a:solidFill>
-              <a:srgbClr val="1F285A"/>
-            </a:solidFill>
-          </a:ln>
-          <a:effectLst/>
-        </p:spPr>
-        <p:style>
-          <a:lnRef idx="1">
-            <a:schemeClr val="accent1"/>
-          </a:lnRef>
-          <a:fillRef idx="3">
-            <a:schemeClr val="accent1"/>
-          </a:fillRef>
-          <a:effectRef idx="2">
-            <a:schemeClr val="accent1"/>
-          </a:effectRef>
-          <a:fontRef idx="minor">
-            <a:schemeClr val="lt1"/>
-          </a:fontRef>
-        </p:style>
-        <p:txBody>
-          <a:bodyPr wrap="square" lIns="125999" tIns="90000" rIns="108000" bIns="54000" rtlCol="0" anchor="ctr"/>
-          <a:lstStyle/>
-          <a:p>
-            <a:pPr algn="ctr">
-              <a:lnSpc>
-                <a:spcPct val="130000"/>
-              </a:lnSpc>
-              <a:spcAft>
-                <a:spcPts val="500"/>
-              </a:spcAft>
-            </a:pPr>
-            <a:r>
-              <a:rPr sz="1500" b="1" dirty="0" err="1">
-                <a:solidFill>
-                  <a:srgbClr val="1F285A"/>
-                </a:solidFill>
-                <a:latin typeface="メイリオ"/>
-                <a:ea typeface="メイリオ"/>
-                <a:cs typeface="メイリオ"/>
-              </a:rPr>
-              <a:t>見学・商談の</a:t>
-            </a:r>
-            <a:endParaRPr sz="1250" b="1" dirty="0">
-              <a:solidFill>
-                <a:srgbClr val="1F285A"/>
-              </a:solidFill>
-              <a:latin typeface="メイリオ"/>
-              <a:ea typeface="メイリオ"/>
-              <a:cs typeface="メイリオ"/>
-            </a:endParaRPr>
-          </a:p>
-          <a:p>
-            <a:pPr algn="ctr">
-              <a:lnSpc>
-                <a:spcPct val="130000"/>
-              </a:lnSpc>
-              <a:spcAft>
-                <a:spcPts val="500"/>
-              </a:spcAft>
-            </a:pPr>
-            <a:r>
-              <a:rPr sz="1500" b="1" dirty="0" err="1">
-                <a:solidFill>
-                  <a:srgbClr val="1F285A"/>
-                </a:solidFill>
-                <a:latin typeface="メイリオ"/>
-                <a:ea typeface="メイリオ"/>
-                <a:cs typeface="メイリオ"/>
-              </a:rPr>
-              <a:t>予約</a:t>
-            </a:r>
-            <a:endParaRPr sz="1250" b="1" dirty="0">
-              <a:solidFill>
-                <a:srgbClr val="1F285A"/>
-              </a:solidFill>
-              <a:latin typeface="メイリオ"/>
-              <a:ea typeface="メイリオ"/>
-              <a:cs typeface="メイリオ"/>
-            </a:endParaRPr>
-          </a:p>
-        </p:txBody>
-      </p:sp>
-      <p:sp>
-        <p:nvSpPr>
-          <p:cNvPr id="13" name="TextBox 19"/>
-          <p:cNvSpPr txBox="1"/>
-          <p:nvPr/>
-        </p:nvSpPr>
-        <p:spPr>
-          <a:xfrm>
-            <a:off x="1080000" y="3564000"/>
-            <a:ext cx="7740000" cy="2520000"/>
-          </a:xfrm>
-          <a:prstGeom prst="rect">
-            <a:avLst/>
-          </a:prstGeom>
-          <a:noFill/>
-        </p:spPr>
-        <p:txBody>
-          <a:bodyPr wrap="square" lIns="0" tIns="21600" rIns="0" bIns="21600" anchor="t">
-            <a:spAutoFit/>
-          </a:bodyPr>
-          <a:lstStyle/>
-          <a:p>
-            <a:pPr algn="l">
-              <a:lnSpc>
-                <a:spcPct val="115000"/>
-              </a:lnSpc>
-              <a:spcAft>
-                <a:spcPts val="1800"/>
-              </a:spcAft>
-            </a:pPr>
-            <a:r>
-              <a:rPr sz="2000" b="0">
-                <a:solidFill>
-                  <a:srgbClr val="333333"/>
-                </a:solidFill>
-                <a:latin typeface="メイリオ"/>
-                <a:ea typeface="メイリオ"/>
-                <a:cs typeface="メイリオ"/>
-              </a:rPr>
-              <a:t>・資料請求のみで終わらせず、予約・商談につなげる</a:t>
-            </a:r>
-          </a:p>
-          <a:p>
-            <a:pPr algn="l">
-              <a:lnSpc>
-                <a:spcPct val="115000"/>
-              </a:lnSpc>
-              <a:spcAft>
-                <a:spcPts val="1400"/>
-              </a:spcAft>
-            </a:pPr>
-            <a:r>
-              <a:rPr sz="2000" b="1">
-                <a:solidFill>
-                  <a:srgbClr val="1F285A"/>
-                </a:solidFill>
-                <a:latin typeface="メイリオ"/>
-                <a:ea typeface="メイリオ"/>
-                <a:cs typeface="メイリオ"/>
-              </a:rPr>
-              <a:t>・実績：皮膚科クリニック　予約数 約1.2倍</a:t>
-            </a:r>
-          </a:p>
-          <a:p>
-            <a:pPr algn="l">
-              <a:lnSpc>
-                <a:spcPct val="115000"/>
-              </a:lnSpc>
-              <a:spcAft>
-                <a:spcPts val="0"/>
-              </a:spcAft>
-            </a:pPr>
-            <a:r>
-              <a:rPr sz="2000" b="1">
-                <a:solidFill>
-                  <a:srgbClr val="1F285A"/>
-                </a:solidFill>
-                <a:latin typeface="メイリオ"/>
-                <a:ea typeface="メイリオ"/>
-                <a:cs typeface="メイリオ"/>
-              </a:rPr>
-              <a:t>・実績：就職支援　面談予約率 55%</a:t>
-            </a:r>
-          </a:p>
-        </p:txBody>
-      </p:sp>
-    </p:spTree>
-  </p:cSld>
-  <p:clrMapOvr>
-    <a:masterClrMapping/>
-  </p:clrMapOvr>
-</p:sld>
-</file>
-
-<file path=ppt/slides/slide5.xml><?xml version="1.0" encoding="utf-8"?>
+<file path=ppt/slides/slide1.xml><?xml version="1.0" encoding="utf-8"?>
 <p:sld xmlns:a="http://schemas.openxmlformats.org/drawingml/2006/main" xmlns:p="http://schemas.openxmlformats.org/presentationml/2006/main" xmlns:r="http://schemas.openxmlformats.org/officeDocument/2006/relationships">
   <p:cSld>
     <p:spTree>
@@ -8775,6 +7104,1635 @@
 </p:sld>
 </file>
 
+<file path=ppt/slides/slide2.xml><?xml version="1.0" encoding="utf-8"?>
+<p:sld xmlns:a="http://schemas.openxmlformats.org/drawingml/2006/main" xmlns:r="http://schemas.openxmlformats.org/officeDocument/2006/relationships" xmlns:p="http://schemas.openxmlformats.org/presentationml/2006/main">
+  <p:cSld>
+    <p:spTree>
+      <p:nvGrpSpPr>
+        <p:cNvPr id="2" name="">
+          <a:extLst>
+            <a:ext uri="{FF2B5EF4-FFF2-40B4-BE49-F238E27FC236}">
+              <a16:creationId xmlns:a16="http://schemas.microsoft.com/office/drawing/2014/main" id="{E70E5221-666F-DE20-B9E8-FDFC607CC22D}"/>
+            </a:ext>
+          </a:extLst>
+        </p:cNvPr>
+        <p:cNvGrpSpPr/>
+        <p:nvPr/>
+      </p:nvGrpSpPr>
+      <p:grpSpPr>
+        <a:xfrm>
+          <a:off x="0" y="0"/>
+          <a:ext cx="0" cy="0"/>
+          <a:chOff x="0" y="0"/>
+          <a:chExt cx="0" cy="0"/>
+        </a:xfrm>
+      </p:grpSpPr>
+      <p:sp>
+        <p:nvSpPr>
+          <p:cNvPr id="3" name="TextBox 1"/>
+          <p:cNvSpPr txBox="1"/>
+          <p:nvPr/>
+        </p:nvSpPr>
+        <p:spPr>
+          <a:xfrm>
+            <a:off x="547200" y="136800"/>
+            <a:ext cx="8784000" cy="338400"/>
+          </a:xfrm>
+          <a:prstGeom prst="rect">
+            <a:avLst/>
+          </a:prstGeom>
+          <a:noFill/>
+        </p:spPr>
+        <p:txBody>
+          <a:bodyPr wrap="square" lIns="0" tIns="21600" rIns="0" bIns="21600" anchor="ctr">
+            <a:spAutoFit/>
+          </a:bodyPr>
+          <a:lstStyle/>
+          <a:p>
+            <a:pPr algn="l"/>
+            <a:r>
+              <a:rPr sz="1600" b="1">
+                <a:solidFill>
+                  <a:srgbClr val="002060"/>
+                </a:solidFill>
+                <a:latin typeface="メイリオ"/>
+                <a:ea typeface="メイリオ"/>
+                <a:cs typeface="メイリオ"/>
+              </a:rPr>
+              <a:t>サンクスLINE｜重要性</a:t>
+            </a:r>
+          </a:p>
+        </p:txBody>
+      </p:sp>
+      <p:sp>
+        <p:nvSpPr>
+          <p:cNvPr id="4" name="TextBox 2"/>
+          <p:cNvSpPr txBox="1"/>
+          <p:nvPr/>
+        </p:nvSpPr>
+        <p:spPr>
+          <a:xfrm>
+            <a:off x="432000" y="684000"/>
+            <a:ext cx="9036000" cy="432000"/>
+          </a:xfrm>
+          <a:prstGeom prst="rect">
+            <a:avLst/>
+          </a:prstGeom>
+          <a:noFill/>
+        </p:spPr>
+        <p:txBody>
+          <a:bodyPr wrap="square" lIns="0" tIns="21600" rIns="0" bIns="21600" anchor="ctr">
+            <a:spAutoFit/>
+          </a:bodyPr>
+          <a:lstStyle/>
+          <a:p>
+            <a:pPr algn="l">
+              <a:lnSpc>
+                <a:spcPct val="130000"/>
+              </a:lnSpc>
+            </a:pPr>
+            <a:r>
+              <a:rPr sz="1600" dirty="0" err="1" b="0">
+                <a:solidFill>
+                  <a:srgbClr val="333333"/>
+                </a:solidFill>
+                <a:latin typeface="メイリオ"/>
+                <a:ea typeface="メイリオ"/>
+                <a:cs typeface="メイリオ"/>
+              </a:rPr>
+              <a:t>申込みの直後に、LINEでつながる</a:t>
+            </a:r>
+            <a:endParaRPr lang="en-US" sz="1600" dirty="0">
+              <a:solidFill>
+                <a:srgbClr val="333333"/>
+              </a:solidFill>
+              <a:latin typeface="メイリオ"/>
+              <a:ea typeface="メイリオ"/>
+              <a:cs typeface="メイリオ"/>
+            </a:endParaRPr>
+          </a:p>
+        </p:txBody>
+      </p:sp>
+      <p:cxnSp>
+        <p:nvCxnSpPr>
+          <p:cNvPr id="5" name="Connector 3"/>
+          <p:cNvCxnSpPr/>
+          <p:nvPr/>
+        </p:nvCxnSpPr>
+        <p:spPr>
+          <a:xfrm>
+            <a:off x="0" y="1389600"/>
+            <a:ext cx="9907200" cy="0"/>
+          </a:xfrm>
+          <a:prstGeom prst="line">
+            <a:avLst/>
+          </a:prstGeom>
+          <a:ln w="12700">
+            <a:solidFill>
+              <a:srgbClr val="D9D9D9"/>
+            </a:solidFill>
+          </a:ln>
+        </p:spPr>
+        <p:style>
+          <a:lnRef idx="2">
+            <a:schemeClr val="accent1"/>
+          </a:lnRef>
+          <a:fillRef idx="0">
+            <a:schemeClr val="accent1"/>
+          </a:fillRef>
+          <a:effectRef idx="1">
+            <a:schemeClr val="accent1"/>
+          </a:effectRef>
+          <a:fontRef idx="minor">
+            <a:schemeClr val="tx1"/>
+          </a:fontRef>
+        </p:style>
+      </p:cxnSp>
+      <p:sp>
+        <p:nvSpPr>
+          <p:cNvPr id="6" name="TextBox 19"/>
+          <p:cNvSpPr txBox="1"/>
+          <p:nvPr/>
+        </p:nvSpPr>
+        <p:spPr>
+          <a:xfrm>
+            <a:off x="1080000" y="2160000"/>
+            <a:ext cx="7740000" cy="3420000"/>
+          </a:xfrm>
+          <a:prstGeom prst="rect">
+            <a:avLst/>
+          </a:prstGeom>
+          <a:noFill/>
+        </p:spPr>
+        <p:txBody>
+          <a:bodyPr wrap="square" lIns="0" tIns="21600" rIns="0" bIns="21600" anchor="t">
+            <a:spAutoFit/>
+          </a:bodyPr>
+          <a:lstStyle/>
+          <a:p>
+            <a:pPr algn="l">
+              <a:lnSpc>
+                <a:spcPct val="115000"/>
+              </a:lnSpc>
+              <a:spcAft>
+                <a:spcPts val="2200"/>
+              </a:spcAft>
+            </a:pPr>
+            <a:r>
+              <a:rPr sz="2000" b="1">
+                <a:solidFill>
+                  <a:srgbClr val="1F285A"/>
+                </a:solidFill>
+                <a:latin typeface="メイリオ"/>
+                <a:ea typeface="メイリオ"/>
+                <a:cs typeface="メイリオ"/>
+              </a:rPr>
+              <a:t>・申込み⇒来店までに一定数が離脱する</a:t>
+            </a:r>
+          </a:p>
+          <a:p>
+            <a:pPr algn="l">
+              <a:lnSpc>
+                <a:spcPct val="115000"/>
+              </a:lnSpc>
+              <a:spcAft>
+                <a:spcPts val="2200"/>
+              </a:spcAft>
+            </a:pPr>
+            <a:r>
+              <a:rPr sz="2000" b="1">
+                <a:solidFill>
+                  <a:srgbClr val="1F285A"/>
+                </a:solidFill>
+                <a:latin typeface="メイリオ"/>
+                <a:ea typeface="メイリオ"/>
+                <a:cs typeface="メイリオ"/>
+              </a:rPr>
+              <a:t>・広告費を増やしても、この離脱層は減らない</a:t>
+            </a:r>
+          </a:p>
+          <a:p>
+            <a:pPr algn="l">
+              <a:lnSpc>
+                <a:spcPct val="115000"/>
+              </a:lnSpc>
+              <a:spcAft>
+                <a:spcPts val="200"/>
+              </a:spcAft>
+            </a:pPr>
+            <a:r>
+              <a:rPr sz="2000" b="1">
+                <a:solidFill>
+                  <a:srgbClr val="1F285A"/>
+                </a:solidFill>
+                <a:latin typeface="メイリオ"/>
+                <a:ea typeface="メイリオ"/>
+                <a:cs typeface="メイリオ"/>
+              </a:rPr>
+              <a:t>・関心が一番高い申込み直後に、LINEでつながるのが最適</a:t>
+            </a:r>
+          </a:p>
+          <a:p>
+            <a:pPr algn="l">
+              <a:lnSpc>
+                <a:spcPct val="115000"/>
+              </a:lnSpc>
+              <a:spcAft>
+                <a:spcPts val="0"/>
+              </a:spcAft>
+            </a:pPr>
+            <a:r>
+              <a:rPr sz="1400" b="0">
+                <a:solidFill>
+                  <a:srgbClr val="7F7F7F"/>
+                </a:solidFill>
+                <a:latin typeface="メイリオ"/>
+                <a:ea typeface="メイリオ"/>
+                <a:cs typeface="メイリオ"/>
+              </a:rPr>
+              <a:t>　（開封率 約70%／バス会社）</a:t>
+            </a:r>
+          </a:p>
+        </p:txBody>
+      </p:sp>
+    </p:spTree>
+    <p:extLst>
+      <p:ext uri="{BB962C8B-B14F-4D97-AF65-F5344CB8AC3E}">
+        <p14:creationId xmlns:p14="http://schemas.microsoft.com/office/powerpoint/2010/main" val="1715909323"/>
+      </p:ext>
+    </p:extLst>
+  </p:cSld>
+  <p:clrMapOvr>
+    <a:masterClrMapping/>
+  </p:clrMapOvr>
+</p:sld>
+</file>
+
+<file path=ppt/slides/slide3.xml><?xml version="1.0" encoding="utf-8"?>
+<p:sld xmlns:a="http://schemas.openxmlformats.org/drawingml/2006/main" xmlns:r="http://schemas.openxmlformats.org/officeDocument/2006/relationships" xmlns:p="http://schemas.openxmlformats.org/presentationml/2006/main">
+  <p:cSld>
+    <p:spTree>
+      <p:nvGrpSpPr>
+        <p:cNvPr id="2" name=""/>
+        <p:cNvGrpSpPr/>
+        <p:nvPr/>
+      </p:nvGrpSpPr>
+      <p:grpSpPr>
+        <a:xfrm>
+          <a:off x="0" y="0"/>
+          <a:ext cx="0" cy="0"/>
+          <a:chOff x="0" y="0"/>
+          <a:chExt cx="0" cy="0"/>
+        </a:xfrm>
+      </p:grpSpPr>
+      <p:sp>
+        <p:nvSpPr>
+          <p:cNvPr id="3" name="TextBox 1"/>
+          <p:cNvSpPr txBox="1"/>
+          <p:nvPr/>
+        </p:nvSpPr>
+        <p:spPr>
+          <a:xfrm>
+            <a:off x="547200" y="136800"/>
+            <a:ext cx="8784000" cy="338400"/>
+          </a:xfrm>
+          <a:prstGeom prst="rect">
+            <a:avLst/>
+          </a:prstGeom>
+          <a:noFill/>
+        </p:spPr>
+        <p:txBody>
+          <a:bodyPr wrap="square" lIns="0" tIns="21600" rIns="0" bIns="21600" anchor="ctr">
+            <a:spAutoFit/>
+          </a:bodyPr>
+          <a:lstStyle/>
+          <a:p>
+            <a:pPr algn="l"/>
+            <a:r>
+              <a:rPr sz="1600" b="1">
+                <a:solidFill>
+                  <a:srgbClr val="002060"/>
+                </a:solidFill>
+                <a:latin typeface="メイリオ"/>
+                <a:ea typeface="メイリオ"/>
+                <a:cs typeface="メイリオ"/>
+              </a:rPr>
+              <a:t>シーン1｜来店・来院の予約</a:t>
+            </a:r>
+          </a:p>
+        </p:txBody>
+      </p:sp>
+      <p:sp>
+        <p:nvSpPr>
+          <p:cNvPr id="4" name="TextBox 2"/>
+          <p:cNvSpPr txBox="1"/>
+          <p:nvPr/>
+        </p:nvSpPr>
+        <p:spPr>
+          <a:xfrm>
+            <a:off x="432000" y="684000"/>
+            <a:ext cx="9036000" cy="432000"/>
+          </a:xfrm>
+          <a:prstGeom prst="rect">
+            <a:avLst/>
+          </a:prstGeom>
+          <a:noFill/>
+        </p:spPr>
+        <p:txBody>
+          <a:bodyPr wrap="square" lIns="0" tIns="21600" rIns="0" bIns="21600" anchor="ctr">
+            <a:spAutoFit/>
+          </a:bodyPr>
+          <a:lstStyle/>
+          <a:p>
+            <a:pPr algn="l">
+              <a:lnSpc>
+                <a:spcPct val="130000"/>
+              </a:lnSpc>
+            </a:pPr>
+            <a:r>
+              <a:rPr sz="1600" dirty="0" err="1" b="0">
+                <a:solidFill>
+                  <a:srgbClr val="333333"/>
+                </a:solidFill>
+                <a:latin typeface="メイリオ"/>
+                <a:ea typeface="メイリオ"/>
+                <a:cs typeface="メイリオ"/>
+              </a:rPr>
+              <a:t>予約を、来店・来院につなげる</a:t>
+            </a:r>
+            <a:endParaRPr sz="1600" dirty="0">
+              <a:solidFill>
+                <a:srgbClr val="333333"/>
+              </a:solidFill>
+              <a:latin typeface="メイリオ"/>
+              <a:ea typeface="メイリオ"/>
+              <a:cs typeface="メイリオ"/>
+            </a:endParaRPr>
+          </a:p>
+        </p:txBody>
+      </p:sp>
+      <p:cxnSp>
+        <p:nvCxnSpPr>
+          <p:cNvPr id="5" name="Connector 3"/>
+          <p:cNvCxnSpPr/>
+          <p:nvPr/>
+        </p:nvCxnSpPr>
+        <p:spPr>
+          <a:xfrm>
+            <a:off x="0" y="1389600"/>
+            <a:ext cx="9907200" cy="0"/>
+          </a:xfrm>
+          <a:prstGeom prst="line">
+            <a:avLst/>
+          </a:prstGeom>
+          <a:ln w="12700">
+            <a:solidFill>
+              <a:srgbClr val="D9D9D9"/>
+            </a:solidFill>
+          </a:ln>
+        </p:spPr>
+        <p:style>
+          <a:lnRef idx="2">
+            <a:schemeClr val="accent1"/>
+          </a:lnRef>
+          <a:fillRef idx="0">
+            <a:schemeClr val="accent1"/>
+          </a:fillRef>
+          <a:effectRef idx="1">
+            <a:schemeClr val="accent1"/>
+          </a:effectRef>
+          <a:fontRef idx="minor">
+            <a:schemeClr val="tx1"/>
+          </a:fontRef>
+        </p:style>
+      </p:cxnSp>
+      <p:sp>
+        <p:nvSpPr>
+          <p:cNvPr id="6" name="Rounded Rectangle 12"/>
+          <p:cNvSpPr/>
+          <p:nvPr/>
+        </p:nvSpPr>
+        <p:spPr>
+          <a:xfrm>
+            <a:off x="1080000" y="1944000"/>
+            <a:ext cx="1638000" cy="1007999"/>
+          </a:xfrm>
+          <a:prstGeom prst="roundRect">
+            <a:avLst>
+              <a:gd name="adj" fmla="val 6000"/>
+            </a:avLst>
+          </a:prstGeom>
+          <a:solidFill>
+            <a:srgbClr val="FFFFFF"/>
+          </a:solidFill>
+          <a:ln w="19050">
+            <a:solidFill>
+              <a:srgbClr val="1F285A"/>
+            </a:solidFill>
+          </a:ln>
+          <a:effectLst/>
+        </p:spPr>
+        <p:style>
+          <a:lnRef idx="1">
+            <a:schemeClr val="accent1"/>
+          </a:lnRef>
+          <a:fillRef idx="3">
+            <a:schemeClr val="accent1"/>
+          </a:fillRef>
+          <a:effectRef idx="2">
+            <a:schemeClr val="accent1"/>
+          </a:effectRef>
+          <a:fontRef idx="minor">
+            <a:schemeClr val="lt1"/>
+          </a:fontRef>
+        </p:style>
+        <p:txBody>
+          <a:bodyPr wrap="square" lIns="125999" tIns="90000" rIns="108000" bIns="54000" rtlCol="0" anchor="ctr"/>
+          <a:lstStyle/>
+          <a:p>
+            <a:pPr algn="ctr">
+              <a:lnSpc>
+                <a:spcPct val="130000"/>
+              </a:lnSpc>
+              <a:spcAft>
+                <a:spcPts val="500"/>
+              </a:spcAft>
+            </a:pPr>
+            <a:r>
+              <a:rPr sz="1500" b="1" dirty="0" err="1">
+                <a:solidFill>
+                  <a:srgbClr val="1F285A"/>
+                </a:solidFill>
+                <a:latin typeface="メイリオ"/>
+                <a:ea typeface="メイリオ"/>
+                <a:cs typeface="メイリオ"/>
+              </a:rPr>
+              <a:t>予約完了</a:t>
+            </a:r>
+            <a:endParaRPr sz="1250" b="1" dirty="0">
+              <a:solidFill>
+                <a:srgbClr val="1F285A"/>
+              </a:solidFill>
+              <a:latin typeface="メイリオ"/>
+              <a:ea typeface="メイリオ"/>
+              <a:cs typeface="メイリオ"/>
+            </a:endParaRPr>
+          </a:p>
+        </p:txBody>
+      </p:sp>
+      <p:sp>
+        <p:nvSpPr>
+          <p:cNvPr id="7" name="Right Arrow 5"/>
+          <p:cNvSpPr/>
+          <p:nvPr/>
+        </p:nvSpPr>
+        <p:spPr>
+          <a:xfrm>
+            <a:off x="2736000" y="2268000"/>
+            <a:ext cx="360000" cy="360000"/>
+          </a:xfrm>
+          <a:prstGeom prst="rightArrow">
+            <a:avLst/>
+          </a:prstGeom>
+          <a:solidFill>
+            <a:srgbClr val="1F285A"/>
+          </a:solidFill>
+          <a:ln>
+            <a:noFill/>
+          </a:ln>
+          <a:effectLst/>
+        </p:spPr>
+        <p:style>
+          <a:lnRef idx="1">
+            <a:schemeClr val="accent1"/>
+          </a:lnRef>
+          <a:fillRef idx="3">
+            <a:schemeClr val="accent1"/>
+          </a:fillRef>
+          <a:effectRef idx="2">
+            <a:schemeClr val="accent1"/>
+          </a:effectRef>
+          <a:fontRef idx="minor">
+            <a:schemeClr val="lt1"/>
+          </a:fontRef>
+        </p:style>
+        <p:txBody>
+          <a:bodyPr rtlCol="0" anchor="ctr"/>
+          <a:lstStyle/>
+          <a:p>
+            <a:pPr algn="ctr"/>
+            <a:endParaRPr>
+              <a:latin typeface="メイリオ"/>
+              <a:ea typeface="メイリオ"/>
+              <a:cs typeface="メイリオ"/>
+            </a:endParaRPr>
+          </a:p>
+        </p:txBody>
+      </p:sp>
+      <p:sp>
+        <p:nvSpPr>
+          <p:cNvPr id="8" name="Rounded Rectangle 4"/>
+          <p:cNvSpPr/>
+          <p:nvPr/>
+        </p:nvSpPr>
+        <p:spPr>
+          <a:xfrm>
+            <a:off x="3114000" y="1944000"/>
+            <a:ext cx="1638000" cy="1007999"/>
+          </a:xfrm>
+          <a:prstGeom prst="roundRect">
+            <a:avLst>
+              <a:gd name="adj" fmla="val 10000"/>
+            </a:avLst>
+          </a:prstGeom>
+          <a:solidFill>
+            <a:srgbClr val="1F285A"/>
+          </a:solidFill>
+          <a:ln>
+            <a:noFill/>
+          </a:ln>
+          <a:effectLst/>
+        </p:spPr>
+        <p:style>
+          <a:lnRef idx="1">
+            <a:schemeClr val="accent1"/>
+          </a:lnRef>
+          <a:fillRef idx="3">
+            <a:schemeClr val="accent1"/>
+          </a:fillRef>
+          <a:effectRef idx="2">
+            <a:schemeClr val="accent1"/>
+          </a:effectRef>
+          <a:fontRef idx="minor">
+            <a:schemeClr val="lt1"/>
+          </a:fontRef>
+        </p:style>
+        <p:txBody>
+          <a:bodyPr wrap="square" lIns="54000" tIns="18000" rIns="54000" bIns="18000" rtlCol="0" anchor="ctr"/>
+          <a:lstStyle/>
+          <a:p>
+            <a:pPr algn="ctr">
+              <a:lnSpc>
+                <a:spcPct val="120000"/>
+              </a:lnSpc>
+            </a:pPr>
+            <a:r>
+              <a:rPr sz="1500" b="1">
+                <a:solidFill>
+                  <a:srgbClr val="FFFFFF"/>
+                </a:solidFill>
+                <a:latin typeface="メイリオ"/>
+                <a:ea typeface="メイリオ"/>
+                <a:cs typeface="メイリオ"/>
+              </a:rPr>
+              <a:t>LINEで</a:t>
+            </a:r>
+          </a:p>
+          <a:p>
+            <a:pPr algn="ctr">
+              <a:lnSpc>
+                <a:spcPct val="120000"/>
+              </a:lnSpc>
+            </a:pPr>
+            <a:r>
+              <a:rPr sz="1500" b="1">
+                <a:solidFill>
+                  <a:srgbClr val="FFFFFF"/>
+                </a:solidFill>
+                <a:latin typeface="メイリオ"/>
+                <a:ea typeface="メイリオ"/>
+                <a:cs typeface="メイリオ"/>
+              </a:rPr>
+              <a:t>予約確認</a:t>
+            </a:r>
+          </a:p>
+        </p:txBody>
+      </p:sp>
+      <p:sp>
+        <p:nvSpPr>
+          <p:cNvPr id="9" name="Right Arrow 5"/>
+          <p:cNvSpPr/>
+          <p:nvPr/>
+        </p:nvSpPr>
+        <p:spPr>
+          <a:xfrm>
+            <a:off x="4770000" y="2268000"/>
+            <a:ext cx="360000" cy="360000"/>
+          </a:xfrm>
+          <a:prstGeom prst="rightArrow">
+            <a:avLst/>
+          </a:prstGeom>
+          <a:solidFill>
+            <a:srgbClr val="1F285A"/>
+          </a:solidFill>
+          <a:ln>
+            <a:noFill/>
+          </a:ln>
+          <a:effectLst/>
+        </p:spPr>
+        <p:style>
+          <a:lnRef idx="1">
+            <a:schemeClr val="accent1"/>
+          </a:lnRef>
+          <a:fillRef idx="3">
+            <a:schemeClr val="accent1"/>
+          </a:fillRef>
+          <a:effectRef idx="2">
+            <a:schemeClr val="accent1"/>
+          </a:effectRef>
+          <a:fontRef idx="minor">
+            <a:schemeClr val="lt1"/>
+          </a:fontRef>
+        </p:style>
+        <p:txBody>
+          <a:bodyPr rtlCol="0" anchor="ctr"/>
+          <a:lstStyle/>
+          <a:p>
+            <a:pPr algn="ctr"/>
+            <a:endParaRPr>
+              <a:latin typeface="メイリオ"/>
+              <a:ea typeface="メイリオ"/>
+              <a:cs typeface="メイリオ"/>
+            </a:endParaRPr>
+          </a:p>
+        </p:txBody>
+      </p:sp>
+      <p:sp>
+        <p:nvSpPr>
+          <p:cNvPr id="10" name="Rounded Rectangle 4"/>
+          <p:cNvSpPr/>
+          <p:nvPr/>
+        </p:nvSpPr>
+        <p:spPr>
+          <a:xfrm>
+            <a:off x="5148000" y="1944000"/>
+            <a:ext cx="1638000" cy="1007999"/>
+          </a:xfrm>
+          <a:prstGeom prst="roundRect">
+            <a:avLst>
+              <a:gd name="adj" fmla="val 10000"/>
+            </a:avLst>
+          </a:prstGeom>
+          <a:solidFill>
+            <a:srgbClr val="1F285A"/>
+          </a:solidFill>
+          <a:ln>
+            <a:noFill/>
+          </a:ln>
+          <a:effectLst/>
+        </p:spPr>
+        <p:style>
+          <a:lnRef idx="1">
+            <a:schemeClr val="accent1"/>
+          </a:lnRef>
+          <a:fillRef idx="3">
+            <a:schemeClr val="accent1"/>
+          </a:fillRef>
+          <a:effectRef idx="2">
+            <a:schemeClr val="accent1"/>
+          </a:effectRef>
+          <a:fontRef idx="minor">
+            <a:schemeClr val="lt1"/>
+          </a:fontRef>
+        </p:style>
+        <p:txBody>
+          <a:bodyPr wrap="square" lIns="54000" tIns="18000" rIns="54000" bIns="18000" rtlCol="0" anchor="ctr"/>
+          <a:lstStyle/>
+          <a:p>
+            <a:pPr algn="ctr">
+              <a:lnSpc>
+                <a:spcPct val="120000"/>
+              </a:lnSpc>
+            </a:pPr>
+            <a:r>
+              <a:rPr sz="1500" b="1">
+                <a:solidFill>
+                  <a:srgbClr val="FFFFFF"/>
+                </a:solidFill>
+                <a:latin typeface="メイリオ"/>
+                <a:ea typeface="メイリオ"/>
+                <a:cs typeface="メイリオ"/>
+              </a:rPr>
+              <a:t>前日に</a:t>
+            </a:r>
+          </a:p>
+          <a:p>
+            <a:pPr algn="ctr">
+              <a:lnSpc>
+                <a:spcPct val="120000"/>
+              </a:lnSpc>
+            </a:pPr>
+            <a:r>
+              <a:rPr sz="1500" b="1">
+                <a:solidFill>
+                  <a:srgbClr val="FFFFFF"/>
+                </a:solidFill>
+                <a:latin typeface="メイリオ"/>
+                <a:ea typeface="メイリオ"/>
+                <a:cs typeface="メイリオ"/>
+              </a:rPr>
+              <a:t>お知らせ</a:t>
+            </a:r>
+          </a:p>
+        </p:txBody>
+      </p:sp>
+      <p:sp>
+        <p:nvSpPr>
+          <p:cNvPr id="11" name="Right Arrow 5"/>
+          <p:cNvSpPr/>
+          <p:nvPr/>
+        </p:nvSpPr>
+        <p:spPr>
+          <a:xfrm>
+            <a:off x="6803999" y="2268000"/>
+            <a:ext cx="360000" cy="360000"/>
+          </a:xfrm>
+          <a:prstGeom prst="rightArrow">
+            <a:avLst/>
+          </a:prstGeom>
+          <a:solidFill>
+            <a:srgbClr val="1F285A"/>
+          </a:solidFill>
+          <a:ln>
+            <a:noFill/>
+          </a:ln>
+          <a:effectLst/>
+        </p:spPr>
+        <p:style>
+          <a:lnRef idx="1">
+            <a:schemeClr val="accent1"/>
+          </a:lnRef>
+          <a:fillRef idx="3">
+            <a:schemeClr val="accent1"/>
+          </a:fillRef>
+          <a:effectRef idx="2">
+            <a:schemeClr val="accent1"/>
+          </a:effectRef>
+          <a:fontRef idx="minor">
+            <a:schemeClr val="lt1"/>
+          </a:fontRef>
+        </p:style>
+        <p:txBody>
+          <a:bodyPr rtlCol="0" anchor="ctr"/>
+          <a:lstStyle/>
+          <a:p>
+            <a:pPr algn="ctr"/>
+            <a:endParaRPr>
+              <a:latin typeface="メイリオ"/>
+              <a:ea typeface="メイリオ"/>
+              <a:cs typeface="メイリオ"/>
+            </a:endParaRPr>
+          </a:p>
+        </p:txBody>
+      </p:sp>
+      <p:sp>
+        <p:nvSpPr>
+          <p:cNvPr id="12" name="Rounded Rectangle 12"/>
+          <p:cNvSpPr/>
+          <p:nvPr/>
+        </p:nvSpPr>
+        <p:spPr>
+          <a:xfrm>
+            <a:off x="7182000" y="1944000"/>
+            <a:ext cx="1638000" cy="1007999"/>
+          </a:xfrm>
+          <a:prstGeom prst="roundRect">
+            <a:avLst>
+              <a:gd name="adj" fmla="val 6000"/>
+            </a:avLst>
+          </a:prstGeom>
+          <a:solidFill>
+            <a:srgbClr val="FFFFFF"/>
+          </a:solidFill>
+          <a:ln w="19050">
+            <a:solidFill>
+              <a:srgbClr val="1F285A"/>
+            </a:solidFill>
+          </a:ln>
+          <a:effectLst/>
+        </p:spPr>
+        <p:style>
+          <a:lnRef idx="1">
+            <a:schemeClr val="accent1"/>
+          </a:lnRef>
+          <a:fillRef idx="3">
+            <a:schemeClr val="accent1"/>
+          </a:fillRef>
+          <a:effectRef idx="2">
+            <a:schemeClr val="accent1"/>
+          </a:effectRef>
+          <a:fontRef idx="minor">
+            <a:schemeClr val="lt1"/>
+          </a:fontRef>
+        </p:style>
+        <p:txBody>
+          <a:bodyPr wrap="square" lIns="125999" tIns="90000" rIns="108000" bIns="54000" rtlCol="0" anchor="ctr"/>
+          <a:lstStyle/>
+          <a:p>
+            <a:pPr algn="ctr">
+              <a:lnSpc>
+                <a:spcPct val="130000"/>
+              </a:lnSpc>
+              <a:spcAft>
+                <a:spcPts val="500"/>
+              </a:spcAft>
+            </a:pPr>
+            <a:r>
+              <a:rPr sz="1500" b="1" dirty="0" err="1">
+                <a:solidFill>
+                  <a:srgbClr val="1F285A"/>
+                </a:solidFill>
+                <a:latin typeface="メイリオ"/>
+                <a:ea typeface="メイリオ"/>
+                <a:cs typeface="メイリオ"/>
+              </a:rPr>
+              <a:t>来店</a:t>
+            </a:r>
+            <a:endParaRPr sz="1250" b="1" dirty="0">
+              <a:solidFill>
+                <a:srgbClr val="1F285A"/>
+              </a:solidFill>
+              <a:latin typeface="メイリオ"/>
+              <a:ea typeface="メイリオ"/>
+              <a:cs typeface="メイリオ"/>
+            </a:endParaRPr>
+          </a:p>
+        </p:txBody>
+      </p:sp>
+      <p:sp>
+        <p:nvSpPr>
+          <p:cNvPr id="13" name="TextBox 19"/>
+          <p:cNvSpPr txBox="1"/>
+          <p:nvPr/>
+        </p:nvSpPr>
+        <p:spPr>
+          <a:xfrm>
+            <a:off x="1080000" y="3564000"/>
+            <a:ext cx="7740000" cy="2520000"/>
+          </a:xfrm>
+          <a:prstGeom prst="rect">
+            <a:avLst/>
+          </a:prstGeom>
+          <a:noFill/>
+        </p:spPr>
+        <p:txBody>
+          <a:bodyPr wrap="square" lIns="0" tIns="21600" rIns="0" bIns="21600" anchor="t">
+            <a:spAutoFit/>
+          </a:bodyPr>
+          <a:lstStyle/>
+          <a:p>
+            <a:pPr algn="l">
+              <a:lnSpc>
+                <a:spcPct val="115000"/>
+              </a:lnSpc>
+              <a:spcAft>
+                <a:spcPts val="1800"/>
+              </a:spcAft>
+            </a:pPr>
+            <a:r>
+              <a:rPr sz="2000" b="0">
+                <a:solidFill>
+                  <a:srgbClr val="333333"/>
+                </a:solidFill>
+                <a:latin typeface="メイリオ"/>
+                <a:ea typeface="メイリオ"/>
+                <a:cs typeface="メイリオ"/>
+              </a:rPr>
+              <a:t>・無断キャンセルを防ぎ、来店につなげる</a:t>
+            </a:r>
+          </a:p>
+          <a:p>
+            <a:pPr algn="l">
+              <a:lnSpc>
+                <a:spcPct val="115000"/>
+              </a:lnSpc>
+              <a:spcAft>
+                <a:spcPts val="0"/>
+              </a:spcAft>
+            </a:pPr>
+            <a:r>
+              <a:rPr sz="2000" b="1">
+                <a:solidFill>
+                  <a:srgbClr val="1F285A"/>
+                </a:solidFill>
+                <a:latin typeface="メイリオ"/>
+                <a:ea typeface="メイリオ"/>
+                <a:cs typeface="メイリオ"/>
+              </a:rPr>
+              <a:t>・実績：美容クリニック　来院率 40〜50%改善</a:t>
+            </a:r>
+          </a:p>
+        </p:txBody>
+      </p:sp>
+    </p:spTree>
+    <p:extLst>
+      <p:ext uri="{BB962C8B-B14F-4D97-AF65-F5344CB8AC3E}">
+        <p14:creationId xmlns:p14="http://schemas.microsoft.com/office/powerpoint/2010/main" val="3939997984"/>
+      </p:ext>
+    </p:extLst>
+  </p:cSld>
+  <p:clrMapOvr>
+    <a:masterClrMapping/>
+  </p:clrMapOvr>
+</p:sld>
+</file>
+
+<file path=ppt/slides/slide4.xml><?xml version="1.0" encoding="utf-8"?>
+<p:sld xmlns:a="http://schemas.openxmlformats.org/drawingml/2006/main" xmlns:r="http://schemas.openxmlformats.org/officeDocument/2006/relationships" xmlns:p="http://schemas.openxmlformats.org/presentationml/2006/main">
+  <p:cSld>
+    <p:spTree>
+      <p:nvGrpSpPr>
+        <p:cNvPr id="2" name=""/>
+        <p:cNvGrpSpPr/>
+        <p:nvPr/>
+      </p:nvGrpSpPr>
+      <p:grpSpPr>
+        <a:xfrm>
+          <a:off x="0" y="0"/>
+          <a:ext cx="0" cy="0"/>
+          <a:chOff x="0" y="0"/>
+          <a:chExt cx="0" cy="0"/>
+        </a:xfrm>
+      </p:grpSpPr>
+      <p:sp>
+        <p:nvSpPr>
+          <p:cNvPr id="3" name="TextBox 1"/>
+          <p:cNvSpPr txBox="1"/>
+          <p:nvPr/>
+        </p:nvSpPr>
+        <p:spPr>
+          <a:xfrm>
+            <a:off x="547200" y="136800"/>
+            <a:ext cx="8784000" cy="338400"/>
+          </a:xfrm>
+          <a:prstGeom prst="rect">
+            <a:avLst/>
+          </a:prstGeom>
+          <a:noFill/>
+        </p:spPr>
+        <p:txBody>
+          <a:bodyPr wrap="square" lIns="0" tIns="21600" rIns="0" bIns="21600" anchor="ctr">
+            <a:spAutoFit/>
+          </a:bodyPr>
+          <a:lstStyle/>
+          <a:p>
+            <a:pPr algn="l"/>
+            <a:r>
+              <a:rPr sz="1600" b="1">
+                <a:solidFill>
+                  <a:srgbClr val="002060"/>
+                </a:solidFill>
+                <a:latin typeface="メイリオ"/>
+                <a:ea typeface="メイリオ"/>
+                <a:cs typeface="メイリオ"/>
+              </a:rPr>
+              <a:t>シーン2｜資料請求</a:t>
+            </a:r>
+          </a:p>
+        </p:txBody>
+      </p:sp>
+      <p:sp>
+        <p:nvSpPr>
+          <p:cNvPr id="4" name="TextBox 2"/>
+          <p:cNvSpPr txBox="1"/>
+          <p:nvPr/>
+        </p:nvSpPr>
+        <p:spPr>
+          <a:xfrm>
+            <a:off x="432000" y="684000"/>
+            <a:ext cx="9036000" cy="432000"/>
+          </a:xfrm>
+          <a:prstGeom prst="rect">
+            <a:avLst/>
+          </a:prstGeom>
+          <a:noFill/>
+        </p:spPr>
+        <p:txBody>
+          <a:bodyPr wrap="square" lIns="0" tIns="21600" rIns="0" bIns="21600" anchor="ctr">
+            <a:spAutoFit/>
+          </a:bodyPr>
+          <a:lstStyle/>
+          <a:p>
+            <a:pPr algn="l">
+              <a:lnSpc>
+                <a:spcPct val="130000"/>
+              </a:lnSpc>
+            </a:pPr>
+            <a:r>
+              <a:rPr sz="1600" dirty="0" err="1" b="0">
+                <a:solidFill>
+                  <a:srgbClr val="333333"/>
+                </a:solidFill>
+                <a:latin typeface="メイリオ"/>
+                <a:ea typeface="メイリオ"/>
+                <a:cs typeface="メイリオ"/>
+              </a:rPr>
+              <a:t>資料請求を、予約・商談につなげる</a:t>
+            </a:r>
+            <a:endParaRPr sz="1600" dirty="0">
+              <a:solidFill>
+                <a:srgbClr val="333333"/>
+              </a:solidFill>
+              <a:latin typeface="メイリオ"/>
+              <a:ea typeface="メイリオ"/>
+              <a:cs typeface="メイリオ"/>
+            </a:endParaRPr>
+          </a:p>
+        </p:txBody>
+      </p:sp>
+      <p:cxnSp>
+        <p:nvCxnSpPr>
+          <p:cNvPr id="5" name="Connector 3"/>
+          <p:cNvCxnSpPr/>
+          <p:nvPr/>
+        </p:nvCxnSpPr>
+        <p:spPr>
+          <a:xfrm>
+            <a:off x="0" y="1389600"/>
+            <a:ext cx="9907200" cy="0"/>
+          </a:xfrm>
+          <a:prstGeom prst="line">
+            <a:avLst/>
+          </a:prstGeom>
+          <a:ln w="12700">
+            <a:solidFill>
+              <a:srgbClr val="D9D9D9"/>
+            </a:solidFill>
+          </a:ln>
+        </p:spPr>
+        <p:style>
+          <a:lnRef idx="2">
+            <a:schemeClr val="accent1"/>
+          </a:lnRef>
+          <a:fillRef idx="0">
+            <a:schemeClr val="accent1"/>
+          </a:fillRef>
+          <a:effectRef idx="1">
+            <a:schemeClr val="accent1"/>
+          </a:effectRef>
+          <a:fontRef idx="minor">
+            <a:schemeClr val="tx1"/>
+          </a:fontRef>
+        </p:style>
+      </p:cxnSp>
+      <p:sp>
+        <p:nvSpPr>
+          <p:cNvPr id="6" name="Rounded Rectangle 12"/>
+          <p:cNvSpPr/>
+          <p:nvPr/>
+        </p:nvSpPr>
+        <p:spPr>
+          <a:xfrm>
+            <a:off x="1080000" y="1944000"/>
+            <a:ext cx="1638000" cy="1007999"/>
+          </a:xfrm>
+          <a:prstGeom prst="roundRect">
+            <a:avLst>
+              <a:gd name="adj" fmla="val 6000"/>
+            </a:avLst>
+          </a:prstGeom>
+          <a:solidFill>
+            <a:srgbClr val="FFFFFF"/>
+          </a:solidFill>
+          <a:ln w="19050">
+            <a:solidFill>
+              <a:srgbClr val="1F285A"/>
+            </a:solidFill>
+          </a:ln>
+          <a:effectLst/>
+        </p:spPr>
+        <p:style>
+          <a:lnRef idx="1">
+            <a:schemeClr val="accent1"/>
+          </a:lnRef>
+          <a:fillRef idx="3">
+            <a:schemeClr val="accent1"/>
+          </a:fillRef>
+          <a:effectRef idx="2">
+            <a:schemeClr val="accent1"/>
+          </a:effectRef>
+          <a:fontRef idx="minor">
+            <a:schemeClr val="lt1"/>
+          </a:fontRef>
+        </p:style>
+        <p:txBody>
+          <a:bodyPr wrap="square" lIns="125999" tIns="90000" rIns="108000" bIns="54000" rtlCol="0" anchor="ctr"/>
+          <a:lstStyle/>
+          <a:p>
+            <a:pPr algn="ctr">
+              <a:lnSpc>
+                <a:spcPct val="130000"/>
+              </a:lnSpc>
+              <a:spcAft>
+                <a:spcPts val="500"/>
+              </a:spcAft>
+            </a:pPr>
+            <a:r>
+              <a:rPr sz="1500" b="1" dirty="0" err="1">
+                <a:solidFill>
+                  <a:srgbClr val="1F285A"/>
+                </a:solidFill>
+                <a:latin typeface="メイリオ"/>
+                <a:ea typeface="メイリオ"/>
+                <a:cs typeface="メイリオ"/>
+              </a:rPr>
+              <a:t>資料請求</a:t>
+            </a:r>
+            <a:endParaRPr sz="1250" b="1" dirty="0">
+              <a:solidFill>
+                <a:srgbClr val="1F285A"/>
+              </a:solidFill>
+              <a:latin typeface="メイリオ"/>
+              <a:ea typeface="メイリオ"/>
+              <a:cs typeface="メイリオ"/>
+            </a:endParaRPr>
+          </a:p>
+        </p:txBody>
+      </p:sp>
+      <p:sp>
+        <p:nvSpPr>
+          <p:cNvPr id="7" name="Right Arrow 5"/>
+          <p:cNvSpPr/>
+          <p:nvPr/>
+        </p:nvSpPr>
+        <p:spPr>
+          <a:xfrm>
+            <a:off x="2736000" y="2268000"/>
+            <a:ext cx="360000" cy="360000"/>
+          </a:xfrm>
+          <a:prstGeom prst="rightArrow">
+            <a:avLst/>
+          </a:prstGeom>
+          <a:solidFill>
+            <a:srgbClr val="1F285A"/>
+          </a:solidFill>
+          <a:ln>
+            <a:noFill/>
+          </a:ln>
+          <a:effectLst/>
+        </p:spPr>
+        <p:style>
+          <a:lnRef idx="1">
+            <a:schemeClr val="accent1"/>
+          </a:lnRef>
+          <a:fillRef idx="3">
+            <a:schemeClr val="accent1"/>
+          </a:fillRef>
+          <a:effectRef idx="2">
+            <a:schemeClr val="accent1"/>
+          </a:effectRef>
+          <a:fontRef idx="minor">
+            <a:schemeClr val="lt1"/>
+          </a:fontRef>
+        </p:style>
+        <p:txBody>
+          <a:bodyPr rtlCol="0" anchor="ctr"/>
+          <a:lstStyle/>
+          <a:p>
+            <a:pPr algn="ctr"/>
+            <a:endParaRPr>
+              <a:latin typeface="メイリオ"/>
+              <a:ea typeface="メイリオ"/>
+              <a:cs typeface="メイリオ"/>
+            </a:endParaRPr>
+          </a:p>
+        </p:txBody>
+      </p:sp>
+      <p:sp>
+        <p:nvSpPr>
+          <p:cNvPr id="8" name="Rounded Rectangle 4"/>
+          <p:cNvSpPr/>
+          <p:nvPr/>
+        </p:nvSpPr>
+        <p:spPr>
+          <a:xfrm>
+            <a:off x="3114000" y="1944000"/>
+            <a:ext cx="1638000" cy="1007999"/>
+          </a:xfrm>
+          <a:prstGeom prst="roundRect">
+            <a:avLst>
+              <a:gd name="adj" fmla="val 10000"/>
+            </a:avLst>
+          </a:prstGeom>
+          <a:solidFill>
+            <a:srgbClr val="1F285A"/>
+          </a:solidFill>
+          <a:ln>
+            <a:noFill/>
+          </a:ln>
+          <a:effectLst/>
+        </p:spPr>
+        <p:style>
+          <a:lnRef idx="1">
+            <a:schemeClr val="accent1"/>
+          </a:lnRef>
+          <a:fillRef idx="3">
+            <a:schemeClr val="accent1"/>
+          </a:fillRef>
+          <a:effectRef idx="2">
+            <a:schemeClr val="accent1"/>
+          </a:effectRef>
+          <a:fontRef idx="minor">
+            <a:schemeClr val="lt1"/>
+          </a:fontRef>
+        </p:style>
+        <p:txBody>
+          <a:bodyPr wrap="square" lIns="54000" tIns="18000" rIns="54000" bIns="18000" rtlCol="0" anchor="ctr"/>
+          <a:lstStyle/>
+          <a:p>
+            <a:pPr algn="ctr">
+              <a:lnSpc>
+                <a:spcPct val="120000"/>
+              </a:lnSpc>
+            </a:pPr>
+            <a:r>
+              <a:rPr sz="1500" b="1">
+                <a:solidFill>
+                  <a:srgbClr val="FFFFFF"/>
+                </a:solidFill>
+                <a:latin typeface="メイリオ"/>
+                <a:ea typeface="メイリオ"/>
+                <a:cs typeface="メイリオ"/>
+              </a:rPr>
+              <a:t>LINEへ案内</a:t>
+            </a:r>
+          </a:p>
+        </p:txBody>
+      </p:sp>
+      <p:sp>
+        <p:nvSpPr>
+          <p:cNvPr id="9" name="Right Arrow 5"/>
+          <p:cNvSpPr/>
+          <p:nvPr/>
+        </p:nvSpPr>
+        <p:spPr>
+          <a:xfrm>
+            <a:off x="4770000" y="2268000"/>
+            <a:ext cx="360000" cy="360000"/>
+          </a:xfrm>
+          <a:prstGeom prst="rightArrow">
+            <a:avLst/>
+          </a:prstGeom>
+          <a:solidFill>
+            <a:srgbClr val="1F285A"/>
+          </a:solidFill>
+          <a:ln>
+            <a:noFill/>
+          </a:ln>
+          <a:effectLst/>
+        </p:spPr>
+        <p:style>
+          <a:lnRef idx="1">
+            <a:schemeClr val="accent1"/>
+          </a:lnRef>
+          <a:fillRef idx="3">
+            <a:schemeClr val="accent1"/>
+          </a:fillRef>
+          <a:effectRef idx="2">
+            <a:schemeClr val="accent1"/>
+          </a:effectRef>
+          <a:fontRef idx="minor">
+            <a:schemeClr val="lt1"/>
+          </a:fontRef>
+        </p:style>
+        <p:txBody>
+          <a:bodyPr rtlCol="0" anchor="ctr"/>
+          <a:lstStyle/>
+          <a:p>
+            <a:pPr algn="ctr"/>
+            <a:endParaRPr>
+              <a:latin typeface="メイリオ"/>
+              <a:ea typeface="メイリオ"/>
+              <a:cs typeface="メイリオ"/>
+            </a:endParaRPr>
+          </a:p>
+        </p:txBody>
+      </p:sp>
+      <p:sp>
+        <p:nvSpPr>
+          <p:cNvPr id="10" name="Rounded Rectangle 4"/>
+          <p:cNvSpPr/>
+          <p:nvPr/>
+        </p:nvSpPr>
+        <p:spPr>
+          <a:xfrm>
+            <a:off x="5148000" y="1944000"/>
+            <a:ext cx="1638000" cy="1007999"/>
+          </a:xfrm>
+          <a:prstGeom prst="roundRect">
+            <a:avLst>
+              <a:gd name="adj" fmla="val 10000"/>
+            </a:avLst>
+          </a:prstGeom>
+          <a:solidFill>
+            <a:srgbClr val="1F285A"/>
+          </a:solidFill>
+          <a:ln>
+            <a:noFill/>
+          </a:ln>
+          <a:effectLst/>
+        </p:spPr>
+        <p:style>
+          <a:lnRef idx="1">
+            <a:schemeClr val="accent1"/>
+          </a:lnRef>
+          <a:fillRef idx="3">
+            <a:schemeClr val="accent1"/>
+          </a:fillRef>
+          <a:effectRef idx="2">
+            <a:schemeClr val="accent1"/>
+          </a:effectRef>
+          <a:fontRef idx="minor">
+            <a:schemeClr val="lt1"/>
+          </a:fontRef>
+        </p:style>
+        <p:txBody>
+          <a:bodyPr wrap="square" lIns="54000" tIns="18000" rIns="54000" bIns="18000" rtlCol="0" anchor="ctr"/>
+          <a:lstStyle/>
+          <a:p>
+            <a:pPr algn="ctr">
+              <a:lnSpc>
+                <a:spcPct val="120000"/>
+              </a:lnSpc>
+            </a:pPr>
+            <a:r>
+              <a:rPr sz="1500" b="1">
+                <a:solidFill>
+                  <a:srgbClr val="FFFFFF"/>
+                </a:solidFill>
+                <a:latin typeface="メイリオ"/>
+                <a:ea typeface="メイリオ"/>
+                <a:cs typeface="メイリオ"/>
+              </a:rPr>
+              <a:t>事例・動画を</a:t>
+            </a:r>
+          </a:p>
+          <a:p>
+            <a:pPr algn="ctr">
+              <a:lnSpc>
+                <a:spcPct val="120000"/>
+              </a:lnSpc>
+            </a:pPr>
+            <a:r>
+              <a:rPr sz="1500" b="1">
+                <a:solidFill>
+                  <a:srgbClr val="FFFFFF"/>
+                </a:solidFill>
+                <a:latin typeface="メイリオ"/>
+                <a:ea typeface="メイリオ"/>
+                <a:cs typeface="メイリオ"/>
+              </a:rPr>
+              <a:t>配信</a:t>
+            </a:r>
+          </a:p>
+        </p:txBody>
+      </p:sp>
+      <p:sp>
+        <p:nvSpPr>
+          <p:cNvPr id="11" name="Right Arrow 5"/>
+          <p:cNvSpPr/>
+          <p:nvPr/>
+        </p:nvSpPr>
+        <p:spPr>
+          <a:xfrm>
+            <a:off x="6803999" y="2268000"/>
+            <a:ext cx="360000" cy="360000"/>
+          </a:xfrm>
+          <a:prstGeom prst="rightArrow">
+            <a:avLst/>
+          </a:prstGeom>
+          <a:solidFill>
+            <a:srgbClr val="1F285A"/>
+          </a:solidFill>
+          <a:ln>
+            <a:noFill/>
+          </a:ln>
+          <a:effectLst/>
+        </p:spPr>
+        <p:style>
+          <a:lnRef idx="1">
+            <a:schemeClr val="accent1"/>
+          </a:lnRef>
+          <a:fillRef idx="3">
+            <a:schemeClr val="accent1"/>
+          </a:fillRef>
+          <a:effectRef idx="2">
+            <a:schemeClr val="accent1"/>
+          </a:effectRef>
+          <a:fontRef idx="minor">
+            <a:schemeClr val="lt1"/>
+          </a:fontRef>
+        </p:style>
+        <p:txBody>
+          <a:bodyPr rtlCol="0" anchor="ctr"/>
+          <a:lstStyle/>
+          <a:p>
+            <a:pPr algn="ctr"/>
+            <a:endParaRPr>
+              <a:latin typeface="メイリオ"/>
+              <a:ea typeface="メイリオ"/>
+              <a:cs typeface="メイリオ"/>
+            </a:endParaRPr>
+          </a:p>
+        </p:txBody>
+      </p:sp>
+      <p:sp>
+        <p:nvSpPr>
+          <p:cNvPr id="12" name="Rounded Rectangle 12"/>
+          <p:cNvSpPr/>
+          <p:nvPr/>
+        </p:nvSpPr>
+        <p:spPr>
+          <a:xfrm>
+            <a:off x="7182000" y="1944000"/>
+            <a:ext cx="1638000" cy="1007999"/>
+          </a:xfrm>
+          <a:prstGeom prst="roundRect">
+            <a:avLst>
+              <a:gd name="adj" fmla="val 6000"/>
+            </a:avLst>
+          </a:prstGeom>
+          <a:solidFill>
+            <a:srgbClr val="FFFFFF"/>
+          </a:solidFill>
+          <a:ln w="19050">
+            <a:solidFill>
+              <a:srgbClr val="1F285A"/>
+            </a:solidFill>
+          </a:ln>
+          <a:effectLst/>
+        </p:spPr>
+        <p:style>
+          <a:lnRef idx="1">
+            <a:schemeClr val="accent1"/>
+          </a:lnRef>
+          <a:fillRef idx="3">
+            <a:schemeClr val="accent1"/>
+          </a:fillRef>
+          <a:effectRef idx="2">
+            <a:schemeClr val="accent1"/>
+          </a:effectRef>
+          <a:fontRef idx="minor">
+            <a:schemeClr val="lt1"/>
+          </a:fontRef>
+        </p:style>
+        <p:txBody>
+          <a:bodyPr wrap="square" lIns="125999" tIns="90000" rIns="108000" bIns="54000" rtlCol="0" anchor="ctr"/>
+          <a:lstStyle/>
+          <a:p>
+            <a:pPr algn="ctr">
+              <a:lnSpc>
+                <a:spcPct val="130000"/>
+              </a:lnSpc>
+              <a:spcAft>
+                <a:spcPts val="500"/>
+              </a:spcAft>
+            </a:pPr>
+            <a:r>
+              <a:rPr sz="1500" b="1" dirty="0" err="1">
+                <a:solidFill>
+                  <a:srgbClr val="1F285A"/>
+                </a:solidFill>
+                <a:latin typeface="メイリオ"/>
+                <a:ea typeface="メイリオ"/>
+                <a:cs typeface="メイリオ"/>
+              </a:rPr>
+              <a:t>見学・商談の</a:t>
+            </a:r>
+            <a:endParaRPr sz="1250" b="1" dirty="0">
+              <a:solidFill>
+                <a:srgbClr val="1F285A"/>
+              </a:solidFill>
+              <a:latin typeface="メイリオ"/>
+              <a:ea typeface="メイリオ"/>
+              <a:cs typeface="メイリオ"/>
+            </a:endParaRPr>
+          </a:p>
+          <a:p>
+            <a:pPr algn="ctr">
+              <a:lnSpc>
+                <a:spcPct val="130000"/>
+              </a:lnSpc>
+              <a:spcAft>
+                <a:spcPts val="500"/>
+              </a:spcAft>
+            </a:pPr>
+            <a:r>
+              <a:rPr sz="1500" b="1" dirty="0" err="1">
+                <a:solidFill>
+                  <a:srgbClr val="1F285A"/>
+                </a:solidFill>
+                <a:latin typeface="メイリオ"/>
+                <a:ea typeface="メイリオ"/>
+                <a:cs typeface="メイリオ"/>
+              </a:rPr>
+              <a:t>予約</a:t>
+            </a:r>
+            <a:endParaRPr sz="1250" b="1" dirty="0">
+              <a:solidFill>
+                <a:srgbClr val="1F285A"/>
+              </a:solidFill>
+              <a:latin typeface="メイリオ"/>
+              <a:ea typeface="メイリオ"/>
+              <a:cs typeface="メイリオ"/>
+            </a:endParaRPr>
+          </a:p>
+        </p:txBody>
+      </p:sp>
+      <p:sp>
+        <p:nvSpPr>
+          <p:cNvPr id="13" name="TextBox 19"/>
+          <p:cNvSpPr txBox="1"/>
+          <p:nvPr/>
+        </p:nvSpPr>
+        <p:spPr>
+          <a:xfrm>
+            <a:off x="1080000" y="3564000"/>
+            <a:ext cx="7740000" cy="2520000"/>
+          </a:xfrm>
+          <a:prstGeom prst="rect">
+            <a:avLst/>
+          </a:prstGeom>
+          <a:noFill/>
+        </p:spPr>
+        <p:txBody>
+          <a:bodyPr wrap="square" lIns="0" tIns="21600" rIns="0" bIns="21600" anchor="t">
+            <a:spAutoFit/>
+          </a:bodyPr>
+          <a:lstStyle/>
+          <a:p>
+            <a:pPr algn="l">
+              <a:lnSpc>
+                <a:spcPct val="115000"/>
+              </a:lnSpc>
+              <a:spcAft>
+                <a:spcPts val="1800"/>
+              </a:spcAft>
+            </a:pPr>
+            <a:r>
+              <a:rPr sz="2000" b="0">
+                <a:solidFill>
+                  <a:srgbClr val="333333"/>
+                </a:solidFill>
+                <a:latin typeface="メイリオ"/>
+                <a:ea typeface="メイリオ"/>
+                <a:cs typeface="メイリオ"/>
+              </a:rPr>
+              <a:t>・資料請求のみで終わらせず、予約・商談につなげる</a:t>
+            </a:r>
+          </a:p>
+          <a:p>
+            <a:pPr algn="l">
+              <a:lnSpc>
+                <a:spcPct val="115000"/>
+              </a:lnSpc>
+              <a:spcAft>
+                <a:spcPts val="1400"/>
+              </a:spcAft>
+            </a:pPr>
+            <a:r>
+              <a:rPr sz="2000" b="1">
+                <a:solidFill>
+                  <a:srgbClr val="1F285A"/>
+                </a:solidFill>
+                <a:latin typeface="メイリオ"/>
+                <a:ea typeface="メイリオ"/>
+                <a:cs typeface="メイリオ"/>
+              </a:rPr>
+              <a:t>・実績：皮膚科クリニック　予約数 約1.2倍</a:t>
+            </a:r>
+          </a:p>
+          <a:p>
+            <a:pPr algn="l">
+              <a:lnSpc>
+                <a:spcPct val="115000"/>
+              </a:lnSpc>
+              <a:spcAft>
+                <a:spcPts val="0"/>
+              </a:spcAft>
+            </a:pPr>
+            <a:r>
+              <a:rPr sz="2000" b="1">
+                <a:solidFill>
+                  <a:srgbClr val="1F285A"/>
+                </a:solidFill>
+                <a:latin typeface="メイリオ"/>
+                <a:ea typeface="メイリオ"/>
+                <a:cs typeface="メイリオ"/>
+              </a:rPr>
+              <a:t>・実績：就職支援　LINEで問い合わせた方の55%が面談を予約</a:t>
+            </a:r>
+          </a:p>
+        </p:txBody>
+      </p:sp>
+    </p:spTree>
+  </p:cSld>
+  <p:clrMapOvr>
+    <a:masterClrMapping/>
+  </p:clrMapOvr>
+</p:sld>
+</file>
+
 <file path=ppt/theme/theme1.xml><?xml version="1.0" encoding="utf-8"?>
 <a:theme xmlns:a="http://schemas.openxmlformats.org/drawingml/2006/main" name="テーマ1">
   <a:themeElements>

--- a/20261002_サンクスLINEのご提案.pptx
+++ b/20261002_サンクスLINEのご提案.pptx
@@ -7308,7 +7308,7 @@
                 <a:ea typeface="メイリオ"/>
                 <a:cs typeface="メイリオ"/>
               </a:rPr>
-              <a:t>・広告費を増やしても、この離脱層は減らない</a:t>
+              <a:t>・関心が一番高い申込み直後に、LINEでつながるのが最適</a:t>
             </a:r>
           </a:p>
           <a:p>
@@ -7329,7 +7329,49 @@
                 <a:ea typeface="メイリオ"/>
                 <a:cs typeface="メイリオ"/>
               </a:rPr>
-              <a:t>・関心が一番高い申込み直後に、LINEでつながるのが最適</a:t>
+              <a:t>・つながると、読まれる</a:t>
+            </a:r>
+          </a:p>
+          <a:p>
+            <a:pPr algn="l">
+              <a:lnSpc>
+                <a:spcPct val="115000"/>
+              </a:lnSpc>
+              <a:spcAft>
+                <a:spcPts val="2200"/>
+              </a:spcAft>
+            </a:pPr>
+            <a:r>
+              <a:rPr sz="1400" b="0">
+                <a:solidFill>
+                  <a:srgbClr val="7F7F7F"/>
+                </a:solidFill>
+                <a:latin typeface="メイリオ"/>
+                <a:ea typeface="メイリオ"/>
+                <a:cs typeface="メイリオ"/>
+              </a:rPr>
+              <a:t>　（開封率 約70%・クリック率はメルマガの約5倍／バス会社）</a:t>
+            </a:r>
+          </a:p>
+          <a:p>
+            <a:pPr algn="l">
+              <a:lnSpc>
+                <a:spcPct val="115000"/>
+              </a:lnSpc>
+              <a:spcAft>
+                <a:spcPts val="200"/>
+              </a:spcAft>
+            </a:pPr>
+            <a:r>
+              <a:rPr sz="2000" b="1">
+                <a:solidFill>
+                  <a:srgbClr val="1F285A"/>
+                </a:solidFill>
+                <a:latin typeface="メイリオ"/>
+                <a:ea typeface="メイリオ"/>
+                <a:cs typeface="メイリオ"/>
+              </a:rPr>
+              <a:t>・つながると、動く</a:t>
             </a:r>
           </a:p>
           <a:p>
@@ -7350,7 +7392,7 @@
                 <a:ea typeface="メイリオ"/>
                 <a:cs typeface="メイリオ"/>
               </a:rPr>
-              <a:t>　（開封率 約70%／バス会社）</a:t>
+              <a:t>　（予約後の来院率 40〜50%改善／美容クリニック）</a:t>
             </a:r>
           </a:p>
         </p:txBody>

--- a/20261002_サンクスLINEのご提案.pptx
+++ b/20261002_サンクスLINEのご提案.pptx
@@ -7308,7 +7308,7 @@
                 <a:ea typeface="メイリオ"/>
                 <a:cs typeface="メイリオ"/>
               </a:rPr>
-              <a:t>・関心が一番高い申込み直後に、LINEでつながるのが最適</a:t>
+              <a:t>・申込み完了の画面は、関心が一番高い瞬間</a:t>
             </a:r>
           </a:p>
           <a:p>
@@ -8061,7 +8061,7 @@
                 <a:ea typeface="メイリオ"/>
                 <a:cs typeface="メイリオ"/>
               </a:rPr>
-              <a:t>・実績：美容クリニック　来院率 40〜50%改善</a:t>
+              <a:t>・実績：美容室　次回予約客数 20%増</a:t>
             </a:r>
           </a:p>
         </p:txBody>

--- a/20261002_サンクスLINEのご提案.pptx
+++ b/20261002_サンクスLINEのご提案.pptx
@@ -7459,7 +7459,7 @@
                 <a:ea typeface="メイリオ"/>
                 <a:cs typeface="メイリオ"/>
               </a:rPr>
-              <a:t>シーン1｜来店・来院の予約</a:t>
+              <a:t>実例｜来店・来院の予約</a:t>
             </a:r>
           </a:p>
         </p:txBody>
@@ -8128,7 +8128,7 @@
                 <a:ea typeface="メイリオ"/>
                 <a:cs typeface="メイリオ"/>
               </a:rPr>
-              <a:t>シーン2｜資料請求</a:t>
+              <a:t>実例｜資料請求</a:t>
             </a:r>
           </a:p>
         </p:txBody>
